--- a/Chapter 15 Language models and the Transformer.pptx
+++ b/Chapter 15 Language models and the Transformer.pptx
@@ -5,10 +5,10 @@
     <p:sldMasterId id="2147483660" r:id="rId1"/>
   </p:sldMasterIdLst>
   <p:notesMasterIdLst>
-    <p:notesMasterId r:id="rId25"/>
+    <p:notesMasterId r:id="rId27"/>
   </p:notesMasterIdLst>
   <p:handoutMasterIdLst>
-    <p:handoutMasterId r:id="rId26"/>
+    <p:handoutMasterId r:id="rId28"/>
   </p:handoutMasterIdLst>
   <p:sldIdLst>
     <p:sldId id="256" r:id="rId2"/>
@@ -31,9 +31,11 @@
     <p:sldId id="1153" r:id="rId19"/>
     <p:sldId id="1154" r:id="rId20"/>
     <p:sldId id="1155" r:id="rId21"/>
-    <p:sldId id="1156" r:id="rId22"/>
-    <p:sldId id="1157" r:id="rId23"/>
-    <p:sldId id="1158" r:id="rId24"/>
+    <p:sldId id="1159" r:id="rId22"/>
+    <p:sldId id="1160" r:id="rId23"/>
+    <p:sldId id="1156" r:id="rId24"/>
+    <p:sldId id="1157" r:id="rId25"/>
+    <p:sldId id="1158" r:id="rId26"/>
   </p:sldIdLst>
   <p:sldSz cx="12192000" cy="6858000"/>
   <p:notesSz cx="6858000" cy="9144000"/>
@@ -161,6 +163,8 @@
             <p14:sldId id="1153"/>
             <p14:sldId id="1154"/>
             <p14:sldId id="1155"/>
+            <p14:sldId id="1159"/>
+            <p14:sldId id="1160"/>
             <p14:sldId id="1156"/>
             <p14:sldId id="1157"/>
             <p14:sldId id="1158"/>
@@ -288,7 +292,7 @@
                 <a:latin typeface="맑은 고딕" panose="020B0503020000020004" pitchFamily="50" charset="-127"/>
                 <a:ea typeface="맑은 고딕" panose="020B0503020000020004" pitchFamily="50" charset="-127"/>
               </a:rPr>
-              <a:t>2026-07-01</a:t>
+              <a:t>2026-07-06</a:t>
             </a:fld>
             <a:endParaRPr lang="ko-KR" altLang="en-US">
               <a:latin typeface="맑은 고딕" panose="020B0503020000020004" pitchFamily="50" charset="-127"/>
@@ -474,7 +478,7 @@
           <a:p>
             <a:fld id="{43E1C3DD-4A19-441D-907C-380838DB51C4}" type="datetime1">
               <a:rPr lang="ko-KR" altLang="en-US" noProof="0" smtClean="0"/>
-              <a:t>2026-07-01</a:t>
+              <a:t>2026-07-06</a:t>
             </a:fld>
             <a:endParaRPr lang="ko-KR" altLang="en-US" noProof="0"/>
           </a:p>
@@ -1322,7 +1326,7 @@
           <a:p>
             <a:fld id="{990475B5-67CA-4281-BDCA-DA943C3C8EB3}" type="datetime1">
               <a:rPr lang="ko-KR" altLang="en-US" noProof="0" smtClean="0"/>
-              <a:t>2026-07-01</a:t>
+              <a:t>2026-07-06</a:t>
             </a:fld>
             <a:endParaRPr lang="ko-KR" altLang="en-US" noProof="0"/>
           </a:p>
@@ -1976,7 +1980,7 @@
           <a:p>
             <a:fld id="{48A87A34-81AB-432B-8DAE-1953F412C126}" type="datetimeFigureOut">
               <a:rPr lang="en-US" smtClean="0"/>
-              <a:t>7/1/2026</a:t>
+              <a:t>7/6/2026</a:t>
             </a:fld>
             <a:endParaRPr lang="en-US" dirty="0"/>
           </a:p>
@@ -2272,7 +2276,7 @@
           <a:p>
             <a:fld id="{C655C81E-72E7-4D05-94B5-F45B321A525D}" type="datetime1">
               <a:rPr lang="ko-KR" altLang="en-US" noProof="0" smtClean="0"/>
-              <a:t>2026-07-01</a:t>
+              <a:t>2026-07-06</a:t>
             </a:fld>
             <a:endParaRPr lang="ko-KR" altLang="en-US" noProof="0" dirty="0">
               <a:latin typeface="맑은 고딕" panose="020B0503020000020004" pitchFamily="50" charset="-127"/>
@@ -10958,6 +10962,336 @@
           </a:p>
         </p:txBody>
       </p:sp>
+      <p:sp>
+        <p:nvSpPr>
+          <p:cNvPr id="5" name="TextBox 4">
+            <a:extLst>
+              <a:ext uri="{FF2B5EF4-FFF2-40B4-BE49-F238E27FC236}">
+                <a16:creationId xmlns:a16="http://schemas.microsoft.com/office/drawing/2014/main" id="{5D5D9538-17D4-5A3B-4535-32EE8A0E37FA}"/>
+              </a:ext>
+            </a:extLst>
+          </p:cNvPr>
+          <p:cNvSpPr txBox="1"/>
+          <p:nvPr/>
+        </p:nvSpPr>
+        <p:spPr>
+          <a:xfrm>
+            <a:off x="5778872" y="1916059"/>
+            <a:ext cx="6096000" cy="3290966"/>
+          </a:xfrm>
+          <a:prstGeom prst="rect">
+            <a:avLst/>
+          </a:prstGeom>
+          <a:noFill/>
+        </p:spPr>
+        <p:txBody>
+          <a:bodyPr wrap="square">
+            <a:spAutoFit/>
+          </a:bodyPr>
+          <a:lstStyle/>
+          <a:p>
+            <a:pPr marL="285750" indent="-285750">
+              <a:lnSpc>
+                <a:spcPct val="150000"/>
+              </a:lnSpc>
+              <a:buFont typeface="Wingdings" panose="05000000000000000000" pitchFamily="2" charset="2"/>
+              <a:buChar char="v"/>
+            </a:pPr>
+            <a:r>
+              <a:rPr lang="en-US" altLang="ko-KR" sz="1400" dirty="0">
+                <a:latin typeface="D2Coding" panose="020B0609020101020101" pitchFamily="49" charset="-127"/>
+                <a:ea typeface="D2Coding" panose="020B0609020101020101" pitchFamily="49" charset="-127"/>
+              </a:rPr>
+              <a:t>2017</a:t>
+            </a:r>
+            <a:r>
+              <a:rPr lang="ko-KR" altLang="en-US" sz="1400" dirty="0">
+                <a:latin typeface="D2Coding" panose="020B0609020101020101" pitchFamily="49" charset="-127"/>
+                <a:ea typeface="D2Coding" panose="020B0609020101020101" pitchFamily="49" charset="-127"/>
+              </a:rPr>
+              <a:t>년도 </a:t>
+            </a:r>
+            <a:r>
+              <a:rPr lang="ko-KR" altLang="ko-KR" sz="1400" dirty="0" err="1">
+                <a:latin typeface="D2Coding" panose="020B0609020101020101" pitchFamily="49" charset="-127"/>
+                <a:ea typeface="D2Coding" panose="020B0609020101020101" pitchFamily="49" charset="-127"/>
+              </a:rPr>
+              <a:t>어텐션</a:t>
+            </a:r>
+            <a:r>
+              <a:rPr lang="ko-KR" altLang="ko-KR" sz="1400" dirty="0">
+                <a:latin typeface="D2Coding" panose="020B0609020101020101" pitchFamily="49" charset="-127"/>
+                <a:ea typeface="D2Coding" panose="020B0609020101020101" pitchFamily="49" charset="-127"/>
+              </a:rPr>
+              <a:t>(</a:t>
+            </a:r>
+            <a:r>
+              <a:rPr lang="ko-KR" altLang="ko-KR" sz="1400" dirty="0" err="1">
+                <a:latin typeface="D2Coding" panose="020B0609020101020101" pitchFamily="49" charset="-127"/>
+                <a:ea typeface="D2Coding" panose="020B0609020101020101" pitchFamily="49" charset="-127"/>
+              </a:rPr>
+              <a:t>Attention</a:t>
+            </a:r>
+            <a:r>
+              <a:rPr lang="ko-KR" altLang="ko-KR" sz="1400" dirty="0">
+                <a:latin typeface="D2Coding" panose="020B0609020101020101" pitchFamily="49" charset="-127"/>
+                <a:ea typeface="D2Coding" panose="020B0609020101020101" pitchFamily="49" charset="-127"/>
+              </a:rPr>
+              <a:t>)'이라고 불리는 이 단순한 메커니즘을 사용하면 순환 레이어(</a:t>
+            </a:r>
+            <a:r>
+              <a:rPr lang="ko-KR" altLang="ko-KR" sz="1400" dirty="0" err="1">
+                <a:latin typeface="D2Coding" panose="020B0609020101020101" pitchFamily="49" charset="-127"/>
+                <a:ea typeface="D2Coding" panose="020B0609020101020101" pitchFamily="49" charset="-127"/>
+              </a:rPr>
+              <a:t>recurrent</a:t>
+            </a:r>
+            <a:r>
+              <a:rPr lang="ko-KR" altLang="ko-KR" sz="1400" dirty="0">
+                <a:latin typeface="D2Coding" panose="020B0609020101020101" pitchFamily="49" charset="-127"/>
+                <a:ea typeface="D2Coding" panose="020B0609020101020101" pitchFamily="49" charset="-127"/>
+              </a:rPr>
+              <a:t> </a:t>
+            </a:r>
+            <a:r>
+              <a:rPr lang="ko-KR" altLang="ko-KR" sz="1400" dirty="0" err="1">
+                <a:latin typeface="D2Coding" panose="020B0609020101020101" pitchFamily="49" charset="-127"/>
+                <a:ea typeface="D2Coding" panose="020B0609020101020101" pitchFamily="49" charset="-127"/>
+              </a:rPr>
+              <a:t>layers</a:t>
+            </a:r>
+            <a:r>
+              <a:rPr lang="ko-KR" altLang="ko-KR" sz="1400" dirty="0">
+                <a:latin typeface="D2Coding" panose="020B0609020101020101" pitchFamily="49" charset="-127"/>
+                <a:ea typeface="D2Coding" panose="020B0609020101020101" pitchFamily="49" charset="-127"/>
+              </a:rPr>
+              <a:t>)를 전혀 사용하지 않고도 강력한 시퀀스 모델을 </a:t>
+            </a:r>
+            <a:r>
+              <a:rPr lang="ko-KR" altLang="en-US" sz="1400" dirty="0">
+                <a:latin typeface="D2Coding" panose="020B0609020101020101" pitchFamily="49" charset="-127"/>
+                <a:ea typeface="D2Coding" panose="020B0609020101020101" pitchFamily="49" charset="-127"/>
+              </a:rPr>
+              <a:t>제시</a:t>
+            </a:r>
+            <a:endParaRPr lang="en-US" altLang="ko-KR" sz="1400" dirty="0">
+              <a:latin typeface="D2Coding" panose="020B0609020101020101" pitchFamily="49" charset="-127"/>
+              <a:ea typeface="D2Coding" panose="020B0609020101020101" pitchFamily="49" charset="-127"/>
+            </a:endParaRPr>
+          </a:p>
+          <a:p>
+            <a:pPr marL="285750" indent="-285750">
+              <a:lnSpc>
+                <a:spcPct val="150000"/>
+              </a:lnSpc>
+              <a:buFont typeface="Wingdings" panose="05000000000000000000" pitchFamily="2" charset="2"/>
+              <a:buChar char="v"/>
+            </a:pPr>
+            <a:endParaRPr lang="en-US" altLang="ko-KR" sz="1400" dirty="0">
+              <a:latin typeface="D2Coding" panose="020B0609020101020101" pitchFamily="49" charset="-127"/>
+              <a:ea typeface="D2Coding" panose="020B0609020101020101" pitchFamily="49" charset="-127"/>
+            </a:endParaRPr>
+          </a:p>
+          <a:p>
+            <a:pPr marL="285750" indent="-285750">
+              <a:lnSpc>
+                <a:spcPct val="150000"/>
+              </a:lnSpc>
+              <a:buFont typeface="Wingdings" panose="05000000000000000000" pitchFamily="2" charset="2"/>
+              <a:buChar char="v"/>
+            </a:pPr>
+            <a:r>
+              <a:rPr lang="ko-KR" altLang="ko-KR" sz="1400" dirty="0">
+                <a:latin typeface="D2Coding" panose="020B0609020101020101" pitchFamily="49" charset="-127"/>
+                <a:ea typeface="D2Coding" panose="020B0609020101020101" pitchFamily="49" charset="-127"/>
+              </a:rPr>
+              <a:t>RNN 기반 모델(LSTM, GRU 등)뿐만 아니라, 당시 막강한 대안으로 떠오르던 CNN 기반의 시퀀스 모델(ConvS2S 등)</a:t>
+            </a:r>
+            <a:r>
+              <a:rPr lang="en-US" altLang="ko-KR" sz="1400" dirty="0">
+                <a:latin typeface="D2Coding" panose="020B0609020101020101" pitchFamily="49" charset="-127"/>
+                <a:ea typeface="D2Coding" panose="020B0609020101020101" pitchFamily="49" charset="-127"/>
+              </a:rPr>
+              <a:t> </a:t>
+            </a:r>
+            <a:r>
+              <a:rPr lang="ko-KR" altLang="en-US" sz="1400" dirty="0">
+                <a:latin typeface="D2Coding" panose="020B0609020101020101" pitchFamily="49" charset="-127"/>
+                <a:ea typeface="D2Coding" panose="020B0609020101020101" pitchFamily="49" charset="-127"/>
+              </a:rPr>
+              <a:t>등을 사용하지 않는 단순한 모델</a:t>
+            </a:r>
+            <a:endParaRPr lang="en-US" altLang="ko-KR" sz="1400" dirty="0">
+              <a:latin typeface="D2Coding" panose="020B0609020101020101" pitchFamily="49" charset="-127"/>
+              <a:ea typeface="D2Coding" panose="020B0609020101020101" pitchFamily="49" charset="-127"/>
+            </a:endParaRPr>
+          </a:p>
+          <a:p>
+            <a:pPr marL="285750" indent="-285750">
+              <a:lnSpc>
+                <a:spcPct val="150000"/>
+              </a:lnSpc>
+              <a:buFont typeface="Wingdings" panose="05000000000000000000" pitchFamily="2" charset="2"/>
+              <a:buChar char="v"/>
+            </a:pPr>
+            <a:endParaRPr lang="en-US" altLang="ko-KR" sz="1400" dirty="0">
+              <a:latin typeface="D2Coding" panose="020B0609020101020101" pitchFamily="49" charset="-127"/>
+              <a:ea typeface="D2Coding" panose="020B0609020101020101" pitchFamily="49" charset="-127"/>
+            </a:endParaRPr>
+          </a:p>
+          <a:p>
+            <a:pPr marL="285750" indent="-285750">
+              <a:lnSpc>
+                <a:spcPct val="150000"/>
+              </a:lnSpc>
+              <a:buFont typeface="Wingdings" panose="05000000000000000000" pitchFamily="2" charset="2"/>
+              <a:buChar char="v"/>
+            </a:pPr>
+            <a:r>
+              <a:rPr lang="ko-KR" altLang="en-US" sz="1400" dirty="0">
+                <a:latin typeface="D2Coding" panose="020B0609020101020101" pitchFamily="49" charset="-127"/>
+                <a:ea typeface="D2Coding" panose="020B0609020101020101" pitchFamily="49" charset="-127"/>
+              </a:rPr>
+              <a:t>현재 모든 </a:t>
+            </a:r>
+            <a:r>
+              <a:rPr lang="en-US" altLang="ko-KR" sz="1400" dirty="0">
+                <a:latin typeface="D2Coding" panose="020B0609020101020101" pitchFamily="49" charset="-127"/>
+                <a:ea typeface="D2Coding" panose="020B0609020101020101" pitchFamily="49" charset="-127"/>
+              </a:rPr>
+              <a:t>LLM(</a:t>
+            </a:r>
+            <a:r>
+              <a:rPr lang="en-US" altLang="ko-KR" sz="1400" dirty="0" err="1">
+                <a:latin typeface="D2Coding" panose="020B0609020101020101" pitchFamily="49" charset="-127"/>
+                <a:ea typeface="D2Coding" panose="020B0609020101020101" pitchFamily="49" charset="-127"/>
+              </a:rPr>
+              <a:t>chatGPT</a:t>
+            </a:r>
+            <a:r>
+              <a:rPr lang="en-US" altLang="ko-KR" sz="1400" dirty="0">
+                <a:latin typeface="D2Coding" panose="020B0609020101020101" pitchFamily="49" charset="-127"/>
+                <a:ea typeface="D2Coding" panose="020B0609020101020101" pitchFamily="49" charset="-127"/>
+              </a:rPr>
+              <a:t>,</a:t>
+            </a:r>
+            <a:r>
+              <a:rPr lang="ko-KR" altLang="en-US" sz="1400" dirty="0">
+                <a:latin typeface="D2Coding" panose="020B0609020101020101" pitchFamily="49" charset="-127"/>
+                <a:ea typeface="D2Coding" panose="020B0609020101020101" pitchFamily="49" charset="-127"/>
+              </a:rPr>
+              <a:t> </a:t>
+            </a:r>
+            <a:r>
+              <a:rPr lang="en-US" altLang="ko-KR" sz="1400" dirty="0" err="1">
+                <a:latin typeface="D2Coding" panose="020B0609020101020101" pitchFamily="49" charset="-127"/>
+                <a:ea typeface="D2Coding" panose="020B0609020101020101" pitchFamily="49" charset="-127"/>
+              </a:rPr>
+              <a:t>claude</a:t>
+            </a:r>
+            <a:r>
+              <a:rPr lang="en-US" altLang="ko-KR" sz="1400" dirty="0">
+                <a:latin typeface="D2Coding" panose="020B0609020101020101" pitchFamily="49" charset="-127"/>
+                <a:ea typeface="D2Coding" panose="020B0609020101020101" pitchFamily="49" charset="-127"/>
+              </a:rPr>
+              <a:t>,</a:t>
+            </a:r>
+            <a:r>
+              <a:rPr lang="ko-KR" altLang="en-US" sz="1400" dirty="0">
+                <a:latin typeface="D2Coding" panose="020B0609020101020101" pitchFamily="49" charset="-127"/>
+                <a:ea typeface="D2Coding" panose="020B0609020101020101" pitchFamily="49" charset="-127"/>
+              </a:rPr>
+              <a:t> </a:t>
+            </a:r>
+            <a:r>
+              <a:rPr lang="en-US" altLang="ko-KR" sz="1400" dirty="0">
+                <a:latin typeface="D2Coding" panose="020B0609020101020101" pitchFamily="49" charset="-127"/>
+                <a:ea typeface="D2Coding" panose="020B0609020101020101" pitchFamily="49" charset="-127"/>
+              </a:rPr>
+              <a:t>Gemini,</a:t>
+            </a:r>
+            <a:r>
+              <a:rPr lang="ko-KR" altLang="en-US" sz="1400" dirty="0">
+                <a:latin typeface="D2Coding" panose="020B0609020101020101" pitchFamily="49" charset="-127"/>
+                <a:ea typeface="D2Coding" panose="020B0609020101020101" pitchFamily="49" charset="-127"/>
+              </a:rPr>
+              <a:t> </a:t>
+            </a:r>
+            <a:r>
+              <a:rPr lang="en-US" altLang="ko-KR" sz="1400" dirty="0" err="1">
+                <a:latin typeface="D2Coding" panose="020B0609020101020101" pitchFamily="49" charset="-127"/>
+                <a:ea typeface="D2Coding" panose="020B0609020101020101" pitchFamily="49" charset="-127"/>
+              </a:rPr>
+              <a:t>Ollama</a:t>
+            </a:r>
+            <a:r>
+              <a:rPr lang="ko-KR" altLang="en-US" sz="1400" dirty="0">
+                <a:latin typeface="D2Coding" panose="020B0609020101020101" pitchFamily="49" charset="-127"/>
+                <a:ea typeface="D2Coding" panose="020B0609020101020101" pitchFamily="49" charset="-127"/>
+              </a:rPr>
+              <a:t> 등</a:t>
+            </a:r>
+            <a:r>
+              <a:rPr lang="en-US" altLang="ko-KR" sz="1400" dirty="0">
+                <a:latin typeface="D2Coding" panose="020B0609020101020101" pitchFamily="49" charset="-127"/>
+                <a:ea typeface="D2Coding" panose="020B0609020101020101" pitchFamily="49" charset="-127"/>
+              </a:rPr>
+              <a:t>)</a:t>
+            </a:r>
+            <a:r>
+              <a:rPr lang="ko-KR" altLang="en-US" sz="1400" dirty="0">
+                <a:latin typeface="D2Coding" panose="020B0609020101020101" pitchFamily="49" charset="-127"/>
+                <a:ea typeface="D2Coding" panose="020B0609020101020101" pitchFamily="49" charset="-127"/>
+              </a:rPr>
+              <a:t>은 </a:t>
+            </a:r>
+            <a:r>
+              <a:rPr lang="en-US" altLang="ko-KR" sz="1400" dirty="0">
+                <a:latin typeface="D2Coding" panose="020B0609020101020101" pitchFamily="49" charset="-127"/>
+                <a:ea typeface="D2Coding" panose="020B0609020101020101" pitchFamily="49" charset="-127"/>
+              </a:rPr>
+              <a:t>Transformer </a:t>
+            </a:r>
+            <a:r>
+              <a:rPr lang="ko-KR" altLang="en-US" sz="1400" dirty="0">
+                <a:latin typeface="D2Coding" panose="020B0609020101020101" pitchFamily="49" charset="-127"/>
+                <a:ea typeface="D2Coding" panose="020B0609020101020101" pitchFamily="49" charset="-127"/>
+              </a:rPr>
+              <a:t>모델을 바탕으로 개발</a:t>
+            </a:r>
+          </a:p>
+        </p:txBody>
+      </p:sp>
+      <p:pic>
+        <p:nvPicPr>
+          <p:cNvPr id="9" name="그림 8">
+            <a:extLst>
+              <a:ext uri="{FF2B5EF4-FFF2-40B4-BE49-F238E27FC236}">
+                <a16:creationId xmlns:a16="http://schemas.microsoft.com/office/drawing/2014/main" id="{A863161F-BF14-267C-746C-B3BEADF2BB4F}"/>
+              </a:ext>
+            </a:extLst>
+          </p:cNvPr>
+          <p:cNvPicPr>
+            <a:picLocks noChangeAspect="1"/>
+          </p:cNvPicPr>
+          <p:nvPr/>
+        </p:nvPicPr>
+        <p:blipFill>
+          <a:blip r:embed="rId2"/>
+          <a:stretch>
+            <a:fillRect/>
+          </a:stretch>
+        </p:blipFill>
+        <p:spPr>
+          <a:xfrm>
+            <a:off x="572847" y="1547212"/>
+            <a:ext cx="5206025" cy="4671611"/>
+          </a:xfrm>
+          <a:prstGeom prst="rect">
+            <a:avLst/>
+          </a:prstGeom>
+        </p:spPr>
+      </p:pic>
     </p:spTree>
     <p:extLst>
       <p:ext uri="{BB962C8B-B14F-4D97-AF65-F5344CB8AC3E}">
@@ -11084,6 +11418,445 @@
               </a:rPr>
               <a:t>The Transformer architecture</a:t>
             </a:r>
+          </a:p>
+        </p:txBody>
+      </p:sp>
+      <p:pic>
+        <p:nvPicPr>
+          <p:cNvPr id="2" name="그림 1">
+            <a:extLst>
+              <a:ext uri="{FF2B5EF4-FFF2-40B4-BE49-F238E27FC236}">
+                <a16:creationId xmlns:a16="http://schemas.microsoft.com/office/drawing/2014/main" id="{A5C9F35C-A020-5175-F5C0-9AE5B7970E08}"/>
+              </a:ext>
+            </a:extLst>
+          </p:cNvPr>
+          <p:cNvPicPr>
+            <a:picLocks noChangeAspect="1"/>
+          </p:cNvPicPr>
+          <p:nvPr/>
+        </p:nvPicPr>
+        <p:blipFill>
+          <a:blip r:embed="rId2"/>
+          <a:stretch>
+            <a:fillRect/>
+          </a:stretch>
+        </p:blipFill>
+        <p:spPr>
+          <a:xfrm>
+            <a:off x="729673" y="1488141"/>
+            <a:ext cx="3980872" cy="4210844"/>
+          </a:xfrm>
+          <a:prstGeom prst="rect">
+            <a:avLst/>
+          </a:prstGeom>
+        </p:spPr>
+      </p:pic>
+      <p:sp>
+        <p:nvSpPr>
+          <p:cNvPr id="6" name="TextBox 5">
+            <a:extLst>
+              <a:ext uri="{FF2B5EF4-FFF2-40B4-BE49-F238E27FC236}">
+                <a16:creationId xmlns:a16="http://schemas.microsoft.com/office/drawing/2014/main" id="{FF723C8B-4332-FD67-9334-8E7E4C519343}"/>
+              </a:ext>
+            </a:extLst>
+          </p:cNvPr>
+          <p:cNvSpPr txBox="1"/>
+          <p:nvPr/>
+        </p:nvSpPr>
+        <p:spPr>
+          <a:xfrm>
+            <a:off x="5006109" y="1488141"/>
+            <a:ext cx="6096000" cy="4583627"/>
+          </a:xfrm>
+          <a:prstGeom prst="rect">
+            <a:avLst/>
+          </a:prstGeom>
+          <a:noFill/>
+        </p:spPr>
+        <p:txBody>
+          <a:bodyPr wrap="square">
+            <a:spAutoFit/>
+          </a:bodyPr>
+          <a:lstStyle/>
+          <a:p>
+            <a:pPr marL="285750" indent="-285750">
+              <a:lnSpc>
+                <a:spcPct val="150000"/>
+              </a:lnSpc>
+              <a:buFont typeface="Wingdings" panose="05000000000000000000" pitchFamily="2" charset="2"/>
+              <a:buChar char="v"/>
+            </a:pPr>
+            <a:r>
+              <a:rPr lang="ko-KR" altLang="ko-KR" sz="1400" dirty="0" err="1">
+                <a:latin typeface="D2Coding" panose="020B0609020101020101" pitchFamily="49" charset="-127"/>
+                <a:ea typeface="D2Coding" panose="020B0609020101020101" pitchFamily="49" charset="-127"/>
+              </a:rPr>
+              <a:t>Original</a:t>
+            </a:r>
+            <a:r>
+              <a:rPr lang="ko-KR" altLang="ko-KR" sz="1400" dirty="0">
+                <a:latin typeface="D2Coding" panose="020B0609020101020101" pitchFamily="49" charset="-127"/>
+                <a:ea typeface="D2Coding" panose="020B0609020101020101" pitchFamily="49" charset="-127"/>
+              </a:rPr>
+              <a:t> </a:t>
+            </a:r>
+            <a:r>
+              <a:rPr lang="ko-KR" altLang="ko-KR" sz="1400" dirty="0" err="1">
+                <a:latin typeface="D2Coding" panose="020B0609020101020101" pitchFamily="49" charset="-127"/>
+                <a:ea typeface="D2Coding" panose="020B0609020101020101" pitchFamily="49" charset="-127"/>
+              </a:rPr>
+              <a:t>representation</a:t>
+            </a:r>
+            <a:endParaRPr lang="en-US" altLang="ko-KR" sz="1400" dirty="0">
+              <a:latin typeface="D2Coding" panose="020B0609020101020101" pitchFamily="49" charset="-127"/>
+              <a:ea typeface="D2Coding" panose="020B0609020101020101" pitchFamily="49" charset="-127"/>
+            </a:endParaRPr>
+          </a:p>
+          <a:p>
+            <a:pPr marL="285750" indent="-285750">
+              <a:lnSpc>
+                <a:spcPct val="150000"/>
+              </a:lnSpc>
+              <a:buFont typeface="Wingdings" panose="05000000000000000000" pitchFamily="2" charset="2"/>
+              <a:buChar char="v"/>
+            </a:pPr>
+            <a:endParaRPr lang="ko-KR" altLang="ko-KR" sz="1400" dirty="0">
+              <a:latin typeface="D2Coding" panose="020B0609020101020101" pitchFamily="49" charset="-127"/>
+              <a:ea typeface="D2Coding" panose="020B0609020101020101" pitchFamily="49" charset="-127"/>
+            </a:endParaRPr>
+          </a:p>
+          <a:p>
+            <a:pPr marL="285750" indent="-285750">
+              <a:lnSpc>
+                <a:spcPct val="150000"/>
+              </a:lnSpc>
+              <a:buFont typeface="Wingdings" panose="05000000000000000000" pitchFamily="2" charset="2"/>
+              <a:buChar char="v"/>
+            </a:pPr>
+            <a:r>
+              <a:rPr lang="ko-KR" altLang="ko-KR" sz="1400" dirty="0" err="1">
+                <a:latin typeface="D2Coding" panose="020B0609020101020101" pitchFamily="49" charset="-127"/>
+                <a:ea typeface="D2Coding" panose="020B0609020101020101" pitchFamily="49" charset="-127"/>
+              </a:rPr>
+              <a:t>Attention</a:t>
+            </a:r>
+            <a:r>
+              <a:rPr lang="ko-KR" altLang="ko-KR" sz="1400" dirty="0">
+                <a:latin typeface="D2Coding" panose="020B0609020101020101" pitchFamily="49" charset="-127"/>
+                <a:ea typeface="D2Coding" panose="020B0609020101020101" pitchFamily="49" charset="-127"/>
+              </a:rPr>
+              <a:t> </a:t>
+            </a:r>
+            <a:r>
+              <a:rPr lang="ko-KR" altLang="ko-KR" sz="1400" dirty="0" err="1">
+                <a:latin typeface="D2Coding" panose="020B0609020101020101" pitchFamily="49" charset="-127"/>
+                <a:ea typeface="D2Coding" panose="020B0609020101020101" pitchFamily="49" charset="-127"/>
+              </a:rPr>
+              <a:t>mechanism</a:t>
+            </a:r>
+            <a:r>
+              <a:rPr lang="ko-KR" altLang="ko-KR" sz="1400" dirty="0">
+                <a:latin typeface="D2Coding" panose="020B0609020101020101" pitchFamily="49" charset="-127"/>
+                <a:ea typeface="D2Coding" panose="020B0609020101020101" pitchFamily="49" charset="-127"/>
+              </a:rPr>
+              <a:t> &amp; </a:t>
+            </a:r>
+            <a:r>
+              <a:rPr lang="ko-KR" altLang="ko-KR" sz="1400" dirty="0" err="1">
+                <a:latin typeface="D2Coding" panose="020B0609020101020101" pitchFamily="49" charset="-127"/>
+                <a:ea typeface="D2Coding" panose="020B0609020101020101" pitchFamily="49" charset="-127"/>
+              </a:rPr>
+              <a:t>Attention</a:t>
+            </a:r>
+            <a:r>
+              <a:rPr lang="ko-KR" altLang="ko-KR" sz="1400" dirty="0">
+                <a:latin typeface="D2Coding" panose="020B0609020101020101" pitchFamily="49" charset="-127"/>
+                <a:ea typeface="D2Coding" panose="020B0609020101020101" pitchFamily="49" charset="-127"/>
+              </a:rPr>
+              <a:t> </a:t>
+            </a:r>
+            <a:r>
+              <a:rPr lang="ko-KR" altLang="ko-KR" sz="1400" dirty="0" err="1">
+                <a:latin typeface="D2Coding" panose="020B0609020101020101" pitchFamily="49" charset="-127"/>
+                <a:ea typeface="D2Coding" panose="020B0609020101020101" pitchFamily="49" charset="-127"/>
+              </a:rPr>
+              <a:t>scores</a:t>
+            </a:r>
+            <a:endParaRPr lang="ko-KR" altLang="ko-KR" sz="1400" dirty="0">
+              <a:latin typeface="D2Coding" panose="020B0609020101020101" pitchFamily="49" charset="-127"/>
+              <a:ea typeface="D2Coding" panose="020B0609020101020101" pitchFamily="49" charset="-127"/>
+            </a:endParaRPr>
+          </a:p>
+          <a:p>
+            <a:pPr marL="742950" lvl="1" indent="-285750">
+              <a:lnSpc>
+                <a:spcPct val="150000"/>
+              </a:lnSpc>
+              <a:buFont typeface="Wingdings" panose="05000000000000000000" pitchFamily="2" charset="2"/>
+              <a:buChar char="v"/>
+            </a:pPr>
+            <a:r>
+              <a:rPr lang="ko-KR" altLang="ko-KR" sz="1400" dirty="0">
+                <a:latin typeface="D2Coding" panose="020B0609020101020101" pitchFamily="49" charset="-127"/>
+                <a:ea typeface="D2Coding" panose="020B0609020101020101" pitchFamily="49" charset="-127"/>
+              </a:rPr>
+              <a:t>모델은 이 이미지에서 '무엇이 중요한지' 판단하는 과정</a:t>
+            </a:r>
+          </a:p>
+          <a:p>
+            <a:pPr marL="742950" lvl="1" indent="-285750">
+              <a:lnSpc>
+                <a:spcPct val="150000"/>
+              </a:lnSpc>
+              <a:buFont typeface="Wingdings" panose="05000000000000000000" pitchFamily="2" charset="2"/>
+              <a:buChar char="v"/>
+            </a:pPr>
+            <a:r>
+              <a:rPr lang="ko-KR" altLang="ko-KR" sz="1400" dirty="0">
+                <a:latin typeface="D2Coding" panose="020B0609020101020101" pitchFamily="49" charset="-127"/>
+                <a:ea typeface="D2Coding" panose="020B0609020101020101" pitchFamily="49" charset="-127"/>
+              </a:rPr>
+              <a:t>흑백 이미지(</a:t>
+            </a:r>
+            <a:r>
+              <a:rPr lang="ko-KR" altLang="ko-KR" sz="1400" dirty="0" err="1">
+                <a:latin typeface="D2Coding" panose="020B0609020101020101" pitchFamily="49" charset="-127"/>
+                <a:ea typeface="D2Coding" panose="020B0609020101020101" pitchFamily="49" charset="-127"/>
+              </a:rPr>
+              <a:t>Attention</a:t>
+            </a:r>
+            <a:r>
+              <a:rPr lang="ko-KR" altLang="ko-KR" sz="1400" dirty="0">
+                <a:latin typeface="D2Coding" panose="020B0609020101020101" pitchFamily="49" charset="-127"/>
+                <a:ea typeface="D2Coding" panose="020B0609020101020101" pitchFamily="49" charset="-127"/>
+              </a:rPr>
+              <a:t> </a:t>
+            </a:r>
+            <a:r>
+              <a:rPr lang="ko-KR" altLang="ko-KR" sz="1400" dirty="0" err="1">
+                <a:latin typeface="D2Coding" panose="020B0609020101020101" pitchFamily="49" charset="-127"/>
+                <a:ea typeface="D2Coding" panose="020B0609020101020101" pitchFamily="49" charset="-127"/>
+              </a:rPr>
+              <a:t>scores</a:t>
+            </a:r>
+            <a:r>
+              <a:rPr lang="ko-KR" altLang="ko-KR" sz="1400" dirty="0">
+                <a:latin typeface="D2Coding" panose="020B0609020101020101" pitchFamily="49" charset="-127"/>
+                <a:ea typeface="D2Coding" panose="020B0609020101020101" pitchFamily="49" charset="-127"/>
+              </a:rPr>
+              <a:t>)</a:t>
+            </a:r>
+            <a:r>
+              <a:rPr lang="ko-KR" altLang="ko-KR" sz="1400" dirty="0" err="1">
+                <a:latin typeface="D2Coding" panose="020B0609020101020101" pitchFamily="49" charset="-127"/>
+                <a:ea typeface="D2Coding" panose="020B0609020101020101" pitchFamily="49" charset="-127"/>
+              </a:rPr>
+              <a:t>를</a:t>
+            </a:r>
+            <a:r>
+              <a:rPr lang="ko-KR" altLang="ko-KR" sz="1400" dirty="0">
+                <a:latin typeface="D2Coding" panose="020B0609020101020101" pitchFamily="49" charset="-127"/>
+                <a:ea typeface="D2Coding" panose="020B0609020101020101" pitchFamily="49" charset="-127"/>
+              </a:rPr>
+              <a:t> 보면, 고양이의 얼굴이 있는 중심부만 하얗게(높은 점수) 빛나고 배경은 까맣게(낮은 점수) 처리되어 있습니다. 즉, "여기가 제일 중요하니까 여기에 집중해!"라고 점수를 매긴 지도(</a:t>
+            </a:r>
+            <a:r>
+              <a:rPr lang="ko-KR" altLang="ko-KR" sz="1400" dirty="0" err="1">
+                <a:latin typeface="D2Coding" panose="020B0609020101020101" pitchFamily="49" charset="-127"/>
+                <a:ea typeface="D2Coding" panose="020B0609020101020101" pitchFamily="49" charset="-127"/>
+              </a:rPr>
+              <a:t>Mask</a:t>
+            </a:r>
+            <a:r>
+              <a:rPr lang="ko-KR" altLang="ko-KR" sz="1400" dirty="0">
+                <a:latin typeface="D2Coding" panose="020B0609020101020101" pitchFamily="49" charset="-127"/>
+                <a:ea typeface="D2Coding" panose="020B0609020101020101" pitchFamily="49" charset="-127"/>
+              </a:rPr>
+              <a:t>)</a:t>
+            </a:r>
+            <a:endParaRPr lang="en-US" altLang="ko-KR" sz="1400" dirty="0">
+              <a:latin typeface="D2Coding" panose="020B0609020101020101" pitchFamily="49" charset="-127"/>
+              <a:ea typeface="D2Coding" panose="020B0609020101020101" pitchFamily="49" charset="-127"/>
+            </a:endParaRPr>
+          </a:p>
+          <a:p>
+            <a:pPr marL="742950" lvl="1" indent="-285750">
+              <a:lnSpc>
+                <a:spcPct val="150000"/>
+              </a:lnSpc>
+              <a:buFont typeface="Wingdings" panose="05000000000000000000" pitchFamily="2" charset="2"/>
+              <a:buChar char="v"/>
+            </a:pPr>
+            <a:endParaRPr lang="en-US" altLang="ko-KR" sz="1400" dirty="0">
+              <a:latin typeface="D2Coding" panose="020B0609020101020101" pitchFamily="49" charset="-127"/>
+              <a:ea typeface="D2Coding" panose="020B0609020101020101" pitchFamily="49" charset="-127"/>
+            </a:endParaRPr>
+          </a:p>
+          <a:p>
+            <a:pPr marL="285750" indent="-285750">
+              <a:lnSpc>
+                <a:spcPct val="150000"/>
+              </a:lnSpc>
+              <a:buFont typeface="Wingdings" panose="05000000000000000000" pitchFamily="2" charset="2"/>
+              <a:buChar char="v"/>
+            </a:pPr>
+            <a:r>
+              <a:rPr lang="ko-KR" altLang="ko-KR" sz="1400" dirty="0">
+                <a:latin typeface="D2Coding" panose="020B0609020101020101" pitchFamily="49" charset="-127"/>
+                <a:ea typeface="D2Coding" panose="020B0609020101020101" pitchFamily="49" charset="-127"/>
+              </a:rPr>
+              <a:t>New </a:t>
+            </a:r>
+            <a:r>
+              <a:rPr lang="ko-KR" altLang="ko-KR" sz="1400" dirty="0" err="1">
+                <a:latin typeface="D2Coding" panose="020B0609020101020101" pitchFamily="49" charset="-127"/>
+                <a:ea typeface="D2Coding" panose="020B0609020101020101" pitchFamily="49" charset="-127"/>
+              </a:rPr>
+              <a:t>representation</a:t>
+            </a:r>
+            <a:endParaRPr lang="en-US" altLang="ko-KR" sz="1400" dirty="0">
+              <a:latin typeface="D2Coding" panose="020B0609020101020101" pitchFamily="49" charset="-127"/>
+              <a:ea typeface="D2Coding" panose="020B0609020101020101" pitchFamily="49" charset="-127"/>
+            </a:endParaRPr>
+          </a:p>
+          <a:p>
+            <a:pPr marL="742950" lvl="1" indent="-285750">
+              <a:lnSpc>
+                <a:spcPct val="150000"/>
+              </a:lnSpc>
+              <a:buFont typeface="Wingdings" panose="05000000000000000000" pitchFamily="2" charset="2"/>
+              <a:buChar char="v"/>
+            </a:pPr>
+            <a:r>
+              <a:rPr lang="ko-KR" altLang="ko-KR" sz="1400" dirty="0">
+                <a:latin typeface="D2Coding" panose="020B0609020101020101" pitchFamily="49" charset="-127"/>
+                <a:ea typeface="D2Coding" panose="020B0609020101020101" pitchFamily="49" charset="-127"/>
+              </a:rPr>
+              <a:t>원본 이미지에 </a:t>
+            </a:r>
+            <a:r>
+              <a:rPr lang="ko-KR" altLang="ko-KR" sz="1400" dirty="0" err="1">
+                <a:latin typeface="D2Coding" panose="020B0609020101020101" pitchFamily="49" charset="-127"/>
+                <a:ea typeface="D2Coding" panose="020B0609020101020101" pitchFamily="49" charset="-127"/>
+              </a:rPr>
+              <a:t>어텐션</a:t>
+            </a:r>
+            <a:r>
+              <a:rPr lang="ko-KR" altLang="ko-KR" sz="1400" dirty="0">
+                <a:latin typeface="D2Coding" panose="020B0609020101020101" pitchFamily="49" charset="-127"/>
+                <a:ea typeface="D2Coding" panose="020B0609020101020101" pitchFamily="49" charset="-127"/>
+              </a:rPr>
+              <a:t> 점수를 곱해 필터링한 최종 결과물</a:t>
+            </a:r>
+          </a:p>
+          <a:p>
+            <a:pPr marL="742950" lvl="1" indent="-285750">
+              <a:lnSpc>
+                <a:spcPct val="150000"/>
+              </a:lnSpc>
+              <a:buFont typeface="Wingdings" panose="05000000000000000000" pitchFamily="2" charset="2"/>
+              <a:buChar char="v"/>
+            </a:pPr>
+            <a:r>
+              <a:rPr lang="ko-KR" altLang="ko-KR" sz="1400" dirty="0">
+                <a:latin typeface="D2Coding" panose="020B0609020101020101" pitchFamily="49" charset="-127"/>
+                <a:ea typeface="D2Coding" panose="020B0609020101020101" pitchFamily="49" charset="-127"/>
+              </a:rPr>
+              <a:t>배경은 어둡게 가려지고, 모델이 집중해야 할 고양이의 눈과 얼굴 부분만 선명하게 강조된 새로운 데이터(표현)</a:t>
+            </a:r>
+            <a:r>
+              <a:rPr lang="en-US" altLang="ko-KR" sz="1400" dirty="0">
+                <a:latin typeface="D2Coding" panose="020B0609020101020101" pitchFamily="49" charset="-127"/>
+                <a:ea typeface="D2Coding" panose="020B0609020101020101" pitchFamily="49" charset="-127"/>
+              </a:rPr>
+              <a:t> </a:t>
+            </a:r>
+            <a:r>
+              <a:rPr lang="ko-KR" altLang="en-US" sz="1400" dirty="0">
+                <a:latin typeface="D2Coding" panose="020B0609020101020101" pitchFamily="49" charset="-127"/>
+                <a:ea typeface="D2Coding" panose="020B0609020101020101" pitchFamily="49" charset="-127"/>
+              </a:rPr>
+              <a:t>생성</a:t>
+            </a:r>
+            <a:endParaRPr lang="en-US" altLang="ko-KR" sz="1400" dirty="0">
+              <a:latin typeface="D2Coding" panose="020B0609020101020101" pitchFamily="49" charset="-127"/>
+              <a:ea typeface="D2Coding" panose="020B0609020101020101" pitchFamily="49" charset="-127"/>
+            </a:endParaRPr>
+          </a:p>
+          <a:p>
+            <a:pPr marL="742950" lvl="1" indent="-285750">
+              <a:lnSpc>
+                <a:spcPct val="150000"/>
+              </a:lnSpc>
+              <a:buFont typeface="Wingdings" panose="05000000000000000000" pitchFamily="2" charset="2"/>
+              <a:buChar char="v"/>
+            </a:pPr>
+            <a:r>
+              <a:rPr lang="ko-KR" altLang="ko-KR" sz="1400" dirty="0">
+                <a:latin typeface="D2Coding" panose="020B0609020101020101" pitchFamily="49" charset="-127"/>
+                <a:ea typeface="D2Coding" panose="020B0609020101020101" pitchFamily="49" charset="-127"/>
+              </a:rPr>
+              <a:t>모델은 이제 이 핵심 정보만을 가지고 다음 연산을 수행</a:t>
+            </a:r>
+          </a:p>
+        </p:txBody>
+      </p:sp>
+      <p:sp>
+        <p:nvSpPr>
+          <p:cNvPr id="8" name="TextBox 7">
+            <a:extLst>
+              <a:ext uri="{FF2B5EF4-FFF2-40B4-BE49-F238E27FC236}">
+                <a16:creationId xmlns:a16="http://schemas.microsoft.com/office/drawing/2014/main" id="{3EC7CAA5-09E1-A6A3-3719-902385AB2D32}"/>
+              </a:ext>
+            </a:extLst>
+          </p:cNvPr>
+          <p:cNvSpPr txBox="1"/>
+          <p:nvPr/>
+        </p:nvSpPr>
+        <p:spPr>
+          <a:xfrm>
+            <a:off x="6966408" y="826899"/>
+            <a:ext cx="4600281" cy="369332"/>
+          </a:xfrm>
+          <a:prstGeom prst="rect">
+            <a:avLst/>
+          </a:prstGeom>
+          <a:noFill/>
+        </p:spPr>
+        <p:txBody>
+          <a:bodyPr wrap="square">
+            <a:spAutoFit/>
+          </a:bodyPr>
+          <a:lstStyle/>
+          <a:p>
+            <a:pPr indent="0" algn="r">
+              <a:buNone/>
+            </a:pPr>
+            <a:r>
+              <a:rPr lang="ko-KR" altLang="ko-KR" sz="1800" b="1" i="0" dirty="0" err="1">
+                <a:effectLst/>
+                <a:latin typeface="Lora" pitchFamily="2" charset="0"/>
+              </a:rPr>
+              <a:t>Dot-product</a:t>
+            </a:r>
+            <a:r>
+              <a:rPr lang="ko-KR" altLang="ko-KR" sz="1800" b="1" i="0" dirty="0">
+                <a:effectLst/>
+                <a:latin typeface="Lora" pitchFamily="2" charset="0"/>
+              </a:rPr>
+              <a:t> </a:t>
+            </a:r>
+            <a:r>
+              <a:rPr lang="ko-KR" altLang="ko-KR" sz="1800" b="1" i="0" dirty="0" err="1">
+                <a:effectLst/>
+                <a:latin typeface="Lora" pitchFamily="2" charset="0"/>
+              </a:rPr>
+              <a:t>attention</a:t>
+            </a:r>
+            <a:endParaRPr lang="ko-KR" altLang="ko-KR" sz="1800" b="1" i="0" dirty="0">
+              <a:effectLst/>
+              <a:latin typeface="Lora" pitchFamily="2" charset="0"/>
+            </a:endParaRPr>
           </a:p>
         </p:txBody>
       </p:sp>
@@ -11216,6 +11989,536 @@
           </a:p>
         </p:txBody>
       </p:sp>
+      <p:pic>
+        <p:nvPicPr>
+          <p:cNvPr id="2" name="그림 1" descr="Attention visualization of different layers from our unsupervised pre‐trained model (using a tool from [58]). An attention map was generated with 16‐frame clip inputs and applied to the last frame in the video clips. Each row represents a video sample, whereas each column illustrates the different convolution layers">
+            <a:extLst>
+              <a:ext uri="{FF2B5EF4-FFF2-40B4-BE49-F238E27FC236}">
+                <a16:creationId xmlns:a16="http://schemas.microsoft.com/office/drawing/2014/main" id="{6A73219F-9DD8-F5AD-5E51-900227F14A1A}"/>
+              </a:ext>
+            </a:extLst>
+          </p:cNvPr>
+          <p:cNvPicPr>
+            <a:picLocks noChangeAspect="1"/>
+          </p:cNvPicPr>
+          <p:nvPr/>
+        </p:nvPicPr>
+        <p:blipFill>
+          <a:blip r:embed="rId2"/>
+          <a:stretch>
+            <a:fillRect/>
+          </a:stretch>
+        </p:blipFill>
+        <p:spPr>
+          <a:xfrm>
+            <a:off x="1244182" y="2539432"/>
+            <a:ext cx="9120853" cy="3723454"/>
+          </a:xfrm>
+          <a:prstGeom prst="rect">
+            <a:avLst/>
+          </a:prstGeom>
+        </p:spPr>
+      </p:pic>
+      <p:sp>
+        <p:nvSpPr>
+          <p:cNvPr id="6" name="TextBox 5">
+            <a:extLst>
+              <a:ext uri="{FF2B5EF4-FFF2-40B4-BE49-F238E27FC236}">
+                <a16:creationId xmlns:a16="http://schemas.microsoft.com/office/drawing/2014/main" id="{AF2571CD-8B62-A93E-2A14-731900273CBB}"/>
+              </a:ext>
+            </a:extLst>
+          </p:cNvPr>
+          <p:cNvSpPr txBox="1"/>
+          <p:nvPr/>
+        </p:nvSpPr>
+        <p:spPr>
+          <a:xfrm>
+            <a:off x="1163783" y="6262886"/>
+            <a:ext cx="8735009" cy="276999"/>
+          </a:xfrm>
+          <a:prstGeom prst="rect">
+            <a:avLst/>
+          </a:prstGeom>
+          <a:noFill/>
+        </p:spPr>
+        <p:txBody>
+          <a:bodyPr wrap="square">
+            <a:spAutoFit/>
+          </a:bodyPr>
+          <a:lstStyle/>
+          <a:p>
+            <a:pPr indent="0" algn="l">
+              <a:buNone/>
+            </a:pPr>
+            <a:r>
+              <a:rPr lang="ko-KR" altLang="ko-KR" sz="1200" b="0" i="0" dirty="0" err="1">
+                <a:solidFill>
+                  <a:srgbClr val="111111"/>
+                </a:solidFill>
+                <a:effectLst/>
+                <a:latin typeface="D2Coding" panose="020B0609020101020101" pitchFamily="49" charset="-127"/>
+                <a:ea typeface="D2Coding" panose="020B0609020101020101" pitchFamily="49" charset="-127"/>
+              </a:rPr>
+              <a:t>Exploring</a:t>
+            </a:r>
+            <a:r>
+              <a:rPr lang="ko-KR" altLang="ko-KR" sz="1200" b="0" i="0" dirty="0">
+                <a:solidFill>
+                  <a:srgbClr val="111111"/>
+                </a:solidFill>
+                <a:effectLst/>
+                <a:latin typeface="D2Coding" panose="020B0609020101020101" pitchFamily="49" charset="-127"/>
+                <a:ea typeface="D2Coding" panose="020B0609020101020101" pitchFamily="49" charset="-127"/>
+              </a:rPr>
+              <a:t> </a:t>
+            </a:r>
+            <a:r>
+              <a:rPr lang="ko-KR" altLang="ko-KR" sz="1200" b="0" i="0" dirty="0" err="1">
+                <a:solidFill>
+                  <a:srgbClr val="111111"/>
+                </a:solidFill>
+                <a:effectLst/>
+                <a:latin typeface="D2Coding" panose="020B0609020101020101" pitchFamily="49" charset="-127"/>
+                <a:ea typeface="D2Coding" panose="020B0609020101020101" pitchFamily="49" charset="-127"/>
+              </a:rPr>
+              <a:t>complementary</a:t>
+            </a:r>
+            <a:r>
+              <a:rPr lang="ko-KR" altLang="ko-KR" sz="1200" b="0" i="0" dirty="0">
+                <a:solidFill>
+                  <a:srgbClr val="111111"/>
+                </a:solidFill>
+                <a:effectLst/>
+                <a:latin typeface="D2Coding" panose="020B0609020101020101" pitchFamily="49" charset="-127"/>
+                <a:ea typeface="D2Coding" panose="020B0609020101020101" pitchFamily="49" charset="-127"/>
+              </a:rPr>
+              <a:t> </a:t>
+            </a:r>
+            <a:r>
+              <a:rPr lang="ko-KR" altLang="ko-KR" sz="1200" b="0" i="0" dirty="0" err="1">
+                <a:solidFill>
+                  <a:srgbClr val="111111"/>
+                </a:solidFill>
+                <a:effectLst/>
+                <a:latin typeface="D2Coding" panose="020B0609020101020101" pitchFamily="49" charset="-127"/>
+                <a:ea typeface="D2Coding" panose="020B0609020101020101" pitchFamily="49" charset="-127"/>
+              </a:rPr>
+              <a:t>information</a:t>
+            </a:r>
+            <a:r>
+              <a:rPr lang="ko-KR" altLang="ko-KR" sz="1200" b="0" i="0" dirty="0">
+                <a:solidFill>
+                  <a:srgbClr val="111111"/>
+                </a:solidFill>
+                <a:effectLst/>
+                <a:latin typeface="D2Coding" panose="020B0609020101020101" pitchFamily="49" charset="-127"/>
+                <a:ea typeface="D2Coding" panose="020B0609020101020101" pitchFamily="49" charset="-127"/>
+              </a:rPr>
+              <a:t> of </a:t>
+            </a:r>
+            <a:r>
+              <a:rPr lang="ko-KR" altLang="ko-KR" sz="1200" b="0" i="0" dirty="0" err="1">
+                <a:solidFill>
+                  <a:srgbClr val="111111"/>
+                </a:solidFill>
+                <a:effectLst/>
+                <a:latin typeface="D2Coding" panose="020B0609020101020101" pitchFamily="49" charset="-127"/>
+                <a:ea typeface="D2Coding" panose="020B0609020101020101" pitchFamily="49" charset="-127"/>
+              </a:rPr>
+              <a:t>self‐supervised</a:t>
+            </a:r>
+            <a:r>
+              <a:rPr lang="ko-KR" altLang="ko-KR" sz="1200" b="0" i="0" dirty="0">
+                <a:solidFill>
+                  <a:srgbClr val="111111"/>
+                </a:solidFill>
+                <a:effectLst/>
+                <a:latin typeface="D2Coding" panose="020B0609020101020101" pitchFamily="49" charset="-127"/>
+                <a:ea typeface="D2Coding" panose="020B0609020101020101" pitchFamily="49" charset="-127"/>
+              </a:rPr>
+              <a:t> </a:t>
+            </a:r>
+            <a:r>
+              <a:rPr lang="ko-KR" altLang="ko-KR" sz="1200" b="0" i="0" dirty="0" err="1">
+                <a:solidFill>
+                  <a:srgbClr val="111111"/>
+                </a:solidFill>
+                <a:effectLst/>
+                <a:latin typeface="D2Coding" panose="020B0609020101020101" pitchFamily="49" charset="-127"/>
+                <a:ea typeface="D2Coding" panose="020B0609020101020101" pitchFamily="49" charset="-127"/>
+              </a:rPr>
+              <a:t>pretext</a:t>
+            </a:r>
+            <a:r>
+              <a:rPr lang="ko-KR" altLang="ko-KR" sz="1200" b="0" i="0" dirty="0">
+                <a:solidFill>
+                  <a:srgbClr val="111111"/>
+                </a:solidFill>
+                <a:effectLst/>
+                <a:latin typeface="D2Coding" panose="020B0609020101020101" pitchFamily="49" charset="-127"/>
+                <a:ea typeface="D2Coding" panose="020B0609020101020101" pitchFamily="49" charset="-127"/>
+              </a:rPr>
+              <a:t> </a:t>
+            </a:r>
+            <a:r>
+              <a:rPr lang="ko-KR" altLang="ko-KR" sz="1200" b="0" i="0" dirty="0" err="1">
+                <a:solidFill>
+                  <a:srgbClr val="111111"/>
+                </a:solidFill>
+                <a:effectLst/>
+                <a:latin typeface="D2Coding" panose="020B0609020101020101" pitchFamily="49" charset="-127"/>
+                <a:ea typeface="D2Coding" panose="020B0609020101020101" pitchFamily="49" charset="-127"/>
+              </a:rPr>
+              <a:t>tasks</a:t>
+            </a:r>
+            <a:r>
+              <a:rPr lang="ko-KR" altLang="ko-KR" sz="1200" b="0" i="0" dirty="0">
+                <a:solidFill>
+                  <a:srgbClr val="111111"/>
+                </a:solidFill>
+                <a:effectLst/>
+                <a:latin typeface="D2Coding" panose="020B0609020101020101" pitchFamily="49" charset="-127"/>
+                <a:ea typeface="D2Coding" panose="020B0609020101020101" pitchFamily="49" charset="-127"/>
+              </a:rPr>
+              <a:t> </a:t>
+            </a:r>
+            <a:r>
+              <a:rPr lang="ko-KR" altLang="ko-KR" sz="1200" b="0" i="0" dirty="0" err="1">
+                <a:solidFill>
+                  <a:srgbClr val="111111"/>
+                </a:solidFill>
+                <a:effectLst/>
+                <a:latin typeface="D2Coding" panose="020B0609020101020101" pitchFamily="49" charset="-127"/>
+                <a:ea typeface="D2Coding" panose="020B0609020101020101" pitchFamily="49" charset="-127"/>
+              </a:rPr>
+              <a:t>for</a:t>
+            </a:r>
+            <a:r>
+              <a:rPr lang="ko-KR" altLang="ko-KR" sz="1200" b="0" i="0" dirty="0">
+                <a:solidFill>
+                  <a:srgbClr val="111111"/>
+                </a:solidFill>
+                <a:effectLst/>
+                <a:latin typeface="D2Coding" panose="020B0609020101020101" pitchFamily="49" charset="-127"/>
+                <a:ea typeface="D2Coding" panose="020B0609020101020101" pitchFamily="49" charset="-127"/>
+              </a:rPr>
+              <a:t> </a:t>
+            </a:r>
+            <a:r>
+              <a:rPr lang="ko-KR" altLang="ko-KR" sz="1200" b="0" i="0" dirty="0" err="1">
+                <a:solidFill>
+                  <a:srgbClr val="111111"/>
+                </a:solidFill>
+                <a:effectLst/>
+                <a:latin typeface="D2Coding" panose="020B0609020101020101" pitchFamily="49" charset="-127"/>
+                <a:ea typeface="D2Coding" panose="020B0609020101020101" pitchFamily="49" charset="-127"/>
+              </a:rPr>
+              <a:t>unsupervised</a:t>
+            </a:r>
+            <a:r>
+              <a:rPr lang="ko-KR" altLang="ko-KR" sz="1200" b="0" i="0" dirty="0">
+                <a:solidFill>
+                  <a:srgbClr val="111111"/>
+                </a:solidFill>
+                <a:effectLst/>
+                <a:latin typeface="D2Coding" panose="020B0609020101020101" pitchFamily="49" charset="-127"/>
+                <a:ea typeface="D2Coding" panose="020B0609020101020101" pitchFamily="49" charset="-127"/>
+              </a:rPr>
+              <a:t> </a:t>
+            </a:r>
+            <a:r>
+              <a:rPr lang="ko-KR" altLang="ko-KR" sz="1200" b="0" i="0" dirty="0" err="1">
+                <a:solidFill>
+                  <a:srgbClr val="111111"/>
+                </a:solidFill>
+                <a:effectLst/>
+                <a:latin typeface="D2Coding" panose="020B0609020101020101" pitchFamily="49" charset="-127"/>
+                <a:ea typeface="D2Coding" panose="020B0609020101020101" pitchFamily="49" charset="-127"/>
+              </a:rPr>
+              <a:t>video</a:t>
+            </a:r>
+            <a:r>
+              <a:rPr lang="ko-KR" altLang="ko-KR" sz="1200" b="0" i="0" dirty="0">
+                <a:solidFill>
+                  <a:srgbClr val="111111"/>
+                </a:solidFill>
+                <a:effectLst/>
+                <a:latin typeface="D2Coding" panose="020B0609020101020101" pitchFamily="49" charset="-127"/>
+                <a:ea typeface="D2Coding" panose="020B0609020101020101" pitchFamily="49" charset="-127"/>
+              </a:rPr>
+              <a:t> </a:t>
+            </a:r>
+            <a:r>
+              <a:rPr lang="ko-KR" altLang="ko-KR" sz="1200" b="0" i="0" dirty="0" err="1">
+                <a:solidFill>
+                  <a:srgbClr val="111111"/>
+                </a:solidFill>
+                <a:effectLst/>
+                <a:latin typeface="D2Coding" panose="020B0609020101020101" pitchFamily="49" charset="-127"/>
+                <a:ea typeface="D2Coding" panose="020B0609020101020101" pitchFamily="49" charset="-127"/>
+              </a:rPr>
+              <a:t>pre‐training</a:t>
+            </a:r>
+            <a:endParaRPr lang="ko-KR" altLang="ko-KR" sz="1200" b="0" i="0" dirty="0">
+              <a:solidFill>
+                <a:srgbClr val="111111"/>
+              </a:solidFill>
+              <a:effectLst/>
+              <a:latin typeface="D2Coding" panose="020B0609020101020101" pitchFamily="49" charset="-127"/>
+              <a:ea typeface="D2Coding" panose="020B0609020101020101" pitchFamily="49" charset="-127"/>
+            </a:endParaRPr>
+          </a:p>
+        </p:txBody>
+      </p:sp>
+      <p:sp>
+        <p:nvSpPr>
+          <p:cNvPr id="7" name="TextBox 6">
+            <a:extLst>
+              <a:ext uri="{FF2B5EF4-FFF2-40B4-BE49-F238E27FC236}">
+                <a16:creationId xmlns:a16="http://schemas.microsoft.com/office/drawing/2014/main" id="{B53B6136-F1AC-F851-F77F-4902265FA8B3}"/>
+              </a:ext>
+            </a:extLst>
+          </p:cNvPr>
+          <p:cNvSpPr txBox="1"/>
+          <p:nvPr/>
+        </p:nvSpPr>
+        <p:spPr>
+          <a:xfrm>
+            <a:off x="563417" y="1185280"/>
+            <a:ext cx="11152937" cy="1162498"/>
+          </a:xfrm>
+          <a:prstGeom prst="rect">
+            <a:avLst/>
+          </a:prstGeom>
+          <a:noFill/>
+        </p:spPr>
+        <p:txBody>
+          <a:bodyPr wrap="square">
+            <a:spAutoFit/>
+          </a:bodyPr>
+          <a:lstStyle/>
+          <a:p>
+            <a:pPr>
+              <a:lnSpc>
+                <a:spcPct val="150000"/>
+              </a:lnSpc>
+            </a:pPr>
+            <a:r>
+              <a:rPr lang="en-US" altLang="ko-KR" sz="1600" dirty="0">
+                <a:latin typeface="D2Coding" panose="020B0609020101020101" pitchFamily="49" charset="-127"/>
+                <a:ea typeface="D2Coding" panose="020B0609020101020101" pitchFamily="49" charset="-127"/>
+              </a:rPr>
+              <a:t>“</a:t>
+            </a:r>
+            <a:r>
+              <a:rPr lang="ko-KR" altLang="ko-KR" sz="1600" dirty="0" err="1">
+                <a:latin typeface="D2Coding" panose="020B0609020101020101" pitchFamily="49" charset="-127"/>
+                <a:ea typeface="D2Coding" panose="020B0609020101020101" pitchFamily="49" charset="-127"/>
+              </a:rPr>
+              <a:t>CNN에</a:t>
+            </a:r>
+            <a:r>
+              <a:rPr lang="ko-KR" altLang="ko-KR" sz="1600" dirty="0">
+                <a:latin typeface="D2Coding" panose="020B0609020101020101" pitchFamily="49" charset="-127"/>
+                <a:ea typeface="D2Coding" panose="020B0609020101020101" pitchFamily="49" charset="-127"/>
+              </a:rPr>
+              <a:t> </a:t>
+            </a:r>
+            <a:r>
+              <a:rPr lang="ko-KR" altLang="ko-KR" sz="1600" dirty="0" err="1">
+                <a:latin typeface="D2Coding" panose="020B0609020101020101" pitchFamily="49" charset="-127"/>
+                <a:ea typeface="D2Coding" panose="020B0609020101020101" pitchFamily="49" charset="-127"/>
+              </a:rPr>
+              <a:t>어텐션</a:t>
+            </a:r>
+            <a:r>
+              <a:rPr lang="en-US" altLang="ko-KR" sz="1600" dirty="0">
+                <a:latin typeface="D2Coding" panose="020B0609020101020101" pitchFamily="49" charset="-127"/>
+                <a:ea typeface="D2Coding" panose="020B0609020101020101" pitchFamily="49" charset="-127"/>
+              </a:rPr>
+              <a:t>(attention) </a:t>
+            </a:r>
+            <a:r>
+              <a:rPr lang="ko-KR" altLang="en-US" sz="1600" dirty="0" err="1">
+                <a:latin typeface="D2Coding" panose="020B0609020101020101" pitchFamily="49" charset="-127"/>
+                <a:ea typeface="D2Coding" panose="020B0609020101020101" pitchFamily="49" charset="-127"/>
+              </a:rPr>
+              <a:t>매커니즘</a:t>
+            </a:r>
+            <a:r>
+              <a:rPr lang="ko-KR" altLang="ko-KR" sz="1600" dirty="0" err="1">
+                <a:latin typeface="D2Coding" panose="020B0609020101020101" pitchFamily="49" charset="-127"/>
+                <a:ea typeface="D2Coding" panose="020B0609020101020101" pitchFamily="49" charset="-127"/>
+              </a:rPr>
+              <a:t>을</a:t>
+            </a:r>
+            <a:r>
+              <a:rPr lang="ko-KR" altLang="ko-KR" sz="1600" dirty="0">
+                <a:latin typeface="D2Coding" panose="020B0609020101020101" pitchFamily="49" charset="-127"/>
+                <a:ea typeface="D2Coding" panose="020B0609020101020101" pitchFamily="49" charset="-127"/>
+              </a:rPr>
+              <a:t> 결합했더니, 레이어가 깊어질수록 인간처럼 영상 속에서 배경에 현혹되지 않고 '행동의 핵심이 되는 인물과 </a:t>
+            </a:r>
+            <a:r>
+              <a:rPr lang="ko-KR" altLang="ko-KR" sz="1600" dirty="0" err="1">
+                <a:latin typeface="D2Coding" panose="020B0609020101020101" pitchFamily="49" charset="-127"/>
+                <a:ea typeface="D2Coding" panose="020B0609020101020101" pitchFamily="49" charset="-127"/>
+              </a:rPr>
+              <a:t>사물'을</a:t>
+            </a:r>
+            <a:r>
+              <a:rPr lang="ko-KR" altLang="ko-KR" sz="1600" dirty="0">
+                <a:latin typeface="D2Coding" panose="020B0609020101020101" pitchFamily="49" charset="-127"/>
+                <a:ea typeface="D2Coding" panose="020B0609020101020101" pitchFamily="49" charset="-127"/>
+              </a:rPr>
+              <a:t> 스스로 기가 막히게 찾아내어 집중하더라</a:t>
+            </a:r>
+            <a:r>
+              <a:rPr lang="en-US" altLang="ko-KR" sz="1600" dirty="0">
+                <a:latin typeface="D2Coding" panose="020B0609020101020101" pitchFamily="49" charset="-127"/>
+                <a:ea typeface="D2Coding" panose="020B0609020101020101" pitchFamily="49" charset="-127"/>
+              </a:rPr>
+              <a:t>”</a:t>
+            </a:r>
+            <a:r>
+              <a:rPr lang="ko-KR" altLang="ko-KR" sz="1600" dirty="0">
+                <a:latin typeface="D2Coding" panose="020B0609020101020101" pitchFamily="49" charset="-127"/>
+                <a:ea typeface="D2Coding" panose="020B0609020101020101" pitchFamily="49" charset="-127"/>
+              </a:rPr>
+              <a:t>는 것을 증명하는 </a:t>
+            </a:r>
+            <a:r>
+              <a:rPr lang="ko-KR" altLang="en-US" sz="1600" dirty="0">
+                <a:latin typeface="D2Coding" panose="020B0609020101020101" pitchFamily="49" charset="-127"/>
+                <a:ea typeface="D2Coding" panose="020B0609020101020101" pitchFamily="49" charset="-127"/>
+              </a:rPr>
+              <a:t>시각 자료</a:t>
+            </a:r>
+            <a:r>
+              <a:rPr lang="en-US" altLang="ko-KR" sz="1600" dirty="0">
+                <a:latin typeface="D2Coding" panose="020B0609020101020101" pitchFamily="49" charset="-127"/>
+                <a:ea typeface="D2Coding" panose="020B0609020101020101" pitchFamily="49" charset="-127"/>
+              </a:rPr>
+              <a:t>(</a:t>
+            </a:r>
+            <a:r>
+              <a:rPr lang="ko-KR" altLang="en-US" sz="1600" dirty="0">
+                <a:latin typeface="D2Coding" panose="020B0609020101020101" pitchFamily="49" charset="-127"/>
+                <a:ea typeface="D2Coding" panose="020B0609020101020101" pitchFamily="49" charset="-127"/>
+              </a:rPr>
+              <a:t>논문</a:t>
+            </a:r>
+            <a:r>
+              <a:rPr lang="en-US" altLang="ko-KR" sz="1600" dirty="0">
+                <a:latin typeface="D2Coding" panose="020B0609020101020101" pitchFamily="49" charset="-127"/>
+                <a:ea typeface="D2Coding" panose="020B0609020101020101" pitchFamily="49" charset="-127"/>
+              </a:rPr>
+              <a:t>)</a:t>
+            </a:r>
+            <a:r>
+              <a:rPr lang="ko-KR" altLang="en-US" sz="1600" dirty="0">
+                <a:latin typeface="D2Coding" panose="020B0609020101020101" pitchFamily="49" charset="-127"/>
+                <a:ea typeface="D2Coding" panose="020B0609020101020101" pitchFamily="49" charset="-127"/>
+              </a:rPr>
+              <a:t>로 비</a:t>
+            </a:r>
+            <a:r>
+              <a:rPr lang="ko-KR" altLang="ko-KR" sz="1600" dirty="0">
+                <a:latin typeface="D2Coding" panose="020B0609020101020101" pitchFamily="49" charset="-127"/>
+                <a:ea typeface="D2Coding" panose="020B0609020101020101" pitchFamily="49" charset="-127"/>
+              </a:rPr>
+              <a:t>지도 학습(</a:t>
+            </a:r>
+            <a:r>
+              <a:rPr lang="ko-KR" altLang="ko-KR" sz="1600" dirty="0" err="1">
+                <a:latin typeface="D2Coding" panose="020B0609020101020101" pitchFamily="49" charset="-127"/>
+                <a:ea typeface="D2Coding" panose="020B0609020101020101" pitchFamily="49" charset="-127"/>
+              </a:rPr>
+              <a:t>Unsupervised</a:t>
+            </a:r>
+            <a:r>
+              <a:rPr lang="ko-KR" altLang="ko-KR" sz="1600" dirty="0">
+                <a:latin typeface="D2Coding" panose="020B0609020101020101" pitchFamily="49" charset="-127"/>
+                <a:ea typeface="D2Coding" panose="020B0609020101020101" pitchFamily="49" charset="-127"/>
+              </a:rPr>
+              <a:t>)인데도 정답 없이 스스로 이 핵심 맥락</a:t>
+            </a:r>
+            <a:r>
+              <a:rPr lang="en-US" altLang="ko-KR" sz="1600" dirty="0">
+                <a:latin typeface="D2Coding" panose="020B0609020101020101" pitchFamily="49" charset="-127"/>
+                <a:ea typeface="D2Coding" panose="020B0609020101020101" pitchFamily="49" charset="-127"/>
+              </a:rPr>
+              <a:t> </a:t>
+            </a:r>
+            <a:r>
+              <a:rPr lang="ko-KR" altLang="en-US" sz="1600" dirty="0">
+                <a:latin typeface="D2Coding" panose="020B0609020101020101" pitchFamily="49" charset="-127"/>
+                <a:ea typeface="D2Coding" panose="020B0609020101020101" pitchFamily="49" charset="-127"/>
+              </a:rPr>
+              <a:t>발견함</a:t>
+            </a:r>
+          </a:p>
+        </p:txBody>
+      </p:sp>
+      <p:sp>
+        <p:nvSpPr>
+          <p:cNvPr id="9" name="TextBox 8">
+            <a:extLst>
+              <a:ext uri="{FF2B5EF4-FFF2-40B4-BE49-F238E27FC236}">
+                <a16:creationId xmlns:a16="http://schemas.microsoft.com/office/drawing/2014/main" id="{15D6C961-7316-807B-F971-F0B9F2EE603F}"/>
+              </a:ext>
+            </a:extLst>
+          </p:cNvPr>
+          <p:cNvSpPr txBox="1"/>
+          <p:nvPr/>
+        </p:nvSpPr>
+        <p:spPr>
+          <a:xfrm>
+            <a:off x="6966408" y="826899"/>
+            <a:ext cx="4600281" cy="369332"/>
+          </a:xfrm>
+          <a:prstGeom prst="rect">
+            <a:avLst/>
+          </a:prstGeom>
+          <a:noFill/>
+        </p:spPr>
+        <p:txBody>
+          <a:bodyPr wrap="square">
+            <a:spAutoFit/>
+          </a:bodyPr>
+          <a:lstStyle/>
+          <a:p>
+            <a:pPr indent="0" algn="r">
+              <a:buNone/>
+            </a:pPr>
+            <a:r>
+              <a:rPr lang="ko-KR" altLang="ko-KR" sz="1800" b="1" i="0" dirty="0" err="1">
+                <a:effectLst/>
+                <a:latin typeface="Lora" pitchFamily="2" charset="0"/>
+              </a:rPr>
+              <a:t>Dot-product</a:t>
+            </a:r>
+            <a:r>
+              <a:rPr lang="ko-KR" altLang="ko-KR" sz="1800" b="1" i="0" dirty="0">
+                <a:effectLst/>
+                <a:latin typeface="Lora" pitchFamily="2" charset="0"/>
+              </a:rPr>
+              <a:t> </a:t>
+            </a:r>
+            <a:r>
+              <a:rPr lang="ko-KR" altLang="ko-KR" sz="1800" b="1" i="0" dirty="0" err="1">
+                <a:effectLst/>
+                <a:latin typeface="Lora" pitchFamily="2" charset="0"/>
+              </a:rPr>
+              <a:t>attention</a:t>
+            </a:r>
+            <a:endParaRPr lang="ko-KR" altLang="ko-KR" sz="1800" b="1" i="0" dirty="0">
+              <a:effectLst/>
+              <a:latin typeface="Lora" pitchFamily="2" charset="0"/>
+            </a:endParaRPr>
+          </a:p>
+        </p:txBody>
+      </p:sp>
     </p:spTree>
     <p:extLst>
       <p:ext uri="{BB962C8B-B14F-4D97-AF65-F5344CB8AC3E}">
@@ -11570,6 +12873,1634 @@
           </a:p>
         </p:txBody>
       </p:sp>
+      <p:pic>
+        <p:nvPicPr>
+          <p:cNvPr id="2" name="그림 1">
+            <a:extLst>
+              <a:ext uri="{FF2B5EF4-FFF2-40B4-BE49-F238E27FC236}">
+                <a16:creationId xmlns:a16="http://schemas.microsoft.com/office/drawing/2014/main" id="{381B4F84-B20F-3B18-0D1B-247AEE6AA392}"/>
+              </a:ext>
+            </a:extLst>
+          </p:cNvPr>
+          <p:cNvPicPr>
+            <a:picLocks noChangeAspect="1"/>
+          </p:cNvPicPr>
+          <p:nvPr/>
+        </p:nvPicPr>
+        <p:blipFill>
+          <a:blip r:embed="rId2"/>
+          <a:stretch>
+            <a:fillRect/>
+          </a:stretch>
+        </p:blipFill>
+        <p:spPr>
+          <a:xfrm>
+            <a:off x="627175" y="1366661"/>
+            <a:ext cx="5869802" cy="2644687"/>
+          </a:xfrm>
+          <a:prstGeom prst="rect">
+            <a:avLst/>
+          </a:prstGeom>
+        </p:spPr>
+      </p:pic>
+      <p:sp>
+        <p:nvSpPr>
+          <p:cNvPr id="10" name="TextBox 9">
+            <a:extLst>
+              <a:ext uri="{FF2B5EF4-FFF2-40B4-BE49-F238E27FC236}">
+                <a16:creationId xmlns:a16="http://schemas.microsoft.com/office/drawing/2014/main" id="{B6DFEDCD-3ACE-670C-3B97-FCE97A3AD0D4}"/>
+              </a:ext>
+            </a:extLst>
+          </p:cNvPr>
+          <p:cNvSpPr txBox="1"/>
+          <p:nvPr/>
+        </p:nvSpPr>
+        <p:spPr>
+          <a:xfrm>
+            <a:off x="6964219" y="1317714"/>
+            <a:ext cx="4549998" cy="3910366"/>
+          </a:xfrm>
+          <a:prstGeom prst="rect">
+            <a:avLst/>
+          </a:prstGeom>
+          <a:noFill/>
+        </p:spPr>
+        <p:txBody>
+          <a:bodyPr wrap="square">
+            <a:spAutoFit/>
+          </a:bodyPr>
+          <a:lstStyle/>
+          <a:p>
+            <a:pPr>
+              <a:lnSpc>
+                <a:spcPct val="200000"/>
+              </a:lnSpc>
+            </a:pPr>
+            <a:r>
+              <a:rPr lang="en-US" altLang="ko-KR" sz="1400" dirty="0">
+                <a:solidFill>
+                  <a:srgbClr val="000000"/>
+                </a:solidFill>
+                <a:latin typeface="D2Coding" panose="020B0609020101020101" pitchFamily="49" charset="-127"/>
+                <a:ea typeface="D2Coding" panose="020B0609020101020101" pitchFamily="49" charset="-127"/>
+              </a:rPr>
+              <a:t>[</a:t>
+            </a:r>
+            <a:r>
+              <a:rPr lang="ko-KR" altLang="ko-KR" sz="1400" dirty="0">
+                <a:solidFill>
+                  <a:srgbClr val="000000"/>
+                </a:solidFill>
+                <a:latin typeface="D2Coding" panose="020B0609020101020101" pitchFamily="49" charset="-127"/>
+                <a:ea typeface="D2Coding" panose="020B0609020101020101" pitchFamily="49" charset="-127"/>
+              </a:rPr>
+              <a:t>"</a:t>
+            </a:r>
+            <a:r>
+              <a:rPr lang="ko-KR" altLang="ko-KR" sz="1400" dirty="0" err="1">
+                <a:solidFill>
+                  <a:srgbClr val="000000"/>
+                </a:solidFill>
+                <a:latin typeface="D2Coding" panose="020B0609020101020101" pitchFamily="49" charset="-127"/>
+                <a:ea typeface="D2Coding" panose="020B0609020101020101" pitchFamily="49" charset="-127"/>
+              </a:rPr>
+              <a:t>Te</a:t>
+            </a:r>
+            <a:r>
+              <a:rPr lang="ko-KR" altLang="ko-KR" sz="1400" dirty="0">
+                <a:solidFill>
+                  <a:srgbClr val="000000"/>
+                </a:solidFill>
+                <a:latin typeface="D2Coding" panose="020B0609020101020101" pitchFamily="49" charset="-127"/>
+                <a:ea typeface="D2Coding" panose="020B0609020101020101" pitchFamily="49" charset="-127"/>
+              </a:rPr>
+              <a:t>", "</a:t>
+            </a:r>
+            <a:r>
+              <a:rPr lang="ko-KR" altLang="ko-KR" sz="1400" dirty="0" err="1">
+                <a:solidFill>
+                  <a:srgbClr val="000000"/>
+                </a:solidFill>
+                <a:latin typeface="D2Coding" panose="020B0609020101020101" pitchFamily="49" charset="-127"/>
+                <a:ea typeface="D2Coding" panose="020B0609020101020101" pitchFamily="49" charset="-127"/>
+              </a:rPr>
+              <a:t>traeré</a:t>
+            </a:r>
+            <a:r>
+              <a:rPr lang="ko-KR" altLang="ko-KR" sz="1400" dirty="0">
+                <a:solidFill>
+                  <a:srgbClr val="000000"/>
+                </a:solidFill>
+                <a:latin typeface="D2Coding" panose="020B0609020101020101" pitchFamily="49" charset="-127"/>
+                <a:ea typeface="D2Coding" panose="020B0609020101020101" pitchFamily="49" charset="-127"/>
+              </a:rPr>
+              <a:t>", "</a:t>
+            </a:r>
+            <a:r>
+              <a:rPr lang="ko-KR" altLang="ko-KR" sz="1400" dirty="0" err="1">
+                <a:solidFill>
+                  <a:srgbClr val="000000"/>
+                </a:solidFill>
+                <a:latin typeface="D2Coding" panose="020B0609020101020101" pitchFamily="49" charset="-127"/>
+                <a:ea typeface="D2Coding" panose="020B0609020101020101" pitchFamily="49" charset="-127"/>
+              </a:rPr>
+              <a:t>la</a:t>
+            </a:r>
+            <a:r>
+              <a:rPr lang="ko-KR" altLang="ko-KR" sz="1400" dirty="0">
+                <a:solidFill>
+                  <a:srgbClr val="000000"/>
+                </a:solidFill>
+                <a:latin typeface="D2Coding" panose="020B0609020101020101" pitchFamily="49" charset="-127"/>
+                <a:ea typeface="D2Coding" panose="020B0609020101020101" pitchFamily="49" charset="-127"/>
+              </a:rPr>
+              <a:t>", "</a:t>
+            </a:r>
+            <a:r>
+              <a:rPr lang="ko-KR" altLang="ko-KR" sz="1400" dirty="0" err="1">
+                <a:solidFill>
+                  <a:srgbClr val="000000"/>
+                </a:solidFill>
+                <a:latin typeface="D2Coding" panose="020B0609020101020101" pitchFamily="49" charset="-127"/>
+                <a:ea typeface="D2Coding" panose="020B0609020101020101" pitchFamily="49" charset="-127"/>
+              </a:rPr>
+              <a:t>bolsa</a:t>
+            </a:r>
+            <a:r>
+              <a:rPr lang="ko-KR" altLang="ko-KR" sz="1400" dirty="0">
+                <a:solidFill>
+                  <a:srgbClr val="000000"/>
+                </a:solidFill>
+                <a:latin typeface="D2Coding" panose="020B0609020101020101" pitchFamily="49" charset="-127"/>
+                <a:ea typeface="D2Coding" panose="020B0609020101020101" pitchFamily="49" charset="-127"/>
+              </a:rPr>
+              <a:t>“</a:t>
+            </a:r>
+            <a:r>
+              <a:rPr lang="en-US" altLang="ko-KR" sz="1400" dirty="0">
+                <a:solidFill>
+                  <a:srgbClr val="000000"/>
+                </a:solidFill>
+                <a:latin typeface="D2Coding" panose="020B0609020101020101" pitchFamily="49" charset="-127"/>
+                <a:ea typeface="D2Coding" panose="020B0609020101020101" pitchFamily="49" charset="-127"/>
+              </a:rPr>
+              <a:t>]</a:t>
+            </a:r>
+            <a:r>
+              <a:rPr lang="ko-KR" altLang="en-US" sz="1400" dirty="0">
+                <a:solidFill>
+                  <a:srgbClr val="000000"/>
+                </a:solidFill>
+                <a:latin typeface="D2Coding" panose="020B0609020101020101" pitchFamily="49" charset="-127"/>
+                <a:ea typeface="D2Coding" panose="020B0609020101020101" pitchFamily="49" charset="-127"/>
+              </a:rPr>
+              <a:t>의 각 단어 </a:t>
+            </a:r>
+            <a:r>
+              <a:rPr lang="ko-KR" altLang="en-US" sz="1400" dirty="0" err="1">
+                <a:solidFill>
+                  <a:srgbClr val="000000"/>
+                </a:solidFill>
+                <a:latin typeface="D2Coding" panose="020B0609020101020101" pitchFamily="49" charset="-127"/>
+                <a:ea typeface="D2Coding" panose="020B0609020101020101" pitchFamily="49" charset="-127"/>
+              </a:rPr>
+              <a:t>임베딩</a:t>
+            </a:r>
+            <a:r>
+              <a:rPr lang="ko-KR" altLang="en-US" sz="1400" dirty="0">
+                <a:solidFill>
+                  <a:srgbClr val="000000"/>
+                </a:solidFill>
+                <a:latin typeface="D2Coding" panose="020B0609020101020101" pitchFamily="49" charset="-127"/>
+                <a:ea typeface="D2Coding" panose="020B0609020101020101" pitchFamily="49" charset="-127"/>
+              </a:rPr>
+              <a:t> 벡터와 </a:t>
+            </a:r>
+            <a:r>
+              <a:rPr lang="en-US" altLang="ko-KR" sz="1400" dirty="0">
+                <a:solidFill>
+                  <a:srgbClr val="000000"/>
+                </a:solidFill>
+                <a:latin typeface="D2Coding" panose="020B0609020101020101" pitchFamily="49" charset="-127"/>
+                <a:ea typeface="D2Coding" panose="020B0609020101020101" pitchFamily="49" charset="-127"/>
+              </a:rPr>
+              <a:t>“bring’</a:t>
+            </a:r>
+            <a:r>
+              <a:rPr lang="ko-KR" altLang="en-US" sz="1400" dirty="0">
+                <a:solidFill>
+                  <a:srgbClr val="000000"/>
+                </a:solidFill>
+                <a:latin typeface="D2Coding" panose="020B0609020101020101" pitchFamily="49" charset="-127"/>
+                <a:ea typeface="D2Coding" panose="020B0609020101020101" pitchFamily="49" charset="-127"/>
+              </a:rPr>
+              <a:t>단어의 </a:t>
+            </a:r>
+            <a:r>
+              <a:rPr lang="ko-KR" altLang="en-US" sz="1400" dirty="0" err="1">
+                <a:solidFill>
+                  <a:srgbClr val="000000"/>
+                </a:solidFill>
+                <a:latin typeface="D2Coding" panose="020B0609020101020101" pitchFamily="49" charset="-127"/>
+                <a:ea typeface="D2Coding" panose="020B0609020101020101" pitchFamily="49" charset="-127"/>
+              </a:rPr>
+              <a:t>임베딩</a:t>
+            </a:r>
+            <a:r>
+              <a:rPr lang="ko-KR" altLang="en-US" sz="1400" dirty="0">
+                <a:solidFill>
+                  <a:srgbClr val="000000"/>
+                </a:solidFill>
+                <a:latin typeface="D2Coding" panose="020B0609020101020101" pitchFamily="49" charset="-127"/>
+                <a:ea typeface="D2Coding" panose="020B0609020101020101" pitchFamily="49" charset="-127"/>
+              </a:rPr>
+              <a:t> 벡터의 내적 값</a:t>
+            </a:r>
+            <a:endParaRPr lang="en-US" altLang="ko-KR" sz="1400" dirty="0">
+              <a:solidFill>
+                <a:srgbClr val="000000"/>
+              </a:solidFill>
+              <a:latin typeface="D2Coding" panose="020B0609020101020101" pitchFamily="49" charset="-127"/>
+              <a:ea typeface="D2Coding" panose="020B0609020101020101" pitchFamily="49" charset="-127"/>
+            </a:endParaRPr>
+          </a:p>
+          <a:p>
+            <a:pPr lvl="1">
+              <a:lnSpc>
+                <a:spcPct val="200000"/>
+              </a:lnSpc>
+            </a:pPr>
+            <a:endParaRPr lang="en-US" altLang="ko-KR" sz="1400" b="1" dirty="0">
+              <a:solidFill>
+                <a:srgbClr val="000000"/>
+              </a:solidFill>
+              <a:latin typeface="D2Coding" panose="020B0609020101020101" pitchFamily="49" charset="-127"/>
+              <a:ea typeface="D2Coding" panose="020B0609020101020101" pitchFamily="49" charset="-127"/>
+            </a:endParaRPr>
+          </a:p>
+          <a:p>
+            <a:pPr lvl="1">
+              <a:lnSpc>
+                <a:spcPct val="200000"/>
+              </a:lnSpc>
+            </a:pPr>
+            <a:endParaRPr lang="en-US" altLang="ko-KR" sz="1400" b="1" dirty="0">
+              <a:solidFill>
+                <a:srgbClr val="000000"/>
+              </a:solidFill>
+              <a:latin typeface="D2Coding" panose="020B0609020101020101" pitchFamily="49" charset="-127"/>
+              <a:ea typeface="D2Coding" panose="020B0609020101020101" pitchFamily="49" charset="-127"/>
+            </a:endParaRPr>
+          </a:p>
+          <a:p>
+            <a:pPr>
+              <a:lnSpc>
+                <a:spcPct val="200000"/>
+              </a:lnSpc>
+            </a:pPr>
+            <a:r>
+              <a:rPr lang="ko-KR" altLang="en-US" sz="1400" dirty="0" err="1">
+                <a:solidFill>
+                  <a:srgbClr val="000000"/>
+                </a:solidFill>
+                <a:latin typeface="D2Coding" panose="020B0609020101020101" pitchFamily="49" charset="-127"/>
+                <a:ea typeface="D2Coding" panose="020B0609020101020101" pitchFamily="49" charset="-127"/>
+              </a:rPr>
+              <a:t>소프트맥스</a:t>
+            </a:r>
+            <a:r>
+              <a:rPr lang="ko-KR" altLang="en-US" sz="1400" dirty="0">
+                <a:solidFill>
+                  <a:srgbClr val="000000"/>
+                </a:solidFill>
+                <a:latin typeface="D2Coding" panose="020B0609020101020101" pitchFamily="49" charset="-127"/>
+                <a:ea typeface="D2Coding" panose="020B0609020101020101" pitchFamily="49" charset="-127"/>
+              </a:rPr>
+              <a:t> 맥스 값을 구한 후 </a:t>
+            </a:r>
+            <a:r>
+              <a:rPr lang="en-US" altLang="ko-KR" sz="1400" dirty="0">
+                <a:solidFill>
+                  <a:srgbClr val="000000"/>
+                </a:solidFill>
+                <a:latin typeface="D2Coding" panose="020B0609020101020101" pitchFamily="49" charset="-127"/>
+                <a:ea typeface="D2Coding" panose="020B0609020101020101" pitchFamily="49" charset="-127"/>
+              </a:rPr>
+              <a:t>(scaling)</a:t>
+            </a:r>
+          </a:p>
+          <a:p>
+            <a:pPr lvl="1">
+              <a:lnSpc>
+                <a:spcPct val="200000"/>
+              </a:lnSpc>
+            </a:pPr>
+            <a:endParaRPr lang="en-US" altLang="ko-KR" sz="1400" dirty="0">
+              <a:solidFill>
+                <a:srgbClr val="000000"/>
+              </a:solidFill>
+              <a:latin typeface="D2Coding" panose="020B0609020101020101" pitchFamily="49" charset="-127"/>
+              <a:ea typeface="D2Coding" panose="020B0609020101020101" pitchFamily="49" charset="-127"/>
+            </a:endParaRPr>
+          </a:p>
+          <a:p>
+            <a:pPr lvl="1">
+              <a:lnSpc>
+                <a:spcPct val="200000"/>
+              </a:lnSpc>
+            </a:pPr>
+            <a:endParaRPr lang="en-US" altLang="ko-KR" sz="1400" dirty="0">
+              <a:solidFill>
+                <a:srgbClr val="000000"/>
+              </a:solidFill>
+              <a:latin typeface="D2Coding" panose="020B0609020101020101" pitchFamily="49" charset="-127"/>
+              <a:ea typeface="D2Coding" panose="020B0609020101020101" pitchFamily="49" charset="-127"/>
+            </a:endParaRPr>
+          </a:p>
+          <a:p>
+            <a:pPr>
+              <a:lnSpc>
+                <a:spcPct val="200000"/>
+              </a:lnSpc>
+            </a:pPr>
+            <a:r>
+              <a:rPr lang="en-US" altLang="ko-KR" sz="1400" dirty="0">
+                <a:solidFill>
+                  <a:srgbClr val="000000"/>
+                </a:solidFill>
+                <a:latin typeface="D2Coding" panose="020B0609020101020101" pitchFamily="49" charset="-127"/>
+                <a:ea typeface="D2Coding" panose="020B0609020101020101" pitchFamily="49" charset="-127"/>
+              </a:rPr>
+              <a:t>[</a:t>
+            </a:r>
+            <a:r>
+              <a:rPr lang="ko-KR" altLang="ko-KR" sz="1400" dirty="0">
+                <a:solidFill>
+                  <a:srgbClr val="000000"/>
+                </a:solidFill>
+                <a:latin typeface="D2Coding" panose="020B0609020101020101" pitchFamily="49" charset="-127"/>
+                <a:ea typeface="D2Coding" panose="020B0609020101020101" pitchFamily="49" charset="-127"/>
+              </a:rPr>
+              <a:t>"</a:t>
+            </a:r>
+            <a:r>
+              <a:rPr lang="ko-KR" altLang="ko-KR" sz="1400" dirty="0" err="1">
+                <a:solidFill>
+                  <a:srgbClr val="000000"/>
+                </a:solidFill>
+                <a:latin typeface="D2Coding" panose="020B0609020101020101" pitchFamily="49" charset="-127"/>
+                <a:ea typeface="D2Coding" panose="020B0609020101020101" pitchFamily="49" charset="-127"/>
+              </a:rPr>
+              <a:t>Te</a:t>
+            </a:r>
+            <a:r>
+              <a:rPr lang="ko-KR" altLang="ko-KR" sz="1400" dirty="0">
+                <a:solidFill>
+                  <a:srgbClr val="000000"/>
+                </a:solidFill>
+                <a:latin typeface="D2Coding" panose="020B0609020101020101" pitchFamily="49" charset="-127"/>
+                <a:ea typeface="D2Coding" panose="020B0609020101020101" pitchFamily="49" charset="-127"/>
+              </a:rPr>
+              <a:t>", "</a:t>
+            </a:r>
+            <a:r>
+              <a:rPr lang="ko-KR" altLang="ko-KR" sz="1400" dirty="0" err="1">
+                <a:solidFill>
+                  <a:srgbClr val="000000"/>
+                </a:solidFill>
+                <a:latin typeface="D2Coding" panose="020B0609020101020101" pitchFamily="49" charset="-127"/>
+                <a:ea typeface="D2Coding" panose="020B0609020101020101" pitchFamily="49" charset="-127"/>
+              </a:rPr>
+              <a:t>traeré</a:t>
+            </a:r>
+            <a:r>
+              <a:rPr lang="ko-KR" altLang="ko-KR" sz="1400" dirty="0">
+                <a:solidFill>
+                  <a:srgbClr val="000000"/>
+                </a:solidFill>
+                <a:latin typeface="D2Coding" panose="020B0609020101020101" pitchFamily="49" charset="-127"/>
+                <a:ea typeface="D2Coding" panose="020B0609020101020101" pitchFamily="49" charset="-127"/>
+              </a:rPr>
+              <a:t>", "</a:t>
+            </a:r>
+            <a:r>
+              <a:rPr lang="ko-KR" altLang="ko-KR" sz="1400" dirty="0" err="1">
+                <a:solidFill>
+                  <a:srgbClr val="000000"/>
+                </a:solidFill>
+                <a:latin typeface="D2Coding" panose="020B0609020101020101" pitchFamily="49" charset="-127"/>
+                <a:ea typeface="D2Coding" panose="020B0609020101020101" pitchFamily="49" charset="-127"/>
+              </a:rPr>
+              <a:t>la</a:t>
+            </a:r>
+            <a:r>
+              <a:rPr lang="ko-KR" altLang="ko-KR" sz="1400" dirty="0">
+                <a:solidFill>
+                  <a:srgbClr val="000000"/>
+                </a:solidFill>
+                <a:latin typeface="D2Coding" panose="020B0609020101020101" pitchFamily="49" charset="-127"/>
+                <a:ea typeface="D2Coding" panose="020B0609020101020101" pitchFamily="49" charset="-127"/>
+              </a:rPr>
+              <a:t>", "</a:t>
+            </a:r>
+            <a:r>
+              <a:rPr lang="ko-KR" altLang="ko-KR" sz="1400" dirty="0" err="1">
+                <a:solidFill>
+                  <a:srgbClr val="000000"/>
+                </a:solidFill>
+                <a:latin typeface="D2Coding" panose="020B0609020101020101" pitchFamily="49" charset="-127"/>
+                <a:ea typeface="D2Coding" panose="020B0609020101020101" pitchFamily="49" charset="-127"/>
+              </a:rPr>
+              <a:t>bolsa</a:t>
+            </a:r>
+            <a:r>
+              <a:rPr lang="ko-KR" altLang="ko-KR" sz="1400" dirty="0">
+                <a:solidFill>
+                  <a:srgbClr val="000000"/>
+                </a:solidFill>
+                <a:latin typeface="D2Coding" panose="020B0609020101020101" pitchFamily="49" charset="-127"/>
+                <a:ea typeface="D2Coding" panose="020B0609020101020101" pitchFamily="49" charset="-127"/>
+              </a:rPr>
+              <a:t>“</a:t>
+            </a:r>
+            <a:r>
+              <a:rPr lang="en-US" altLang="ko-KR" sz="1400" dirty="0">
+                <a:solidFill>
+                  <a:srgbClr val="000000"/>
+                </a:solidFill>
+                <a:latin typeface="D2Coding" panose="020B0609020101020101" pitchFamily="49" charset="-127"/>
+                <a:ea typeface="D2Coding" panose="020B0609020101020101" pitchFamily="49" charset="-127"/>
+              </a:rPr>
+              <a:t>]</a:t>
+            </a:r>
+            <a:r>
+              <a:rPr lang="ko-KR" altLang="en-US" sz="1400" dirty="0">
+                <a:solidFill>
+                  <a:srgbClr val="000000"/>
+                </a:solidFill>
+                <a:latin typeface="D2Coding" panose="020B0609020101020101" pitchFamily="49" charset="-127"/>
+                <a:ea typeface="D2Coding" panose="020B0609020101020101" pitchFamily="49" charset="-127"/>
+              </a:rPr>
+              <a:t>의 각 단어 </a:t>
+            </a:r>
+            <a:r>
+              <a:rPr lang="ko-KR" altLang="en-US" sz="1400" dirty="0" err="1">
+                <a:solidFill>
+                  <a:srgbClr val="000000"/>
+                </a:solidFill>
+                <a:latin typeface="D2Coding" panose="020B0609020101020101" pitchFamily="49" charset="-127"/>
+                <a:ea typeface="D2Coding" panose="020B0609020101020101" pitchFamily="49" charset="-127"/>
+              </a:rPr>
+              <a:t>임베딩에</a:t>
+            </a:r>
+            <a:r>
+              <a:rPr lang="ko-KR" altLang="en-US" sz="1400" dirty="0">
+                <a:solidFill>
+                  <a:srgbClr val="000000"/>
+                </a:solidFill>
+                <a:latin typeface="D2Coding" panose="020B0609020101020101" pitchFamily="49" charset="-127"/>
+                <a:ea typeface="D2Coding" panose="020B0609020101020101" pitchFamily="49" charset="-127"/>
+              </a:rPr>
+              <a:t> 곱해서 합을 생성</a:t>
+            </a:r>
+            <a:endParaRPr lang="ko-KR" altLang="ko-KR" sz="1400" dirty="0">
+              <a:solidFill>
+                <a:srgbClr val="000000"/>
+              </a:solidFill>
+              <a:latin typeface="D2Coding" panose="020B0609020101020101" pitchFamily="49" charset="-127"/>
+              <a:ea typeface="D2Coding" panose="020B0609020101020101" pitchFamily="49" charset="-127"/>
+            </a:endParaRPr>
+          </a:p>
+        </p:txBody>
+      </p:sp>
+      <p:pic>
+        <p:nvPicPr>
+          <p:cNvPr id="14" name="그래픽 13" descr="배지 1 단색으로 채워진">
+            <a:extLst>
+              <a:ext uri="{FF2B5EF4-FFF2-40B4-BE49-F238E27FC236}">
+                <a16:creationId xmlns:a16="http://schemas.microsoft.com/office/drawing/2014/main" id="{9BB34B10-C2C4-0316-3701-6CC56606A2E0}"/>
+              </a:ext>
+            </a:extLst>
+          </p:cNvPr>
+          <p:cNvPicPr>
+            <a:picLocks noChangeAspect="1"/>
+          </p:cNvPicPr>
+          <p:nvPr/>
+        </p:nvPicPr>
+        <p:blipFill>
+          <a:blip>
+            <a:extLst>
+              <a:ext uri="{96DAC541-7B7A-43D3-8B79-37D633B846F1}">
+                <asvg:svgBlip xmlns:asvg="http://schemas.microsoft.com/office/drawing/2016/SVG/main" r:embed="rId3"/>
+              </a:ext>
+            </a:extLst>
+          </a:blip>
+          <a:stretch>
+            <a:fillRect/>
+          </a:stretch>
+        </p:blipFill>
+        <p:spPr>
+          <a:xfrm>
+            <a:off x="677783" y="4627001"/>
+            <a:ext cx="276330" cy="276330"/>
+          </a:xfrm>
+          <a:prstGeom prst="rect">
+            <a:avLst/>
+          </a:prstGeom>
+        </p:spPr>
+      </p:pic>
+      <p:pic>
+        <p:nvPicPr>
+          <p:cNvPr id="16" name="그래픽 15" descr="배지 단색으로 채워진">
+            <a:extLst>
+              <a:ext uri="{FF2B5EF4-FFF2-40B4-BE49-F238E27FC236}">
+                <a16:creationId xmlns:a16="http://schemas.microsoft.com/office/drawing/2014/main" id="{C65C769D-DD6E-1D00-8DBE-5F5CF21DF152}"/>
+              </a:ext>
+            </a:extLst>
+          </p:cNvPr>
+          <p:cNvPicPr>
+            <a:picLocks noChangeAspect="1"/>
+          </p:cNvPicPr>
+          <p:nvPr/>
+        </p:nvPicPr>
+        <p:blipFill>
+          <a:blip>
+            <a:extLst>
+              <a:ext uri="{96DAC541-7B7A-43D3-8B79-37D633B846F1}">
+                <asvg:svgBlip xmlns:asvg="http://schemas.microsoft.com/office/drawing/2016/SVG/main" r:embed="rId4"/>
+              </a:ext>
+            </a:extLst>
+          </a:blip>
+          <a:stretch>
+            <a:fillRect/>
+          </a:stretch>
+        </p:blipFill>
+        <p:spPr>
+          <a:xfrm>
+            <a:off x="677783" y="5039466"/>
+            <a:ext cx="276330" cy="276330"/>
+          </a:xfrm>
+          <a:prstGeom prst="rect">
+            <a:avLst/>
+          </a:prstGeom>
+        </p:spPr>
+      </p:pic>
+      <p:pic>
+        <p:nvPicPr>
+          <p:cNvPr id="18" name="그래픽 17" descr="배지 3 단색으로 채워진">
+            <a:extLst>
+              <a:ext uri="{FF2B5EF4-FFF2-40B4-BE49-F238E27FC236}">
+                <a16:creationId xmlns:a16="http://schemas.microsoft.com/office/drawing/2014/main" id="{888A3E31-4E67-1DE8-26B5-8D483AA33647}"/>
+              </a:ext>
+            </a:extLst>
+          </p:cNvPr>
+          <p:cNvPicPr>
+            <a:picLocks noChangeAspect="1"/>
+          </p:cNvPicPr>
+          <p:nvPr/>
+        </p:nvPicPr>
+        <p:blipFill>
+          <a:blip>
+            <a:extLst>
+              <a:ext uri="{96DAC541-7B7A-43D3-8B79-37D633B846F1}">
+                <asvg:svgBlip xmlns:asvg="http://schemas.microsoft.com/office/drawing/2016/SVG/main" r:embed="rId5"/>
+              </a:ext>
+            </a:extLst>
+          </a:blip>
+          <a:stretch>
+            <a:fillRect/>
+          </a:stretch>
+        </p:blipFill>
+        <p:spPr>
+          <a:xfrm>
+            <a:off x="677783" y="5451931"/>
+            <a:ext cx="276330" cy="276330"/>
+          </a:xfrm>
+          <a:prstGeom prst="rect">
+            <a:avLst/>
+          </a:prstGeom>
+        </p:spPr>
+      </p:pic>
+      <p:sp>
+        <p:nvSpPr>
+          <p:cNvPr id="30" name="TextBox 29">
+            <a:extLst>
+              <a:ext uri="{FF2B5EF4-FFF2-40B4-BE49-F238E27FC236}">
+                <a16:creationId xmlns:a16="http://schemas.microsoft.com/office/drawing/2014/main" id="{6F65EDEE-4C5F-7812-4F7C-112D4E9FB0ED}"/>
+              </a:ext>
+            </a:extLst>
+          </p:cNvPr>
+          <p:cNvSpPr txBox="1"/>
+          <p:nvPr/>
+        </p:nvSpPr>
+        <p:spPr>
+          <a:xfrm>
+            <a:off x="7375008" y="2318789"/>
+            <a:ext cx="2332410" cy="307777"/>
+          </a:xfrm>
+          <a:prstGeom prst="rect">
+            <a:avLst/>
+          </a:prstGeom>
+          <a:solidFill>
+            <a:schemeClr val="bg1"/>
+          </a:solidFill>
+        </p:spPr>
+        <p:txBody>
+          <a:bodyPr wrap="square">
+            <a:spAutoFit/>
+          </a:bodyPr>
+          <a:lstStyle/>
+          <a:p>
+            <a:pPr indent="0" algn="l">
+              <a:buNone/>
+            </a:pPr>
+            <a:r>
+              <a:rPr lang="ko-KR" altLang="ko-KR" sz="1400" dirty="0">
+                <a:latin typeface="D2Coding" panose="020B0609020101020101" pitchFamily="49" charset="-127"/>
+                <a:ea typeface="D2Coding" panose="020B0609020101020101" pitchFamily="49" charset="-127"/>
+              </a:rPr>
+              <a:t>[0.56, 2.51, 0.49, 1.21]</a:t>
+            </a:r>
+          </a:p>
+        </p:txBody>
+      </p:sp>
+      <p:pic>
+        <p:nvPicPr>
+          <p:cNvPr id="34" name="그래픽 33" descr="배지 1 단색으로 채워진">
+            <a:extLst>
+              <a:ext uri="{FF2B5EF4-FFF2-40B4-BE49-F238E27FC236}">
+                <a16:creationId xmlns:a16="http://schemas.microsoft.com/office/drawing/2014/main" id="{CC130F45-ED15-6906-4187-F61079D246ED}"/>
+              </a:ext>
+            </a:extLst>
+          </p:cNvPr>
+          <p:cNvPicPr>
+            <a:picLocks noChangeAspect="1"/>
+          </p:cNvPicPr>
+          <p:nvPr/>
+        </p:nvPicPr>
+        <p:blipFill>
+          <a:blip>
+            <a:extLst>
+              <a:ext uri="{96DAC541-7B7A-43D3-8B79-37D633B846F1}">
+                <asvg:svgBlip xmlns:asvg="http://schemas.microsoft.com/office/drawing/2016/SVG/main" r:embed="rId3"/>
+              </a:ext>
+            </a:extLst>
+          </a:blip>
+          <a:stretch>
+            <a:fillRect/>
+          </a:stretch>
+        </p:blipFill>
+        <p:spPr>
+          <a:xfrm>
+            <a:off x="6576674" y="1485386"/>
+            <a:ext cx="276330" cy="276330"/>
+          </a:xfrm>
+          <a:prstGeom prst="rect">
+            <a:avLst/>
+          </a:prstGeom>
+        </p:spPr>
+      </p:pic>
+      <p:pic>
+        <p:nvPicPr>
+          <p:cNvPr id="36" name="그래픽 35" descr="배지 단색으로 채워진">
+            <a:extLst>
+              <a:ext uri="{FF2B5EF4-FFF2-40B4-BE49-F238E27FC236}">
+                <a16:creationId xmlns:a16="http://schemas.microsoft.com/office/drawing/2014/main" id="{818828B1-EC24-5501-448F-FC02FDC86DA2}"/>
+              </a:ext>
+            </a:extLst>
+          </p:cNvPr>
+          <p:cNvPicPr>
+            <a:picLocks noChangeAspect="1"/>
+          </p:cNvPicPr>
+          <p:nvPr/>
+        </p:nvPicPr>
+        <p:blipFill>
+          <a:blip>
+            <a:extLst>
+              <a:ext uri="{96DAC541-7B7A-43D3-8B79-37D633B846F1}">
+                <asvg:svgBlip xmlns:asvg="http://schemas.microsoft.com/office/drawing/2016/SVG/main" r:embed="rId4"/>
+              </a:ext>
+            </a:extLst>
+          </a:blip>
+          <a:stretch>
+            <a:fillRect/>
+          </a:stretch>
+        </p:blipFill>
+        <p:spPr>
+          <a:xfrm>
+            <a:off x="6576674" y="3210721"/>
+            <a:ext cx="276330" cy="276330"/>
+          </a:xfrm>
+          <a:prstGeom prst="rect">
+            <a:avLst/>
+          </a:prstGeom>
+        </p:spPr>
+      </p:pic>
+      <p:pic>
+        <p:nvPicPr>
+          <p:cNvPr id="38" name="그래픽 37" descr="배지 3 단색으로 채워진">
+            <a:extLst>
+              <a:ext uri="{FF2B5EF4-FFF2-40B4-BE49-F238E27FC236}">
+                <a16:creationId xmlns:a16="http://schemas.microsoft.com/office/drawing/2014/main" id="{6B50664C-753A-4A42-027A-323EE8844BCA}"/>
+              </a:ext>
+            </a:extLst>
+          </p:cNvPr>
+          <p:cNvPicPr>
+            <a:picLocks noChangeAspect="1"/>
+          </p:cNvPicPr>
+          <p:nvPr/>
+        </p:nvPicPr>
+        <p:blipFill>
+          <a:blip>
+            <a:extLst>
+              <a:ext uri="{96DAC541-7B7A-43D3-8B79-37D633B846F1}">
+                <asvg:svgBlip xmlns:asvg="http://schemas.microsoft.com/office/drawing/2016/SVG/main" r:embed="rId5"/>
+              </a:ext>
+            </a:extLst>
+          </a:blip>
+          <a:stretch>
+            <a:fillRect/>
+          </a:stretch>
+        </p:blipFill>
+        <p:spPr>
+          <a:xfrm>
+            <a:off x="6541046" y="4441518"/>
+            <a:ext cx="276330" cy="276330"/>
+          </a:xfrm>
+          <a:prstGeom prst="rect">
+            <a:avLst/>
+          </a:prstGeom>
+        </p:spPr>
+      </p:pic>
+      <p:sp>
+        <p:nvSpPr>
+          <p:cNvPr id="42" name="TextBox 41">
+            <a:extLst>
+              <a:ext uri="{FF2B5EF4-FFF2-40B4-BE49-F238E27FC236}">
+                <a16:creationId xmlns:a16="http://schemas.microsoft.com/office/drawing/2014/main" id="{9D68CD3C-D03E-4059-5D28-7AAB6407BAFC}"/>
+              </a:ext>
+            </a:extLst>
+          </p:cNvPr>
+          <p:cNvSpPr txBox="1"/>
+          <p:nvPr/>
+        </p:nvSpPr>
+        <p:spPr>
+          <a:xfrm>
+            <a:off x="5004797" y="1696403"/>
+            <a:ext cx="1460662" cy="707886"/>
+          </a:xfrm>
+          <a:prstGeom prst="rect">
+            <a:avLst/>
+          </a:prstGeom>
+          <a:solidFill>
+            <a:schemeClr val="bg1"/>
+          </a:solidFill>
+          <a:ln>
+            <a:solidFill>
+              <a:schemeClr val="tx1"/>
+            </a:solidFill>
+          </a:ln>
+        </p:spPr>
+        <p:txBody>
+          <a:bodyPr wrap="square">
+            <a:spAutoFit/>
+          </a:bodyPr>
+          <a:lstStyle/>
+          <a:p>
+            <a:pPr>
+              <a:buNone/>
+            </a:pPr>
+            <a:r>
+              <a:rPr lang="ko-KR" altLang="ko-KR" sz="1000" b="0" dirty="0">
+                <a:effectLst/>
+                <a:latin typeface="D2Coding" panose="020B0609020101020101" pitchFamily="49" charset="-127"/>
+                <a:ea typeface="D2Coding" panose="020B0609020101020101" pitchFamily="49" charset="-127"/>
+              </a:rPr>
+              <a:t>[0.1, 0.2, 0.1, 0.3]</a:t>
+            </a:r>
+            <a:endParaRPr lang="en-US" altLang="ko-KR" sz="1000" b="0" dirty="0">
+              <a:effectLst/>
+              <a:latin typeface="D2Coding" panose="020B0609020101020101" pitchFamily="49" charset="-127"/>
+              <a:ea typeface="D2Coding" panose="020B0609020101020101" pitchFamily="49" charset="-127"/>
+            </a:endParaRPr>
+          </a:p>
+          <a:p>
+            <a:pPr>
+              <a:buNone/>
+            </a:pPr>
+            <a:r>
+              <a:rPr lang="ko-KR" altLang="ko-KR" sz="1000" b="0" dirty="0">
+                <a:effectLst/>
+                <a:latin typeface="D2Coding" panose="020B0609020101020101" pitchFamily="49" charset="-127"/>
+                <a:ea typeface="D2Coding" panose="020B0609020101020101" pitchFamily="49" charset="-127"/>
+              </a:rPr>
+              <a:t>[0.8, 0.9, 0.7, 0.9] </a:t>
+            </a:r>
+            <a:endParaRPr lang="en-US" altLang="ko-KR" sz="1000" b="0" dirty="0">
+              <a:effectLst/>
+              <a:latin typeface="D2Coding" panose="020B0609020101020101" pitchFamily="49" charset="-127"/>
+              <a:ea typeface="D2Coding" panose="020B0609020101020101" pitchFamily="49" charset="-127"/>
+            </a:endParaRPr>
+          </a:p>
+          <a:p>
+            <a:pPr>
+              <a:buNone/>
+            </a:pPr>
+            <a:r>
+              <a:rPr lang="ko-KR" altLang="ko-KR" sz="1000" b="0" dirty="0">
+                <a:effectLst/>
+                <a:latin typeface="D2Coding" panose="020B0609020101020101" pitchFamily="49" charset="-127"/>
+                <a:ea typeface="D2Coding" panose="020B0609020101020101" pitchFamily="49" charset="-127"/>
+              </a:rPr>
+              <a:t>[0.2, 0.1, 0.3, 0.1] </a:t>
+            </a:r>
+            <a:endParaRPr lang="en-US" altLang="ko-KR" sz="1000" b="0" dirty="0">
+              <a:effectLst/>
+              <a:latin typeface="D2Coding" panose="020B0609020101020101" pitchFamily="49" charset="-127"/>
+              <a:ea typeface="D2Coding" panose="020B0609020101020101" pitchFamily="49" charset="-127"/>
+            </a:endParaRPr>
+          </a:p>
+          <a:p>
+            <a:pPr>
+              <a:buNone/>
+            </a:pPr>
+            <a:r>
+              <a:rPr lang="ko-KR" altLang="ko-KR" sz="1000" b="0" dirty="0">
+                <a:effectLst/>
+                <a:latin typeface="D2Coding" panose="020B0609020101020101" pitchFamily="49" charset="-127"/>
+                <a:ea typeface="D2Coding" panose="020B0609020101020101" pitchFamily="49" charset="-127"/>
+              </a:rPr>
+              <a:t>[0.5, 0.4, 0.6, 0.2]</a:t>
+            </a:r>
+          </a:p>
+        </p:txBody>
+      </p:sp>
+      <p:sp>
+        <p:nvSpPr>
+          <p:cNvPr id="48" name="TextBox 47">
+            <a:extLst>
+              <a:ext uri="{FF2B5EF4-FFF2-40B4-BE49-F238E27FC236}">
+                <a16:creationId xmlns:a16="http://schemas.microsoft.com/office/drawing/2014/main" id="{11C3E297-FCCB-397E-018E-55E4BDE3DA38}"/>
+              </a:ext>
+            </a:extLst>
+          </p:cNvPr>
+          <p:cNvSpPr txBox="1"/>
+          <p:nvPr/>
+        </p:nvSpPr>
+        <p:spPr>
+          <a:xfrm>
+            <a:off x="7375008" y="3632659"/>
+            <a:ext cx="3139003" cy="307777"/>
+          </a:xfrm>
+          <a:prstGeom prst="rect">
+            <a:avLst/>
+          </a:prstGeom>
+          <a:solidFill>
+            <a:schemeClr val="bg1"/>
+          </a:solidFill>
+        </p:spPr>
+        <p:txBody>
+          <a:bodyPr wrap="square">
+            <a:spAutoFit/>
+          </a:bodyPr>
+          <a:lstStyle/>
+          <a:p>
+            <a:pPr indent="0" algn="l">
+              <a:buNone/>
+            </a:pPr>
+            <a:r>
+              <a:rPr lang="ko-KR" altLang="ko-KR" sz="1400" dirty="0">
+                <a:latin typeface="D2Coding" panose="020B0609020101020101" pitchFamily="49" charset="-127"/>
+                <a:ea typeface="D2Coding" panose="020B0609020101020101" pitchFamily="49" charset="-127"/>
+              </a:rPr>
+              <a:t>[0.0919, 0.6462 , 0.0857, 0.1761]</a:t>
+            </a:r>
+          </a:p>
+        </p:txBody>
+      </p:sp>
+      <p:sp>
+        <p:nvSpPr>
+          <p:cNvPr id="50" name="TextBox 49">
+            <a:extLst>
+              <a:ext uri="{FF2B5EF4-FFF2-40B4-BE49-F238E27FC236}">
+                <a16:creationId xmlns:a16="http://schemas.microsoft.com/office/drawing/2014/main" id="{D431C0E0-1E7B-89C8-8987-C0F92717C6A7}"/>
+              </a:ext>
+            </a:extLst>
+          </p:cNvPr>
+          <p:cNvSpPr txBox="1"/>
+          <p:nvPr/>
+        </p:nvSpPr>
+        <p:spPr>
+          <a:xfrm>
+            <a:off x="1656709" y="4129587"/>
+            <a:ext cx="2004419" cy="307777"/>
+          </a:xfrm>
+          <a:prstGeom prst="rect">
+            <a:avLst/>
+          </a:prstGeom>
+          <a:solidFill>
+            <a:schemeClr val="bg1"/>
+          </a:solidFill>
+          <a:ln w="28575">
+            <a:solidFill>
+              <a:srgbClr val="FF0000"/>
+            </a:solidFill>
+          </a:ln>
+        </p:spPr>
+        <p:txBody>
+          <a:bodyPr wrap="square">
+            <a:spAutoFit/>
+          </a:bodyPr>
+          <a:lstStyle/>
+          <a:p>
+            <a:r>
+              <a:rPr lang="ko-KR" altLang="ko-KR" sz="1400" dirty="0">
+                <a:latin typeface="D2Coding" panose="020B0609020101020101" pitchFamily="49" charset="-127"/>
+                <a:ea typeface="D2Coding" panose="020B0609020101020101" pitchFamily="49" charset="-127"/>
+              </a:rPr>
+              <a:t>[0.7, 0.8, 0.6, 0.9]</a:t>
+            </a:r>
+          </a:p>
+        </p:txBody>
+      </p:sp>
+      <p:sp>
+        <p:nvSpPr>
+          <p:cNvPr id="52" name="TextBox 51">
+            <a:extLst>
+              <a:ext uri="{FF2B5EF4-FFF2-40B4-BE49-F238E27FC236}">
+                <a16:creationId xmlns:a16="http://schemas.microsoft.com/office/drawing/2014/main" id="{AB209FEE-C228-2E1F-12A2-AFB5FF530FF1}"/>
+              </a:ext>
+            </a:extLst>
+          </p:cNvPr>
+          <p:cNvSpPr txBox="1"/>
+          <p:nvPr/>
+        </p:nvSpPr>
+        <p:spPr>
+          <a:xfrm>
+            <a:off x="7375007" y="6247497"/>
+            <a:ext cx="3139003" cy="307777"/>
+          </a:xfrm>
+          <a:prstGeom prst="rect">
+            <a:avLst/>
+          </a:prstGeom>
+          <a:solidFill>
+            <a:schemeClr val="bg1"/>
+          </a:solidFill>
+          <a:ln w="28575">
+            <a:solidFill>
+              <a:srgbClr val="00B0F0"/>
+            </a:solidFill>
+          </a:ln>
+        </p:spPr>
+        <p:txBody>
+          <a:bodyPr wrap="square">
+            <a:spAutoFit/>
+          </a:bodyPr>
+          <a:lstStyle/>
+          <a:p>
+            <a:r>
+              <a:rPr lang="ko-KR" altLang="ko-KR" sz="1400" dirty="0">
+                <a:latin typeface="D2Coding" panose="020B0609020101020101" pitchFamily="49" charset="-127"/>
+                <a:ea typeface="D2Coding" panose="020B0609020101020101" pitchFamily="49" charset="-127"/>
+              </a:rPr>
+              <a:t>[0.631</a:t>
+            </a:r>
+            <a:r>
+              <a:rPr lang="en-US" altLang="ko-KR" sz="1400" dirty="0">
+                <a:latin typeface="D2Coding" panose="020B0609020101020101" pitchFamily="49" charset="-127"/>
+                <a:ea typeface="D2Coding" panose="020B0609020101020101" pitchFamily="49" charset="-127"/>
+              </a:rPr>
+              <a:t>4</a:t>
+            </a:r>
+            <a:r>
+              <a:rPr lang="ko-KR" altLang="ko-KR" sz="1400" dirty="0">
+                <a:latin typeface="D2Coding" panose="020B0609020101020101" pitchFamily="49" charset="-127"/>
+                <a:ea typeface="D2Coding" panose="020B0609020101020101" pitchFamily="49" charset="-127"/>
+              </a:rPr>
+              <a:t>3</a:t>
+            </a:r>
+            <a:r>
+              <a:rPr lang="en-US" altLang="ko-KR" sz="1400" dirty="0">
+                <a:latin typeface="D2Coding" panose="020B0609020101020101" pitchFamily="49" charset="-127"/>
+                <a:ea typeface="D2Coding" panose="020B0609020101020101" pitchFamily="49" charset="-127"/>
+              </a:rPr>
+              <a:t>, </a:t>
+            </a:r>
+            <a:r>
+              <a:rPr lang="ko-KR" altLang="ko-KR" sz="1400" dirty="0">
+                <a:latin typeface="D2Coding" panose="020B0609020101020101" pitchFamily="49" charset="-127"/>
+                <a:ea typeface="D2Coding" panose="020B0609020101020101" pitchFamily="49" charset="-127"/>
+              </a:rPr>
+              <a:t>0.6790</a:t>
+            </a:r>
+            <a:r>
+              <a:rPr lang="en-US" altLang="ko-KR" sz="1400" dirty="0">
+                <a:latin typeface="D2Coding" panose="020B0609020101020101" pitchFamily="49" charset="-127"/>
+                <a:ea typeface="D2Coding" panose="020B0609020101020101" pitchFamily="49" charset="-127"/>
+              </a:rPr>
+              <a:t>,</a:t>
+            </a:r>
+            <a:r>
+              <a:rPr lang="ko-KR" altLang="ko-KR" sz="1400" dirty="0">
+                <a:latin typeface="D2Coding" panose="020B0609020101020101" pitchFamily="49" charset="-127"/>
+                <a:ea typeface="D2Coding" panose="020B0609020101020101" pitchFamily="49" charset="-127"/>
+              </a:rPr>
+              <a:t> 0.5929</a:t>
+            </a:r>
+            <a:r>
+              <a:rPr lang="en-US" altLang="ko-KR" sz="1400" dirty="0">
+                <a:latin typeface="D2Coding" panose="020B0609020101020101" pitchFamily="49" charset="-127"/>
+                <a:ea typeface="D2Coding" panose="020B0609020101020101" pitchFamily="49" charset="-127"/>
+              </a:rPr>
+              <a:t>,</a:t>
+            </a:r>
+            <a:r>
+              <a:rPr lang="ko-KR" altLang="ko-KR" sz="1400" dirty="0">
+                <a:latin typeface="D2Coding" panose="020B0609020101020101" pitchFamily="49" charset="-127"/>
+                <a:ea typeface="D2Coding" panose="020B0609020101020101" pitchFamily="49" charset="-127"/>
+              </a:rPr>
+              <a:t> 0.65</a:t>
+            </a:r>
+            <a:r>
+              <a:rPr lang="en-US" altLang="ko-KR" sz="1400" dirty="0">
+                <a:latin typeface="D2Coding" panose="020B0609020101020101" pitchFamily="49" charset="-127"/>
+                <a:ea typeface="D2Coding" panose="020B0609020101020101" pitchFamily="49" charset="-127"/>
+              </a:rPr>
+              <a:t>30</a:t>
+            </a:r>
+            <a:r>
+              <a:rPr lang="ko-KR" altLang="ko-KR" sz="1400" dirty="0">
+                <a:latin typeface="D2Coding" panose="020B0609020101020101" pitchFamily="49" charset="-127"/>
+                <a:ea typeface="D2Coding" panose="020B0609020101020101" pitchFamily="49" charset="-127"/>
+              </a:rPr>
+              <a:t>]</a:t>
+            </a:r>
+            <a:endParaRPr lang="ko-KR" altLang="en-US" sz="1400" dirty="0">
+              <a:latin typeface="D2Coding" panose="020B0609020101020101" pitchFamily="49" charset="-127"/>
+              <a:ea typeface="D2Coding" panose="020B0609020101020101" pitchFamily="49" charset="-127"/>
+            </a:endParaRPr>
+          </a:p>
+        </p:txBody>
+      </p:sp>
+      <p:sp>
+        <p:nvSpPr>
+          <p:cNvPr id="53" name="직사각형 52">
+            <a:extLst>
+              <a:ext uri="{FF2B5EF4-FFF2-40B4-BE49-F238E27FC236}">
+                <a16:creationId xmlns:a16="http://schemas.microsoft.com/office/drawing/2014/main" id="{E4840900-CD8B-5BAD-7BDD-7F374B98F9A8}"/>
+              </a:ext>
+            </a:extLst>
+          </p:cNvPr>
+          <p:cNvSpPr/>
+          <p:nvPr/>
+        </p:nvSpPr>
+        <p:spPr>
+          <a:xfrm>
+            <a:off x="2142836" y="3589410"/>
+            <a:ext cx="1080655" cy="421938"/>
+          </a:xfrm>
+          <a:prstGeom prst="rect">
+            <a:avLst/>
+          </a:prstGeom>
+          <a:noFill/>
+          <a:ln w="28575">
+            <a:solidFill>
+              <a:srgbClr val="FF0000"/>
+            </a:solidFill>
+          </a:ln>
+        </p:spPr>
+        <p:style>
+          <a:lnRef idx="2">
+            <a:schemeClr val="accent1">
+              <a:shade val="15000"/>
+            </a:schemeClr>
+          </a:lnRef>
+          <a:fillRef idx="1">
+            <a:schemeClr val="accent1"/>
+          </a:fillRef>
+          <a:effectRef idx="0">
+            <a:schemeClr val="accent1"/>
+          </a:effectRef>
+          <a:fontRef idx="minor">
+            <a:schemeClr val="lt1"/>
+          </a:fontRef>
+        </p:style>
+        <p:txBody>
+          <a:bodyPr rtlCol="0" anchor="ctr"/>
+          <a:lstStyle/>
+          <a:p>
+            <a:pPr algn="ctr"/>
+            <a:endParaRPr lang="ko-KR" altLang="en-US"/>
+          </a:p>
+        </p:txBody>
+      </p:sp>
+      <p:cxnSp>
+        <p:nvCxnSpPr>
+          <p:cNvPr id="55" name="직선 화살표 연결선 54">
+            <a:extLst>
+              <a:ext uri="{FF2B5EF4-FFF2-40B4-BE49-F238E27FC236}">
+                <a16:creationId xmlns:a16="http://schemas.microsoft.com/office/drawing/2014/main" id="{72990524-CCF1-788B-512B-37D6EE03ADFA}"/>
+              </a:ext>
+            </a:extLst>
+          </p:cNvPr>
+          <p:cNvCxnSpPr>
+            <a:cxnSpLocks/>
+            <a:endCxn id="52" idx="1"/>
+          </p:cNvCxnSpPr>
+          <p:nvPr/>
+        </p:nvCxnSpPr>
+        <p:spPr>
+          <a:xfrm>
+            <a:off x="5957455" y="2404289"/>
+            <a:ext cx="1417552" cy="3997097"/>
+          </a:xfrm>
+          <a:prstGeom prst="straightConnector1">
+            <a:avLst/>
+          </a:prstGeom>
+          <a:ln>
+            <a:tailEnd type="triangle"/>
+          </a:ln>
+        </p:spPr>
+        <p:style>
+          <a:lnRef idx="1">
+            <a:schemeClr val="dk1"/>
+          </a:lnRef>
+          <a:fillRef idx="0">
+            <a:schemeClr val="dk1"/>
+          </a:fillRef>
+          <a:effectRef idx="0">
+            <a:schemeClr val="dk1"/>
+          </a:effectRef>
+          <a:fontRef idx="minor">
+            <a:schemeClr val="tx1"/>
+          </a:fontRef>
+        </p:style>
+      </p:cxnSp>
+      <p:sp>
+        <p:nvSpPr>
+          <p:cNvPr id="8" name="TextBox 7">
+            <a:extLst>
+              <a:ext uri="{FF2B5EF4-FFF2-40B4-BE49-F238E27FC236}">
+                <a16:creationId xmlns:a16="http://schemas.microsoft.com/office/drawing/2014/main" id="{199FFCC4-6076-77AD-CEA6-EB277323DFB8}"/>
+              </a:ext>
+            </a:extLst>
+          </p:cNvPr>
+          <p:cNvSpPr txBox="1"/>
+          <p:nvPr/>
+        </p:nvSpPr>
+        <p:spPr>
+          <a:xfrm>
+            <a:off x="995348" y="4614998"/>
+            <a:ext cx="5331559" cy="1169551"/>
+          </a:xfrm>
+          <a:prstGeom prst="rect">
+            <a:avLst/>
+          </a:prstGeom>
+          <a:solidFill>
+            <a:srgbClr val="76E3FF"/>
+          </a:solidFill>
+        </p:spPr>
+        <p:txBody>
+          <a:bodyPr wrap="square">
+            <a:spAutoFit/>
+          </a:bodyPr>
+          <a:lstStyle/>
+          <a:p>
+            <a:r>
+              <a:rPr lang="ko-KR" altLang="ko-KR" sz="1400" dirty="0" err="1">
+                <a:solidFill>
+                  <a:srgbClr val="000000"/>
+                </a:solidFill>
+                <a:latin typeface="D2Coding" panose="020B0609020101020101" pitchFamily="49" charset="-127"/>
+                <a:ea typeface="D2Coding" panose="020B0609020101020101" pitchFamily="49" charset="-127"/>
+              </a:rPr>
+              <a:t>raw_scores</a:t>
+            </a:r>
+            <a:r>
+              <a:rPr lang="ko-KR" altLang="ko-KR" sz="1400" dirty="0">
+                <a:solidFill>
+                  <a:srgbClr val="000000"/>
+                </a:solidFill>
+                <a:latin typeface="D2Coding" panose="020B0609020101020101" pitchFamily="49" charset="-127"/>
+                <a:ea typeface="D2Coding" panose="020B0609020101020101" pitchFamily="49" charset="-127"/>
+              </a:rPr>
+              <a:t> = [</a:t>
+            </a:r>
+            <a:r>
+              <a:rPr lang="ko-KR" altLang="ko-KR" sz="1400" dirty="0" err="1">
+                <a:solidFill>
+                  <a:srgbClr val="000000"/>
+                </a:solidFill>
+                <a:latin typeface="D2Coding" panose="020B0609020101020101" pitchFamily="49" charset="-127"/>
+                <a:ea typeface="D2Coding" panose="020B0609020101020101" pitchFamily="49" charset="-127"/>
+              </a:rPr>
+              <a:t>score</a:t>
+            </a:r>
+            <a:r>
+              <a:rPr lang="ko-KR" altLang="ko-KR" sz="1400" dirty="0">
+                <a:solidFill>
+                  <a:srgbClr val="000000"/>
+                </a:solidFill>
+                <a:latin typeface="D2Coding" panose="020B0609020101020101" pitchFamily="49" charset="-127"/>
+                <a:ea typeface="D2Coding" panose="020B0609020101020101" pitchFamily="49" charset="-127"/>
+              </a:rPr>
+              <a:t>(</a:t>
+            </a:r>
+            <a:r>
+              <a:rPr lang="ko-KR" altLang="ko-KR" sz="1400" dirty="0" err="1">
+                <a:solidFill>
+                  <a:srgbClr val="000000"/>
+                </a:solidFill>
+                <a:latin typeface="D2Coding" panose="020B0609020101020101" pitchFamily="49" charset="-127"/>
+                <a:ea typeface="D2Coding" panose="020B0609020101020101" pitchFamily="49" charset="-127"/>
+              </a:rPr>
+              <a:t>target</a:t>
+            </a:r>
+            <a:r>
+              <a:rPr lang="ko-KR" altLang="ko-KR" sz="1400" dirty="0">
+                <a:solidFill>
+                  <a:srgbClr val="000000"/>
+                </a:solidFill>
+                <a:latin typeface="D2Coding" panose="020B0609020101020101" pitchFamily="49" charset="-127"/>
+                <a:ea typeface="D2Coding" panose="020B0609020101020101" pitchFamily="49" charset="-127"/>
+              </a:rPr>
+              <a:t>, </a:t>
+            </a:r>
+            <a:r>
+              <a:rPr lang="ko-KR" altLang="ko-KR" sz="1400" dirty="0" err="1">
+                <a:solidFill>
+                  <a:srgbClr val="000000"/>
+                </a:solidFill>
+                <a:latin typeface="D2Coding" panose="020B0609020101020101" pitchFamily="49" charset="-127"/>
+                <a:ea typeface="D2Coding" panose="020B0609020101020101" pitchFamily="49" charset="-127"/>
+              </a:rPr>
+              <a:t>source</a:t>
+            </a:r>
+            <a:r>
+              <a:rPr lang="ko-KR" altLang="ko-KR" sz="1400" dirty="0">
+                <a:solidFill>
+                  <a:srgbClr val="000000"/>
+                </a:solidFill>
+                <a:latin typeface="D2Coding" panose="020B0609020101020101" pitchFamily="49" charset="-127"/>
+                <a:ea typeface="D2Coding" panose="020B0609020101020101" pitchFamily="49" charset="-127"/>
+              </a:rPr>
+              <a:t>) </a:t>
+            </a:r>
+            <a:r>
+              <a:rPr lang="ko-KR" altLang="ko-KR" sz="1400" dirty="0" err="1">
+                <a:solidFill>
+                  <a:srgbClr val="000000"/>
+                </a:solidFill>
+                <a:latin typeface="D2Coding" panose="020B0609020101020101" pitchFamily="49" charset="-127"/>
+                <a:ea typeface="D2Coding" panose="020B0609020101020101" pitchFamily="49" charset="-127"/>
+              </a:rPr>
+              <a:t>for</a:t>
+            </a:r>
+            <a:r>
+              <a:rPr lang="ko-KR" altLang="ko-KR" sz="1400" dirty="0">
+                <a:solidFill>
+                  <a:srgbClr val="000000"/>
+                </a:solidFill>
+                <a:latin typeface="D2Coding" panose="020B0609020101020101" pitchFamily="49" charset="-127"/>
+                <a:ea typeface="D2Coding" panose="020B0609020101020101" pitchFamily="49" charset="-127"/>
+              </a:rPr>
+              <a:t> </a:t>
+            </a:r>
+            <a:r>
+              <a:rPr lang="ko-KR" altLang="ko-KR" sz="1400" dirty="0" err="1">
+                <a:solidFill>
+                  <a:srgbClr val="000000"/>
+                </a:solidFill>
+                <a:latin typeface="D2Coding" panose="020B0609020101020101" pitchFamily="49" charset="-127"/>
+                <a:ea typeface="D2Coding" panose="020B0609020101020101" pitchFamily="49" charset="-127"/>
+              </a:rPr>
+              <a:t>source</a:t>
+            </a:r>
+            <a:r>
+              <a:rPr lang="ko-KR" altLang="ko-KR" sz="1400" dirty="0">
+                <a:solidFill>
+                  <a:srgbClr val="000000"/>
+                </a:solidFill>
+                <a:latin typeface="D2Coding" panose="020B0609020101020101" pitchFamily="49" charset="-127"/>
+                <a:ea typeface="D2Coding" panose="020B0609020101020101" pitchFamily="49" charset="-127"/>
+              </a:rPr>
+              <a:t> </a:t>
+            </a:r>
+            <a:r>
+              <a:rPr lang="ko-KR" altLang="ko-KR" sz="1400" dirty="0" err="1">
+                <a:solidFill>
+                  <a:srgbClr val="000000"/>
+                </a:solidFill>
+                <a:latin typeface="D2Coding" panose="020B0609020101020101" pitchFamily="49" charset="-127"/>
+                <a:ea typeface="D2Coding" panose="020B0609020101020101" pitchFamily="49" charset="-127"/>
+              </a:rPr>
+              <a:t>in</a:t>
+            </a:r>
+            <a:r>
+              <a:rPr lang="ko-KR" altLang="ko-KR" sz="1400" dirty="0">
+                <a:solidFill>
+                  <a:srgbClr val="000000"/>
+                </a:solidFill>
+                <a:latin typeface="D2Coding" panose="020B0609020101020101" pitchFamily="49" charset="-127"/>
+                <a:ea typeface="D2Coding" panose="020B0609020101020101" pitchFamily="49" charset="-127"/>
+              </a:rPr>
+              <a:t> </a:t>
+            </a:r>
+            <a:r>
+              <a:rPr lang="ko-KR" altLang="ko-KR" sz="1400" dirty="0" err="1">
+                <a:solidFill>
+                  <a:srgbClr val="000000"/>
+                </a:solidFill>
+                <a:latin typeface="D2Coding" panose="020B0609020101020101" pitchFamily="49" charset="-127"/>
+                <a:ea typeface="D2Coding" panose="020B0609020101020101" pitchFamily="49" charset="-127"/>
+              </a:rPr>
+              <a:t>sources</a:t>
+            </a:r>
+            <a:r>
+              <a:rPr lang="ko-KR" altLang="ko-KR" sz="1400" dirty="0">
+                <a:solidFill>
+                  <a:srgbClr val="000000"/>
+                </a:solidFill>
+                <a:latin typeface="D2Coding" panose="020B0609020101020101" pitchFamily="49" charset="-127"/>
+                <a:ea typeface="D2Coding" panose="020B0609020101020101" pitchFamily="49" charset="-127"/>
+              </a:rPr>
+              <a:t>]</a:t>
+            </a:r>
+            <a:endParaRPr lang="en-US" altLang="ko-KR" sz="1400" dirty="0">
+              <a:solidFill>
+                <a:srgbClr val="000000"/>
+              </a:solidFill>
+              <a:latin typeface="D2Coding" panose="020B0609020101020101" pitchFamily="49" charset="-127"/>
+              <a:ea typeface="D2Coding" panose="020B0609020101020101" pitchFamily="49" charset="-127"/>
+            </a:endParaRPr>
+          </a:p>
+          <a:p>
+            <a:endParaRPr lang="en-US" altLang="ko-KR" sz="1400" dirty="0">
+              <a:solidFill>
+                <a:srgbClr val="000000"/>
+              </a:solidFill>
+              <a:latin typeface="D2Coding" panose="020B0609020101020101" pitchFamily="49" charset="-127"/>
+              <a:ea typeface="D2Coding" panose="020B0609020101020101" pitchFamily="49" charset="-127"/>
+            </a:endParaRPr>
+          </a:p>
+          <a:p>
+            <a:r>
+              <a:rPr lang="ko-KR" altLang="ko-KR" sz="1400" dirty="0" err="1">
+                <a:solidFill>
+                  <a:srgbClr val="000000"/>
+                </a:solidFill>
+                <a:latin typeface="D2Coding" panose="020B0609020101020101" pitchFamily="49" charset="-127"/>
+                <a:ea typeface="D2Coding" panose="020B0609020101020101" pitchFamily="49" charset="-127"/>
+              </a:rPr>
+              <a:t>attention_weights</a:t>
+            </a:r>
+            <a:r>
+              <a:rPr lang="ko-KR" altLang="ko-KR" sz="1400" dirty="0">
+                <a:solidFill>
+                  <a:srgbClr val="000000"/>
+                </a:solidFill>
+                <a:latin typeface="D2Coding" panose="020B0609020101020101" pitchFamily="49" charset="-127"/>
+                <a:ea typeface="D2Coding" panose="020B0609020101020101" pitchFamily="49" charset="-127"/>
+              </a:rPr>
+              <a:t> = </a:t>
+            </a:r>
+            <a:r>
+              <a:rPr lang="ko-KR" altLang="ko-KR" sz="1400" dirty="0" err="1">
+                <a:solidFill>
+                  <a:srgbClr val="000000"/>
+                </a:solidFill>
+                <a:latin typeface="D2Coding" panose="020B0609020101020101" pitchFamily="49" charset="-127"/>
+                <a:ea typeface="D2Coding" panose="020B0609020101020101" pitchFamily="49" charset="-127"/>
+              </a:rPr>
+              <a:t>softmax</a:t>
+            </a:r>
+            <a:r>
+              <a:rPr lang="ko-KR" altLang="ko-KR" sz="1400" dirty="0">
+                <a:solidFill>
+                  <a:srgbClr val="000000"/>
+                </a:solidFill>
+                <a:latin typeface="D2Coding" panose="020B0609020101020101" pitchFamily="49" charset="-127"/>
+                <a:ea typeface="D2Coding" panose="020B0609020101020101" pitchFamily="49" charset="-127"/>
+              </a:rPr>
+              <a:t>(</a:t>
+            </a:r>
+            <a:r>
+              <a:rPr lang="ko-KR" altLang="ko-KR" sz="1400" dirty="0" err="1">
+                <a:solidFill>
+                  <a:srgbClr val="000000"/>
+                </a:solidFill>
+                <a:latin typeface="D2Coding" panose="020B0609020101020101" pitchFamily="49" charset="-127"/>
+                <a:ea typeface="D2Coding" panose="020B0609020101020101" pitchFamily="49" charset="-127"/>
+              </a:rPr>
+              <a:t>scores</a:t>
+            </a:r>
+            <a:r>
+              <a:rPr lang="ko-KR" altLang="ko-KR" sz="1400" dirty="0">
+                <a:solidFill>
+                  <a:srgbClr val="000000"/>
+                </a:solidFill>
+                <a:latin typeface="D2Coding" panose="020B0609020101020101" pitchFamily="49" charset="-127"/>
+                <a:ea typeface="D2Coding" panose="020B0609020101020101" pitchFamily="49" charset="-127"/>
+              </a:rPr>
+              <a:t>)</a:t>
+            </a:r>
+          </a:p>
+          <a:p>
+            <a:pPr marR="0" indent="0">
+              <a:buNone/>
+            </a:pPr>
+            <a:endParaRPr lang="en-US" altLang="ko-KR" sz="1400" dirty="0">
+              <a:solidFill>
+                <a:srgbClr val="000000"/>
+              </a:solidFill>
+              <a:latin typeface="D2Coding" panose="020B0609020101020101" pitchFamily="49" charset="-127"/>
+              <a:ea typeface="D2Coding" panose="020B0609020101020101" pitchFamily="49" charset="-127"/>
+            </a:endParaRPr>
+          </a:p>
+          <a:p>
+            <a:pPr marR="0" indent="0">
+              <a:buNone/>
+            </a:pPr>
+            <a:r>
+              <a:rPr lang="ko-KR" altLang="ko-KR" sz="1400" dirty="0" err="1">
+                <a:solidFill>
+                  <a:srgbClr val="000000"/>
+                </a:solidFill>
+                <a:latin typeface="D2Coding" panose="020B0609020101020101" pitchFamily="49" charset="-127"/>
+                <a:ea typeface="D2Coding" panose="020B0609020101020101" pitchFamily="49" charset="-127"/>
+              </a:rPr>
+              <a:t>combined</a:t>
+            </a:r>
+            <a:r>
+              <a:rPr lang="ko-KR" altLang="ko-KR" sz="1400" dirty="0">
+                <a:solidFill>
+                  <a:srgbClr val="000000"/>
+                </a:solidFill>
+                <a:latin typeface="D2Coding" panose="020B0609020101020101" pitchFamily="49" charset="-127"/>
+                <a:ea typeface="D2Coding" panose="020B0609020101020101" pitchFamily="49" charset="-127"/>
+              </a:rPr>
+              <a:t> = </a:t>
+            </a:r>
+            <a:r>
+              <a:rPr lang="ko-KR" altLang="ko-KR" sz="1400" dirty="0" err="1">
+                <a:solidFill>
+                  <a:srgbClr val="000000"/>
+                </a:solidFill>
+                <a:latin typeface="D2Coding" panose="020B0609020101020101" pitchFamily="49" charset="-127"/>
+                <a:ea typeface="D2Coding" panose="020B0609020101020101" pitchFamily="49" charset="-127"/>
+              </a:rPr>
+              <a:t>np.sum</a:t>
+            </a:r>
+            <a:r>
+              <a:rPr lang="ko-KR" altLang="ko-KR" sz="1400" dirty="0">
+                <a:solidFill>
+                  <a:srgbClr val="000000"/>
+                </a:solidFill>
+                <a:latin typeface="D2Coding" panose="020B0609020101020101" pitchFamily="49" charset="-127"/>
+                <a:ea typeface="D2Coding" panose="020B0609020101020101" pitchFamily="49" charset="-127"/>
+              </a:rPr>
+              <a:t>(</a:t>
+            </a:r>
+            <a:r>
+              <a:rPr lang="ko-KR" altLang="ko-KR" sz="1400" dirty="0" err="1">
+                <a:solidFill>
+                  <a:srgbClr val="000000"/>
+                </a:solidFill>
+                <a:latin typeface="D2Coding" panose="020B0609020101020101" pitchFamily="49" charset="-127"/>
+                <a:ea typeface="D2Coding" panose="020B0609020101020101" pitchFamily="49" charset="-127"/>
+              </a:rPr>
+              <a:t>scores</a:t>
+            </a:r>
+            <a:r>
+              <a:rPr lang="ko-KR" altLang="ko-KR" sz="1400" dirty="0">
+                <a:solidFill>
+                  <a:srgbClr val="000000"/>
+                </a:solidFill>
+                <a:latin typeface="D2Coding" panose="020B0609020101020101" pitchFamily="49" charset="-127"/>
+                <a:ea typeface="D2Coding" panose="020B0609020101020101" pitchFamily="49" charset="-127"/>
+              </a:rPr>
+              <a:t> * </a:t>
+            </a:r>
+            <a:r>
+              <a:rPr lang="ko-KR" altLang="ko-KR" sz="1400" dirty="0" err="1">
+                <a:solidFill>
+                  <a:srgbClr val="000000"/>
+                </a:solidFill>
+                <a:latin typeface="D2Coding" panose="020B0609020101020101" pitchFamily="49" charset="-127"/>
+                <a:ea typeface="D2Coding" panose="020B0609020101020101" pitchFamily="49" charset="-127"/>
+              </a:rPr>
+              <a:t>sources</a:t>
+            </a:r>
+            <a:r>
+              <a:rPr lang="ko-KR" altLang="ko-KR" sz="1400" dirty="0">
+                <a:solidFill>
+                  <a:srgbClr val="000000"/>
+                </a:solidFill>
+                <a:latin typeface="D2Coding" panose="020B0609020101020101" pitchFamily="49" charset="-127"/>
+                <a:ea typeface="D2Coding" panose="020B0609020101020101" pitchFamily="49" charset="-127"/>
+              </a:rPr>
+              <a:t>)</a:t>
+            </a:r>
+          </a:p>
+        </p:txBody>
+      </p:sp>
+      <p:pic>
+        <p:nvPicPr>
+          <p:cNvPr id="57" name="그림 56">
+            <a:extLst>
+              <a:ext uri="{FF2B5EF4-FFF2-40B4-BE49-F238E27FC236}">
+                <a16:creationId xmlns:a16="http://schemas.microsoft.com/office/drawing/2014/main" id="{115801C9-1C49-8A81-C541-5665623596BE}"/>
+              </a:ext>
+            </a:extLst>
+          </p:cNvPr>
+          <p:cNvPicPr>
+            <a:picLocks noChangeAspect="1"/>
+          </p:cNvPicPr>
+          <p:nvPr/>
+        </p:nvPicPr>
+        <p:blipFill>
+          <a:blip r:embed="rId6">
+            <a:duotone>
+              <a:prstClr val="black"/>
+              <a:schemeClr val="accent3">
+                <a:tint val="45000"/>
+                <a:satMod val="400000"/>
+              </a:schemeClr>
+            </a:duotone>
+          </a:blip>
+          <a:stretch>
+            <a:fillRect/>
+          </a:stretch>
+        </p:blipFill>
+        <p:spPr>
+          <a:xfrm>
+            <a:off x="7375007" y="5229796"/>
+            <a:ext cx="2151067" cy="918851"/>
+          </a:xfrm>
+          <a:prstGeom prst="rect">
+            <a:avLst/>
+          </a:prstGeom>
+        </p:spPr>
+      </p:pic>
+      <p:sp>
+        <p:nvSpPr>
+          <p:cNvPr id="62" name="TextBox 61">
+            <a:extLst>
+              <a:ext uri="{FF2B5EF4-FFF2-40B4-BE49-F238E27FC236}">
+                <a16:creationId xmlns:a16="http://schemas.microsoft.com/office/drawing/2014/main" id="{E0DBEE09-3F5C-FB5E-0111-891462181261}"/>
+              </a:ext>
+            </a:extLst>
+          </p:cNvPr>
+          <p:cNvSpPr txBox="1"/>
+          <p:nvPr/>
+        </p:nvSpPr>
+        <p:spPr>
+          <a:xfrm>
+            <a:off x="6966408" y="826899"/>
+            <a:ext cx="4600281" cy="369332"/>
+          </a:xfrm>
+          <a:prstGeom prst="rect">
+            <a:avLst/>
+          </a:prstGeom>
+          <a:noFill/>
+        </p:spPr>
+        <p:txBody>
+          <a:bodyPr wrap="square">
+            <a:spAutoFit/>
+          </a:bodyPr>
+          <a:lstStyle/>
+          <a:p>
+            <a:pPr indent="0" algn="r">
+              <a:buNone/>
+            </a:pPr>
+            <a:r>
+              <a:rPr lang="ko-KR" altLang="ko-KR" sz="1800" b="1" i="0" dirty="0" err="1">
+                <a:effectLst/>
+                <a:latin typeface="Lora" pitchFamily="2" charset="0"/>
+              </a:rPr>
+              <a:t>Dot-product</a:t>
+            </a:r>
+            <a:r>
+              <a:rPr lang="ko-KR" altLang="ko-KR" sz="1800" b="1" i="0" dirty="0">
+                <a:effectLst/>
+                <a:latin typeface="Lora" pitchFamily="2" charset="0"/>
+              </a:rPr>
+              <a:t> </a:t>
+            </a:r>
+            <a:r>
+              <a:rPr lang="ko-KR" altLang="ko-KR" sz="1800" b="1" i="0" dirty="0" err="1">
+                <a:effectLst/>
+                <a:latin typeface="Lora" pitchFamily="2" charset="0"/>
+              </a:rPr>
+              <a:t>attention</a:t>
+            </a:r>
+            <a:endParaRPr lang="ko-KR" altLang="ko-KR" sz="1800" b="1" i="0" dirty="0">
+              <a:effectLst/>
+              <a:latin typeface="Lora" pitchFamily="2" charset="0"/>
+            </a:endParaRPr>
+          </a:p>
+        </p:txBody>
+      </p:sp>
     </p:spTree>
     <p:extLst>
       <p:ext uri="{BB962C8B-B14F-4D97-AF65-F5344CB8AC3E}">
@@ -11584,6 +14515,2569 @@
 </file>
 
 <file path=ppt/slides/slide21.xml><?xml version="1.0" encoding="utf-8"?>
+<p:sld xmlns:a="http://schemas.openxmlformats.org/drawingml/2006/main" xmlns:r="http://schemas.openxmlformats.org/officeDocument/2006/relationships" xmlns:p="http://schemas.openxmlformats.org/presentationml/2006/main">
+  <p:cSld>
+    <p:spTree>
+      <p:nvGrpSpPr>
+        <p:cNvPr id="1" name="">
+          <a:extLst>
+            <a:ext uri="{FF2B5EF4-FFF2-40B4-BE49-F238E27FC236}">
+              <a16:creationId xmlns:a16="http://schemas.microsoft.com/office/drawing/2014/main" id="{D44BBCDE-48D0-D947-2AC3-05D8719F00C2}"/>
+            </a:ext>
+          </a:extLst>
+        </p:cNvPr>
+        <p:cNvGrpSpPr/>
+        <p:nvPr/>
+      </p:nvGrpSpPr>
+      <p:grpSpPr>
+        <a:xfrm>
+          <a:off x="0" y="0"/>
+          <a:ext cx="0" cy="0"/>
+          <a:chOff x="0" y="0"/>
+          <a:chExt cx="0" cy="0"/>
+        </a:xfrm>
+      </p:grpSpPr>
+      <p:sp>
+        <p:nvSpPr>
+          <p:cNvPr id="4" name="슬라이드 번호 개체 틀 3">
+            <a:extLst>
+              <a:ext uri="{FF2B5EF4-FFF2-40B4-BE49-F238E27FC236}">
+                <a16:creationId xmlns:a16="http://schemas.microsoft.com/office/drawing/2014/main" id="{4F3944A8-CD14-49B3-1AA8-680D65BD58E2}"/>
+              </a:ext>
+            </a:extLst>
+          </p:cNvPr>
+          <p:cNvSpPr>
+            <a:spLocks noGrp="1"/>
+          </p:cNvSpPr>
+          <p:nvPr>
+            <p:ph type="sldNum" sz="quarter" idx="12"/>
+          </p:nvPr>
+        </p:nvSpPr>
+        <p:spPr>
+          <a:xfrm>
+            <a:off x="10514011" y="6036261"/>
+            <a:ext cx="753545" cy="365125"/>
+          </a:xfrm>
+        </p:spPr>
+        <p:txBody>
+          <a:bodyPr/>
+          <a:lstStyle/>
+          <a:p>
+            <a:fld id="{D57F1E4F-1CFF-5643-939E-217C01CDF565}" type="slidenum">
+              <a:rPr lang="en-US" smtClean="0"/>
+              <a:pPr/>
+              <a:t>21</a:t>
+            </a:fld>
+            <a:endParaRPr lang="en-US" dirty="0"/>
+          </a:p>
+        </p:txBody>
+      </p:sp>
+      <p:sp>
+        <p:nvSpPr>
+          <p:cNvPr id="3" name="제목 1">
+            <a:extLst>
+              <a:ext uri="{FF2B5EF4-FFF2-40B4-BE49-F238E27FC236}">
+                <a16:creationId xmlns:a16="http://schemas.microsoft.com/office/drawing/2014/main" id="{ED0CA67B-0067-E27D-6859-76E0A873E67F}"/>
+              </a:ext>
+            </a:extLst>
+          </p:cNvPr>
+          <p:cNvSpPr txBox="1">
+            <a:spLocks/>
+          </p:cNvSpPr>
+          <p:nvPr/>
+        </p:nvSpPr>
+        <p:spPr>
+          <a:xfrm>
+            <a:off x="475645" y="481983"/>
+            <a:ext cx="10353762" cy="766439"/>
+          </a:xfrm>
+          <a:prstGeom prst="rect">
+            <a:avLst/>
+          </a:prstGeom>
+        </p:spPr>
+        <p:txBody>
+          <a:bodyPr vert="horz" lIns="91440" tIns="45720" rIns="91440" bIns="45720" rtlCol="0" anchor="ctr">
+            <a:normAutofit/>
+          </a:bodyPr>
+          <a:lstStyle>
+            <a:lvl1pPr algn="ctr" defTabSz="914400" rtl="0" eaLnBrk="1" latinLnBrk="1" hangingPunct="1">
+              <a:lnSpc>
+                <a:spcPct val="90000"/>
+              </a:lnSpc>
+              <a:spcBef>
+                <a:spcPct val="0"/>
+              </a:spcBef>
+              <a:buNone/>
+              <a:defRPr sz="3200" kern="1200" cap="all" baseline="0">
+                <a:solidFill>
+                  <a:schemeClr val="tx1"/>
+                </a:solidFill>
+                <a:effectLst/>
+                <a:latin typeface="Batang" panose="02030600000101010101" pitchFamily="18" charset="-127"/>
+                <a:ea typeface="Batang" panose="02030600000101010101" pitchFamily="18" charset="-127"/>
+                <a:cs typeface="+mj-cs"/>
+              </a:defRPr>
+            </a:lvl1pPr>
+          </a:lstStyle>
+          <a:p>
+            <a:pPr algn="l"/>
+            <a:r>
+              <a:rPr lang="en-US" altLang="ko-KR" sz="2800" b="1" cap="none" dirty="0">
+                <a:latin typeface="Lora" pitchFamily="2" charset="0"/>
+              </a:rPr>
+              <a:t>The Transformer architecture</a:t>
+            </a:r>
+          </a:p>
+        </p:txBody>
+      </p:sp>
+      <p:sp>
+        <p:nvSpPr>
+          <p:cNvPr id="39" name="TextBox 38">
+            <a:extLst>
+              <a:ext uri="{FF2B5EF4-FFF2-40B4-BE49-F238E27FC236}">
+                <a16:creationId xmlns:a16="http://schemas.microsoft.com/office/drawing/2014/main" id="{0B07912B-8FD4-8EAC-1BAA-D3C18E409216}"/>
+              </a:ext>
+            </a:extLst>
+          </p:cNvPr>
+          <p:cNvSpPr txBox="1"/>
+          <p:nvPr/>
+        </p:nvSpPr>
+        <p:spPr>
+          <a:xfrm>
+            <a:off x="537021" y="1551563"/>
+            <a:ext cx="10353762" cy="4832092"/>
+          </a:xfrm>
+          <a:prstGeom prst="rect">
+            <a:avLst/>
+          </a:prstGeom>
+          <a:solidFill>
+            <a:srgbClr val="76E3FF"/>
+          </a:solidFill>
+        </p:spPr>
+        <p:txBody>
+          <a:bodyPr wrap="square">
+            <a:spAutoFit/>
+          </a:bodyPr>
+          <a:lstStyle/>
+          <a:p>
+            <a:pPr>
+              <a:buNone/>
+            </a:pPr>
+            <a:r>
+              <a:rPr lang="ko-KR" altLang="ko-KR" sz="1400" b="0" dirty="0" err="1">
+                <a:effectLst/>
+                <a:latin typeface="D2Coding" panose="020B0609020101020101" pitchFamily="49" charset="-127"/>
+                <a:ea typeface="D2Coding" panose="020B0609020101020101" pitchFamily="49" charset="-127"/>
+              </a:rPr>
+              <a:t>import</a:t>
+            </a:r>
+            <a:r>
+              <a:rPr lang="ko-KR" altLang="ko-KR" sz="1400" b="0" dirty="0">
+                <a:effectLst/>
+                <a:latin typeface="D2Coding" panose="020B0609020101020101" pitchFamily="49" charset="-127"/>
+                <a:ea typeface="D2Coding" panose="020B0609020101020101" pitchFamily="49" charset="-127"/>
+              </a:rPr>
+              <a:t> </a:t>
+            </a:r>
+            <a:r>
+              <a:rPr lang="ko-KR" altLang="ko-KR" sz="1400" b="0" dirty="0" err="1">
+                <a:effectLst/>
+                <a:latin typeface="D2Coding" panose="020B0609020101020101" pitchFamily="49" charset="-127"/>
+                <a:ea typeface="D2Coding" panose="020B0609020101020101" pitchFamily="49" charset="-127"/>
+              </a:rPr>
+              <a:t>numpy</a:t>
+            </a:r>
+            <a:r>
+              <a:rPr lang="ko-KR" altLang="ko-KR" sz="1400" b="0" dirty="0">
+                <a:effectLst/>
+                <a:latin typeface="D2Coding" panose="020B0609020101020101" pitchFamily="49" charset="-127"/>
+                <a:ea typeface="D2Coding" panose="020B0609020101020101" pitchFamily="49" charset="-127"/>
+              </a:rPr>
+              <a:t> </a:t>
+            </a:r>
+            <a:r>
+              <a:rPr lang="ko-KR" altLang="ko-KR" sz="1400" b="0" dirty="0" err="1">
+                <a:effectLst/>
+                <a:latin typeface="D2Coding" panose="020B0609020101020101" pitchFamily="49" charset="-127"/>
+                <a:ea typeface="D2Coding" panose="020B0609020101020101" pitchFamily="49" charset="-127"/>
+              </a:rPr>
+              <a:t>as</a:t>
+            </a:r>
+            <a:r>
+              <a:rPr lang="ko-KR" altLang="ko-KR" sz="1400" b="0" dirty="0">
+                <a:effectLst/>
+                <a:latin typeface="D2Coding" panose="020B0609020101020101" pitchFamily="49" charset="-127"/>
+                <a:ea typeface="D2Coding" panose="020B0609020101020101" pitchFamily="49" charset="-127"/>
+              </a:rPr>
+              <a:t> </a:t>
+            </a:r>
+            <a:r>
+              <a:rPr lang="ko-KR" altLang="ko-KR" sz="1400" b="0" dirty="0" err="1">
+                <a:effectLst/>
+                <a:latin typeface="D2Coding" panose="020B0609020101020101" pitchFamily="49" charset="-127"/>
+                <a:ea typeface="D2Coding" panose="020B0609020101020101" pitchFamily="49" charset="-127"/>
+              </a:rPr>
+              <a:t>np</a:t>
+            </a:r>
+            <a:endParaRPr lang="en-US" altLang="ko-KR" sz="1400" b="0" dirty="0">
+              <a:effectLst/>
+              <a:latin typeface="D2Coding" panose="020B0609020101020101" pitchFamily="49" charset="-127"/>
+              <a:ea typeface="D2Coding" panose="020B0609020101020101" pitchFamily="49" charset="-127"/>
+            </a:endParaRPr>
+          </a:p>
+          <a:p>
+            <a:pPr>
+              <a:buNone/>
+            </a:pPr>
+            <a:endParaRPr lang="en-US" altLang="ko-KR" sz="1400" b="0" dirty="0">
+              <a:effectLst/>
+              <a:latin typeface="D2Coding" panose="020B0609020101020101" pitchFamily="49" charset="-127"/>
+              <a:ea typeface="D2Coding" panose="020B0609020101020101" pitchFamily="49" charset="-127"/>
+            </a:endParaRPr>
+          </a:p>
+          <a:p>
+            <a:pPr>
+              <a:buNone/>
+            </a:pPr>
+            <a:r>
+              <a:rPr lang="ko-KR" altLang="ko-KR" sz="1400" dirty="0">
+                <a:latin typeface="D2Coding" panose="020B0609020101020101" pitchFamily="49" charset="-127"/>
+                <a:ea typeface="D2Coding" panose="020B0609020101020101" pitchFamily="49" charset="-127"/>
+              </a:rPr>
+              <a:t># 1. </a:t>
+            </a:r>
+            <a:r>
+              <a:rPr lang="ko-KR" altLang="ko-KR" sz="1400" dirty="0" err="1">
+                <a:latin typeface="D2Coding" panose="020B0609020101020101" pitchFamily="49" charset="-127"/>
+                <a:ea typeface="D2Coding" panose="020B0609020101020101" pitchFamily="49" charset="-127"/>
+              </a:rPr>
+              <a:t>소프트맥스</a:t>
+            </a:r>
+            <a:r>
+              <a:rPr lang="ko-KR" altLang="ko-KR" sz="1400" dirty="0">
+                <a:latin typeface="D2Coding" panose="020B0609020101020101" pitchFamily="49" charset="-127"/>
+                <a:ea typeface="D2Coding" panose="020B0609020101020101" pitchFamily="49" charset="-127"/>
+              </a:rPr>
+              <a:t>(</a:t>
+            </a:r>
+            <a:r>
+              <a:rPr lang="ko-KR" altLang="ko-KR" sz="1400" dirty="0" err="1">
+                <a:latin typeface="D2Coding" panose="020B0609020101020101" pitchFamily="49" charset="-127"/>
+                <a:ea typeface="D2Coding" panose="020B0609020101020101" pitchFamily="49" charset="-127"/>
+              </a:rPr>
+              <a:t>Softmax</a:t>
+            </a:r>
+            <a:r>
+              <a:rPr lang="ko-KR" altLang="ko-KR" sz="1400" dirty="0">
+                <a:latin typeface="D2Coding" panose="020B0609020101020101" pitchFamily="49" charset="-127"/>
+                <a:ea typeface="D2Coding" panose="020B0609020101020101" pitchFamily="49" charset="-127"/>
+              </a:rPr>
+              <a:t>) 함수 구현</a:t>
+            </a:r>
+            <a:endParaRPr lang="ko-KR" altLang="ko-KR" sz="1400" b="0" dirty="0">
+              <a:effectLst/>
+              <a:latin typeface="D2Coding" panose="020B0609020101020101" pitchFamily="49" charset="-127"/>
+              <a:ea typeface="D2Coding" panose="020B0609020101020101" pitchFamily="49" charset="-127"/>
+            </a:endParaRPr>
+          </a:p>
+          <a:p>
+            <a:r>
+              <a:rPr lang="ko-KR" altLang="ko-KR" sz="1400" b="0" dirty="0" err="1">
+                <a:effectLst/>
+                <a:latin typeface="D2Coding" panose="020B0609020101020101" pitchFamily="49" charset="-127"/>
+                <a:ea typeface="D2Coding" panose="020B0609020101020101" pitchFamily="49" charset="-127"/>
+              </a:rPr>
+              <a:t>def</a:t>
+            </a:r>
+            <a:r>
+              <a:rPr lang="ko-KR" altLang="ko-KR" sz="1400" b="0" dirty="0">
+                <a:effectLst/>
+                <a:latin typeface="D2Coding" panose="020B0609020101020101" pitchFamily="49" charset="-127"/>
+                <a:ea typeface="D2Coding" panose="020B0609020101020101" pitchFamily="49" charset="-127"/>
+              </a:rPr>
+              <a:t> </a:t>
+            </a:r>
+            <a:r>
+              <a:rPr lang="ko-KR" altLang="ko-KR" sz="1400" b="0" dirty="0" err="1">
+                <a:effectLst/>
+                <a:latin typeface="D2Coding" panose="020B0609020101020101" pitchFamily="49" charset="-127"/>
+                <a:ea typeface="D2Coding" panose="020B0609020101020101" pitchFamily="49" charset="-127"/>
+              </a:rPr>
+              <a:t>softmax</a:t>
+            </a:r>
+            <a:r>
+              <a:rPr lang="ko-KR" altLang="ko-KR" sz="1400" b="0" dirty="0">
+                <a:effectLst/>
+                <a:latin typeface="D2Coding" panose="020B0609020101020101" pitchFamily="49" charset="-127"/>
+                <a:ea typeface="D2Coding" panose="020B0609020101020101" pitchFamily="49" charset="-127"/>
+              </a:rPr>
+              <a:t>(</a:t>
+            </a:r>
+            <a:r>
+              <a:rPr lang="ko-KR" altLang="ko-KR" sz="1400" b="0" dirty="0" err="1">
+                <a:effectLst/>
+                <a:latin typeface="D2Coding" panose="020B0609020101020101" pitchFamily="49" charset="-127"/>
+                <a:ea typeface="D2Coding" panose="020B0609020101020101" pitchFamily="49" charset="-127"/>
+              </a:rPr>
+              <a:t>x</a:t>
+            </a:r>
+            <a:r>
+              <a:rPr lang="ko-KR" altLang="ko-KR" sz="1400" b="0" dirty="0">
+                <a:effectLst/>
+                <a:latin typeface="D2Coding" panose="020B0609020101020101" pitchFamily="49" charset="-127"/>
+                <a:ea typeface="D2Coding" panose="020B0609020101020101" pitchFamily="49" charset="-127"/>
+              </a:rPr>
+              <a:t>):</a:t>
+            </a:r>
+          </a:p>
+          <a:p>
+            <a:pPr>
+              <a:buNone/>
+            </a:pPr>
+            <a:r>
+              <a:rPr lang="ko-KR" altLang="ko-KR" sz="1400" b="0" dirty="0">
+                <a:effectLst/>
+                <a:latin typeface="D2Coding" panose="020B0609020101020101" pitchFamily="49" charset="-127"/>
+                <a:ea typeface="D2Coding" panose="020B0609020101020101" pitchFamily="49" charset="-127"/>
+              </a:rPr>
+              <a:t>    # </a:t>
+            </a:r>
+            <a:r>
+              <a:rPr lang="ko-KR" altLang="ko-KR" sz="1400" b="0" dirty="0" err="1">
+                <a:effectLst/>
+                <a:latin typeface="D2Coding" panose="020B0609020101020101" pitchFamily="49" charset="-127"/>
+                <a:ea typeface="D2Coding" panose="020B0609020101020101" pitchFamily="49" charset="-127"/>
+              </a:rPr>
+              <a:t>오버플로우</a:t>
+            </a:r>
+            <a:r>
+              <a:rPr lang="ko-KR" altLang="ko-KR" sz="1400" b="0" dirty="0">
+                <a:effectLst/>
+                <a:latin typeface="D2Coding" panose="020B0609020101020101" pitchFamily="49" charset="-127"/>
+                <a:ea typeface="D2Coding" panose="020B0609020101020101" pitchFamily="49" charset="-127"/>
+              </a:rPr>
+              <a:t> 방지를 위해 최댓값을 </a:t>
+            </a:r>
+            <a:r>
+              <a:rPr lang="ko-KR" altLang="ko-KR" sz="1400" b="0" dirty="0" err="1">
+                <a:effectLst/>
+                <a:latin typeface="D2Coding" panose="020B0609020101020101" pitchFamily="49" charset="-127"/>
+                <a:ea typeface="D2Coding" panose="020B0609020101020101" pitchFamily="49" charset="-127"/>
+              </a:rPr>
+              <a:t>빼주는</a:t>
+            </a:r>
+            <a:r>
+              <a:rPr lang="ko-KR" altLang="ko-KR" sz="1400" b="0" dirty="0">
+                <a:effectLst/>
+                <a:latin typeface="D2Coding" panose="020B0609020101020101" pitchFamily="49" charset="-127"/>
+                <a:ea typeface="D2Coding" panose="020B0609020101020101" pitchFamily="49" charset="-127"/>
+              </a:rPr>
+              <a:t> 안정적인 </a:t>
+            </a:r>
+            <a:r>
+              <a:rPr lang="ko-KR" altLang="ko-KR" sz="1400" b="0" dirty="0" err="1">
+                <a:effectLst/>
+                <a:latin typeface="D2Coding" panose="020B0609020101020101" pitchFamily="49" charset="-127"/>
+                <a:ea typeface="D2Coding" panose="020B0609020101020101" pitchFamily="49" charset="-127"/>
+              </a:rPr>
+              <a:t>소프트맥스</a:t>
+            </a:r>
+            <a:endParaRPr lang="ko-KR" altLang="ko-KR" sz="1400" b="0" dirty="0">
+              <a:effectLst/>
+              <a:latin typeface="D2Coding" panose="020B0609020101020101" pitchFamily="49" charset="-127"/>
+              <a:ea typeface="D2Coding" panose="020B0609020101020101" pitchFamily="49" charset="-127"/>
+            </a:endParaRPr>
+          </a:p>
+          <a:p>
+            <a:pPr>
+              <a:buNone/>
+            </a:pPr>
+            <a:r>
+              <a:rPr lang="ko-KR" altLang="ko-KR" sz="1400" b="0" dirty="0">
+                <a:effectLst/>
+                <a:latin typeface="D2Coding" panose="020B0609020101020101" pitchFamily="49" charset="-127"/>
+                <a:ea typeface="D2Coding" panose="020B0609020101020101" pitchFamily="49" charset="-127"/>
+              </a:rPr>
+              <a:t>    </a:t>
+            </a:r>
+            <a:r>
+              <a:rPr lang="ko-KR" altLang="ko-KR" sz="1400" b="0" dirty="0" err="1">
+                <a:effectLst/>
+                <a:latin typeface="D2Coding" panose="020B0609020101020101" pitchFamily="49" charset="-127"/>
+                <a:ea typeface="D2Coding" panose="020B0609020101020101" pitchFamily="49" charset="-127"/>
+              </a:rPr>
+              <a:t>e_x</a:t>
+            </a:r>
+            <a:r>
+              <a:rPr lang="ko-KR" altLang="ko-KR" sz="1400" b="0" dirty="0">
+                <a:effectLst/>
+                <a:latin typeface="D2Coding" panose="020B0609020101020101" pitchFamily="49" charset="-127"/>
+                <a:ea typeface="D2Coding" panose="020B0609020101020101" pitchFamily="49" charset="-127"/>
+              </a:rPr>
+              <a:t> = </a:t>
+            </a:r>
+            <a:r>
+              <a:rPr lang="ko-KR" altLang="ko-KR" sz="1400" b="0" dirty="0" err="1">
+                <a:effectLst/>
+                <a:latin typeface="D2Coding" panose="020B0609020101020101" pitchFamily="49" charset="-127"/>
+                <a:ea typeface="D2Coding" panose="020B0609020101020101" pitchFamily="49" charset="-127"/>
+              </a:rPr>
+              <a:t>np.exp</a:t>
+            </a:r>
+            <a:r>
+              <a:rPr lang="ko-KR" altLang="ko-KR" sz="1400" b="0" dirty="0">
+                <a:effectLst/>
+                <a:latin typeface="D2Coding" panose="020B0609020101020101" pitchFamily="49" charset="-127"/>
+                <a:ea typeface="D2Coding" panose="020B0609020101020101" pitchFamily="49" charset="-127"/>
+              </a:rPr>
+              <a:t>(</a:t>
+            </a:r>
+            <a:r>
+              <a:rPr lang="ko-KR" altLang="ko-KR" sz="1400" b="0" dirty="0" err="1">
+                <a:effectLst/>
+                <a:latin typeface="D2Coding" panose="020B0609020101020101" pitchFamily="49" charset="-127"/>
+                <a:ea typeface="D2Coding" panose="020B0609020101020101" pitchFamily="49" charset="-127"/>
+              </a:rPr>
+              <a:t>x</a:t>
+            </a:r>
+            <a:r>
+              <a:rPr lang="ko-KR" altLang="ko-KR" sz="1400" b="0" dirty="0">
+                <a:effectLst/>
+                <a:latin typeface="D2Coding" panose="020B0609020101020101" pitchFamily="49" charset="-127"/>
+                <a:ea typeface="D2Coding" panose="020B0609020101020101" pitchFamily="49" charset="-127"/>
+              </a:rPr>
+              <a:t> - </a:t>
+            </a:r>
+            <a:r>
+              <a:rPr lang="ko-KR" altLang="ko-KR" sz="1400" b="0" dirty="0" err="1">
+                <a:effectLst/>
+                <a:latin typeface="D2Coding" panose="020B0609020101020101" pitchFamily="49" charset="-127"/>
+                <a:ea typeface="D2Coding" panose="020B0609020101020101" pitchFamily="49" charset="-127"/>
+              </a:rPr>
+              <a:t>np.max</a:t>
+            </a:r>
+            <a:r>
+              <a:rPr lang="ko-KR" altLang="ko-KR" sz="1400" b="0" dirty="0">
+                <a:effectLst/>
+                <a:latin typeface="D2Coding" panose="020B0609020101020101" pitchFamily="49" charset="-127"/>
+                <a:ea typeface="D2Coding" panose="020B0609020101020101" pitchFamily="49" charset="-127"/>
+              </a:rPr>
+              <a:t>(</a:t>
+            </a:r>
+            <a:r>
+              <a:rPr lang="ko-KR" altLang="ko-KR" sz="1400" b="0" dirty="0" err="1">
+                <a:effectLst/>
+                <a:latin typeface="D2Coding" panose="020B0609020101020101" pitchFamily="49" charset="-127"/>
+                <a:ea typeface="D2Coding" panose="020B0609020101020101" pitchFamily="49" charset="-127"/>
+              </a:rPr>
+              <a:t>x</a:t>
+            </a:r>
+            <a:r>
+              <a:rPr lang="ko-KR" altLang="ko-KR" sz="1400" b="0" dirty="0">
+                <a:effectLst/>
+                <a:latin typeface="D2Coding" panose="020B0609020101020101" pitchFamily="49" charset="-127"/>
+                <a:ea typeface="D2Coding" panose="020B0609020101020101" pitchFamily="49" charset="-127"/>
+              </a:rPr>
+              <a:t>))</a:t>
+            </a:r>
+          </a:p>
+          <a:p>
+            <a:pPr>
+              <a:buNone/>
+            </a:pPr>
+            <a:r>
+              <a:rPr lang="ko-KR" altLang="ko-KR" sz="1400" b="0" dirty="0">
+                <a:effectLst/>
+                <a:latin typeface="D2Coding" panose="020B0609020101020101" pitchFamily="49" charset="-127"/>
+                <a:ea typeface="D2Coding" panose="020B0609020101020101" pitchFamily="49" charset="-127"/>
+              </a:rPr>
+              <a:t>    </a:t>
+            </a:r>
+            <a:r>
+              <a:rPr lang="ko-KR" altLang="ko-KR" sz="1400" b="0" dirty="0" err="1">
+                <a:effectLst/>
+                <a:latin typeface="D2Coding" panose="020B0609020101020101" pitchFamily="49" charset="-127"/>
+                <a:ea typeface="D2Coding" panose="020B0609020101020101" pitchFamily="49" charset="-127"/>
+              </a:rPr>
+              <a:t>return</a:t>
+            </a:r>
+            <a:r>
+              <a:rPr lang="ko-KR" altLang="ko-KR" sz="1400" b="0" dirty="0">
+                <a:effectLst/>
+                <a:latin typeface="D2Coding" panose="020B0609020101020101" pitchFamily="49" charset="-127"/>
+                <a:ea typeface="D2Coding" panose="020B0609020101020101" pitchFamily="49" charset="-127"/>
+              </a:rPr>
+              <a:t> </a:t>
+            </a:r>
+            <a:r>
+              <a:rPr lang="ko-KR" altLang="ko-KR" sz="1400" b="0" dirty="0" err="1">
+                <a:effectLst/>
+                <a:latin typeface="D2Coding" panose="020B0609020101020101" pitchFamily="49" charset="-127"/>
+                <a:ea typeface="D2Coding" panose="020B0609020101020101" pitchFamily="49" charset="-127"/>
+              </a:rPr>
+              <a:t>e_x</a:t>
+            </a:r>
+            <a:r>
+              <a:rPr lang="ko-KR" altLang="ko-KR" sz="1400" b="0" dirty="0">
+                <a:effectLst/>
+                <a:latin typeface="D2Coding" panose="020B0609020101020101" pitchFamily="49" charset="-127"/>
+                <a:ea typeface="D2Coding" panose="020B0609020101020101" pitchFamily="49" charset="-127"/>
+              </a:rPr>
+              <a:t> / </a:t>
+            </a:r>
+            <a:r>
+              <a:rPr lang="ko-KR" altLang="ko-KR" sz="1400" b="0" dirty="0" err="1">
+                <a:effectLst/>
+                <a:latin typeface="D2Coding" panose="020B0609020101020101" pitchFamily="49" charset="-127"/>
+                <a:ea typeface="D2Coding" panose="020B0609020101020101" pitchFamily="49" charset="-127"/>
+              </a:rPr>
+              <a:t>e_x.sum</a:t>
+            </a:r>
+            <a:r>
+              <a:rPr lang="ko-KR" altLang="ko-KR" sz="1400" b="0" dirty="0">
+                <a:effectLst/>
+                <a:latin typeface="D2Coding" panose="020B0609020101020101" pitchFamily="49" charset="-127"/>
+                <a:ea typeface="D2Coding" panose="020B0609020101020101" pitchFamily="49" charset="-127"/>
+              </a:rPr>
+              <a:t>(</a:t>
+            </a:r>
+            <a:r>
+              <a:rPr lang="ko-KR" altLang="ko-KR" sz="1400" b="0" dirty="0" err="1">
+                <a:effectLst/>
+                <a:latin typeface="D2Coding" panose="020B0609020101020101" pitchFamily="49" charset="-127"/>
+                <a:ea typeface="D2Coding" panose="020B0609020101020101" pitchFamily="49" charset="-127"/>
+              </a:rPr>
+              <a:t>axis</a:t>
+            </a:r>
+            <a:r>
+              <a:rPr lang="ko-KR" altLang="ko-KR" sz="1400" b="0" dirty="0">
+                <a:effectLst/>
+                <a:latin typeface="D2Coding" panose="020B0609020101020101" pitchFamily="49" charset="-127"/>
+                <a:ea typeface="D2Coding" panose="020B0609020101020101" pitchFamily="49" charset="-127"/>
+              </a:rPr>
+              <a:t>=0)</a:t>
+            </a:r>
+            <a:endParaRPr lang="en-US" altLang="ko-KR" sz="1400" b="0" dirty="0">
+              <a:effectLst/>
+              <a:latin typeface="D2Coding" panose="020B0609020101020101" pitchFamily="49" charset="-127"/>
+              <a:ea typeface="D2Coding" panose="020B0609020101020101" pitchFamily="49" charset="-127"/>
+            </a:endParaRPr>
+          </a:p>
+          <a:p>
+            <a:pPr>
+              <a:buNone/>
+            </a:pPr>
+            <a:endParaRPr lang="en-US" altLang="ko-KR" sz="1400" b="0" dirty="0">
+              <a:effectLst/>
+              <a:latin typeface="D2Coding" panose="020B0609020101020101" pitchFamily="49" charset="-127"/>
+              <a:ea typeface="D2Coding" panose="020B0609020101020101" pitchFamily="49" charset="-127"/>
+            </a:endParaRPr>
+          </a:p>
+          <a:p>
+            <a:pPr>
+              <a:buNone/>
+            </a:pPr>
+            <a:r>
+              <a:rPr lang="ko-KR" altLang="ko-KR" sz="1400" dirty="0">
+                <a:latin typeface="D2Coding" panose="020B0609020101020101" pitchFamily="49" charset="-127"/>
+                <a:ea typeface="D2Coding" panose="020B0609020101020101" pitchFamily="49" charset="-127"/>
+              </a:rPr>
+              <a:t># 2. 점수(</a:t>
+            </a:r>
+            <a:r>
+              <a:rPr lang="ko-KR" altLang="ko-KR" sz="1400" dirty="0" err="1">
+                <a:latin typeface="D2Coding" panose="020B0609020101020101" pitchFamily="49" charset="-127"/>
+                <a:ea typeface="D2Coding" panose="020B0609020101020101" pitchFamily="49" charset="-127"/>
+              </a:rPr>
+              <a:t>Score</a:t>
+            </a:r>
+            <a:r>
+              <a:rPr lang="ko-KR" altLang="ko-KR" sz="1400" dirty="0">
+                <a:latin typeface="D2Coding" panose="020B0609020101020101" pitchFamily="49" charset="-127"/>
+                <a:ea typeface="D2Coding" panose="020B0609020101020101" pitchFamily="49" charset="-127"/>
+              </a:rPr>
+              <a:t>) 함수 구현: 여기서는 가장 널리 쓰이는 '내적(</a:t>
+            </a:r>
+            <a:r>
+              <a:rPr lang="ko-KR" altLang="ko-KR" sz="1400" dirty="0" err="1">
+                <a:latin typeface="D2Coding" panose="020B0609020101020101" pitchFamily="49" charset="-127"/>
+                <a:ea typeface="D2Coding" panose="020B0609020101020101" pitchFamily="49" charset="-127"/>
+              </a:rPr>
+              <a:t>Dot</a:t>
+            </a:r>
+            <a:r>
+              <a:rPr lang="ko-KR" altLang="ko-KR" sz="1400" dirty="0">
+                <a:latin typeface="D2Coding" panose="020B0609020101020101" pitchFamily="49" charset="-127"/>
+                <a:ea typeface="D2Coding" panose="020B0609020101020101" pitchFamily="49" charset="-127"/>
+              </a:rPr>
+              <a:t> </a:t>
+            </a:r>
+            <a:r>
+              <a:rPr lang="ko-KR" altLang="ko-KR" sz="1400" dirty="0" err="1">
+                <a:latin typeface="D2Coding" panose="020B0609020101020101" pitchFamily="49" charset="-127"/>
+                <a:ea typeface="D2Coding" panose="020B0609020101020101" pitchFamily="49" charset="-127"/>
+              </a:rPr>
+              <a:t>Product</a:t>
+            </a:r>
+            <a:r>
+              <a:rPr lang="ko-KR" altLang="ko-KR" sz="1400" dirty="0">
+                <a:latin typeface="D2Coding" panose="020B0609020101020101" pitchFamily="49" charset="-127"/>
+                <a:ea typeface="D2Coding" panose="020B0609020101020101" pitchFamily="49" charset="-127"/>
+              </a:rPr>
+              <a:t>)’</a:t>
+            </a:r>
+            <a:endParaRPr lang="ko-KR" altLang="ko-KR" sz="1400" b="0" dirty="0">
+              <a:effectLst/>
+              <a:latin typeface="D2Coding" panose="020B0609020101020101" pitchFamily="49" charset="-127"/>
+              <a:ea typeface="D2Coding" panose="020B0609020101020101" pitchFamily="49" charset="-127"/>
+            </a:endParaRPr>
+          </a:p>
+          <a:p>
+            <a:r>
+              <a:rPr lang="ko-KR" altLang="ko-KR" sz="1400" b="0" dirty="0" err="1">
+                <a:effectLst/>
+                <a:latin typeface="D2Coding" panose="020B0609020101020101" pitchFamily="49" charset="-127"/>
+                <a:ea typeface="D2Coding" panose="020B0609020101020101" pitchFamily="49" charset="-127"/>
+              </a:rPr>
+              <a:t>def</a:t>
+            </a:r>
+            <a:r>
+              <a:rPr lang="ko-KR" altLang="ko-KR" sz="1400" b="0" dirty="0">
+                <a:effectLst/>
+                <a:latin typeface="D2Coding" panose="020B0609020101020101" pitchFamily="49" charset="-127"/>
+                <a:ea typeface="D2Coding" panose="020B0609020101020101" pitchFamily="49" charset="-127"/>
+              </a:rPr>
+              <a:t> </a:t>
+            </a:r>
+            <a:r>
+              <a:rPr lang="ko-KR" altLang="ko-KR" sz="1400" b="0" dirty="0" err="1">
+                <a:effectLst/>
+                <a:latin typeface="D2Coding" panose="020B0609020101020101" pitchFamily="49" charset="-127"/>
+                <a:ea typeface="D2Coding" panose="020B0609020101020101" pitchFamily="49" charset="-127"/>
+              </a:rPr>
+              <a:t>score</a:t>
+            </a:r>
+            <a:r>
+              <a:rPr lang="ko-KR" altLang="ko-KR" sz="1400" b="0" dirty="0">
+                <a:effectLst/>
+                <a:latin typeface="D2Coding" panose="020B0609020101020101" pitchFamily="49" charset="-127"/>
+                <a:ea typeface="D2Coding" panose="020B0609020101020101" pitchFamily="49" charset="-127"/>
+              </a:rPr>
+              <a:t>(</a:t>
+            </a:r>
+            <a:r>
+              <a:rPr lang="ko-KR" altLang="ko-KR" sz="1400" b="0" dirty="0" err="1">
+                <a:effectLst/>
+                <a:latin typeface="D2Coding" panose="020B0609020101020101" pitchFamily="49" charset="-127"/>
+                <a:ea typeface="D2Coding" panose="020B0609020101020101" pitchFamily="49" charset="-127"/>
+              </a:rPr>
+              <a:t>target</a:t>
+            </a:r>
+            <a:r>
+              <a:rPr lang="ko-KR" altLang="ko-KR" sz="1400" b="0" dirty="0">
+                <a:effectLst/>
+                <a:latin typeface="D2Coding" panose="020B0609020101020101" pitchFamily="49" charset="-127"/>
+                <a:ea typeface="D2Coding" panose="020B0609020101020101" pitchFamily="49" charset="-127"/>
+              </a:rPr>
+              <a:t>, </a:t>
+            </a:r>
+            <a:r>
+              <a:rPr lang="ko-KR" altLang="ko-KR" sz="1400" b="0" dirty="0" err="1">
+                <a:effectLst/>
+                <a:latin typeface="D2Coding" panose="020B0609020101020101" pitchFamily="49" charset="-127"/>
+                <a:ea typeface="D2Coding" panose="020B0609020101020101" pitchFamily="49" charset="-127"/>
+              </a:rPr>
+              <a:t>source</a:t>
+            </a:r>
+            <a:r>
+              <a:rPr lang="ko-KR" altLang="ko-KR" sz="1400" b="0" dirty="0">
+                <a:effectLst/>
+                <a:latin typeface="D2Coding" panose="020B0609020101020101" pitchFamily="49" charset="-127"/>
+                <a:ea typeface="D2Coding" panose="020B0609020101020101" pitchFamily="49" charset="-127"/>
+              </a:rPr>
+              <a:t>):</a:t>
+            </a:r>
+          </a:p>
+          <a:p>
+            <a:pPr>
+              <a:buNone/>
+            </a:pPr>
+            <a:r>
+              <a:rPr lang="ko-KR" altLang="ko-KR" sz="1400" b="0" dirty="0">
+                <a:effectLst/>
+                <a:latin typeface="D2Coding" panose="020B0609020101020101" pitchFamily="49" charset="-127"/>
+                <a:ea typeface="D2Coding" panose="020B0609020101020101" pitchFamily="49" charset="-127"/>
+              </a:rPr>
+              <a:t>    </a:t>
+            </a:r>
+            <a:r>
+              <a:rPr lang="ko-KR" altLang="ko-KR" sz="1400" b="0" dirty="0" err="1">
+                <a:effectLst/>
+                <a:latin typeface="D2Coding" panose="020B0609020101020101" pitchFamily="49" charset="-127"/>
+                <a:ea typeface="D2Coding" panose="020B0609020101020101" pitchFamily="49" charset="-127"/>
+              </a:rPr>
+              <a:t>return</a:t>
+            </a:r>
+            <a:r>
+              <a:rPr lang="ko-KR" altLang="ko-KR" sz="1400" b="0" dirty="0">
+                <a:effectLst/>
+                <a:latin typeface="D2Coding" panose="020B0609020101020101" pitchFamily="49" charset="-127"/>
+                <a:ea typeface="D2Coding" panose="020B0609020101020101" pitchFamily="49" charset="-127"/>
+              </a:rPr>
+              <a:t> </a:t>
+            </a:r>
+            <a:r>
+              <a:rPr lang="ko-KR" altLang="ko-KR" sz="1400" b="0" dirty="0" err="1">
+                <a:effectLst/>
+                <a:latin typeface="D2Coding" panose="020B0609020101020101" pitchFamily="49" charset="-127"/>
+                <a:ea typeface="D2Coding" panose="020B0609020101020101" pitchFamily="49" charset="-127"/>
+              </a:rPr>
+              <a:t>np.dot</a:t>
+            </a:r>
+            <a:r>
+              <a:rPr lang="ko-KR" altLang="ko-KR" sz="1400" b="0" dirty="0">
+                <a:effectLst/>
+                <a:latin typeface="D2Coding" panose="020B0609020101020101" pitchFamily="49" charset="-127"/>
+                <a:ea typeface="D2Coding" panose="020B0609020101020101" pitchFamily="49" charset="-127"/>
+              </a:rPr>
+              <a:t>(</a:t>
+            </a:r>
+            <a:r>
+              <a:rPr lang="ko-KR" altLang="ko-KR" sz="1400" b="0" dirty="0" err="1">
+                <a:effectLst/>
+                <a:latin typeface="D2Coding" panose="020B0609020101020101" pitchFamily="49" charset="-127"/>
+                <a:ea typeface="D2Coding" panose="020B0609020101020101" pitchFamily="49" charset="-127"/>
+              </a:rPr>
+              <a:t>target</a:t>
+            </a:r>
+            <a:r>
+              <a:rPr lang="ko-KR" altLang="ko-KR" sz="1400" b="0" dirty="0">
+                <a:effectLst/>
+                <a:latin typeface="D2Coding" panose="020B0609020101020101" pitchFamily="49" charset="-127"/>
+                <a:ea typeface="D2Coding" panose="020B0609020101020101" pitchFamily="49" charset="-127"/>
+              </a:rPr>
+              <a:t>, </a:t>
+            </a:r>
+            <a:r>
+              <a:rPr lang="ko-KR" altLang="ko-KR" sz="1400" b="0" dirty="0" err="1">
+                <a:effectLst/>
+                <a:latin typeface="D2Coding" panose="020B0609020101020101" pitchFamily="49" charset="-127"/>
+                <a:ea typeface="D2Coding" panose="020B0609020101020101" pitchFamily="49" charset="-127"/>
+              </a:rPr>
+              <a:t>source</a:t>
+            </a:r>
+            <a:r>
+              <a:rPr lang="ko-KR" altLang="ko-KR" sz="1400" b="0" dirty="0">
+                <a:effectLst/>
+                <a:latin typeface="D2Coding" panose="020B0609020101020101" pitchFamily="49" charset="-127"/>
+                <a:ea typeface="D2Coding" panose="020B0609020101020101" pitchFamily="49" charset="-127"/>
+              </a:rPr>
+              <a:t>)</a:t>
+            </a:r>
+            <a:endParaRPr lang="en-US" altLang="ko-KR" sz="1400" b="0" dirty="0">
+              <a:effectLst/>
+              <a:latin typeface="D2Coding" panose="020B0609020101020101" pitchFamily="49" charset="-127"/>
+              <a:ea typeface="D2Coding" panose="020B0609020101020101" pitchFamily="49" charset="-127"/>
+            </a:endParaRPr>
+          </a:p>
+          <a:p>
+            <a:pPr>
+              <a:buNone/>
+            </a:pPr>
+            <a:endParaRPr lang="ko-KR" altLang="ko-KR" sz="1400" b="0" dirty="0">
+              <a:effectLst/>
+              <a:latin typeface="D2Coding" panose="020B0609020101020101" pitchFamily="49" charset="-127"/>
+              <a:ea typeface="D2Coding" panose="020B0609020101020101" pitchFamily="49" charset="-127"/>
+            </a:endParaRPr>
+          </a:p>
+          <a:p>
+            <a:pPr>
+              <a:buNone/>
+            </a:pPr>
+            <a:r>
+              <a:rPr lang="ko-KR" altLang="ko-KR" sz="1400" b="0" dirty="0">
+                <a:effectLst/>
+                <a:latin typeface="D2Coding" panose="020B0609020101020101" pitchFamily="49" charset="-127"/>
+                <a:ea typeface="D2Coding" panose="020B0609020101020101" pitchFamily="49" charset="-127"/>
+              </a:rPr>
+              <a:t># </a:t>
+            </a:r>
+            <a:r>
+              <a:rPr lang="ko-KR" altLang="ko-KR" sz="1400" dirty="0">
+                <a:latin typeface="D2Coding" panose="020B0609020101020101" pitchFamily="49" charset="-127"/>
+                <a:ea typeface="D2Coding" panose="020B0609020101020101" pitchFamily="49" charset="-127"/>
+              </a:rPr>
+              <a:t>4차원 단어 </a:t>
+            </a:r>
+            <a:r>
+              <a:rPr lang="ko-KR" altLang="ko-KR" sz="1400" dirty="0" err="1">
+                <a:latin typeface="D2Coding" panose="020B0609020101020101" pitchFamily="49" charset="-127"/>
+                <a:ea typeface="D2Coding" panose="020B0609020101020101" pitchFamily="49" charset="-127"/>
+              </a:rPr>
+              <a:t>임베딩</a:t>
+            </a:r>
+            <a:r>
+              <a:rPr lang="ko-KR" altLang="ko-KR" sz="1400" dirty="0">
+                <a:latin typeface="D2Coding" panose="020B0609020101020101" pitchFamily="49" charset="-127"/>
+                <a:ea typeface="D2Coding" panose="020B0609020101020101" pitchFamily="49" charset="-127"/>
+              </a:rPr>
+              <a:t> 벡터</a:t>
+            </a:r>
+            <a:r>
+              <a:rPr lang="en-US" altLang="ko-KR" sz="1400" dirty="0">
+                <a:latin typeface="D2Coding" panose="020B0609020101020101" pitchFamily="49" charset="-127"/>
+                <a:ea typeface="D2Coding" panose="020B0609020101020101" pitchFamily="49" charset="-127"/>
+              </a:rPr>
+              <a:t>, </a:t>
+            </a:r>
+            <a:r>
+              <a:rPr lang="ko-KR" altLang="ko-KR" sz="1400" b="0" dirty="0">
+                <a:effectLst/>
+                <a:latin typeface="D2Coding" panose="020B0609020101020101" pitchFamily="49" charset="-127"/>
+                <a:ea typeface="D2Coding" panose="020B0609020101020101" pitchFamily="49" charset="-127"/>
+              </a:rPr>
+              <a:t>소스 단어들 (스페인어 원문 벡터 리스트)</a:t>
+            </a:r>
+            <a:r>
+              <a:rPr lang="en-US" altLang="ko-KR" sz="1400" b="0" dirty="0">
+                <a:effectLst/>
+                <a:latin typeface="D2Coding" panose="020B0609020101020101" pitchFamily="49" charset="-127"/>
+                <a:ea typeface="D2Coding" panose="020B0609020101020101" pitchFamily="49" charset="-127"/>
+              </a:rPr>
+              <a:t>, </a:t>
+            </a:r>
+            <a:r>
+              <a:rPr lang="ko-KR" altLang="ko-KR" sz="1400" b="0" dirty="0">
+                <a:effectLst/>
+                <a:latin typeface="D2Coding" panose="020B0609020101020101" pitchFamily="49" charset="-127"/>
+                <a:ea typeface="D2Coding" panose="020B0609020101020101" pitchFamily="49" charset="-127"/>
+              </a:rPr>
+              <a:t># 예: ["</a:t>
+            </a:r>
+            <a:r>
+              <a:rPr lang="ko-KR" altLang="ko-KR" sz="1400" b="0" dirty="0" err="1">
+                <a:effectLst/>
+                <a:latin typeface="D2Coding" panose="020B0609020101020101" pitchFamily="49" charset="-127"/>
+                <a:ea typeface="D2Coding" panose="020B0609020101020101" pitchFamily="49" charset="-127"/>
+              </a:rPr>
+              <a:t>Te</a:t>
+            </a:r>
+            <a:r>
+              <a:rPr lang="ko-KR" altLang="ko-KR" sz="1400" b="0" dirty="0">
+                <a:effectLst/>
+                <a:latin typeface="D2Coding" panose="020B0609020101020101" pitchFamily="49" charset="-127"/>
+                <a:ea typeface="D2Coding" panose="020B0609020101020101" pitchFamily="49" charset="-127"/>
+              </a:rPr>
+              <a:t>", "</a:t>
+            </a:r>
+            <a:r>
+              <a:rPr lang="ko-KR" altLang="ko-KR" sz="1400" b="0" dirty="0" err="1">
+                <a:effectLst/>
+                <a:latin typeface="D2Coding" panose="020B0609020101020101" pitchFamily="49" charset="-127"/>
+                <a:ea typeface="D2Coding" panose="020B0609020101020101" pitchFamily="49" charset="-127"/>
+              </a:rPr>
+              <a:t>traeré</a:t>
+            </a:r>
+            <a:r>
+              <a:rPr lang="ko-KR" altLang="ko-KR" sz="1400" b="0" dirty="0">
+                <a:effectLst/>
+                <a:latin typeface="D2Coding" panose="020B0609020101020101" pitchFamily="49" charset="-127"/>
+                <a:ea typeface="D2Coding" panose="020B0609020101020101" pitchFamily="49" charset="-127"/>
+              </a:rPr>
+              <a:t>", "</a:t>
+            </a:r>
+            <a:r>
+              <a:rPr lang="ko-KR" altLang="ko-KR" sz="1400" b="0" dirty="0" err="1">
+                <a:effectLst/>
+                <a:latin typeface="D2Coding" panose="020B0609020101020101" pitchFamily="49" charset="-127"/>
+                <a:ea typeface="D2Coding" panose="020B0609020101020101" pitchFamily="49" charset="-127"/>
+              </a:rPr>
+              <a:t>la</a:t>
+            </a:r>
+            <a:r>
+              <a:rPr lang="ko-KR" altLang="ko-KR" sz="1400" b="0" dirty="0">
+                <a:effectLst/>
+                <a:latin typeface="D2Coding" panose="020B0609020101020101" pitchFamily="49" charset="-127"/>
+                <a:ea typeface="D2Coding" panose="020B0609020101020101" pitchFamily="49" charset="-127"/>
+              </a:rPr>
+              <a:t>", "</a:t>
+            </a:r>
+            <a:r>
+              <a:rPr lang="ko-KR" altLang="ko-KR" sz="1400" b="0" dirty="0" err="1">
+                <a:effectLst/>
+                <a:latin typeface="D2Coding" panose="020B0609020101020101" pitchFamily="49" charset="-127"/>
+                <a:ea typeface="D2Coding" panose="020B0609020101020101" pitchFamily="49" charset="-127"/>
+              </a:rPr>
+              <a:t>bolsa</a:t>
+            </a:r>
+            <a:r>
+              <a:rPr lang="ko-KR" altLang="ko-KR" sz="1400" b="0" dirty="0">
+                <a:effectLst/>
+                <a:latin typeface="D2Coding" panose="020B0609020101020101" pitchFamily="49" charset="-127"/>
+                <a:ea typeface="D2Coding" panose="020B0609020101020101" pitchFamily="49" charset="-127"/>
+              </a:rPr>
+              <a:t>"]</a:t>
+            </a:r>
+          </a:p>
+          <a:p>
+            <a:pPr>
+              <a:buNone/>
+            </a:pPr>
+            <a:r>
+              <a:rPr lang="ko-KR" altLang="ko-KR" sz="1400" b="0" dirty="0" err="1">
+                <a:effectLst/>
+                <a:latin typeface="D2Coding" panose="020B0609020101020101" pitchFamily="49" charset="-127"/>
+                <a:ea typeface="D2Coding" panose="020B0609020101020101" pitchFamily="49" charset="-127"/>
+              </a:rPr>
+              <a:t>sources</a:t>
+            </a:r>
+            <a:r>
+              <a:rPr lang="ko-KR" altLang="ko-KR" sz="1400" b="0" dirty="0">
+                <a:effectLst/>
+                <a:latin typeface="D2Coding" panose="020B0609020101020101" pitchFamily="49" charset="-127"/>
+                <a:ea typeface="D2Coding" panose="020B0609020101020101" pitchFamily="49" charset="-127"/>
+              </a:rPr>
+              <a:t> = </a:t>
+            </a:r>
+            <a:r>
+              <a:rPr lang="ko-KR" altLang="ko-KR" sz="1400" b="0" dirty="0" err="1">
+                <a:effectLst/>
+                <a:latin typeface="D2Coding" panose="020B0609020101020101" pitchFamily="49" charset="-127"/>
+                <a:ea typeface="D2Coding" panose="020B0609020101020101" pitchFamily="49" charset="-127"/>
+              </a:rPr>
+              <a:t>np.array</a:t>
+            </a:r>
+            <a:r>
+              <a:rPr lang="ko-KR" altLang="ko-KR" sz="1400" b="0" dirty="0">
+                <a:effectLst/>
+                <a:latin typeface="D2Coding" panose="020B0609020101020101" pitchFamily="49" charset="-127"/>
+                <a:ea typeface="D2Coding" panose="020B0609020101020101" pitchFamily="49" charset="-127"/>
+              </a:rPr>
+              <a:t>([</a:t>
+            </a:r>
+          </a:p>
+          <a:p>
+            <a:pPr>
+              <a:buNone/>
+            </a:pPr>
+            <a:r>
+              <a:rPr lang="ko-KR" altLang="ko-KR" sz="1400" b="0" dirty="0">
+                <a:effectLst/>
+                <a:latin typeface="D2Coding" panose="020B0609020101020101" pitchFamily="49" charset="-127"/>
+                <a:ea typeface="D2Coding" panose="020B0609020101020101" pitchFamily="49" charset="-127"/>
+              </a:rPr>
+              <a:t>    [0.1, 0.2, 0.1, 0.3],  # </a:t>
+            </a:r>
+            <a:r>
+              <a:rPr lang="ko-KR" altLang="ko-KR" sz="1400" b="0" dirty="0" err="1">
+                <a:effectLst/>
+                <a:latin typeface="D2Coding" panose="020B0609020101020101" pitchFamily="49" charset="-127"/>
+                <a:ea typeface="D2Coding" panose="020B0609020101020101" pitchFamily="49" charset="-127"/>
+              </a:rPr>
+              <a:t>Te</a:t>
+            </a:r>
+            <a:endParaRPr lang="ko-KR" altLang="ko-KR" sz="1400" b="0" dirty="0">
+              <a:effectLst/>
+              <a:latin typeface="D2Coding" panose="020B0609020101020101" pitchFamily="49" charset="-127"/>
+              <a:ea typeface="D2Coding" panose="020B0609020101020101" pitchFamily="49" charset="-127"/>
+            </a:endParaRPr>
+          </a:p>
+          <a:p>
+            <a:pPr>
+              <a:buNone/>
+            </a:pPr>
+            <a:r>
+              <a:rPr lang="ko-KR" altLang="ko-KR" sz="1400" b="0" dirty="0">
+                <a:effectLst/>
+                <a:latin typeface="D2Coding" panose="020B0609020101020101" pitchFamily="49" charset="-127"/>
+                <a:ea typeface="D2Coding" panose="020B0609020101020101" pitchFamily="49" charset="-127"/>
+              </a:rPr>
+              <a:t>    [0.8, 0.9, 0.7, 0.9],  # </a:t>
+            </a:r>
+            <a:r>
+              <a:rPr lang="ko-KR" altLang="ko-KR" sz="1400" b="0" dirty="0" err="1">
+                <a:effectLst/>
+                <a:latin typeface="D2Coding" panose="020B0609020101020101" pitchFamily="49" charset="-127"/>
+                <a:ea typeface="D2Coding" panose="020B0609020101020101" pitchFamily="49" charset="-127"/>
+              </a:rPr>
+              <a:t>traeré</a:t>
+            </a:r>
+            <a:r>
+              <a:rPr lang="ko-KR" altLang="ko-KR" sz="1400" b="0" dirty="0">
+                <a:effectLst/>
+                <a:latin typeface="D2Coding" panose="020B0609020101020101" pitchFamily="49" charset="-127"/>
+                <a:ea typeface="D2Coding" panose="020B0609020101020101" pitchFamily="49" charset="-127"/>
+              </a:rPr>
+              <a:t> (가져오다 - 의미적 값이 큼)</a:t>
+            </a:r>
+          </a:p>
+          <a:p>
+            <a:pPr>
+              <a:buNone/>
+            </a:pPr>
+            <a:r>
+              <a:rPr lang="ko-KR" altLang="ko-KR" sz="1400" b="0" dirty="0">
+                <a:effectLst/>
+                <a:latin typeface="D2Coding" panose="020B0609020101020101" pitchFamily="49" charset="-127"/>
+                <a:ea typeface="D2Coding" panose="020B0609020101020101" pitchFamily="49" charset="-127"/>
+              </a:rPr>
+              <a:t>    [0.2, 0.1, 0.3, 0.1],  # </a:t>
+            </a:r>
+            <a:r>
+              <a:rPr lang="ko-KR" altLang="ko-KR" sz="1400" b="0" dirty="0" err="1">
+                <a:effectLst/>
+                <a:latin typeface="D2Coding" panose="020B0609020101020101" pitchFamily="49" charset="-127"/>
+                <a:ea typeface="D2Coding" panose="020B0609020101020101" pitchFamily="49" charset="-127"/>
+              </a:rPr>
+              <a:t>la</a:t>
+            </a:r>
+            <a:endParaRPr lang="ko-KR" altLang="ko-KR" sz="1400" b="0" dirty="0">
+              <a:effectLst/>
+              <a:latin typeface="D2Coding" panose="020B0609020101020101" pitchFamily="49" charset="-127"/>
+              <a:ea typeface="D2Coding" panose="020B0609020101020101" pitchFamily="49" charset="-127"/>
+            </a:endParaRPr>
+          </a:p>
+          <a:p>
+            <a:pPr>
+              <a:buNone/>
+            </a:pPr>
+            <a:r>
+              <a:rPr lang="ko-KR" altLang="ko-KR" sz="1400" b="0" dirty="0">
+                <a:effectLst/>
+                <a:latin typeface="D2Coding" panose="020B0609020101020101" pitchFamily="49" charset="-127"/>
+                <a:ea typeface="D2Coding" panose="020B0609020101020101" pitchFamily="49" charset="-127"/>
+              </a:rPr>
+              <a:t>    [0.5, 0.4, 0.6, 0.2]   # </a:t>
+            </a:r>
+            <a:r>
+              <a:rPr lang="ko-KR" altLang="ko-KR" sz="1400" b="0" dirty="0" err="1">
+                <a:effectLst/>
+                <a:latin typeface="D2Coding" panose="020B0609020101020101" pitchFamily="49" charset="-127"/>
+                <a:ea typeface="D2Coding" panose="020B0609020101020101" pitchFamily="49" charset="-127"/>
+              </a:rPr>
+              <a:t>bolsa</a:t>
+            </a:r>
+            <a:endParaRPr lang="ko-KR" altLang="ko-KR" sz="1400" b="0" dirty="0">
+              <a:effectLst/>
+              <a:latin typeface="D2Coding" panose="020B0609020101020101" pitchFamily="49" charset="-127"/>
+              <a:ea typeface="D2Coding" panose="020B0609020101020101" pitchFamily="49" charset="-127"/>
+            </a:endParaRPr>
+          </a:p>
+          <a:p>
+            <a:pPr>
+              <a:buNone/>
+            </a:pPr>
+            <a:r>
+              <a:rPr lang="ko-KR" altLang="ko-KR" sz="1400" b="0" dirty="0">
+                <a:effectLst/>
+                <a:latin typeface="D2Coding" panose="020B0609020101020101" pitchFamily="49" charset="-127"/>
+                <a:ea typeface="D2Coding" panose="020B0609020101020101" pitchFamily="49" charset="-127"/>
+              </a:rPr>
+              <a:t>])</a:t>
+            </a:r>
+            <a:endParaRPr lang="en-US" altLang="ko-KR" sz="1400" b="0" dirty="0">
+              <a:effectLst/>
+              <a:latin typeface="D2Coding" panose="020B0609020101020101" pitchFamily="49" charset="-127"/>
+              <a:ea typeface="D2Coding" panose="020B0609020101020101" pitchFamily="49" charset="-127"/>
+            </a:endParaRPr>
+          </a:p>
+          <a:p>
+            <a:pPr>
+              <a:buNone/>
+            </a:pPr>
+            <a:endParaRPr lang="ko-KR" altLang="ko-KR" sz="1400" b="0" dirty="0">
+              <a:effectLst/>
+              <a:latin typeface="D2Coding" panose="020B0609020101020101" pitchFamily="49" charset="-127"/>
+              <a:ea typeface="D2Coding" panose="020B0609020101020101" pitchFamily="49" charset="-127"/>
+            </a:endParaRPr>
+          </a:p>
+          <a:p>
+            <a:pPr>
+              <a:buNone/>
+            </a:pPr>
+            <a:r>
+              <a:rPr lang="ko-KR" altLang="ko-KR" sz="1400" b="0" dirty="0">
+                <a:effectLst/>
+                <a:latin typeface="D2Coding" panose="020B0609020101020101" pitchFamily="49" charset="-127"/>
+                <a:ea typeface="D2Coding" panose="020B0609020101020101" pitchFamily="49" charset="-127"/>
+              </a:rPr>
+              <a:t># 타겟 단어 (현재 </a:t>
+            </a:r>
+            <a:r>
+              <a:rPr lang="ko-KR" altLang="ko-KR" sz="1400" b="0" dirty="0" err="1">
+                <a:effectLst/>
+                <a:latin typeface="D2Coding" panose="020B0609020101020101" pitchFamily="49" charset="-127"/>
+                <a:ea typeface="D2Coding" panose="020B0609020101020101" pitchFamily="49" charset="-127"/>
+              </a:rPr>
+              <a:t>디코더가</a:t>
+            </a:r>
+            <a:r>
+              <a:rPr lang="ko-KR" altLang="ko-KR" sz="1400" b="0" dirty="0">
+                <a:effectLst/>
+                <a:latin typeface="D2Coding" panose="020B0609020101020101" pitchFamily="49" charset="-127"/>
+                <a:ea typeface="D2Coding" panose="020B0609020101020101" pitchFamily="49" charset="-127"/>
+              </a:rPr>
+              <a:t> 출력하려는 영어 단어 벡터)</a:t>
+            </a:r>
+            <a:r>
+              <a:rPr lang="en-US" altLang="ko-KR" sz="1400" b="0" dirty="0">
+                <a:effectLst/>
+                <a:latin typeface="D2Coding" panose="020B0609020101020101" pitchFamily="49" charset="-127"/>
+                <a:ea typeface="D2Coding" panose="020B0609020101020101" pitchFamily="49" charset="-127"/>
+              </a:rPr>
+              <a:t>, </a:t>
+            </a:r>
+            <a:r>
+              <a:rPr lang="ko-KR" altLang="ko-KR" sz="1400" b="0" dirty="0">
+                <a:effectLst/>
+                <a:latin typeface="D2Coding" panose="020B0609020101020101" pitchFamily="49" charset="-127"/>
+                <a:ea typeface="D2Coding" panose="020B0609020101020101" pitchFamily="49" charset="-127"/>
+              </a:rPr>
+              <a:t># 예: "</a:t>
+            </a:r>
+            <a:r>
+              <a:rPr lang="ko-KR" altLang="ko-KR" sz="1400" b="0" dirty="0" err="1">
+                <a:effectLst/>
+                <a:latin typeface="D2Coding" panose="020B0609020101020101" pitchFamily="49" charset="-127"/>
+                <a:ea typeface="D2Coding" panose="020B0609020101020101" pitchFamily="49" charset="-127"/>
+              </a:rPr>
+              <a:t>bring</a:t>
+            </a:r>
+            <a:r>
+              <a:rPr lang="ko-KR" altLang="ko-KR" sz="1400" b="0" dirty="0">
+                <a:effectLst/>
+                <a:latin typeface="D2Coding" panose="020B0609020101020101" pitchFamily="49" charset="-127"/>
+                <a:ea typeface="D2Coding" panose="020B0609020101020101" pitchFamily="49" charset="-127"/>
+              </a:rPr>
+              <a:t>" (가져오다)</a:t>
+            </a:r>
+          </a:p>
+          <a:p>
+            <a:pPr>
+              <a:buNone/>
+            </a:pPr>
+            <a:r>
+              <a:rPr lang="ko-KR" altLang="ko-KR" sz="1400" b="0" dirty="0" err="1">
+                <a:effectLst/>
+                <a:latin typeface="D2Coding" panose="020B0609020101020101" pitchFamily="49" charset="-127"/>
+                <a:ea typeface="D2Coding" panose="020B0609020101020101" pitchFamily="49" charset="-127"/>
+              </a:rPr>
+              <a:t>target</a:t>
+            </a:r>
+            <a:r>
+              <a:rPr lang="ko-KR" altLang="ko-KR" sz="1400" b="0" dirty="0">
+                <a:effectLst/>
+                <a:latin typeface="D2Coding" panose="020B0609020101020101" pitchFamily="49" charset="-127"/>
+                <a:ea typeface="D2Coding" panose="020B0609020101020101" pitchFamily="49" charset="-127"/>
+              </a:rPr>
+              <a:t> = </a:t>
+            </a:r>
+            <a:r>
+              <a:rPr lang="ko-KR" altLang="ko-KR" sz="1400" b="0" dirty="0" err="1">
+                <a:effectLst/>
+                <a:latin typeface="D2Coding" panose="020B0609020101020101" pitchFamily="49" charset="-127"/>
+                <a:ea typeface="D2Coding" panose="020B0609020101020101" pitchFamily="49" charset="-127"/>
+              </a:rPr>
+              <a:t>np.array</a:t>
+            </a:r>
+            <a:r>
+              <a:rPr lang="ko-KR" altLang="ko-KR" sz="1400" b="0" dirty="0">
+                <a:effectLst/>
+                <a:latin typeface="D2Coding" panose="020B0609020101020101" pitchFamily="49" charset="-127"/>
+                <a:ea typeface="D2Coding" panose="020B0609020101020101" pitchFamily="49" charset="-127"/>
+              </a:rPr>
+              <a:t>([0.7, 0.8, 0.6, 0.9]) </a:t>
+            </a:r>
+            <a:endParaRPr lang="en-US" altLang="ko-KR" sz="1400" b="0" dirty="0">
+              <a:effectLst/>
+              <a:latin typeface="D2Coding" panose="020B0609020101020101" pitchFamily="49" charset="-127"/>
+              <a:ea typeface="D2Coding" panose="020B0609020101020101" pitchFamily="49" charset="-127"/>
+            </a:endParaRPr>
+          </a:p>
+        </p:txBody>
+      </p:sp>
+      <p:sp>
+        <p:nvSpPr>
+          <p:cNvPr id="43" name="TextBox 42">
+            <a:extLst>
+              <a:ext uri="{FF2B5EF4-FFF2-40B4-BE49-F238E27FC236}">
+                <a16:creationId xmlns:a16="http://schemas.microsoft.com/office/drawing/2014/main" id="{9E5ACCF5-7BA8-5844-5E37-5232D0C90D7D}"/>
+              </a:ext>
+            </a:extLst>
+          </p:cNvPr>
+          <p:cNvSpPr txBox="1"/>
+          <p:nvPr/>
+        </p:nvSpPr>
+        <p:spPr>
+          <a:xfrm>
+            <a:off x="6966408" y="826899"/>
+            <a:ext cx="4600281" cy="369332"/>
+          </a:xfrm>
+          <a:prstGeom prst="rect">
+            <a:avLst/>
+          </a:prstGeom>
+          <a:noFill/>
+        </p:spPr>
+        <p:txBody>
+          <a:bodyPr wrap="square">
+            <a:spAutoFit/>
+          </a:bodyPr>
+          <a:lstStyle/>
+          <a:p>
+            <a:pPr indent="0" algn="r">
+              <a:buNone/>
+            </a:pPr>
+            <a:r>
+              <a:rPr lang="ko-KR" altLang="ko-KR" sz="1800" b="1" i="0" dirty="0" err="1">
+                <a:effectLst/>
+                <a:latin typeface="Lora" pitchFamily="2" charset="0"/>
+              </a:rPr>
+              <a:t>Dot-product</a:t>
+            </a:r>
+            <a:r>
+              <a:rPr lang="ko-KR" altLang="ko-KR" sz="1800" b="1" i="0" dirty="0">
+                <a:effectLst/>
+                <a:latin typeface="Lora" pitchFamily="2" charset="0"/>
+              </a:rPr>
+              <a:t> </a:t>
+            </a:r>
+            <a:r>
+              <a:rPr lang="ko-KR" altLang="ko-KR" sz="1800" b="1" i="0" dirty="0" err="1">
+                <a:effectLst/>
+                <a:latin typeface="Lora" pitchFamily="2" charset="0"/>
+              </a:rPr>
+              <a:t>attention</a:t>
+            </a:r>
+            <a:endParaRPr lang="ko-KR" altLang="ko-KR" sz="1800" b="1" i="0" dirty="0">
+              <a:effectLst/>
+              <a:latin typeface="Lora" pitchFamily="2" charset="0"/>
+            </a:endParaRPr>
+          </a:p>
+        </p:txBody>
+      </p:sp>
+    </p:spTree>
+    <p:extLst>
+      <p:ext uri="{BB962C8B-B14F-4D97-AF65-F5344CB8AC3E}">
+        <p14:creationId xmlns:p14="http://schemas.microsoft.com/office/powerpoint/2010/main" val="2886946679"/>
+      </p:ext>
+    </p:extLst>
+  </p:cSld>
+  <p:clrMapOvr>
+    <a:masterClrMapping/>
+  </p:clrMapOvr>
+</p:sld>
+</file>
+
+<file path=ppt/slides/slide22.xml><?xml version="1.0" encoding="utf-8"?>
+<p:sld xmlns:a="http://schemas.openxmlformats.org/drawingml/2006/main" xmlns:r="http://schemas.openxmlformats.org/officeDocument/2006/relationships" xmlns:p="http://schemas.openxmlformats.org/presentationml/2006/main">
+  <p:cSld>
+    <p:spTree>
+      <p:nvGrpSpPr>
+        <p:cNvPr id="1" name="">
+          <a:extLst>
+            <a:ext uri="{FF2B5EF4-FFF2-40B4-BE49-F238E27FC236}">
+              <a16:creationId xmlns:a16="http://schemas.microsoft.com/office/drawing/2014/main" id="{F146E55A-319D-D843-7B87-BF900155752F}"/>
+            </a:ext>
+          </a:extLst>
+        </p:cNvPr>
+        <p:cNvGrpSpPr/>
+        <p:nvPr/>
+      </p:nvGrpSpPr>
+      <p:grpSpPr>
+        <a:xfrm>
+          <a:off x="0" y="0"/>
+          <a:ext cx="0" cy="0"/>
+          <a:chOff x="0" y="0"/>
+          <a:chExt cx="0" cy="0"/>
+        </a:xfrm>
+      </p:grpSpPr>
+      <p:sp>
+        <p:nvSpPr>
+          <p:cNvPr id="4" name="슬라이드 번호 개체 틀 3">
+            <a:extLst>
+              <a:ext uri="{FF2B5EF4-FFF2-40B4-BE49-F238E27FC236}">
+                <a16:creationId xmlns:a16="http://schemas.microsoft.com/office/drawing/2014/main" id="{4900139C-8AB8-BF2F-A5B4-6C7B815069CC}"/>
+              </a:ext>
+            </a:extLst>
+          </p:cNvPr>
+          <p:cNvSpPr>
+            <a:spLocks noGrp="1"/>
+          </p:cNvSpPr>
+          <p:nvPr>
+            <p:ph type="sldNum" sz="quarter" idx="12"/>
+          </p:nvPr>
+        </p:nvSpPr>
+        <p:spPr>
+          <a:xfrm>
+            <a:off x="10514011" y="6036261"/>
+            <a:ext cx="753545" cy="365125"/>
+          </a:xfrm>
+        </p:spPr>
+        <p:txBody>
+          <a:bodyPr/>
+          <a:lstStyle/>
+          <a:p>
+            <a:fld id="{D57F1E4F-1CFF-5643-939E-217C01CDF565}" type="slidenum">
+              <a:rPr lang="en-US" smtClean="0"/>
+              <a:pPr/>
+              <a:t>22</a:t>
+            </a:fld>
+            <a:endParaRPr lang="en-US" dirty="0"/>
+          </a:p>
+        </p:txBody>
+      </p:sp>
+      <p:sp>
+        <p:nvSpPr>
+          <p:cNvPr id="3" name="제목 1">
+            <a:extLst>
+              <a:ext uri="{FF2B5EF4-FFF2-40B4-BE49-F238E27FC236}">
+                <a16:creationId xmlns:a16="http://schemas.microsoft.com/office/drawing/2014/main" id="{8DF72A09-AEE7-4810-EAAD-B6E381EA6B86}"/>
+              </a:ext>
+            </a:extLst>
+          </p:cNvPr>
+          <p:cNvSpPr txBox="1">
+            <a:spLocks/>
+          </p:cNvSpPr>
+          <p:nvPr/>
+        </p:nvSpPr>
+        <p:spPr>
+          <a:xfrm>
+            <a:off x="475645" y="481983"/>
+            <a:ext cx="10353762" cy="766439"/>
+          </a:xfrm>
+          <a:prstGeom prst="rect">
+            <a:avLst/>
+          </a:prstGeom>
+        </p:spPr>
+        <p:txBody>
+          <a:bodyPr vert="horz" lIns="91440" tIns="45720" rIns="91440" bIns="45720" rtlCol="0" anchor="ctr">
+            <a:normAutofit/>
+          </a:bodyPr>
+          <a:lstStyle>
+            <a:lvl1pPr algn="ctr" defTabSz="914400" rtl="0" eaLnBrk="1" latinLnBrk="1" hangingPunct="1">
+              <a:lnSpc>
+                <a:spcPct val="90000"/>
+              </a:lnSpc>
+              <a:spcBef>
+                <a:spcPct val="0"/>
+              </a:spcBef>
+              <a:buNone/>
+              <a:defRPr sz="3200" kern="1200" cap="all" baseline="0">
+                <a:solidFill>
+                  <a:schemeClr val="tx1"/>
+                </a:solidFill>
+                <a:effectLst/>
+                <a:latin typeface="Batang" panose="02030600000101010101" pitchFamily="18" charset="-127"/>
+                <a:ea typeface="Batang" panose="02030600000101010101" pitchFamily="18" charset="-127"/>
+                <a:cs typeface="+mj-cs"/>
+              </a:defRPr>
+            </a:lvl1pPr>
+          </a:lstStyle>
+          <a:p>
+            <a:pPr algn="l"/>
+            <a:r>
+              <a:rPr lang="en-US" altLang="ko-KR" sz="2800" b="1" cap="none" dirty="0">
+                <a:latin typeface="Lora" pitchFamily="2" charset="0"/>
+              </a:rPr>
+              <a:t>The Transformer architecture</a:t>
+            </a:r>
+          </a:p>
+        </p:txBody>
+      </p:sp>
+      <p:sp>
+        <p:nvSpPr>
+          <p:cNvPr id="41" name="TextBox 40">
+            <a:extLst>
+              <a:ext uri="{FF2B5EF4-FFF2-40B4-BE49-F238E27FC236}">
+                <a16:creationId xmlns:a16="http://schemas.microsoft.com/office/drawing/2014/main" id="{8D06D37C-FFD3-3818-5D79-EADC347494B1}"/>
+              </a:ext>
+            </a:extLst>
+          </p:cNvPr>
+          <p:cNvSpPr txBox="1"/>
+          <p:nvPr/>
+        </p:nvSpPr>
+        <p:spPr>
+          <a:xfrm>
+            <a:off x="572626" y="1500202"/>
+            <a:ext cx="9550429" cy="4260462"/>
+          </a:xfrm>
+          <a:prstGeom prst="rect">
+            <a:avLst/>
+          </a:prstGeom>
+          <a:solidFill>
+            <a:srgbClr val="76E3FF"/>
+          </a:solidFill>
+        </p:spPr>
+        <p:txBody>
+          <a:bodyPr wrap="square">
+            <a:spAutoFit/>
+          </a:bodyPr>
+          <a:lstStyle/>
+          <a:p>
+            <a:pPr>
+              <a:lnSpc>
+                <a:spcPct val="150000"/>
+              </a:lnSpc>
+              <a:buNone/>
+            </a:pPr>
+            <a:r>
+              <a:rPr lang="ko-KR" altLang="ko-KR" sz="1400" b="0" dirty="0">
+                <a:effectLst/>
+                <a:latin typeface="D2Coding" panose="020B0609020101020101" pitchFamily="49" charset="-127"/>
+                <a:ea typeface="D2Coding" panose="020B0609020101020101" pitchFamily="49" charset="-127"/>
+              </a:rPr>
+              <a:t># 1단계</a:t>
+            </a:r>
+            <a:r>
+              <a:rPr lang="en-US" altLang="ko-KR" sz="1400" b="0" dirty="0">
+                <a:effectLst/>
+                <a:latin typeface="D2Coding" panose="020B0609020101020101" pitchFamily="49" charset="-127"/>
+                <a:ea typeface="D2Coding" panose="020B0609020101020101" pitchFamily="49" charset="-127"/>
+              </a:rPr>
+              <a:t>(</a:t>
+            </a:r>
+            <a:r>
+              <a:rPr lang="ko-KR" altLang="ko-KR" sz="1400" dirty="0" err="1">
+                <a:latin typeface="D2Coding" panose="020B0609020101020101" pitchFamily="49" charset="-127"/>
+                <a:ea typeface="D2Coding" panose="020B0609020101020101" pitchFamily="49" charset="-127"/>
+              </a:rPr>
+              <a:t>어텐션</a:t>
+            </a:r>
+            <a:r>
+              <a:rPr lang="ko-KR" altLang="ko-KR" sz="1400" dirty="0">
+                <a:latin typeface="D2Coding" panose="020B0609020101020101" pitchFamily="49" charset="-127"/>
+                <a:ea typeface="D2Coding" panose="020B0609020101020101" pitchFamily="49" charset="-127"/>
+              </a:rPr>
+              <a:t> 메커니즘 실행</a:t>
+            </a:r>
+            <a:r>
+              <a:rPr lang="en-US" altLang="ko-KR" sz="1400" dirty="0">
+                <a:latin typeface="D2Coding" panose="020B0609020101020101" pitchFamily="49" charset="-127"/>
+                <a:ea typeface="D2Coding" panose="020B0609020101020101" pitchFamily="49" charset="-127"/>
+              </a:rPr>
+              <a:t>)</a:t>
+            </a:r>
+            <a:r>
+              <a:rPr lang="ko-KR" altLang="ko-KR" sz="1400" b="0" dirty="0">
+                <a:effectLst/>
+                <a:latin typeface="D2Coding" panose="020B0609020101020101" pitchFamily="49" charset="-127"/>
+                <a:ea typeface="D2Coding" panose="020B0609020101020101" pitchFamily="49" charset="-127"/>
+              </a:rPr>
+              <a:t>: 각 소스 단어와 타겟 단어 간의 연관성 점수 계산 </a:t>
+            </a:r>
+            <a:endParaRPr lang="en-US" altLang="ko-KR" sz="1400" b="0" dirty="0">
+              <a:effectLst/>
+              <a:latin typeface="D2Coding" panose="020B0609020101020101" pitchFamily="49" charset="-127"/>
+              <a:ea typeface="D2Coding" panose="020B0609020101020101" pitchFamily="49" charset="-127"/>
+            </a:endParaRPr>
+          </a:p>
+          <a:p>
+            <a:pPr>
+              <a:lnSpc>
+                <a:spcPct val="150000"/>
+              </a:lnSpc>
+              <a:buNone/>
+            </a:pPr>
+            <a:r>
+              <a:rPr lang="ko-KR" altLang="ko-KR" sz="1400" b="0" dirty="0" err="1">
+                <a:effectLst/>
+                <a:latin typeface="D2Coding" panose="020B0609020101020101" pitchFamily="49" charset="-127"/>
+                <a:ea typeface="D2Coding" panose="020B0609020101020101" pitchFamily="49" charset="-127"/>
+              </a:rPr>
+              <a:t>raw_scores</a:t>
+            </a:r>
+            <a:r>
+              <a:rPr lang="ko-KR" altLang="ko-KR" sz="1400" b="0" dirty="0">
+                <a:effectLst/>
+                <a:latin typeface="D2Coding" panose="020B0609020101020101" pitchFamily="49" charset="-127"/>
+                <a:ea typeface="D2Coding" panose="020B0609020101020101" pitchFamily="49" charset="-127"/>
+              </a:rPr>
+              <a:t> = </a:t>
+            </a:r>
+            <a:r>
+              <a:rPr lang="ko-KR" altLang="ko-KR" sz="1400" b="0" dirty="0" err="1">
+                <a:effectLst/>
+                <a:latin typeface="D2Coding" panose="020B0609020101020101" pitchFamily="49" charset="-127"/>
+                <a:ea typeface="D2Coding" panose="020B0609020101020101" pitchFamily="49" charset="-127"/>
+              </a:rPr>
+              <a:t>np.array</a:t>
+            </a:r>
+            <a:r>
+              <a:rPr lang="ko-KR" altLang="ko-KR" sz="1400" b="0" dirty="0">
+                <a:effectLst/>
+                <a:latin typeface="D2Coding" panose="020B0609020101020101" pitchFamily="49" charset="-127"/>
+                <a:ea typeface="D2Coding" panose="020B0609020101020101" pitchFamily="49" charset="-127"/>
+              </a:rPr>
+              <a:t>([</a:t>
+            </a:r>
+            <a:r>
+              <a:rPr lang="ko-KR" altLang="ko-KR" sz="1400" b="0" dirty="0" err="1">
+                <a:effectLst/>
+                <a:latin typeface="D2Coding" panose="020B0609020101020101" pitchFamily="49" charset="-127"/>
+                <a:ea typeface="D2Coding" panose="020B0609020101020101" pitchFamily="49" charset="-127"/>
+              </a:rPr>
+              <a:t>score</a:t>
+            </a:r>
+            <a:r>
+              <a:rPr lang="ko-KR" altLang="ko-KR" sz="1400" b="0" dirty="0">
+                <a:effectLst/>
+                <a:latin typeface="D2Coding" panose="020B0609020101020101" pitchFamily="49" charset="-127"/>
+                <a:ea typeface="D2Coding" panose="020B0609020101020101" pitchFamily="49" charset="-127"/>
+              </a:rPr>
+              <a:t>(</a:t>
+            </a:r>
+            <a:r>
+              <a:rPr lang="ko-KR" altLang="ko-KR" sz="1400" b="0" dirty="0" err="1">
+                <a:effectLst/>
+                <a:latin typeface="D2Coding" panose="020B0609020101020101" pitchFamily="49" charset="-127"/>
+                <a:ea typeface="D2Coding" panose="020B0609020101020101" pitchFamily="49" charset="-127"/>
+              </a:rPr>
+              <a:t>target</a:t>
+            </a:r>
+            <a:r>
+              <a:rPr lang="ko-KR" altLang="ko-KR" sz="1400" b="0" dirty="0">
+                <a:effectLst/>
+                <a:latin typeface="D2Coding" panose="020B0609020101020101" pitchFamily="49" charset="-127"/>
+                <a:ea typeface="D2Coding" panose="020B0609020101020101" pitchFamily="49" charset="-127"/>
+              </a:rPr>
+              <a:t>, </a:t>
+            </a:r>
+            <a:r>
+              <a:rPr lang="ko-KR" altLang="ko-KR" sz="1400" b="0" dirty="0" err="1">
+                <a:effectLst/>
+                <a:latin typeface="D2Coding" panose="020B0609020101020101" pitchFamily="49" charset="-127"/>
+                <a:ea typeface="D2Coding" panose="020B0609020101020101" pitchFamily="49" charset="-127"/>
+              </a:rPr>
+              <a:t>s</a:t>
+            </a:r>
+            <a:r>
+              <a:rPr lang="ko-KR" altLang="ko-KR" sz="1400" b="0" dirty="0">
+                <a:effectLst/>
+                <a:latin typeface="D2Coding" panose="020B0609020101020101" pitchFamily="49" charset="-127"/>
+                <a:ea typeface="D2Coding" panose="020B0609020101020101" pitchFamily="49" charset="-127"/>
+              </a:rPr>
+              <a:t>) </a:t>
+            </a:r>
+            <a:r>
+              <a:rPr lang="ko-KR" altLang="ko-KR" sz="1400" b="0" dirty="0" err="1">
+                <a:effectLst/>
+                <a:latin typeface="D2Coding" panose="020B0609020101020101" pitchFamily="49" charset="-127"/>
+                <a:ea typeface="D2Coding" panose="020B0609020101020101" pitchFamily="49" charset="-127"/>
+              </a:rPr>
+              <a:t>for</a:t>
+            </a:r>
+            <a:r>
+              <a:rPr lang="ko-KR" altLang="ko-KR" sz="1400" b="0" dirty="0">
+                <a:effectLst/>
+                <a:latin typeface="D2Coding" panose="020B0609020101020101" pitchFamily="49" charset="-127"/>
+                <a:ea typeface="D2Coding" panose="020B0609020101020101" pitchFamily="49" charset="-127"/>
+              </a:rPr>
+              <a:t> </a:t>
+            </a:r>
+            <a:r>
+              <a:rPr lang="ko-KR" altLang="ko-KR" sz="1400" b="0" dirty="0" err="1">
+                <a:effectLst/>
+                <a:latin typeface="D2Coding" panose="020B0609020101020101" pitchFamily="49" charset="-127"/>
+                <a:ea typeface="D2Coding" panose="020B0609020101020101" pitchFamily="49" charset="-127"/>
+              </a:rPr>
+              <a:t>s</a:t>
+            </a:r>
+            <a:r>
+              <a:rPr lang="ko-KR" altLang="ko-KR" sz="1400" b="0" dirty="0">
+                <a:effectLst/>
+                <a:latin typeface="D2Coding" panose="020B0609020101020101" pitchFamily="49" charset="-127"/>
+                <a:ea typeface="D2Coding" panose="020B0609020101020101" pitchFamily="49" charset="-127"/>
+              </a:rPr>
+              <a:t> </a:t>
+            </a:r>
+            <a:r>
+              <a:rPr lang="ko-KR" altLang="ko-KR" sz="1400" b="0" dirty="0" err="1">
+                <a:effectLst/>
+                <a:latin typeface="D2Coding" panose="020B0609020101020101" pitchFamily="49" charset="-127"/>
+                <a:ea typeface="D2Coding" panose="020B0609020101020101" pitchFamily="49" charset="-127"/>
+              </a:rPr>
+              <a:t>in</a:t>
+            </a:r>
+            <a:r>
+              <a:rPr lang="ko-KR" altLang="ko-KR" sz="1400" b="0" dirty="0">
+                <a:effectLst/>
+                <a:latin typeface="D2Coding" panose="020B0609020101020101" pitchFamily="49" charset="-127"/>
+                <a:ea typeface="D2Coding" panose="020B0609020101020101" pitchFamily="49" charset="-127"/>
+              </a:rPr>
+              <a:t> </a:t>
+            </a:r>
+            <a:r>
+              <a:rPr lang="ko-KR" altLang="ko-KR" sz="1400" b="0" dirty="0" err="1">
+                <a:effectLst/>
+                <a:latin typeface="D2Coding" panose="020B0609020101020101" pitchFamily="49" charset="-127"/>
+                <a:ea typeface="D2Coding" panose="020B0609020101020101" pitchFamily="49" charset="-127"/>
+              </a:rPr>
+              <a:t>sources</a:t>
+            </a:r>
+            <a:r>
+              <a:rPr lang="ko-KR" altLang="ko-KR" sz="1400" b="0" dirty="0">
+                <a:effectLst/>
+                <a:latin typeface="D2Coding" panose="020B0609020101020101" pitchFamily="49" charset="-127"/>
+                <a:ea typeface="D2Coding" panose="020B0609020101020101" pitchFamily="49" charset="-127"/>
+              </a:rPr>
+              <a:t>])</a:t>
+            </a:r>
+          </a:p>
+          <a:p>
+            <a:pPr>
+              <a:lnSpc>
+                <a:spcPct val="150000"/>
+              </a:lnSpc>
+            </a:pPr>
+            <a:r>
+              <a:rPr lang="ko-KR" altLang="ko-KR" sz="1400" dirty="0" err="1">
+                <a:latin typeface="D2Coding" panose="020B0609020101020101" pitchFamily="49" charset="-127"/>
+                <a:ea typeface="D2Coding" panose="020B0609020101020101" pitchFamily="49" charset="-127"/>
+              </a:rPr>
+              <a:t>print</a:t>
+            </a:r>
+            <a:r>
+              <a:rPr lang="ko-KR" altLang="ko-KR" sz="1400" dirty="0">
+                <a:latin typeface="D2Coding" panose="020B0609020101020101" pitchFamily="49" charset="-127"/>
+                <a:ea typeface="D2Coding" panose="020B0609020101020101" pitchFamily="49" charset="-127"/>
+              </a:rPr>
+              <a:t>(f"1. 날것의 </a:t>
+            </a:r>
+            <a:r>
+              <a:rPr lang="ko-KR" altLang="ko-KR" sz="1400" dirty="0" err="1">
+                <a:latin typeface="D2Coding" panose="020B0609020101020101" pitchFamily="49" charset="-127"/>
+                <a:ea typeface="D2Coding" panose="020B0609020101020101" pitchFamily="49" charset="-127"/>
+              </a:rPr>
+              <a:t>어텐션</a:t>
+            </a:r>
+            <a:r>
+              <a:rPr lang="ko-KR" altLang="ko-KR" sz="1400" dirty="0">
+                <a:latin typeface="D2Coding" panose="020B0609020101020101" pitchFamily="49" charset="-127"/>
+                <a:ea typeface="D2Coding" panose="020B0609020101020101" pitchFamily="49" charset="-127"/>
+              </a:rPr>
+              <a:t> 점수 (</a:t>
+            </a:r>
+            <a:r>
+              <a:rPr lang="ko-KR" altLang="ko-KR" sz="1400" dirty="0" err="1">
+                <a:latin typeface="D2Coding" panose="020B0609020101020101" pitchFamily="49" charset="-127"/>
+                <a:ea typeface="D2Coding" panose="020B0609020101020101" pitchFamily="49" charset="-127"/>
+              </a:rPr>
+              <a:t>Raw</a:t>
+            </a:r>
+            <a:r>
+              <a:rPr lang="ko-KR" altLang="ko-KR" sz="1400" dirty="0">
+                <a:latin typeface="D2Coding" panose="020B0609020101020101" pitchFamily="49" charset="-127"/>
+                <a:ea typeface="D2Coding" panose="020B0609020101020101" pitchFamily="49" charset="-127"/>
+              </a:rPr>
+              <a:t> </a:t>
+            </a:r>
+            <a:r>
+              <a:rPr lang="ko-KR" altLang="ko-KR" sz="1400" dirty="0" err="1">
+                <a:latin typeface="D2Coding" panose="020B0609020101020101" pitchFamily="49" charset="-127"/>
+                <a:ea typeface="D2Coding" panose="020B0609020101020101" pitchFamily="49" charset="-127"/>
+              </a:rPr>
+              <a:t>Scores</a:t>
+            </a:r>
+            <a:r>
+              <a:rPr lang="ko-KR" altLang="ko-KR" sz="1400" dirty="0">
+                <a:latin typeface="D2Coding" panose="020B0609020101020101" pitchFamily="49" charset="-127"/>
+                <a:ea typeface="D2Coding" panose="020B0609020101020101" pitchFamily="49" charset="-127"/>
+              </a:rPr>
+              <a:t>): {</a:t>
+            </a:r>
+            <a:r>
+              <a:rPr lang="ko-KR" altLang="ko-KR" sz="1400" dirty="0" err="1">
+                <a:latin typeface="D2Coding" panose="020B0609020101020101" pitchFamily="49" charset="-127"/>
+                <a:ea typeface="D2Coding" panose="020B0609020101020101" pitchFamily="49" charset="-127"/>
+              </a:rPr>
+              <a:t>raw_scores</a:t>
+            </a:r>
+            <a:r>
+              <a:rPr lang="ko-KR" altLang="ko-KR" sz="1400" dirty="0">
+                <a:latin typeface="D2Coding" panose="020B0609020101020101" pitchFamily="49" charset="-127"/>
+                <a:ea typeface="D2Coding" panose="020B0609020101020101" pitchFamily="49" charset="-127"/>
+              </a:rPr>
+              <a:t>}")</a:t>
+            </a:r>
+            <a:r>
+              <a:rPr lang="en-US" altLang="ko-KR" sz="1400" dirty="0">
+                <a:latin typeface="D2Coding" panose="020B0609020101020101" pitchFamily="49" charset="-127"/>
+                <a:ea typeface="D2Coding" panose="020B0609020101020101" pitchFamily="49" charset="-127"/>
+              </a:rPr>
+              <a:t> </a:t>
+            </a:r>
+            <a:r>
+              <a:rPr lang="ko-KR" altLang="ko-KR" sz="1400" b="0" dirty="0">
+                <a:effectLst/>
+                <a:latin typeface="D2Coding" panose="020B0609020101020101" pitchFamily="49" charset="-127"/>
+                <a:ea typeface="D2Coding" panose="020B0609020101020101" pitchFamily="49" charset="-127"/>
+              </a:rPr>
+              <a:t># 출력 결과 '</a:t>
+            </a:r>
+            <a:r>
+              <a:rPr lang="ko-KR" altLang="ko-KR" sz="1400" b="0" dirty="0" err="1">
+                <a:effectLst/>
+                <a:latin typeface="D2Coding" panose="020B0609020101020101" pitchFamily="49" charset="-127"/>
+                <a:ea typeface="D2Coding" panose="020B0609020101020101" pitchFamily="49" charset="-127"/>
+              </a:rPr>
+              <a:t>traeré'의</a:t>
+            </a:r>
+            <a:r>
+              <a:rPr lang="ko-KR" altLang="ko-KR" sz="1400" b="0" dirty="0">
+                <a:effectLst/>
+                <a:latin typeface="D2Coding" panose="020B0609020101020101" pitchFamily="49" charset="-127"/>
+                <a:ea typeface="D2Coding" panose="020B0609020101020101" pitchFamily="49" charset="-127"/>
+              </a:rPr>
+              <a:t> 점수가 가장 높음</a:t>
+            </a:r>
+            <a:endParaRPr lang="en-US" altLang="ko-KR" sz="1400" b="0" dirty="0">
+              <a:effectLst/>
+              <a:latin typeface="D2Coding" panose="020B0609020101020101" pitchFamily="49" charset="-127"/>
+              <a:ea typeface="D2Coding" panose="020B0609020101020101" pitchFamily="49" charset="-127"/>
+            </a:endParaRPr>
+          </a:p>
+          <a:p>
+            <a:pPr>
+              <a:lnSpc>
+                <a:spcPct val="150000"/>
+              </a:lnSpc>
+              <a:buNone/>
+            </a:pPr>
+            <a:endParaRPr lang="ko-KR" altLang="ko-KR" sz="1400" b="0" dirty="0">
+              <a:effectLst/>
+              <a:latin typeface="D2Coding" panose="020B0609020101020101" pitchFamily="49" charset="-127"/>
+              <a:ea typeface="D2Coding" panose="020B0609020101020101" pitchFamily="49" charset="-127"/>
+            </a:endParaRPr>
+          </a:p>
+          <a:p>
+            <a:pPr>
+              <a:lnSpc>
+                <a:spcPct val="150000"/>
+              </a:lnSpc>
+              <a:buNone/>
+            </a:pPr>
+            <a:r>
+              <a:rPr lang="ko-KR" altLang="ko-KR" sz="1400" b="0" dirty="0">
+                <a:effectLst/>
+                <a:latin typeface="D2Coding" panose="020B0609020101020101" pitchFamily="49" charset="-127"/>
+                <a:ea typeface="D2Coding" panose="020B0609020101020101" pitchFamily="49" charset="-127"/>
+              </a:rPr>
+              <a:t># 2단계: </a:t>
+            </a:r>
+            <a:r>
+              <a:rPr lang="ko-KR" altLang="ko-KR" sz="1400" b="0" dirty="0" err="1">
+                <a:effectLst/>
+                <a:latin typeface="D2Coding" panose="020B0609020101020101" pitchFamily="49" charset="-127"/>
+                <a:ea typeface="D2Coding" panose="020B0609020101020101" pitchFamily="49" charset="-127"/>
+              </a:rPr>
+              <a:t>소프트맥스를</a:t>
+            </a:r>
+            <a:r>
+              <a:rPr lang="ko-KR" altLang="ko-KR" sz="1400" b="0" dirty="0">
+                <a:effectLst/>
+                <a:latin typeface="D2Coding" panose="020B0609020101020101" pitchFamily="49" charset="-127"/>
+                <a:ea typeface="D2Coding" panose="020B0609020101020101" pitchFamily="49" charset="-127"/>
+              </a:rPr>
+              <a:t> 취해 합이 1이 되는 가중치 확률로 변환</a:t>
+            </a:r>
+          </a:p>
+          <a:p>
+            <a:pPr>
+              <a:lnSpc>
+                <a:spcPct val="150000"/>
+              </a:lnSpc>
+            </a:pPr>
+            <a:r>
+              <a:rPr lang="ko-KR" altLang="ko-KR" sz="1400" dirty="0" err="1">
+                <a:latin typeface="D2Coding" panose="020B0609020101020101" pitchFamily="49" charset="-127"/>
+                <a:ea typeface="D2Coding" panose="020B0609020101020101" pitchFamily="49" charset="-127"/>
+              </a:rPr>
+              <a:t>attention_weights</a:t>
+            </a:r>
+            <a:r>
+              <a:rPr lang="ko-KR" altLang="ko-KR" sz="1400" dirty="0">
+                <a:latin typeface="D2Coding" panose="020B0609020101020101" pitchFamily="49" charset="-127"/>
+                <a:ea typeface="D2Coding" panose="020B0609020101020101" pitchFamily="49" charset="-127"/>
+              </a:rPr>
+              <a:t> = </a:t>
+            </a:r>
+            <a:r>
+              <a:rPr lang="ko-KR" altLang="ko-KR" sz="1400" dirty="0" err="1">
+                <a:latin typeface="D2Coding" panose="020B0609020101020101" pitchFamily="49" charset="-127"/>
+                <a:ea typeface="D2Coding" panose="020B0609020101020101" pitchFamily="49" charset="-127"/>
+              </a:rPr>
+              <a:t>softmax</a:t>
+            </a:r>
+            <a:r>
+              <a:rPr lang="ko-KR" altLang="ko-KR" sz="1400" dirty="0">
+                <a:latin typeface="D2Coding" panose="020B0609020101020101" pitchFamily="49" charset="-127"/>
+                <a:ea typeface="D2Coding" panose="020B0609020101020101" pitchFamily="49" charset="-127"/>
+              </a:rPr>
+              <a:t>(</a:t>
+            </a:r>
+            <a:r>
+              <a:rPr lang="ko-KR" altLang="ko-KR" sz="1400" dirty="0" err="1">
+                <a:latin typeface="D2Coding" panose="020B0609020101020101" pitchFamily="49" charset="-127"/>
+                <a:ea typeface="D2Coding" panose="020B0609020101020101" pitchFamily="49" charset="-127"/>
+              </a:rPr>
+              <a:t>raw_scores</a:t>
+            </a:r>
+            <a:r>
+              <a:rPr lang="ko-KR" altLang="ko-KR" sz="1400" dirty="0">
+                <a:latin typeface="D2Coding" panose="020B0609020101020101" pitchFamily="49" charset="-127"/>
+                <a:ea typeface="D2Coding" panose="020B0609020101020101" pitchFamily="49" charset="-127"/>
+              </a:rPr>
+              <a:t>)</a:t>
+            </a:r>
+          </a:p>
+          <a:p>
+            <a:pPr>
+              <a:lnSpc>
+                <a:spcPct val="150000"/>
+              </a:lnSpc>
+            </a:pPr>
+            <a:r>
+              <a:rPr lang="ko-KR" altLang="ko-KR" sz="1400" dirty="0" err="1">
+                <a:latin typeface="D2Coding" panose="020B0609020101020101" pitchFamily="49" charset="-127"/>
+                <a:ea typeface="D2Coding" panose="020B0609020101020101" pitchFamily="49" charset="-127"/>
+              </a:rPr>
+              <a:t>print</a:t>
+            </a:r>
+            <a:r>
+              <a:rPr lang="ko-KR" altLang="ko-KR" sz="1400" dirty="0">
+                <a:latin typeface="D2Coding" panose="020B0609020101020101" pitchFamily="49" charset="-127"/>
+                <a:ea typeface="D2Coding" panose="020B0609020101020101" pitchFamily="49" charset="-127"/>
+              </a:rPr>
+              <a:t>(</a:t>
+            </a:r>
+            <a:r>
+              <a:rPr lang="ko-KR" altLang="ko-KR" sz="1400" dirty="0" err="1">
+                <a:latin typeface="D2Coding" panose="020B0609020101020101" pitchFamily="49" charset="-127"/>
+                <a:ea typeface="D2Coding" panose="020B0609020101020101" pitchFamily="49" charset="-127"/>
+              </a:rPr>
+              <a:t>f</a:t>
+            </a:r>
+            <a:r>
+              <a:rPr lang="ko-KR" altLang="ko-KR" sz="1400" dirty="0">
+                <a:latin typeface="D2Coding" panose="020B0609020101020101" pitchFamily="49" charset="-127"/>
+                <a:ea typeface="D2Coding" panose="020B0609020101020101" pitchFamily="49" charset="-127"/>
+              </a:rPr>
+              <a:t>"\n2. </a:t>
+            </a:r>
+            <a:r>
+              <a:rPr lang="ko-KR" altLang="ko-KR" sz="1400" dirty="0" err="1">
+                <a:latin typeface="D2Coding" panose="020B0609020101020101" pitchFamily="49" charset="-127"/>
+                <a:ea typeface="D2Coding" panose="020B0609020101020101" pitchFamily="49" charset="-127"/>
+              </a:rPr>
+              <a:t>소프트맥스</a:t>
+            </a:r>
+            <a:r>
+              <a:rPr lang="ko-KR" altLang="ko-KR" sz="1400" dirty="0">
+                <a:latin typeface="D2Coding" panose="020B0609020101020101" pitchFamily="49" charset="-127"/>
+                <a:ea typeface="D2Coding" panose="020B0609020101020101" pitchFamily="49" charset="-127"/>
+              </a:rPr>
+              <a:t> 정규화 후 가중치 (</a:t>
+            </a:r>
+            <a:r>
+              <a:rPr lang="ko-KR" altLang="ko-KR" sz="1400" dirty="0" err="1">
+                <a:latin typeface="D2Coding" panose="020B0609020101020101" pitchFamily="49" charset="-127"/>
+                <a:ea typeface="D2Coding" panose="020B0609020101020101" pitchFamily="49" charset="-127"/>
+              </a:rPr>
+              <a:t>Attention</a:t>
+            </a:r>
+            <a:r>
+              <a:rPr lang="ko-KR" altLang="ko-KR" sz="1400" dirty="0">
+                <a:latin typeface="D2Coding" panose="020B0609020101020101" pitchFamily="49" charset="-127"/>
+                <a:ea typeface="D2Coding" panose="020B0609020101020101" pitchFamily="49" charset="-127"/>
+              </a:rPr>
+              <a:t> </a:t>
+            </a:r>
+            <a:r>
+              <a:rPr lang="ko-KR" altLang="ko-KR" sz="1400" dirty="0" err="1">
+                <a:latin typeface="D2Coding" panose="020B0609020101020101" pitchFamily="49" charset="-127"/>
+                <a:ea typeface="D2Coding" panose="020B0609020101020101" pitchFamily="49" charset="-127"/>
+              </a:rPr>
+              <a:t>Weights</a:t>
+            </a:r>
+            <a:r>
+              <a:rPr lang="ko-KR" altLang="ko-KR" sz="1400" dirty="0">
+                <a:latin typeface="D2Coding" panose="020B0609020101020101" pitchFamily="49" charset="-127"/>
+                <a:ea typeface="D2Coding" panose="020B0609020101020101" pitchFamily="49" charset="-127"/>
+              </a:rPr>
+              <a:t>) 가중치 총합: {</a:t>
+            </a:r>
+            <a:r>
+              <a:rPr lang="ko-KR" altLang="ko-KR" sz="1400" dirty="0" err="1">
+                <a:latin typeface="D2Coding" panose="020B0609020101020101" pitchFamily="49" charset="-127"/>
+                <a:ea typeface="D2Coding" panose="020B0609020101020101" pitchFamily="49" charset="-127"/>
+              </a:rPr>
+              <a:t>np.sum</a:t>
+            </a:r>
+            <a:r>
+              <a:rPr lang="ko-KR" altLang="ko-KR" sz="1400" dirty="0">
+                <a:latin typeface="D2Coding" panose="020B0609020101020101" pitchFamily="49" charset="-127"/>
+                <a:ea typeface="D2Coding" panose="020B0609020101020101" pitchFamily="49" charset="-127"/>
+              </a:rPr>
+              <a:t>(</a:t>
+            </a:r>
+            <a:r>
+              <a:rPr lang="ko-KR" altLang="ko-KR" sz="1400" dirty="0" err="1">
+                <a:latin typeface="D2Coding" panose="020B0609020101020101" pitchFamily="49" charset="-127"/>
+                <a:ea typeface="D2Coding" panose="020B0609020101020101" pitchFamily="49" charset="-127"/>
+              </a:rPr>
+              <a:t>attention_weights</a:t>
+            </a:r>
+            <a:r>
+              <a:rPr lang="ko-KR" altLang="ko-KR" sz="1400" dirty="0">
+                <a:latin typeface="D2Coding" panose="020B0609020101020101" pitchFamily="49" charset="-127"/>
+                <a:ea typeface="D2Coding" panose="020B0609020101020101" pitchFamily="49" charset="-127"/>
+              </a:rPr>
+              <a:t>)}")</a:t>
+            </a:r>
+          </a:p>
+          <a:p>
+            <a:pPr>
+              <a:lnSpc>
+                <a:spcPct val="150000"/>
+              </a:lnSpc>
+            </a:pPr>
+            <a:r>
+              <a:rPr lang="ko-KR" altLang="ko-KR" sz="1400" dirty="0" err="1">
+                <a:latin typeface="D2Coding" panose="020B0609020101020101" pitchFamily="49" charset="-127"/>
+                <a:ea typeface="D2Coding" panose="020B0609020101020101" pitchFamily="49" charset="-127"/>
+              </a:rPr>
+              <a:t>for</a:t>
+            </a:r>
+            <a:r>
+              <a:rPr lang="ko-KR" altLang="ko-KR" sz="1400" dirty="0">
+                <a:latin typeface="D2Coding" panose="020B0609020101020101" pitchFamily="49" charset="-127"/>
+                <a:ea typeface="D2Coding" panose="020B0609020101020101" pitchFamily="49" charset="-127"/>
+              </a:rPr>
+              <a:t> </a:t>
+            </a:r>
+            <a:r>
+              <a:rPr lang="ko-KR" altLang="ko-KR" sz="1400" dirty="0" err="1">
+                <a:latin typeface="D2Coding" panose="020B0609020101020101" pitchFamily="49" charset="-127"/>
+                <a:ea typeface="D2Coding" panose="020B0609020101020101" pitchFamily="49" charset="-127"/>
+              </a:rPr>
+              <a:t>word</a:t>
+            </a:r>
+            <a:r>
+              <a:rPr lang="ko-KR" altLang="ko-KR" sz="1400" dirty="0">
+                <a:latin typeface="D2Coding" panose="020B0609020101020101" pitchFamily="49" charset="-127"/>
+                <a:ea typeface="D2Coding" panose="020B0609020101020101" pitchFamily="49" charset="-127"/>
+              </a:rPr>
+              <a:t>, </a:t>
+            </a:r>
+            <a:r>
+              <a:rPr lang="ko-KR" altLang="ko-KR" sz="1400" dirty="0" err="1">
+                <a:latin typeface="D2Coding" panose="020B0609020101020101" pitchFamily="49" charset="-127"/>
+                <a:ea typeface="D2Coding" panose="020B0609020101020101" pitchFamily="49" charset="-127"/>
+              </a:rPr>
+              <a:t>weight</a:t>
+            </a:r>
+            <a:r>
+              <a:rPr lang="ko-KR" altLang="ko-KR" sz="1400" dirty="0">
+                <a:latin typeface="D2Coding" panose="020B0609020101020101" pitchFamily="49" charset="-127"/>
+                <a:ea typeface="D2Coding" panose="020B0609020101020101" pitchFamily="49" charset="-127"/>
+              </a:rPr>
+              <a:t> </a:t>
+            </a:r>
+            <a:r>
+              <a:rPr lang="ko-KR" altLang="ko-KR" sz="1400" dirty="0" err="1">
+                <a:latin typeface="D2Coding" panose="020B0609020101020101" pitchFamily="49" charset="-127"/>
+                <a:ea typeface="D2Coding" panose="020B0609020101020101" pitchFamily="49" charset="-127"/>
+              </a:rPr>
+              <a:t>in</a:t>
+            </a:r>
+            <a:r>
+              <a:rPr lang="ko-KR" altLang="ko-KR" sz="1400" dirty="0">
+                <a:latin typeface="D2Coding" panose="020B0609020101020101" pitchFamily="49" charset="-127"/>
+                <a:ea typeface="D2Coding" panose="020B0609020101020101" pitchFamily="49" charset="-127"/>
+              </a:rPr>
+              <a:t> </a:t>
+            </a:r>
+            <a:r>
+              <a:rPr lang="ko-KR" altLang="ko-KR" sz="1400" dirty="0" err="1">
+                <a:latin typeface="D2Coding" panose="020B0609020101020101" pitchFamily="49" charset="-127"/>
+                <a:ea typeface="D2Coding" panose="020B0609020101020101" pitchFamily="49" charset="-127"/>
+              </a:rPr>
+              <a:t>zip</a:t>
+            </a:r>
+            <a:r>
+              <a:rPr lang="ko-KR" altLang="ko-KR" sz="1400" dirty="0">
+                <a:latin typeface="D2Coding" panose="020B0609020101020101" pitchFamily="49" charset="-127"/>
+                <a:ea typeface="D2Coding" panose="020B0609020101020101" pitchFamily="49" charset="-127"/>
+              </a:rPr>
+              <a:t>(["</a:t>
+            </a:r>
+            <a:r>
+              <a:rPr lang="ko-KR" altLang="ko-KR" sz="1400" dirty="0" err="1">
+                <a:latin typeface="D2Coding" panose="020B0609020101020101" pitchFamily="49" charset="-127"/>
+                <a:ea typeface="D2Coding" panose="020B0609020101020101" pitchFamily="49" charset="-127"/>
+              </a:rPr>
+              <a:t>Te</a:t>
+            </a:r>
+            <a:r>
+              <a:rPr lang="ko-KR" altLang="ko-KR" sz="1400" dirty="0">
+                <a:latin typeface="D2Coding" panose="020B0609020101020101" pitchFamily="49" charset="-127"/>
+                <a:ea typeface="D2Coding" panose="020B0609020101020101" pitchFamily="49" charset="-127"/>
+              </a:rPr>
+              <a:t>", "</a:t>
+            </a:r>
+            <a:r>
+              <a:rPr lang="ko-KR" altLang="ko-KR" sz="1400" dirty="0" err="1">
+                <a:latin typeface="D2Coding" panose="020B0609020101020101" pitchFamily="49" charset="-127"/>
+                <a:ea typeface="D2Coding" panose="020B0609020101020101" pitchFamily="49" charset="-127"/>
+              </a:rPr>
+              <a:t>traeré</a:t>
+            </a:r>
+            <a:r>
+              <a:rPr lang="ko-KR" altLang="ko-KR" sz="1400" dirty="0">
+                <a:latin typeface="D2Coding" panose="020B0609020101020101" pitchFamily="49" charset="-127"/>
+                <a:ea typeface="D2Coding" panose="020B0609020101020101" pitchFamily="49" charset="-127"/>
+              </a:rPr>
+              <a:t>", "</a:t>
+            </a:r>
+            <a:r>
+              <a:rPr lang="ko-KR" altLang="ko-KR" sz="1400" dirty="0" err="1">
+                <a:latin typeface="D2Coding" panose="020B0609020101020101" pitchFamily="49" charset="-127"/>
+                <a:ea typeface="D2Coding" panose="020B0609020101020101" pitchFamily="49" charset="-127"/>
+              </a:rPr>
+              <a:t>la</a:t>
+            </a:r>
+            <a:r>
+              <a:rPr lang="ko-KR" altLang="ko-KR" sz="1400" dirty="0">
+                <a:latin typeface="D2Coding" panose="020B0609020101020101" pitchFamily="49" charset="-127"/>
+                <a:ea typeface="D2Coding" panose="020B0609020101020101" pitchFamily="49" charset="-127"/>
+              </a:rPr>
+              <a:t>", "</a:t>
+            </a:r>
+            <a:r>
+              <a:rPr lang="ko-KR" altLang="ko-KR" sz="1400" dirty="0" err="1">
+                <a:latin typeface="D2Coding" panose="020B0609020101020101" pitchFamily="49" charset="-127"/>
+                <a:ea typeface="D2Coding" panose="020B0609020101020101" pitchFamily="49" charset="-127"/>
+              </a:rPr>
+              <a:t>bolsa</a:t>
+            </a:r>
+            <a:r>
+              <a:rPr lang="ko-KR" altLang="ko-KR" sz="1400" dirty="0">
+                <a:latin typeface="D2Coding" panose="020B0609020101020101" pitchFamily="49" charset="-127"/>
+                <a:ea typeface="D2Coding" panose="020B0609020101020101" pitchFamily="49" charset="-127"/>
+              </a:rPr>
+              <a:t>"], </a:t>
+            </a:r>
+            <a:r>
+              <a:rPr lang="ko-KR" altLang="ko-KR" sz="1400" dirty="0" err="1">
+                <a:latin typeface="D2Coding" panose="020B0609020101020101" pitchFamily="49" charset="-127"/>
+                <a:ea typeface="D2Coding" panose="020B0609020101020101" pitchFamily="49" charset="-127"/>
+              </a:rPr>
+              <a:t>attention_weights</a:t>
+            </a:r>
+            <a:r>
+              <a:rPr lang="ko-KR" altLang="ko-KR" sz="1400" dirty="0">
+                <a:latin typeface="D2Coding" panose="020B0609020101020101" pitchFamily="49" charset="-127"/>
+                <a:ea typeface="D2Coding" panose="020B0609020101020101" pitchFamily="49" charset="-127"/>
+              </a:rPr>
+              <a:t>):</a:t>
+            </a:r>
+          </a:p>
+          <a:p>
+            <a:pPr>
+              <a:lnSpc>
+                <a:spcPct val="150000"/>
+              </a:lnSpc>
+            </a:pPr>
+            <a:r>
+              <a:rPr lang="ko-KR" altLang="ko-KR" sz="1400" dirty="0">
+                <a:latin typeface="D2Coding" panose="020B0609020101020101" pitchFamily="49" charset="-127"/>
+                <a:ea typeface="D2Coding" panose="020B0609020101020101" pitchFamily="49" charset="-127"/>
+              </a:rPr>
+              <a:t>    </a:t>
+            </a:r>
+            <a:r>
+              <a:rPr lang="ko-KR" altLang="ko-KR" sz="1400" dirty="0" err="1">
+                <a:latin typeface="D2Coding" panose="020B0609020101020101" pitchFamily="49" charset="-127"/>
+                <a:ea typeface="D2Coding" panose="020B0609020101020101" pitchFamily="49" charset="-127"/>
+              </a:rPr>
+              <a:t>print</a:t>
+            </a:r>
+            <a:r>
+              <a:rPr lang="ko-KR" altLang="ko-KR" sz="1400" dirty="0">
+                <a:latin typeface="D2Coding" panose="020B0609020101020101" pitchFamily="49" charset="-127"/>
+                <a:ea typeface="D2Coding" panose="020B0609020101020101" pitchFamily="49" charset="-127"/>
+              </a:rPr>
+              <a:t>(</a:t>
+            </a:r>
+            <a:r>
+              <a:rPr lang="ko-KR" altLang="ko-KR" sz="1400" dirty="0" err="1">
+                <a:latin typeface="D2Coding" panose="020B0609020101020101" pitchFamily="49" charset="-127"/>
+                <a:ea typeface="D2Coding" panose="020B0609020101020101" pitchFamily="49" charset="-127"/>
+              </a:rPr>
+              <a:t>f</a:t>
+            </a:r>
+            <a:r>
+              <a:rPr lang="ko-KR" altLang="ko-KR" sz="1400" dirty="0">
+                <a:latin typeface="D2Coding" panose="020B0609020101020101" pitchFamily="49" charset="-127"/>
+                <a:ea typeface="D2Coding" panose="020B0609020101020101" pitchFamily="49" charset="-127"/>
+              </a:rPr>
+              <a:t>" - {</a:t>
+            </a:r>
+            <a:r>
+              <a:rPr lang="ko-KR" altLang="ko-KR" sz="1400" dirty="0" err="1">
+                <a:latin typeface="D2Coding" panose="020B0609020101020101" pitchFamily="49" charset="-127"/>
+                <a:ea typeface="D2Coding" panose="020B0609020101020101" pitchFamily="49" charset="-127"/>
+              </a:rPr>
+              <a:t>word</a:t>
+            </a:r>
+            <a:r>
+              <a:rPr lang="ko-KR" altLang="ko-KR" sz="1400" dirty="0">
+                <a:latin typeface="D2Coding" panose="020B0609020101020101" pitchFamily="49" charset="-127"/>
+                <a:ea typeface="D2Coding" panose="020B0609020101020101" pitchFamily="49" charset="-127"/>
+              </a:rPr>
+              <a:t>}: {weight:.4f}")</a:t>
+            </a:r>
+            <a:endParaRPr lang="en-US" altLang="ko-KR" sz="1400" dirty="0">
+              <a:latin typeface="D2Coding" panose="020B0609020101020101" pitchFamily="49" charset="-127"/>
+              <a:ea typeface="D2Coding" panose="020B0609020101020101" pitchFamily="49" charset="-127"/>
+            </a:endParaRPr>
+          </a:p>
+          <a:p>
+            <a:pPr>
+              <a:lnSpc>
+                <a:spcPct val="150000"/>
+              </a:lnSpc>
+            </a:pPr>
+            <a:endParaRPr lang="ko-KR" altLang="ko-KR" sz="1400" dirty="0">
+              <a:latin typeface="D2Coding" panose="020B0609020101020101" pitchFamily="49" charset="-127"/>
+              <a:ea typeface="D2Coding" panose="020B0609020101020101" pitchFamily="49" charset="-127"/>
+            </a:endParaRPr>
+          </a:p>
+          <a:p>
+            <a:pPr>
+              <a:lnSpc>
+                <a:spcPct val="150000"/>
+              </a:lnSpc>
+              <a:buNone/>
+            </a:pPr>
+            <a:r>
+              <a:rPr lang="ko-KR" altLang="ko-KR" sz="1400" b="0" dirty="0">
+                <a:effectLst/>
+                <a:latin typeface="D2Coding" panose="020B0609020101020101" pitchFamily="49" charset="-127"/>
+                <a:ea typeface="D2Coding" panose="020B0609020101020101" pitchFamily="49" charset="-127"/>
+              </a:rPr>
+              <a:t># 3단계: </a:t>
+            </a:r>
+            <a:r>
+              <a:rPr lang="ko-KR" altLang="ko-KR" sz="1400" b="0" dirty="0" err="1">
+                <a:effectLst/>
+                <a:latin typeface="D2Coding" panose="020B0609020101020101" pitchFamily="49" charset="-127"/>
+                <a:ea typeface="D2Coding" panose="020B0609020101020101" pitchFamily="49" charset="-127"/>
+              </a:rPr>
+              <a:t>가중합</a:t>
+            </a:r>
+            <a:r>
+              <a:rPr lang="ko-KR" altLang="ko-KR" sz="1400" b="0" dirty="0">
+                <a:effectLst/>
+                <a:latin typeface="D2Coding" panose="020B0609020101020101" pitchFamily="49" charset="-127"/>
+                <a:ea typeface="D2Coding" panose="020B0609020101020101" pitchFamily="49" charset="-127"/>
+              </a:rPr>
+              <a:t>(</a:t>
+            </a:r>
+            <a:r>
+              <a:rPr lang="ko-KR" altLang="ko-KR" sz="1400" b="0" dirty="0" err="1">
+                <a:effectLst/>
+                <a:latin typeface="D2Coding" panose="020B0609020101020101" pitchFamily="49" charset="-127"/>
+                <a:ea typeface="D2Coding" panose="020B0609020101020101" pitchFamily="49" charset="-127"/>
+              </a:rPr>
+              <a:t>Weighted</a:t>
+            </a:r>
+            <a:r>
+              <a:rPr lang="ko-KR" altLang="ko-KR" sz="1400" b="0" dirty="0">
+                <a:effectLst/>
+                <a:latin typeface="D2Coding" panose="020B0609020101020101" pitchFamily="49" charset="-127"/>
+                <a:ea typeface="D2Coding" panose="020B0609020101020101" pitchFamily="49" charset="-127"/>
+              </a:rPr>
+              <a:t> </a:t>
+            </a:r>
+            <a:r>
+              <a:rPr lang="ko-KR" altLang="ko-KR" sz="1400" b="0" dirty="0" err="1">
+                <a:effectLst/>
+                <a:latin typeface="D2Coding" panose="020B0609020101020101" pitchFamily="49" charset="-127"/>
+                <a:ea typeface="D2Coding" panose="020B0609020101020101" pitchFamily="49" charset="-127"/>
+              </a:rPr>
+              <a:t>Sum</a:t>
+            </a:r>
+            <a:r>
+              <a:rPr lang="ko-KR" altLang="ko-KR" sz="1400" b="0" dirty="0">
+                <a:effectLst/>
+                <a:latin typeface="D2Coding" panose="020B0609020101020101" pitchFamily="49" charset="-127"/>
+                <a:ea typeface="D2Coding" panose="020B0609020101020101" pitchFamily="49" charset="-127"/>
+              </a:rPr>
+              <a:t>)</a:t>
+            </a:r>
+            <a:r>
+              <a:rPr lang="en-US" altLang="ko-KR" sz="1400" dirty="0">
+                <a:latin typeface="D2Coding" panose="020B0609020101020101" pitchFamily="49" charset="-127"/>
+                <a:ea typeface="D2Coding" panose="020B0609020101020101" pitchFamily="49" charset="-127"/>
+              </a:rPr>
+              <a:t> </a:t>
+            </a:r>
+            <a:r>
+              <a:rPr lang="ko-KR" altLang="ko-KR" sz="1400" b="0" dirty="0">
+                <a:effectLst/>
+                <a:latin typeface="D2Coding" panose="020B0609020101020101" pitchFamily="49" charset="-127"/>
+                <a:ea typeface="D2Coding" panose="020B0609020101020101" pitchFamily="49" charset="-127"/>
+              </a:rPr>
+              <a:t>구하기</a:t>
+            </a:r>
+            <a:r>
+              <a:rPr lang="en-US" altLang="ko-KR" sz="1400" b="0" dirty="0">
+                <a:effectLst/>
+                <a:latin typeface="D2Coding" panose="020B0609020101020101" pitchFamily="49" charset="-127"/>
+                <a:ea typeface="D2Coding" panose="020B0609020101020101" pitchFamily="49" charset="-127"/>
+              </a:rPr>
+              <a:t> : </a:t>
+            </a:r>
+            <a:r>
+              <a:rPr lang="ko-KR" altLang="ko-KR" sz="1400" b="0" dirty="0">
+                <a:effectLst/>
+                <a:latin typeface="D2Coding" panose="020B0609020101020101" pitchFamily="49" charset="-127"/>
+                <a:ea typeface="D2Coding" panose="020B0609020101020101" pitchFamily="49" charset="-127"/>
+              </a:rPr>
+              <a:t>원소별 곱(</a:t>
+            </a:r>
+            <a:r>
+              <a:rPr lang="ko-KR" altLang="ko-KR" sz="1400" b="0" dirty="0" err="1">
+                <a:effectLst/>
+                <a:latin typeface="D2Coding" panose="020B0609020101020101" pitchFamily="49" charset="-127"/>
+                <a:ea typeface="D2Coding" panose="020B0609020101020101" pitchFamily="49" charset="-127"/>
+              </a:rPr>
+              <a:t>scores</a:t>
+            </a:r>
+            <a:r>
+              <a:rPr lang="ko-KR" altLang="ko-KR" sz="1400" b="0" dirty="0">
+                <a:effectLst/>
+                <a:latin typeface="D2Coding" panose="020B0609020101020101" pitchFamily="49" charset="-127"/>
+                <a:ea typeface="D2Coding" panose="020B0609020101020101" pitchFamily="49" charset="-127"/>
+              </a:rPr>
+              <a:t> * </a:t>
+            </a:r>
+            <a:r>
+              <a:rPr lang="ko-KR" altLang="ko-KR" sz="1400" b="0" dirty="0" err="1">
+                <a:effectLst/>
+                <a:latin typeface="D2Coding" panose="020B0609020101020101" pitchFamily="49" charset="-127"/>
+                <a:ea typeface="D2Coding" panose="020B0609020101020101" pitchFamily="49" charset="-127"/>
+              </a:rPr>
+              <a:t>sources</a:t>
+            </a:r>
+            <a:r>
+              <a:rPr lang="ko-KR" altLang="ko-KR" sz="1400" b="0" dirty="0">
+                <a:effectLst/>
+                <a:latin typeface="D2Coding" panose="020B0609020101020101" pitchFamily="49" charset="-127"/>
+                <a:ea typeface="D2Coding" panose="020B0609020101020101" pitchFamily="49" charset="-127"/>
+              </a:rPr>
+              <a:t>)을 한 뒤, 행(</a:t>
+            </a:r>
+            <a:r>
+              <a:rPr lang="ko-KR" altLang="ko-KR" sz="1400" b="0" dirty="0" err="1">
+                <a:effectLst/>
+                <a:latin typeface="D2Coding" panose="020B0609020101020101" pitchFamily="49" charset="-127"/>
+                <a:ea typeface="D2Coding" panose="020B0609020101020101" pitchFamily="49" charset="-127"/>
+              </a:rPr>
+              <a:t>axis</a:t>
+            </a:r>
+            <a:r>
+              <a:rPr lang="ko-KR" altLang="ko-KR" sz="1400" b="0" dirty="0">
+                <a:effectLst/>
+                <a:latin typeface="D2Coding" panose="020B0609020101020101" pitchFamily="49" charset="-127"/>
+                <a:ea typeface="D2Coding" panose="020B0609020101020101" pitchFamily="49" charset="-127"/>
+              </a:rPr>
+              <a:t>=0) 기준으로 </a:t>
+            </a:r>
+            <a:r>
+              <a:rPr lang="ko-KR" altLang="en-US" sz="1400" dirty="0">
+                <a:latin typeface="D2Coding" panose="020B0609020101020101" pitchFamily="49" charset="-127"/>
+                <a:ea typeface="D2Coding" panose="020B0609020101020101" pitchFamily="49" charset="-127"/>
+              </a:rPr>
+              <a:t>총합</a:t>
+            </a:r>
+            <a:endParaRPr lang="ko-KR" altLang="ko-KR" sz="1400" b="0" dirty="0">
+              <a:effectLst/>
+              <a:latin typeface="D2Coding" panose="020B0609020101020101" pitchFamily="49" charset="-127"/>
+              <a:ea typeface="D2Coding" panose="020B0609020101020101" pitchFamily="49" charset="-127"/>
+            </a:endParaRPr>
+          </a:p>
+          <a:p>
+            <a:pPr>
+              <a:lnSpc>
+                <a:spcPct val="150000"/>
+              </a:lnSpc>
+              <a:buNone/>
+            </a:pPr>
+            <a:r>
+              <a:rPr lang="ko-KR" altLang="ko-KR" sz="1400" b="0" dirty="0" err="1">
+                <a:effectLst/>
+                <a:latin typeface="D2Coding" panose="020B0609020101020101" pitchFamily="49" charset="-127"/>
+                <a:ea typeface="D2Coding" panose="020B0609020101020101" pitchFamily="49" charset="-127"/>
+              </a:rPr>
+              <a:t>combined</a:t>
+            </a:r>
+            <a:r>
+              <a:rPr lang="ko-KR" altLang="ko-KR" sz="1400" b="0" dirty="0">
+                <a:effectLst/>
+                <a:latin typeface="D2Coding" panose="020B0609020101020101" pitchFamily="49" charset="-127"/>
+                <a:ea typeface="D2Coding" panose="020B0609020101020101" pitchFamily="49" charset="-127"/>
+              </a:rPr>
+              <a:t> = </a:t>
+            </a:r>
+            <a:r>
+              <a:rPr lang="ko-KR" altLang="ko-KR" sz="1400" b="0" dirty="0" err="1">
+                <a:effectLst/>
+                <a:latin typeface="D2Coding" panose="020B0609020101020101" pitchFamily="49" charset="-127"/>
+                <a:ea typeface="D2Coding" panose="020B0609020101020101" pitchFamily="49" charset="-127"/>
+              </a:rPr>
+              <a:t>np.sum</a:t>
+            </a:r>
+            <a:r>
+              <a:rPr lang="ko-KR" altLang="ko-KR" sz="1400" b="0" dirty="0">
+                <a:effectLst/>
+                <a:latin typeface="D2Coding" panose="020B0609020101020101" pitchFamily="49" charset="-127"/>
+                <a:ea typeface="D2Coding" panose="020B0609020101020101" pitchFamily="49" charset="-127"/>
+              </a:rPr>
+              <a:t>(</a:t>
+            </a:r>
+            <a:r>
+              <a:rPr lang="ko-KR" altLang="ko-KR" sz="1400" b="0" dirty="0" err="1">
+                <a:effectLst/>
+                <a:latin typeface="D2Coding" panose="020B0609020101020101" pitchFamily="49" charset="-127"/>
+                <a:ea typeface="D2Coding" panose="020B0609020101020101" pitchFamily="49" charset="-127"/>
+              </a:rPr>
+              <a:t>attention_weights</a:t>
+            </a:r>
+            <a:r>
+              <a:rPr lang="ko-KR" altLang="ko-KR" sz="1400" b="0" dirty="0">
+                <a:effectLst/>
+                <a:latin typeface="D2Coding" panose="020B0609020101020101" pitchFamily="49" charset="-127"/>
+                <a:ea typeface="D2Coding" panose="020B0609020101020101" pitchFamily="49" charset="-127"/>
+              </a:rPr>
+              <a:t>[:, </a:t>
+            </a:r>
+            <a:r>
+              <a:rPr lang="ko-KR" altLang="ko-KR" sz="1400" b="0" dirty="0" err="1">
+                <a:effectLst/>
+                <a:latin typeface="D2Coding" panose="020B0609020101020101" pitchFamily="49" charset="-127"/>
+                <a:ea typeface="D2Coding" panose="020B0609020101020101" pitchFamily="49" charset="-127"/>
+              </a:rPr>
+              <a:t>np.newaxis</a:t>
+            </a:r>
+            <a:r>
+              <a:rPr lang="ko-KR" altLang="ko-KR" sz="1400" b="0" dirty="0">
+                <a:effectLst/>
+                <a:latin typeface="D2Coding" panose="020B0609020101020101" pitchFamily="49" charset="-127"/>
+                <a:ea typeface="D2Coding" panose="020B0609020101020101" pitchFamily="49" charset="-127"/>
+              </a:rPr>
+              <a:t>] * </a:t>
+            </a:r>
+            <a:r>
+              <a:rPr lang="ko-KR" altLang="ko-KR" sz="1400" b="0" dirty="0" err="1">
+                <a:effectLst/>
+                <a:latin typeface="D2Coding" panose="020B0609020101020101" pitchFamily="49" charset="-127"/>
+                <a:ea typeface="D2Coding" panose="020B0609020101020101" pitchFamily="49" charset="-127"/>
+              </a:rPr>
+              <a:t>sources</a:t>
+            </a:r>
+            <a:r>
+              <a:rPr lang="ko-KR" altLang="ko-KR" sz="1400" b="0" dirty="0">
+                <a:effectLst/>
+                <a:latin typeface="D2Coding" panose="020B0609020101020101" pitchFamily="49" charset="-127"/>
+                <a:ea typeface="D2Coding" panose="020B0609020101020101" pitchFamily="49" charset="-127"/>
+              </a:rPr>
+              <a:t>, </a:t>
+            </a:r>
+            <a:r>
+              <a:rPr lang="ko-KR" altLang="ko-KR" sz="1400" b="0" dirty="0" err="1">
+                <a:effectLst/>
+                <a:latin typeface="D2Coding" panose="020B0609020101020101" pitchFamily="49" charset="-127"/>
+                <a:ea typeface="D2Coding" panose="020B0609020101020101" pitchFamily="49" charset="-127"/>
+              </a:rPr>
+              <a:t>axis</a:t>
+            </a:r>
+            <a:r>
+              <a:rPr lang="ko-KR" altLang="ko-KR" sz="1400" b="0" dirty="0">
+                <a:effectLst/>
+                <a:latin typeface="D2Coding" panose="020B0609020101020101" pitchFamily="49" charset="-127"/>
+                <a:ea typeface="D2Coding" panose="020B0609020101020101" pitchFamily="49" charset="-127"/>
+              </a:rPr>
+              <a:t>=0)</a:t>
+            </a:r>
+          </a:p>
+          <a:p>
+            <a:pPr>
+              <a:lnSpc>
+                <a:spcPct val="150000"/>
+              </a:lnSpc>
+            </a:pPr>
+            <a:r>
+              <a:rPr lang="ko-KR" altLang="ko-KR" sz="1400" dirty="0" err="1">
+                <a:latin typeface="D2Coding" panose="020B0609020101020101" pitchFamily="49" charset="-127"/>
+                <a:ea typeface="D2Coding" panose="020B0609020101020101" pitchFamily="49" charset="-127"/>
+              </a:rPr>
+              <a:t>print</a:t>
+            </a:r>
+            <a:r>
+              <a:rPr lang="ko-KR" altLang="ko-KR" sz="1400" dirty="0">
+                <a:latin typeface="D2Coding" panose="020B0609020101020101" pitchFamily="49" charset="-127"/>
+                <a:ea typeface="D2Coding" panose="020B0609020101020101" pitchFamily="49" charset="-127"/>
+              </a:rPr>
+              <a:t>(</a:t>
+            </a:r>
+            <a:r>
+              <a:rPr lang="ko-KR" altLang="ko-KR" sz="1400" dirty="0" err="1">
+                <a:latin typeface="D2Coding" panose="020B0609020101020101" pitchFamily="49" charset="-127"/>
+                <a:ea typeface="D2Coding" panose="020B0609020101020101" pitchFamily="49" charset="-127"/>
+              </a:rPr>
+              <a:t>f</a:t>
+            </a:r>
+            <a:r>
+              <a:rPr lang="ko-KR" altLang="ko-KR" sz="1400" dirty="0">
+                <a:latin typeface="D2Coding" panose="020B0609020101020101" pitchFamily="49" charset="-127"/>
+                <a:ea typeface="D2Coding" panose="020B0609020101020101" pitchFamily="49" charset="-127"/>
+              </a:rPr>
+              <a:t>"\n3. 최종 추출된 문맥 벡터 (</a:t>
+            </a:r>
+            <a:r>
+              <a:rPr lang="ko-KR" altLang="ko-KR" sz="1400" dirty="0" err="1">
+                <a:latin typeface="D2Coding" panose="020B0609020101020101" pitchFamily="49" charset="-127"/>
+                <a:ea typeface="D2Coding" panose="020B0609020101020101" pitchFamily="49" charset="-127"/>
+              </a:rPr>
+              <a:t>Combined</a:t>
+            </a:r>
+            <a:r>
+              <a:rPr lang="ko-KR" altLang="ko-KR" sz="1400" dirty="0">
+                <a:latin typeface="D2Coding" panose="020B0609020101020101" pitchFamily="49" charset="-127"/>
+                <a:ea typeface="D2Coding" panose="020B0609020101020101" pitchFamily="49" charset="-127"/>
+              </a:rPr>
+              <a:t> </a:t>
+            </a:r>
+            <a:r>
+              <a:rPr lang="ko-KR" altLang="ko-KR" sz="1400" dirty="0" err="1">
+                <a:latin typeface="D2Coding" panose="020B0609020101020101" pitchFamily="49" charset="-127"/>
+                <a:ea typeface="D2Coding" panose="020B0609020101020101" pitchFamily="49" charset="-127"/>
+              </a:rPr>
+              <a:t>Context</a:t>
+            </a:r>
+            <a:r>
+              <a:rPr lang="ko-KR" altLang="ko-KR" sz="1400" dirty="0">
+                <a:latin typeface="D2Coding" panose="020B0609020101020101" pitchFamily="49" charset="-127"/>
+                <a:ea typeface="D2Coding" panose="020B0609020101020101" pitchFamily="49" charset="-127"/>
+              </a:rPr>
+              <a:t> </a:t>
+            </a:r>
+            <a:r>
+              <a:rPr lang="ko-KR" altLang="ko-KR" sz="1400" dirty="0" err="1">
+                <a:latin typeface="D2Coding" panose="020B0609020101020101" pitchFamily="49" charset="-127"/>
+                <a:ea typeface="D2Coding" panose="020B0609020101020101" pitchFamily="49" charset="-127"/>
+              </a:rPr>
+              <a:t>Vector</a:t>
+            </a:r>
+            <a:r>
+              <a:rPr lang="ko-KR" altLang="ko-KR" sz="1400" dirty="0">
+                <a:latin typeface="D2Coding" panose="020B0609020101020101" pitchFamily="49" charset="-127"/>
+                <a:ea typeface="D2Coding" panose="020B0609020101020101" pitchFamily="49" charset="-127"/>
+              </a:rPr>
+              <a:t>): {</a:t>
+            </a:r>
+            <a:r>
+              <a:rPr lang="ko-KR" altLang="ko-KR" sz="1400" dirty="0" err="1">
+                <a:latin typeface="D2Coding" panose="020B0609020101020101" pitchFamily="49" charset="-127"/>
+                <a:ea typeface="D2Coding" panose="020B0609020101020101" pitchFamily="49" charset="-127"/>
+              </a:rPr>
+              <a:t>combined</a:t>
+            </a:r>
+            <a:r>
+              <a:rPr lang="ko-KR" altLang="ko-KR" sz="1400" dirty="0">
+                <a:latin typeface="D2Coding" panose="020B0609020101020101" pitchFamily="49" charset="-127"/>
+                <a:ea typeface="D2Coding" panose="020B0609020101020101" pitchFamily="49" charset="-127"/>
+              </a:rPr>
+              <a:t>}")</a:t>
+            </a:r>
+          </a:p>
+        </p:txBody>
+      </p:sp>
+      <p:sp>
+        <p:nvSpPr>
+          <p:cNvPr id="5" name="TextBox 4">
+            <a:extLst>
+              <a:ext uri="{FF2B5EF4-FFF2-40B4-BE49-F238E27FC236}">
+                <a16:creationId xmlns:a16="http://schemas.microsoft.com/office/drawing/2014/main" id="{B845E81A-875F-A5EE-79EC-22F770545304}"/>
+              </a:ext>
+            </a:extLst>
+          </p:cNvPr>
+          <p:cNvSpPr txBox="1"/>
+          <p:nvPr/>
+        </p:nvSpPr>
+        <p:spPr>
+          <a:xfrm>
+            <a:off x="6966408" y="826899"/>
+            <a:ext cx="4600281" cy="369332"/>
+          </a:xfrm>
+          <a:prstGeom prst="rect">
+            <a:avLst/>
+          </a:prstGeom>
+          <a:noFill/>
+        </p:spPr>
+        <p:txBody>
+          <a:bodyPr wrap="square">
+            <a:spAutoFit/>
+          </a:bodyPr>
+          <a:lstStyle/>
+          <a:p>
+            <a:pPr indent="0" algn="r">
+              <a:buNone/>
+            </a:pPr>
+            <a:r>
+              <a:rPr lang="ko-KR" altLang="ko-KR" sz="1800" b="1" i="0" dirty="0" err="1">
+                <a:effectLst/>
+                <a:latin typeface="Lora" pitchFamily="2" charset="0"/>
+              </a:rPr>
+              <a:t>Dot-product</a:t>
+            </a:r>
+            <a:r>
+              <a:rPr lang="ko-KR" altLang="ko-KR" sz="1800" b="1" i="0" dirty="0">
+                <a:effectLst/>
+                <a:latin typeface="Lora" pitchFamily="2" charset="0"/>
+              </a:rPr>
+              <a:t> </a:t>
+            </a:r>
+            <a:r>
+              <a:rPr lang="ko-KR" altLang="ko-KR" sz="1800" b="1" i="0" dirty="0" err="1">
+                <a:effectLst/>
+                <a:latin typeface="Lora" pitchFamily="2" charset="0"/>
+              </a:rPr>
+              <a:t>attention</a:t>
+            </a:r>
+            <a:endParaRPr lang="ko-KR" altLang="ko-KR" sz="1800" b="1" i="0" dirty="0">
+              <a:effectLst/>
+              <a:latin typeface="Lora" pitchFamily="2" charset="0"/>
+            </a:endParaRPr>
+          </a:p>
+        </p:txBody>
+      </p:sp>
+    </p:spTree>
+    <p:extLst>
+      <p:ext uri="{BB962C8B-B14F-4D97-AF65-F5344CB8AC3E}">
+        <p14:creationId xmlns:p14="http://schemas.microsoft.com/office/powerpoint/2010/main" val="2621999612"/>
+      </p:ext>
+    </p:extLst>
+  </p:cSld>
+  <p:clrMapOvr>
+    <a:masterClrMapping/>
+  </p:clrMapOvr>
+</p:sld>
+</file>
+
+<file path=ppt/slides/slide23.xml><?xml version="1.0" encoding="utf-8"?>
 <p:sld xmlns:a="http://schemas.openxmlformats.org/drawingml/2006/main" xmlns:r="http://schemas.openxmlformats.org/officeDocument/2006/relationships" xmlns:p="http://schemas.openxmlformats.org/presentationml/2006/main">
   <p:cSld>
     <p:spTree>
@@ -11635,7 +17129,7 @@
             <a:fld id="{D57F1E4F-1CFF-5643-939E-217C01CDF565}" type="slidenum">
               <a:rPr lang="en-US" smtClean="0"/>
               <a:pPr/>
-              <a:t>21</a:t>
+              <a:t>23</a:t>
             </a:fld>
             <a:endParaRPr lang="en-US" dirty="0"/>
           </a:p>
@@ -11699,6 +17193,1202 @@
           </a:p>
         </p:txBody>
       </p:sp>
+      <p:pic>
+        <p:nvPicPr>
+          <p:cNvPr id="5" name="그림 4">
+            <a:extLst>
+              <a:ext uri="{FF2B5EF4-FFF2-40B4-BE49-F238E27FC236}">
+                <a16:creationId xmlns:a16="http://schemas.microsoft.com/office/drawing/2014/main" id="{E351A6D1-52D7-E7C4-E4C9-F3AF795934AC}"/>
+              </a:ext>
+            </a:extLst>
+          </p:cNvPr>
+          <p:cNvPicPr>
+            <a:picLocks noChangeAspect="1"/>
+          </p:cNvPicPr>
+          <p:nvPr/>
+        </p:nvPicPr>
+        <p:blipFill>
+          <a:blip r:embed="rId2"/>
+          <a:stretch>
+            <a:fillRect/>
+          </a:stretch>
+        </p:blipFill>
+        <p:spPr>
+          <a:xfrm>
+            <a:off x="627175" y="1366661"/>
+            <a:ext cx="4948745" cy="2229697"/>
+          </a:xfrm>
+          <a:prstGeom prst="rect">
+            <a:avLst/>
+          </a:prstGeom>
+        </p:spPr>
+      </p:pic>
+      <p:sp>
+        <p:nvSpPr>
+          <p:cNvPr id="7" name="TextBox 6">
+            <a:extLst>
+              <a:ext uri="{FF2B5EF4-FFF2-40B4-BE49-F238E27FC236}">
+                <a16:creationId xmlns:a16="http://schemas.microsoft.com/office/drawing/2014/main" id="{1228AC0E-2712-39EE-3B6F-D2420FAEA1A5}"/>
+              </a:ext>
+            </a:extLst>
+          </p:cNvPr>
+          <p:cNvSpPr txBox="1"/>
+          <p:nvPr/>
+        </p:nvSpPr>
+        <p:spPr>
+          <a:xfrm>
+            <a:off x="1476339" y="3662917"/>
+            <a:ext cx="1689897" cy="276999"/>
+          </a:xfrm>
+          <a:prstGeom prst="rect">
+            <a:avLst/>
+          </a:prstGeom>
+          <a:solidFill>
+            <a:schemeClr val="bg1"/>
+          </a:solidFill>
+          <a:ln w="28575">
+            <a:solidFill>
+              <a:srgbClr val="FF0000"/>
+            </a:solidFill>
+          </a:ln>
+        </p:spPr>
+        <p:txBody>
+          <a:bodyPr wrap="square">
+            <a:spAutoFit/>
+          </a:bodyPr>
+          <a:lstStyle/>
+          <a:p>
+            <a:r>
+              <a:rPr lang="ko-KR" altLang="ko-KR" sz="1200" dirty="0">
+                <a:latin typeface="D2Coding" panose="020B0609020101020101" pitchFamily="49" charset="-127"/>
+                <a:ea typeface="D2Coding" panose="020B0609020101020101" pitchFamily="49" charset="-127"/>
+              </a:rPr>
+              <a:t>[0.7, 0.8, 0.6, 0.9]</a:t>
+            </a:r>
+          </a:p>
+        </p:txBody>
+      </p:sp>
+      <p:sp>
+        <p:nvSpPr>
+          <p:cNvPr id="9" name="TextBox 8">
+            <a:extLst>
+              <a:ext uri="{FF2B5EF4-FFF2-40B4-BE49-F238E27FC236}">
+                <a16:creationId xmlns:a16="http://schemas.microsoft.com/office/drawing/2014/main" id="{51488CF9-30F3-19FA-39C6-E5D6ED8B648D}"/>
+              </a:ext>
+            </a:extLst>
+          </p:cNvPr>
+          <p:cNvSpPr txBox="1"/>
+          <p:nvPr/>
+        </p:nvSpPr>
+        <p:spPr>
+          <a:xfrm>
+            <a:off x="3004785" y="5759262"/>
+            <a:ext cx="2345495" cy="276999"/>
+          </a:xfrm>
+          <a:prstGeom prst="rect">
+            <a:avLst/>
+          </a:prstGeom>
+          <a:solidFill>
+            <a:schemeClr val="bg1"/>
+          </a:solidFill>
+          <a:ln w="28575">
+            <a:solidFill>
+              <a:srgbClr val="00B0F0"/>
+            </a:solidFill>
+          </a:ln>
+        </p:spPr>
+        <p:txBody>
+          <a:bodyPr wrap="square">
+            <a:spAutoFit/>
+          </a:bodyPr>
+          <a:lstStyle/>
+          <a:p>
+            <a:r>
+              <a:rPr lang="ko-KR" altLang="ko-KR" sz="1200" dirty="0">
+                <a:latin typeface="D2Coding" panose="020B0609020101020101" pitchFamily="49" charset="-127"/>
+                <a:ea typeface="D2Coding" panose="020B0609020101020101" pitchFamily="49" charset="-127"/>
+              </a:rPr>
+              <a:t>[0.631</a:t>
+            </a:r>
+            <a:r>
+              <a:rPr lang="en-US" altLang="ko-KR" sz="1200" dirty="0">
+                <a:latin typeface="D2Coding" panose="020B0609020101020101" pitchFamily="49" charset="-127"/>
+                <a:ea typeface="D2Coding" panose="020B0609020101020101" pitchFamily="49" charset="-127"/>
+              </a:rPr>
+              <a:t>, </a:t>
+            </a:r>
+            <a:r>
+              <a:rPr lang="ko-KR" altLang="ko-KR" sz="1200" dirty="0">
+                <a:latin typeface="D2Coding" panose="020B0609020101020101" pitchFamily="49" charset="-127"/>
+                <a:ea typeface="D2Coding" panose="020B0609020101020101" pitchFamily="49" charset="-127"/>
+              </a:rPr>
+              <a:t>0.679</a:t>
+            </a:r>
+            <a:r>
+              <a:rPr lang="en-US" altLang="ko-KR" sz="1200" dirty="0">
+                <a:latin typeface="D2Coding" panose="020B0609020101020101" pitchFamily="49" charset="-127"/>
+                <a:ea typeface="D2Coding" panose="020B0609020101020101" pitchFamily="49" charset="-127"/>
+              </a:rPr>
+              <a:t>,</a:t>
+            </a:r>
+            <a:r>
+              <a:rPr lang="ko-KR" altLang="ko-KR" sz="1200" dirty="0">
+                <a:latin typeface="D2Coding" panose="020B0609020101020101" pitchFamily="49" charset="-127"/>
+                <a:ea typeface="D2Coding" panose="020B0609020101020101" pitchFamily="49" charset="-127"/>
+              </a:rPr>
+              <a:t> 0.592</a:t>
+            </a:r>
+            <a:r>
+              <a:rPr lang="en-US" altLang="ko-KR" sz="1200" dirty="0">
+                <a:latin typeface="D2Coding" panose="020B0609020101020101" pitchFamily="49" charset="-127"/>
+                <a:ea typeface="D2Coding" panose="020B0609020101020101" pitchFamily="49" charset="-127"/>
+              </a:rPr>
+              <a:t>,</a:t>
+            </a:r>
+            <a:r>
+              <a:rPr lang="ko-KR" altLang="ko-KR" sz="1200" dirty="0">
+                <a:latin typeface="D2Coding" panose="020B0609020101020101" pitchFamily="49" charset="-127"/>
+                <a:ea typeface="D2Coding" panose="020B0609020101020101" pitchFamily="49" charset="-127"/>
+              </a:rPr>
+              <a:t> 0.65</a:t>
+            </a:r>
+            <a:r>
+              <a:rPr lang="en-US" altLang="ko-KR" sz="1200" dirty="0">
+                <a:latin typeface="D2Coding" panose="020B0609020101020101" pitchFamily="49" charset="-127"/>
+                <a:ea typeface="D2Coding" panose="020B0609020101020101" pitchFamily="49" charset="-127"/>
+              </a:rPr>
+              <a:t>3</a:t>
+            </a:r>
+            <a:r>
+              <a:rPr lang="ko-KR" altLang="ko-KR" sz="1200" dirty="0">
+                <a:latin typeface="D2Coding" panose="020B0609020101020101" pitchFamily="49" charset="-127"/>
+                <a:ea typeface="D2Coding" panose="020B0609020101020101" pitchFamily="49" charset="-127"/>
+              </a:rPr>
+              <a:t>]</a:t>
+            </a:r>
+            <a:endParaRPr lang="ko-KR" altLang="en-US" sz="1200" dirty="0">
+              <a:latin typeface="D2Coding" panose="020B0609020101020101" pitchFamily="49" charset="-127"/>
+              <a:ea typeface="D2Coding" panose="020B0609020101020101" pitchFamily="49" charset="-127"/>
+            </a:endParaRPr>
+          </a:p>
+        </p:txBody>
+      </p:sp>
+      <p:sp>
+        <p:nvSpPr>
+          <p:cNvPr id="11" name="직사각형 10">
+            <a:extLst>
+              <a:ext uri="{FF2B5EF4-FFF2-40B4-BE49-F238E27FC236}">
+                <a16:creationId xmlns:a16="http://schemas.microsoft.com/office/drawing/2014/main" id="{214489A3-B97F-4857-94C9-992DACAD2A0C}"/>
+              </a:ext>
+            </a:extLst>
+          </p:cNvPr>
+          <p:cNvSpPr/>
+          <p:nvPr/>
+        </p:nvSpPr>
+        <p:spPr>
+          <a:xfrm>
+            <a:off x="1865746" y="3240628"/>
+            <a:ext cx="911085" cy="355730"/>
+          </a:xfrm>
+          <a:prstGeom prst="rect">
+            <a:avLst/>
+          </a:prstGeom>
+          <a:noFill/>
+          <a:ln w="28575">
+            <a:solidFill>
+              <a:srgbClr val="FF0000"/>
+            </a:solidFill>
+          </a:ln>
+        </p:spPr>
+        <p:style>
+          <a:lnRef idx="2">
+            <a:schemeClr val="accent1">
+              <a:shade val="15000"/>
+            </a:schemeClr>
+          </a:lnRef>
+          <a:fillRef idx="1">
+            <a:schemeClr val="accent1"/>
+          </a:fillRef>
+          <a:effectRef idx="0">
+            <a:schemeClr val="accent1"/>
+          </a:effectRef>
+          <a:fontRef idx="minor">
+            <a:schemeClr val="lt1"/>
+          </a:fontRef>
+        </p:style>
+        <p:txBody>
+          <a:bodyPr rtlCol="0" anchor="ctr"/>
+          <a:lstStyle/>
+          <a:p>
+            <a:pPr algn="ctr"/>
+            <a:endParaRPr lang="ko-KR" altLang="en-US" sz="1600"/>
+          </a:p>
+        </p:txBody>
+      </p:sp>
+      <p:sp>
+        <p:nvSpPr>
+          <p:cNvPr id="17" name="TextBox 16">
+            <a:extLst>
+              <a:ext uri="{FF2B5EF4-FFF2-40B4-BE49-F238E27FC236}">
+                <a16:creationId xmlns:a16="http://schemas.microsoft.com/office/drawing/2014/main" id="{6F8D586B-E5DC-F053-E5A6-159ABD6EE8B3}"/>
+              </a:ext>
+            </a:extLst>
+          </p:cNvPr>
+          <p:cNvSpPr txBox="1"/>
+          <p:nvPr/>
+        </p:nvSpPr>
+        <p:spPr>
+          <a:xfrm>
+            <a:off x="3053757" y="4179119"/>
+            <a:ext cx="2247549" cy="338554"/>
+          </a:xfrm>
+          <a:prstGeom prst="rect">
+            <a:avLst/>
+          </a:prstGeom>
+          <a:noFill/>
+        </p:spPr>
+        <p:txBody>
+          <a:bodyPr wrap="square">
+            <a:spAutoFit/>
+          </a:bodyPr>
+          <a:lstStyle/>
+          <a:p>
+            <a:pPr algn="ctr"/>
+            <a:r>
+              <a:rPr lang="en-US" altLang="ko-KR" sz="1600" dirty="0">
+                <a:solidFill>
+                  <a:srgbClr val="000000"/>
+                </a:solidFill>
+                <a:latin typeface="D2Coding" panose="020B0609020101020101" pitchFamily="49" charset="-127"/>
+                <a:ea typeface="D2Coding" panose="020B0609020101020101" pitchFamily="49" charset="-127"/>
+              </a:rPr>
+              <a:t>Attention Mechanism</a:t>
+            </a:r>
+            <a:endParaRPr lang="ko-KR" altLang="en-US" sz="1600" dirty="0"/>
+          </a:p>
+        </p:txBody>
+      </p:sp>
+      <p:sp>
+        <p:nvSpPr>
+          <p:cNvPr id="22" name="TextBox 21">
+            <a:extLst>
+              <a:ext uri="{FF2B5EF4-FFF2-40B4-BE49-F238E27FC236}">
+                <a16:creationId xmlns:a16="http://schemas.microsoft.com/office/drawing/2014/main" id="{6124CC52-E662-7DCB-F345-32678DD6EED8}"/>
+              </a:ext>
+            </a:extLst>
+          </p:cNvPr>
+          <p:cNvSpPr txBox="1"/>
+          <p:nvPr/>
+        </p:nvSpPr>
+        <p:spPr>
+          <a:xfrm>
+            <a:off x="5726546" y="1366661"/>
+            <a:ext cx="6096000" cy="4865306"/>
+          </a:xfrm>
+          <a:prstGeom prst="rect">
+            <a:avLst/>
+          </a:prstGeom>
+          <a:noFill/>
+        </p:spPr>
+        <p:txBody>
+          <a:bodyPr wrap="square">
+            <a:spAutoFit/>
+          </a:bodyPr>
+          <a:lstStyle/>
+          <a:p>
+            <a:pPr>
+              <a:lnSpc>
+                <a:spcPct val="150000"/>
+              </a:lnSpc>
+            </a:pPr>
+            <a:r>
+              <a:rPr lang="en-US" altLang="ko-KR" sz="1400" b="1" dirty="0">
+                <a:latin typeface="D2Coding" panose="020B0609020101020101" pitchFamily="49" charset="-127"/>
+                <a:ea typeface="D2Coding" panose="020B0609020101020101" pitchFamily="49" charset="-127"/>
+              </a:rPr>
+              <a:t>Attention Mechanism = </a:t>
+            </a:r>
+            <a:r>
+              <a:rPr lang="ko-KR" altLang="ko-KR" sz="1400" b="1" dirty="0">
+                <a:latin typeface="D2Coding" panose="020B0609020101020101" pitchFamily="49" charset="-127"/>
+                <a:ea typeface="D2Coding" panose="020B0609020101020101" pitchFamily="49" charset="-127"/>
+              </a:rPr>
+              <a:t>맞춤형 문맥 가이드라인</a:t>
+            </a:r>
+            <a:endParaRPr lang="en-US" altLang="ko-KR" sz="1400" b="1" dirty="0">
+              <a:latin typeface="D2Coding" panose="020B0609020101020101" pitchFamily="49" charset="-127"/>
+              <a:ea typeface="D2Coding" panose="020B0609020101020101" pitchFamily="49" charset="-127"/>
+            </a:endParaRPr>
+          </a:p>
+          <a:p>
+            <a:pPr>
+              <a:lnSpc>
+                <a:spcPct val="150000"/>
+              </a:lnSpc>
+            </a:pPr>
+            <a:endParaRPr lang="en-US" altLang="ko-KR" sz="1400" b="1" dirty="0">
+              <a:latin typeface="D2Coding" panose="020B0609020101020101" pitchFamily="49" charset="-127"/>
+              <a:ea typeface="D2Coding" panose="020B0609020101020101" pitchFamily="49" charset="-127"/>
+            </a:endParaRPr>
+          </a:p>
+          <a:p>
+            <a:pPr marL="285750" indent="-285750">
+              <a:lnSpc>
+                <a:spcPct val="150000"/>
+              </a:lnSpc>
+              <a:buFont typeface="Wingdings" panose="05000000000000000000" pitchFamily="2" charset="2"/>
+              <a:buChar char="v"/>
+            </a:pPr>
+            <a:r>
+              <a:rPr lang="ko-KR" altLang="en-US" sz="1200" dirty="0">
+                <a:latin typeface="D2Coding" panose="020B0609020101020101" pitchFamily="49" charset="-127"/>
+                <a:ea typeface="D2Coding" panose="020B0609020101020101" pitchFamily="49" charset="-127"/>
+              </a:rPr>
+              <a:t>마지막</a:t>
+            </a:r>
+            <a:r>
+              <a:rPr lang="en-US" altLang="ko-KR" sz="1200" dirty="0">
+                <a:latin typeface="D2Coding" panose="020B0609020101020101" pitchFamily="49" charset="-127"/>
+                <a:ea typeface="D2Coding" panose="020B0609020101020101" pitchFamily="49" charset="-127"/>
+              </a:rPr>
+              <a:t> </a:t>
+            </a:r>
+            <a:r>
+              <a:rPr lang="ko-KR" altLang="ko-KR" sz="1200" dirty="0">
+                <a:latin typeface="D2Coding" panose="020B0609020101020101" pitchFamily="49" charset="-127"/>
+                <a:ea typeface="D2Coding" panose="020B0609020101020101" pitchFamily="49" charset="-127"/>
+              </a:rPr>
+              <a:t>벡터는 다음 레이어로 넘겨줄 "스페인어 문장의 엑기스 </a:t>
+            </a:r>
+            <a:r>
+              <a:rPr lang="ko-KR" altLang="ko-KR" sz="1200" dirty="0" err="1">
+                <a:latin typeface="D2Coding" panose="020B0609020101020101" pitchFamily="49" charset="-127"/>
+                <a:ea typeface="D2Coding" panose="020B0609020101020101" pitchFamily="49" charset="-127"/>
+              </a:rPr>
+              <a:t>요약본“</a:t>
+            </a:r>
+            <a:r>
+              <a:rPr lang="ko-KR" altLang="en-US" sz="1200" dirty="0" err="1">
+                <a:latin typeface="D2Coding" panose="020B0609020101020101" pitchFamily="49" charset="-127"/>
+                <a:ea typeface="D2Coding" panose="020B0609020101020101" pitchFamily="49" charset="-127"/>
+              </a:rPr>
+              <a:t>으로</a:t>
+            </a:r>
+            <a:r>
+              <a:rPr lang="en-US" altLang="ko-KR" sz="1200" dirty="0">
+                <a:latin typeface="D2Coding" panose="020B0609020101020101" pitchFamily="49" charset="-127"/>
+                <a:ea typeface="D2Coding" panose="020B0609020101020101" pitchFamily="49" charset="-127"/>
+              </a:rPr>
+              <a:t> </a:t>
+            </a:r>
+            <a:r>
+              <a:rPr lang="ko-KR" altLang="ko-KR" sz="1200" dirty="0">
+                <a:latin typeface="D2Coding" panose="020B0609020101020101" pitchFamily="49" charset="-127"/>
+                <a:ea typeface="D2Coding" panose="020B0609020101020101" pitchFamily="49" charset="-127"/>
+              </a:rPr>
+              <a:t>수치를 뜯어보면 소름 돋는 포인트</a:t>
+            </a:r>
+            <a:endParaRPr lang="en-US" altLang="ko-KR" sz="1200" dirty="0">
+              <a:latin typeface="D2Coding" panose="020B0609020101020101" pitchFamily="49" charset="-127"/>
+              <a:ea typeface="D2Coding" panose="020B0609020101020101" pitchFamily="49" charset="-127"/>
+            </a:endParaRPr>
+          </a:p>
+          <a:p>
+            <a:pPr marL="285750" indent="-285750">
+              <a:lnSpc>
+                <a:spcPct val="150000"/>
+              </a:lnSpc>
+              <a:buFont typeface="Wingdings" panose="05000000000000000000" pitchFamily="2" charset="2"/>
+              <a:buChar char="v"/>
+            </a:pPr>
+            <a:r>
+              <a:rPr lang="ko-KR" altLang="ko-KR" sz="1200" dirty="0">
+                <a:latin typeface="D2Coding" panose="020B0609020101020101" pitchFamily="49" charset="-127"/>
+                <a:ea typeface="D2Coding" panose="020B0609020101020101" pitchFamily="49" charset="-127"/>
+              </a:rPr>
+              <a:t>원본 스페인어 단어 중 가장 중요했던 "</a:t>
+            </a:r>
+            <a:r>
+              <a:rPr lang="ko-KR" altLang="ko-KR" sz="1200" dirty="0" err="1">
+                <a:latin typeface="D2Coding" panose="020B0609020101020101" pitchFamily="49" charset="-127"/>
+                <a:ea typeface="D2Coding" panose="020B0609020101020101" pitchFamily="49" charset="-127"/>
+              </a:rPr>
+              <a:t>traeré</a:t>
+            </a:r>
+            <a:r>
+              <a:rPr lang="ko-KR" altLang="ko-KR" sz="1200" dirty="0">
+                <a:latin typeface="D2Coding" panose="020B0609020101020101" pitchFamily="49" charset="-127"/>
+                <a:ea typeface="D2Coding" panose="020B0609020101020101" pitchFamily="49" charset="-127"/>
+              </a:rPr>
+              <a:t>" [0.8, 0.9, 0.7, 0.9]의 값과 최종 결과물 [0.63</a:t>
+            </a:r>
+            <a:r>
+              <a:rPr lang="en-US" altLang="ko-KR" sz="1200" dirty="0">
+                <a:latin typeface="D2Coding" panose="020B0609020101020101" pitchFamily="49" charset="-127"/>
+                <a:ea typeface="D2Coding" panose="020B0609020101020101" pitchFamily="49" charset="-127"/>
+              </a:rPr>
+              <a:t>1</a:t>
+            </a:r>
+            <a:r>
+              <a:rPr lang="ko-KR" altLang="ko-KR" sz="1200" dirty="0">
+                <a:latin typeface="D2Coding" panose="020B0609020101020101" pitchFamily="49" charset="-127"/>
+                <a:ea typeface="D2Coding" panose="020B0609020101020101" pitchFamily="49" charset="-127"/>
+              </a:rPr>
+              <a:t>, 0.67</a:t>
+            </a:r>
+            <a:r>
+              <a:rPr lang="en-US" altLang="ko-KR" sz="1200" dirty="0">
+                <a:latin typeface="D2Coding" panose="020B0609020101020101" pitchFamily="49" charset="-127"/>
+                <a:ea typeface="D2Coding" panose="020B0609020101020101" pitchFamily="49" charset="-127"/>
+              </a:rPr>
+              <a:t>9</a:t>
+            </a:r>
+            <a:r>
+              <a:rPr lang="ko-KR" altLang="ko-KR" sz="1200" dirty="0">
+                <a:latin typeface="D2Coding" panose="020B0609020101020101" pitchFamily="49" charset="-127"/>
+                <a:ea typeface="D2Coding" panose="020B0609020101020101" pitchFamily="49" charset="-127"/>
+              </a:rPr>
+              <a:t>, 0.59</a:t>
+            </a:r>
+            <a:r>
+              <a:rPr lang="en-US" altLang="ko-KR" sz="1200" dirty="0">
+                <a:latin typeface="D2Coding" panose="020B0609020101020101" pitchFamily="49" charset="-127"/>
+                <a:ea typeface="D2Coding" panose="020B0609020101020101" pitchFamily="49" charset="-127"/>
+              </a:rPr>
+              <a:t>2</a:t>
+            </a:r>
+            <a:r>
+              <a:rPr lang="ko-KR" altLang="ko-KR" sz="1200" dirty="0">
+                <a:latin typeface="D2Coding" panose="020B0609020101020101" pitchFamily="49" charset="-127"/>
+                <a:ea typeface="D2Coding" panose="020B0609020101020101" pitchFamily="49" charset="-127"/>
+              </a:rPr>
+              <a:t>, 0.65</a:t>
+            </a:r>
+            <a:r>
+              <a:rPr lang="en-US" altLang="ko-KR" sz="1200" dirty="0">
+                <a:latin typeface="D2Coding" panose="020B0609020101020101" pitchFamily="49" charset="-127"/>
+                <a:ea typeface="D2Coding" panose="020B0609020101020101" pitchFamily="49" charset="-127"/>
+              </a:rPr>
+              <a:t>3</a:t>
+            </a:r>
+            <a:r>
+              <a:rPr lang="ko-KR" altLang="ko-KR" sz="1200" dirty="0">
+                <a:latin typeface="D2Coding" panose="020B0609020101020101" pitchFamily="49" charset="-127"/>
+                <a:ea typeface="D2Coding" panose="020B0609020101020101" pitchFamily="49" charset="-127"/>
+              </a:rPr>
+              <a:t>]를 비교해 보세요</a:t>
+            </a:r>
+            <a:endParaRPr lang="en-US" altLang="ko-KR" sz="1200" dirty="0">
+              <a:latin typeface="D2Coding" panose="020B0609020101020101" pitchFamily="49" charset="-127"/>
+              <a:ea typeface="D2Coding" panose="020B0609020101020101" pitchFamily="49" charset="-127"/>
+            </a:endParaRPr>
+          </a:p>
+          <a:p>
+            <a:pPr marL="285750" indent="-285750">
+              <a:lnSpc>
+                <a:spcPct val="150000"/>
+              </a:lnSpc>
+              <a:buFont typeface="Wingdings" panose="05000000000000000000" pitchFamily="2" charset="2"/>
+              <a:buChar char="v"/>
+            </a:pPr>
+            <a:r>
+              <a:rPr lang="ko-KR" altLang="ko-KR" sz="1200" dirty="0">
+                <a:latin typeface="D2Coding" panose="020B0609020101020101" pitchFamily="49" charset="-127"/>
+                <a:ea typeface="D2Coding" panose="020B0609020101020101" pitchFamily="49" charset="-127"/>
+              </a:rPr>
+              <a:t>64.6%라는 큰 가중치를 받았기 때문에 전체적인 모양새(수치 경향성)가 "</a:t>
+            </a:r>
+            <a:r>
+              <a:rPr lang="ko-KR" altLang="ko-KR" sz="1200" dirty="0" err="1">
+                <a:latin typeface="D2Coding" panose="020B0609020101020101" pitchFamily="49" charset="-127"/>
+                <a:ea typeface="D2Coding" panose="020B0609020101020101" pitchFamily="49" charset="-127"/>
+              </a:rPr>
+              <a:t>traeré"를</a:t>
+            </a:r>
+            <a:r>
+              <a:rPr lang="ko-KR" altLang="ko-KR" sz="1200" dirty="0">
+                <a:latin typeface="D2Coding" panose="020B0609020101020101" pitchFamily="49" charset="-127"/>
+                <a:ea typeface="D2Coding" panose="020B0609020101020101" pitchFamily="49" charset="-127"/>
+              </a:rPr>
+              <a:t> 쏙 </a:t>
+            </a:r>
+            <a:r>
+              <a:rPr lang="ko-KR" altLang="ko-KR" sz="1200" dirty="0" err="1">
+                <a:latin typeface="D2Coding" panose="020B0609020101020101" pitchFamily="49" charset="-127"/>
+                <a:ea typeface="D2Coding" panose="020B0609020101020101" pitchFamily="49" charset="-127"/>
+              </a:rPr>
+              <a:t>빼닮아</a:t>
+            </a:r>
+            <a:r>
+              <a:rPr lang="ko-KR" altLang="ko-KR" sz="1200" dirty="0">
+                <a:latin typeface="D2Coding" panose="020B0609020101020101" pitchFamily="49" charset="-127"/>
+                <a:ea typeface="D2Coding" panose="020B0609020101020101" pitchFamily="49" charset="-127"/>
+              </a:rPr>
+              <a:t> 있습니다.</a:t>
+            </a:r>
+            <a:r>
+              <a:rPr lang="en-US" altLang="ko-KR" sz="1200" dirty="0">
+                <a:latin typeface="D2Coding" panose="020B0609020101020101" pitchFamily="49" charset="-127"/>
+                <a:ea typeface="D2Coding" panose="020B0609020101020101" pitchFamily="49" charset="-127"/>
+              </a:rPr>
+              <a:t> </a:t>
+            </a:r>
+            <a:r>
+              <a:rPr lang="ko-KR" altLang="ko-KR" sz="1200" dirty="0">
+                <a:latin typeface="D2Coding" panose="020B0609020101020101" pitchFamily="49" charset="-127"/>
+                <a:ea typeface="D2Coding" panose="020B0609020101020101" pitchFamily="49" charset="-127"/>
+              </a:rPr>
+              <a:t>하지만 완전히 똑같진 않죠? 두 번째로 가중치가 높았던 "</a:t>
+            </a:r>
+            <a:r>
+              <a:rPr lang="ko-KR" altLang="ko-KR" sz="1200" dirty="0" err="1">
+                <a:latin typeface="D2Coding" panose="020B0609020101020101" pitchFamily="49" charset="-127"/>
+                <a:ea typeface="D2Coding" panose="020B0609020101020101" pitchFamily="49" charset="-127"/>
+              </a:rPr>
+              <a:t>bolsa</a:t>
+            </a:r>
+            <a:r>
+              <a:rPr lang="ko-KR" altLang="ko-KR" sz="1200" dirty="0">
+                <a:latin typeface="D2Coding" panose="020B0609020101020101" pitchFamily="49" charset="-127"/>
+                <a:ea typeface="D2Coding" panose="020B0609020101020101" pitchFamily="49" charset="-127"/>
+              </a:rPr>
+              <a:t>" [0.5, 0.4, 0.6, 0.2]의 성분도 17.6%만큼 은은하게 섞여 들어갔기 때문</a:t>
+            </a:r>
+            <a:endParaRPr lang="en-US" altLang="ko-KR" sz="1200" dirty="0">
+              <a:latin typeface="D2Coding" panose="020B0609020101020101" pitchFamily="49" charset="-127"/>
+              <a:ea typeface="D2Coding" panose="020B0609020101020101" pitchFamily="49" charset="-127"/>
+            </a:endParaRPr>
+          </a:p>
+          <a:p>
+            <a:pPr marL="285750" indent="-285750">
+              <a:lnSpc>
+                <a:spcPct val="150000"/>
+              </a:lnSpc>
+              <a:buFont typeface="Wingdings" panose="05000000000000000000" pitchFamily="2" charset="2"/>
+              <a:buChar char="v"/>
+            </a:pPr>
+            <a:r>
+              <a:rPr lang="ko-KR" altLang="ko-KR" sz="1200" dirty="0">
+                <a:latin typeface="D2Coding" panose="020B0609020101020101" pitchFamily="49" charset="-127"/>
+                <a:ea typeface="D2Coding" panose="020B0609020101020101" pitchFamily="49" charset="-127"/>
+              </a:rPr>
+              <a:t>즉, 이 3번 수치는 단순히 "</a:t>
+            </a:r>
+            <a:r>
+              <a:rPr lang="ko-KR" altLang="ko-KR" sz="1200" dirty="0" err="1">
+                <a:latin typeface="D2Coding" panose="020B0609020101020101" pitchFamily="49" charset="-127"/>
+                <a:ea typeface="D2Coding" panose="020B0609020101020101" pitchFamily="49" charset="-127"/>
+              </a:rPr>
+              <a:t>traeré</a:t>
+            </a:r>
+            <a:r>
+              <a:rPr lang="ko-KR" altLang="ko-KR" sz="1200" dirty="0">
+                <a:latin typeface="D2Coding" panose="020B0609020101020101" pitchFamily="49" charset="-127"/>
+                <a:ea typeface="D2Coding" panose="020B0609020101020101" pitchFamily="49" charset="-127"/>
+              </a:rPr>
+              <a:t>" 하나만을 뜻하는 게 아니라, "지금 영어로 '</a:t>
+            </a:r>
+            <a:r>
+              <a:rPr lang="ko-KR" altLang="ko-KR" sz="1200" dirty="0" err="1">
+                <a:latin typeface="D2Coding" panose="020B0609020101020101" pitchFamily="49" charset="-127"/>
+                <a:ea typeface="D2Coding" panose="020B0609020101020101" pitchFamily="49" charset="-127"/>
+              </a:rPr>
+              <a:t>bring'을</a:t>
+            </a:r>
+            <a:r>
+              <a:rPr lang="ko-KR" altLang="ko-KR" sz="1200" dirty="0">
+                <a:latin typeface="D2Coding" panose="020B0609020101020101" pitchFamily="49" charset="-127"/>
+                <a:ea typeface="D2Coding" panose="020B0609020101020101" pitchFamily="49" charset="-127"/>
+              </a:rPr>
+              <a:t> 출력하려는 순간에, 스페인어 원문에서 가져오다('</a:t>
+            </a:r>
+            <a:r>
+              <a:rPr lang="ko-KR" altLang="ko-KR" sz="1200" dirty="0" err="1">
+                <a:latin typeface="D2Coding" panose="020B0609020101020101" pitchFamily="49" charset="-127"/>
+                <a:ea typeface="D2Coding" panose="020B0609020101020101" pitchFamily="49" charset="-127"/>
+              </a:rPr>
+              <a:t>traeré</a:t>
+            </a:r>
+            <a:r>
+              <a:rPr lang="ko-KR" altLang="ko-KR" sz="1200" dirty="0">
+                <a:latin typeface="D2Coding" panose="020B0609020101020101" pitchFamily="49" charset="-127"/>
+                <a:ea typeface="D2Coding" panose="020B0609020101020101" pitchFamily="49" charset="-127"/>
+              </a:rPr>
+              <a:t>')라는 행동 정보와 가방('</a:t>
+            </a:r>
+            <a:r>
+              <a:rPr lang="ko-KR" altLang="ko-KR" sz="1200" dirty="0" err="1">
+                <a:latin typeface="D2Coding" panose="020B0609020101020101" pitchFamily="49" charset="-127"/>
+                <a:ea typeface="D2Coding" panose="020B0609020101020101" pitchFamily="49" charset="-127"/>
+              </a:rPr>
+              <a:t>bolsa</a:t>
+            </a:r>
+            <a:r>
+              <a:rPr lang="ko-KR" altLang="ko-KR" sz="1200" dirty="0">
+                <a:latin typeface="D2Coding" panose="020B0609020101020101" pitchFamily="49" charset="-127"/>
+                <a:ea typeface="D2Coding" panose="020B0609020101020101" pitchFamily="49" charset="-127"/>
+              </a:rPr>
+              <a:t>')이라는 목적어 정보를 최적의 비율로 융합해 놓은 단 하나의 벡터“</a:t>
+            </a:r>
+            <a:endParaRPr lang="en-US" altLang="ko-KR" sz="1200" dirty="0">
+              <a:latin typeface="D2Coding" panose="020B0609020101020101" pitchFamily="49" charset="-127"/>
+              <a:ea typeface="D2Coding" panose="020B0609020101020101" pitchFamily="49" charset="-127"/>
+            </a:endParaRPr>
+          </a:p>
+          <a:p>
+            <a:pPr marL="285750" indent="-285750">
+              <a:lnSpc>
+                <a:spcPct val="150000"/>
+              </a:lnSpc>
+              <a:buFont typeface="Wingdings" panose="05000000000000000000" pitchFamily="2" charset="2"/>
+              <a:buChar char="v"/>
+            </a:pPr>
+            <a:r>
+              <a:rPr lang="en-US" altLang="ko-KR" sz="1200" dirty="0">
+                <a:latin typeface="D2Coding" panose="020B0609020101020101" pitchFamily="49" charset="-127"/>
+                <a:ea typeface="D2Coding" panose="020B0609020101020101" pitchFamily="49" charset="-127"/>
+              </a:rPr>
+              <a:t>Transformer</a:t>
+            </a:r>
+            <a:r>
+              <a:rPr lang="ko-KR" altLang="en-US" sz="1200" dirty="0">
+                <a:latin typeface="D2Coding" panose="020B0609020101020101" pitchFamily="49" charset="-127"/>
+                <a:ea typeface="D2Coding" panose="020B0609020101020101" pitchFamily="49" charset="-127"/>
+              </a:rPr>
+              <a:t>는 </a:t>
+            </a:r>
+            <a:r>
+              <a:rPr lang="ko-KR" altLang="ko-KR" sz="1200" dirty="0">
+                <a:latin typeface="D2Coding" panose="020B0609020101020101" pitchFamily="49" charset="-127"/>
+                <a:ea typeface="D2Coding" panose="020B0609020101020101" pitchFamily="49" charset="-127"/>
+              </a:rPr>
+              <a:t>＂군더더기(</a:t>
+            </a:r>
+            <a:r>
+              <a:rPr lang="ko-KR" altLang="ko-KR" sz="1200" dirty="0" err="1">
+                <a:latin typeface="D2Coding" panose="020B0609020101020101" pitchFamily="49" charset="-127"/>
+                <a:ea typeface="D2Coding" panose="020B0609020101020101" pitchFamily="49" charset="-127"/>
+              </a:rPr>
+              <a:t>Te</a:t>
+            </a:r>
+            <a:r>
+              <a:rPr lang="ko-KR" altLang="ko-KR" sz="1200" dirty="0">
+                <a:latin typeface="D2Coding" panose="020B0609020101020101" pitchFamily="49" charset="-127"/>
+                <a:ea typeface="D2Coding" panose="020B0609020101020101" pitchFamily="49" charset="-127"/>
+              </a:rPr>
+              <a:t>, </a:t>
+            </a:r>
+            <a:r>
+              <a:rPr lang="ko-KR" altLang="ko-KR" sz="1200" dirty="0" err="1">
+                <a:latin typeface="D2Coding" panose="020B0609020101020101" pitchFamily="49" charset="-127"/>
+                <a:ea typeface="D2Coding" panose="020B0609020101020101" pitchFamily="49" charset="-127"/>
+              </a:rPr>
+              <a:t>la</a:t>
+            </a:r>
+            <a:r>
+              <a:rPr lang="ko-KR" altLang="ko-KR" sz="1200" dirty="0">
+                <a:latin typeface="D2Coding" panose="020B0609020101020101" pitchFamily="49" charset="-127"/>
+                <a:ea typeface="D2Coding" panose="020B0609020101020101" pitchFamily="49" charset="-127"/>
+              </a:rPr>
+              <a:t>)는 싹 걸러내고, 핵심 맥락(</a:t>
+            </a:r>
+            <a:r>
+              <a:rPr lang="ko-KR" altLang="ko-KR" sz="1200" dirty="0" err="1">
+                <a:latin typeface="D2Coding" panose="020B0609020101020101" pitchFamily="49" charset="-127"/>
+                <a:ea typeface="D2Coding" panose="020B0609020101020101" pitchFamily="49" charset="-127"/>
+              </a:rPr>
+              <a:t>traeré</a:t>
+            </a:r>
+            <a:r>
+              <a:rPr lang="ko-KR" altLang="ko-KR" sz="1200" dirty="0">
+                <a:latin typeface="D2Coding" panose="020B0609020101020101" pitchFamily="49" charset="-127"/>
+                <a:ea typeface="D2Coding" panose="020B0609020101020101" pitchFamily="49" charset="-127"/>
+              </a:rPr>
+              <a:t> + </a:t>
+            </a:r>
+            <a:r>
+              <a:rPr lang="ko-KR" altLang="ko-KR" sz="1200" dirty="0" err="1">
+                <a:latin typeface="D2Coding" panose="020B0609020101020101" pitchFamily="49" charset="-127"/>
+                <a:ea typeface="D2Coding" panose="020B0609020101020101" pitchFamily="49" charset="-127"/>
+              </a:rPr>
+              <a:t>bolsa</a:t>
+            </a:r>
+            <a:r>
+              <a:rPr lang="ko-KR" altLang="ko-KR" sz="1200" dirty="0">
+                <a:latin typeface="D2Coding" panose="020B0609020101020101" pitchFamily="49" charset="-127"/>
+                <a:ea typeface="D2Coding" panose="020B0609020101020101" pitchFamily="49" charset="-127"/>
+              </a:rPr>
+              <a:t>)만 정확하게 버무려진 3번 </a:t>
+            </a:r>
+            <a:r>
+              <a:rPr lang="ko-KR" altLang="ko-KR" sz="1200" dirty="0" err="1">
+                <a:latin typeface="D2Coding" panose="020B0609020101020101" pitchFamily="49" charset="-127"/>
+                <a:ea typeface="D2Coding" panose="020B0609020101020101" pitchFamily="49" charset="-127"/>
+              </a:rPr>
+              <a:t>벡터＂를</a:t>
+            </a:r>
+            <a:r>
+              <a:rPr lang="ko-KR" altLang="ko-KR" sz="1200" dirty="0">
+                <a:latin typeface="D2Coding" panose="020B0609020101020101" pitchFamily="49" charset="-127"/>
+                <a:ea typeface="D2Coding" panose="020B0609020101020101" pitchFamily="49" charset="-127"/>
+              </a:rPr>
+              <a:t> </a:t>
+            </a:r>
+            <a:r>
+              <a:rPr lang="ko-KR" altLang="ko-KR" sz="1200" dirty="0" err="1">
+                <a:latin typeface="D2Coding" panose="020B0609020101020101" pitchFamily="49" charset="-127"/>
+                <a:ea typeface="D2Coding" panose="020B0609020101020101" pitchFamily="49" charset="-127"/>
+              </a:rPr>
+              <a:t>디코더에게</a:t>
+            </a:r>
+            <a:r>
+              <a:rPr lang="ko-KR" altLang="ko-KR" sz="1200" dirty="0">
+                <a:latin typeface="D2Coding" panose="020B0609020101020101" pitchFamily="49" charset="-127"/>
+                <a:ea typeface="D2Coding" panose="020B0609020101020101" pitchFamily="49" charset="-127"/>
+              </a:rPr>
+              <a:t> </a:t>
+            </a:r>
+            <a:r>
+              <a:rPr lang="ko-KR" altLang="en-US" sz="1200" dirty="0">
+                <a:latin typeface="D2Coding" panose="020B0609020101020101" pitchFamily="49" charset="-127"/>
+                <a:ea typeface="D2Coding" panose="020B0609020101020101" pitchFamily="49" charset="-127"/>
+              </a:rPr>
+              <a:t>전달하면</a:t>
+            </a:r>
+            <a:r>
+              <a:rPr lang="ko-KR" altLang="ko-KR" sz="1200" dirty="0">
+                <a:latin typeface="D2Coding" panose="020B0609020101020101" pitchFamily="49" charset="-127"/>
+                <a:ea typeface="D2Coding" panose="020B0609020101020101" pitchFamily="49" charset="-127"/>
+              </a:rPr>
+              <a:t> </a:t>
+            </a:r>
+            <a:r>
+              <a:rPr lang="ko-KR" altLang="ko-KR" sz="1200" dirty="0" err="1">
+                <a:latin typeface="D2Coding" panose="020B0609020101020101" pitchFamily="49" charset="-127"/>
+                <a:ea typeface="D2Coding" panose="020B0609020101020101" pitchFamily="49" charset="-127"/>
+              </a:rPr>
+              <a:t>디코더는</a:t>
+            </a:r>
+            <a:r>
+              <a:rPr lang="ko-KR" altLang="ko-KR" sz="1200" dirty="0">
+                <a:latin typeface="D2Coding" panose="020B0609020101020101" pitchFamily="49" charset="-127"/>
+                <a:ea typeface="D2Coding" panose="020B0609020101020101" pitchFamily="49" charset="-127"/>
+              </a:rPr>
+              <a:t> 영어 문장 "</a:t>
+            </a:r>
+            <a:r>
+              <a:rPr lang="ko-KR" altLang="ko-KR" sz="1200" dirty="0" err="1">
+                <a:latin typeface="D2Coding" panose="020B0609020101020101" pitchFamily="49" charset="-127"/>
+                <a:ea typeface="D2Coding" panose="020B0609020101020101" pitchFamily="49" charset="-127"/>
+              </a:rPr>
+              <a:t>I</a:t>
+            </a:r>
+            <a:r>
+              <a:rPr lang="ko-KR" altLang="ko-KR" sz="1200" dirty="0">
+                <a:latin typeface="D2Coding" panose="020B0609020101020101" pitchFamily="49" charset="-127"/>
+                <a:ea typeface="D2Coding" panose="020B0609020101020101" pitchFamily="49" charset="-127"/>
+              </a:rPr>
+              <a:t> </a:t>
+            </a:r>
+            <a:r>
+              <a:rPr lang="ko-KR" altLang="ko-KR" sz="1200" dirty="0" err="1">
+                <a:latin typeface="D2Coding" panose="020B0609020101020101" pitchFamily="49" charset="-127"/>
+                <a:ea typeface="D2Coding" panose="020B0609020101020101" pitchFamily="49" charset="-127"/>
+              </a:rPr>
+              <a:t>will</a:t>
+            </a:r>
+            <a:r>
+              <a:rPr lang="ko-KR" altLang="ko-KR" sz="1200" dirty="0">
+                <a:latin typeface="D2Coding" panose="020B0609020101020101" pitchFamily="49" charset="-127"/>
+                <a:ea typeface="D2Coding" panose="020B0609020101020101" pitchFamily="49" charset="-127"/>
+              </a:rPr>
+              <a:t> </a:t>
+            </a:r>
+            <a:r>
+              <a:rPr lang="ko-KR" altLang="ko-KR" sz="1200" dirty="0" err="1">
+                <a:latin typeface="D2Coding" panose="020B0609020101020101" pitchFamily="49" charset="-127"/>
+                <a:ea typeface="D2Coding" panose="020B0609020101020101" pitchFamily="49" charset="-127"/>
+              </a:rPr>
+              <a:t>bring</a:t>
+            </a:r>
+            <a:r>
+              <a:rPr lang="ko-KR" altLang="ko-KR" sz="1200" dirty="0">
+                <a:latin typeface="D2Coding" panose="020B0609020101020101" pitchFamily="49" charset="-127"/>
+                <a:ea typeface="D2Coding" panose="020B0609020101020101" pitchFamily="49" charset="-127"/>
+              </a:rPr>
+              <a:t> </a:t>
+            </a:r>
+            <a:r>
+              <a:rPr lang="ko-KR" altLang="ko-KR" sz="1200" dirty="0" err="1">
+                <a:latin typeface="D2Coding" panose="020B0609020101020101" pitchFamily="49" charset="-127"/>
+                <a:ea typeface="D2Coding" panose="020B0609020101020101" pitchFamily="49" charset="-127"/>
+              </a:rPr>
+              <a:t>the</a:t>
+            </a:r>
+            <a:r>
+              <a:rPr lang="ko-KR" altLang="ko-KR" sz="1200" dirty="0">
+                <a:latin typeface="D2Coding" panose="020B0609020101020101" pitchFamily="49" charset="-127"/>
+                <a:ea typeface="D2Coding" panose="020B0609020101020101" pitchFamily="49" charset="-127"/>
+              </a:rPr>
+              <a:t> </a:t>
+            </a:r>
+            <a:r>
+              <a:rPr lang="ko-KR" altLang="ko-KR" sz="1200" dirty="0" err="1">
+                <a:latin typeface="D2Coding" panose="020B0609020101020101" pitchFamily="49" charset="-127"/>
+                <a:ea typeface="D2Coding" panose="020B0609020101020101" pitchFamily="49" charset="-127"/>
+              </a:rPr>
+              <a:t>bag</a:t>
+            </a:r>
+            <a:r>
+              <a:rPr lang="ko-KR" altLang="ko-KR" sz="1200" dirty="0">
+                <a:latin typeface="D2Coding" panose="020B0609020101020101" pitchFamily="49" charset="-127"/>
+                <a:ea typeface="D2Coding" panose="020B0609020101020101" pitchFamily="49" charset="-127"/>
+              </a:rPr>
+              <a:t> </a:t>
+            </a:r>
+            <a:r>
+              <a:rPr lang="ko-KR" altLang="ko-KR" sz="1200" dirty="0" err="1">
+                <a:latin typeface="D2Coding" panose="020B0609020101020101" pitchFamily="49" charset="-127"/>
+                <a:ea typeface="D2Coding" panose="020B0609020101020101" pitchFamily="49" charset="-127"/>
+              </a:rPr>
+              <a:t>to</a:t>
+            </a:r>
+            <a:r>
+              <a:rPr lang="ko-KR" altLang="ko-KR" sz="1200" dirty="0">
+                <a:latin typeface="D2Coding" panose="020B0609020101020101" pitchFamily="49" charset="-127"/>
+                <a:ea typeface="D2Coding" panose="020B0609020101020101" pitchFamily="49" charset="-127"/>
+              </a:rPr>
+              <a:t> </a:t>
+            </a:r>
+            <a:r>
+              <a:rPr lang="ko-KR" altLang="ko-KR" sz="1200" dirty="0" err="1">
+                <a:latin typeface="D2Coding" panose="020B0609020101020101" pitchFamily="49" charset="-127"/>
+                <a:ea typeface="D2Coding" panose="020B0609020101020101" pitchFamily="49" charset="-127"/>
+              </a:rPr>
+              <a:t>you"를</a:t>
+            </a:r>
+            <a:r>
+              <a:rPr lang="ko-KR" altLang="ko-KR" sz="1200" dirty="0">
+                <a:latin typeface="D2Coding" panose="020B0609020101020101" pitchFamily="49" charset="-127"/>
+                <a:ea typeface="D2Coding" panose="020B0609020101020101" pitchFamily="49" charset="-127"/>
+              </a:rPr>
+              <a:t> 완벽하게 완성해 나갈 수 있</a:t>
+            </a:r>
+            <a:r>
+              <a:rPr lang="ko-KR" altLang="en-US" sz="1200" dirty="0">
+                <a:latin typeface="D2Coding" panose="020B0609020101020101" pitchFamily="49" charset="-127"/>
+                <a:ea typeface="D2Coding" panose="020B0609020101020101" pitchFamily="49" charset="-127"/>
+              </a:rPr>
+              <a:t>음</a:t>
+            </a:r>
+            <a:endParaRPr lang="ko-KR" altLang="ko-KR" sz="1200" dirty="0">
+              <a:latin typeface="D2Coding" panose="020B0609020101020101" pitchFamily="49" charset="-127"/>
+              <a:ea typeface="D2Coding" panose="020B0609020101020101" pitchFamily="49" charset="-127"/>
+            </a:endParaRPr>
+          </a:p>
+        </p:txBody>
+      </p:sp>
+      <p:sp>
+        <p:nvSpPr>
+          <p:cNvPr id="24" name="TextBox 23">
+            <a:extLst>
+              <a:ext uri="{FF2B5EF4-FFF2-40B4-BE49-F238E27FC236}">
+                <a16:creationId xmlns:a16="http://schemas.microsoft.com/office/drawing/2014/main" id="{1884D2CE-F01F-7E46-26AF-CA2CC9A83760}"/>
+              </a:ext>
+            </a:extLst>
+          </p:cNvPr>
+          <p:cNvSpPr txBox="1"/>
+          <p:nvPr/>
+        </p:nvSpPr>
+        <p:spPr>
+          <a:xfrm>
+            <a:off x="3644511" y="1802420"/>
+            <a:ext cx="1720540" cy="830997"/>
+          </a:xfrm>
+          <a:prstGeom prst="rect">
+            <a:avLst/>
+          </a:prstGeom>
+          <a:solidFill>
+            <a:schemeClr val="bg1"/>
+          </a:solidFill>
+          <a:ln w="28575">
+            <a:solidFill>
+              <a:schemeClr val="tx1"/>
+            </a:solidFill>
+          </a:ln>
+        </p:spPr>
+        <p:txBody>
+          <a:bodyPr wrap="square">
+            <a:spAutoFit/>
+          </a:bodyPr>
+          <a:lstStyle/>
+          <a:p>
+            <a:pPr>
+              <a:buNone/>
+            </a:pPr>
+            <a:r>
+              <a:rPr lang="ko-KR" altLang="ko-KR" sz="1200" b="0" dirty="0">
+                <a:effectLst/>
+                <a:latin typeface="D2Coding" panose="020B0609020101020101" pitchFamily="49" charset="-127"/>
+                <a:ea typeface="D2Coding" panose="020B0609020101020101" pitchFamily="49" charset="-127"/>
+              </a:rPr>
+              <a:t>[0.1, 0.2, 0.1, 0.3]</a:t>
+            </a:r>
+            <a:endParaRPr lang="en-US" altLang="ko-KR" sz="1200" b="0" dirty="0">
+              <a:effectLst/>
+              <a:latin typeface="D2Coding" panose="020B0609020101020101" pitchFamily="49" charset="-127"/>
+              <a:ea typeface="D2Coding" panose="020B0609020101020101" pitchFamily="49" charset="-127"/>
+            </a:endParaRPr>
+          </a:p>
+          <a:p>
+            <a:pPr>
+              <a:buNone/>
+            </a:pPr>
+            <a:r>
+              <a:rPr lang="ko-KR" altLang="ko-KR" sz="1200" b="0" dirty="0">
+                <a:effectLst/>
+                <a:latin typeface="D2Coding" panose="020B0609020101020101" pitchFamily="49" charset="-127"/>
+                <a:ea typeface="D2Coding" panose="020B0609020101020101" pitchFamily="49" charset="-127"/>
+              </a:rPr>
+              <a:t>[0.8, 0.9, 0.7, 0.9] </a:t>
+            </a:r>
+            <a:endParaRPr lang="en-US" altLang="ko-KR" sz="1200" b="0" dirty="0">
+              <a:effectLst/>
+              <a:latin typeface="D2Coding" panose="020B0609020101020101" pitchFamily="49" charset="-127"/>
+              <a:ea typeface="D2Coding" panose="020B0609020101020101" pitchFamily="49" charset="-127"/>
+            </a:endParaRPr>
+          </a:p>
+          <a:p>
+            <a:pPr>
+              <a:buNone/>
+            </a:pPr>
+            <a:r>
+              <a:rPr lang="ko-KR" altLang="ko-KR" sz="1200" b="0" dirty="0">
+                <a:effectLst/>
+                <a:latin typeface="D2Coding" panose="020B0609020101020101" pitchFamily="49" charset="-127"/>
+                <a:ea typeface="D2Coding" panose="020B0609020101020101" pitchFamily="49" charset="-127"/>
+              </a:rPr>
+              <a:t>[0.2, 0.1, 0.3, 0.1] </a:t>
+            </a:r>
+            <a:endParaRPr lang="en-US" altLang="ko-KR" sz="1200" b="0" dirty="0">
+              <a:effectLst/>
+              <a:latin typeface="D2Coding" panose="020B0609020101020101" pitchFamily="49" charset="-127"/>
+              <a:ea typeface="D2Coding" panose="020B0609020101020101" pitchFamily="49" charset="-127"/>
+            </a:endParaRPr>
+          </a:p>
+          <a:p>
+            <a:pPr>
+              <a:buNone/>
+            </a:pPr>
+            <a:r>
+              <a:rPr lang="ko-KR" altLang="ko-KR" sz="1200" b="0" dirty="0">
+                <a:effectLst/>
+                <a:latin typeface="D2Coding" panose="020B0609020101020101" pitchFamily="49" charset="-127"/>
+                <a:ea typeface="D2Coding" panose="020B0609020101020101" pitchFamily="49" charset="-127"/>
+              </a:rPr>
+              <a:t>[0.5, 0.4, 0.6, 0.2]</a:t>
+            </a:r>
+          </a:p>
+        </p:txBody>
+      </p:sp>
+      <p:cxnSp>
+        <p:nvCxnSpPr>
+          <p:cNvPr id="30" name="연결선: 꺾임 29">
+            <a:extLst>
+              <a:ext uri="{FF2B5EF4-FFF2-40B4-BE49-F238E27FC236}">
+                <a16:creationId xmlns:a16="http://schemas.microsoft.com/office/drawing/2014/main" id="{1D5AB4D7-9798-F976-3FD7-DE3A692E74B0}"/>
+              </a:ext>
+            </a:extLst>
+          </p:cNvPr>
+          <p:cNvCxnSpPr>
+            <a:cxnSpLocks/>
+            <a:stCxn id="24" idx="1"/>
+            <a:endCxn id="9" idx="0"/>
+          </p:cNvCxnSpPr>
+          <p:nvPr/>
+        </p:nvCxnSpPr>
+        <p:spPr>
+          <a:xfrm rot="10800000" flipH="1" flipV="1">
+            <a:off x="3644511" y="2217918"/>
+            <a:ext cx="533022" cy="3541343"/>
+          </a:xfrm>
+          <a:prstGeom prst="bentConnector4">
+            <a:avLst>
+              <a:gd name="adj1" fmla="val -42888"/>
+              <a:gd name="adj2" fmla="val 55866"/>
+            </a:avLst>
+          </a:prstGeom>
+          <a:ln w="28575">
+            <a:solidFill>
+              <a:srgbClr val="00B0F0"/>
+            </a:solidFill>
+            <a:tailEnd type="triangle"/>
+          </a:ln>
+        </p:spPr>
+        <p:style>
+          <a:lnRef idx="1">
+            <a:schemeClr val="dk1"/>
+          </a:lnRef>
+          <a:fillRef idx="0">
+            <a:schemeClr val="dk1"/>
+          </a:fillRef>
+          <a:effectRef idx="0">
+            <a:schemeClr val="dk1"/>
+          </a:effectRef>
+          <a:fontRef idx="minor">
+            <a:schemeClr val="tx1"/>
+          </a:fontRef>
+        </p:style>
+      </p:cxnSp>
+      <p:sp>
+        <p:nvSpPr>
+          <p:cNvPr id="33" name="TextBox 32">
+            <a:extLst>
+              <a:ext uri="{FF2B5EF4-FFF2-40B4-BE49-F238E27FC236}">
+                <a16:creationId xmlns:a16="http://schemas.microsoft.com/office/drawing/2014/main" id="{C657DF47-A658-C852-3125-AC09F4F3C187}"/>
+              </a:ext>
+            </a:extLst>
+          </p:cNvPr>
+          <p:cNvSpPr txBox="1"/>
+          <p:nvPr/>
+        </p:nvSpPr>
+        <p:spPr>
+          <a:xfrm>
+            <a:off x="2847878" y="4939305"/>
+            <a:ext cx="2728042" cy="276999"/>
+          </a:xfrm>
+          <a:prstGeom prst="rect">
+            <a:avLst/>
+          </a:prstGeom>
+          <a:noFill/>
+        </p:spPr>
+        <p:txBody>
+          <a:bodyPr wrap="square">
+            <a:spAutoFit/>
+          </a:bodyPr>
+          <a:lstStyle/>
+          <a:p>
+            <a:pPr indent="0" algn="l">
+              <a:buNone/>
+            </a:pPr>
+            <a:r>
+              <a:rPr lang="ko-KR" altLang="ko-KR" sz="1200" dirty="0">
+                <a:latin typeface="D2Coding" panose="020B0609020101020101" pitchFamily="49" charset="-127"/>
+                <a:ea typeface="D2Coding" panose="020B0609020101020101" pitchFamily="49" charset="-127"/>
+              </a:rPr>
+              <a:t>[0.0919, 0.646 , 0.0857, 0.1761]</a:t>
+            </a:r>
+          </a:p>
+        </p:txBody>
+      </p:sp>
+      <p:sp>
+        <p:nvSpPr>
+          <p:cNvPr id="38" name="TextBox 37">
+            <a:extLst>
+              <a:ext uri="{FF2B5EF4-FFF2-40B4-BE49-F238E27FC236}">
+                <a16:creationId xmlns:a16="http://schemas.microsoft.com/office/drawing/2014/main" id="{1610CD02-1A36-093E-930B-928933FA62D2}"/>
+              </a:ext>
+            </a:extLst>
+          </p:cNvPr>
+          <p:cNvSpPr txBox="1"/>
+          <p:nvPr/>
+        </p:nvSpPr>
+        <p:spPr>
+          <a:xfrm>
+            <a:off x="1314889" y="4939304"/>
+            <a:ext cx="1689896" cy="276999"/>
+          </a:xfrm>
+          <a:prstGeom prst="rect">
+            <a:avLst/>
+          </a:prstGeom>
+          <a:noFill/>
+        </p:spPr>
+        <p:txBody>
+          <a:bodyPr wrap="square">
+            <a:spAutoFit/>
+          </a:bodyPr>
+          <a:lstStyle/>
+          <a:p>
+            <a:r>
+              <a:rPr lang="ko-KR" altLang="ko-KR" sz="1200" dirty="0" err="1">
+                <a:latin typeface="D2Coding" panose="020B0609020101020101" pitchFamily="49" charset="-127"/>
+                <a:ea typeface="D2Coding" panose="020B0609020101020101" pitchFamily="49" charset="-127"/>
+              </a:rPr>
+              <a:t>attention_weights</a:t>
+            </a:r>
+            <a:r>
+              <a:rPr lang="ko-KR" altLang="ko-KR" sz="1200" dirty="0">
+                <a:latin typeface="D2Coding" panose="020B0609020101020101" pitchFamily="49" charset="-127"/>
+                <a:ea typeface="D2Coding" panose="020B0609020101020101" pitchFamily="49" charset="-127"/>
+              </a:rPr>
+              <a:t> </a:t>
+            </a:r>
+            <a:endParaRPr lang="ko-KR" altLang="en-US" sz="1200" dirty="0">
+              <a:latin typeface="D2Coding" panose="020B0609020101020101" pitchFamily="49" charset="-127"/>
+              <a:ea typeface="D2Coding" panose="020B0609020101020101" pitchFamily="49" charset="-127"/>
+            </a:endParaRPr>
+          </a:p>
+        </p:txBody>
+      </p:sp>
+      <p:sp>
+        <p:nvSpPr>
+          <p:cNvPr id="40" name="TextBox 39">
+            <a:extLst>
+              <a:ext uri="{FF2B5EF4-FFF2-40B4-BE49-F238E27FC236}">
+                <a16:creationId xmlns:a16="http://schemas.microsoft.com/office/drawing/2014/main" id="{AE438E7A-F9F1-38A2-E05E-C7B3A31E60C1}"/>
+              </a:ext>
+            </a:extLst>
+          </p:cNvPr>
+          <p:cNvSpPr txBox="1"/>
+          <p:nvPr/>
+        </p:nvSpPr>
+        <p:spPr>
+          <a:xfrm>
+            <a:off x="6966408" y="826899"/>
+            <a:ext cx="4600281" cy="369332"/>
+          </a:xfrm>
+          <a:prstGeom prst="rect">
+            <a:avLst/>
+          </a:prstGeom>
+          <a:noFill/>
+        </p:spPr>
+        <p:txBody>
+          <a:bodyPr wrap="square">
+            <a:spAutoFit/>
+          </a:bodyPr>
+          <a:lstStyle/>
+          <a:p>
+            <a:pPr indent="0" algn="r">
+              <a:buNone/>
+            </a:pPr>
+            <a:r>
+              <a:rPr lang="ko-KR" altLang="ko-KR" sz="1800" b="1" i="0" dirty="0" err="1">
+                <a:effectLst/>
+                <a:latin typeface="Lora" pitchFamily="2" charset="0"/>
+              </a:rPr>
+              <a:t>Dot-product</a:t>
+            </a:r>
+            <a:r>
+              <a:rPr lang="ko-KR" altLang="ko-KR" sz="1800" b="1" i="0" dirty="0">
+                <a:effectLst/>
+                <a:latin typeface="Lora" pitchFamily="2" charset="0"/>
+              </a:rPr>
+              <a:t> </a:t>
+            </a:r>
+            <a:r>
+              <a:rPr lang="ko-KR" altLang="ko-KR" sz="1800" b="1" i="0" dirty="0" err="1">
+                <a:effectLst/>
+                <a:latin typeface="Lora" pitchFamily="2" charset="0"/>
+              </a:rPr>
+              <a:t>attention</a:t>
+            </a:r>
+            <a:endParaRPr lang="ko-KR" altLang="ko-KR" sz="1800" b="1" i="0" dirty="0">
+              <a:effectLst/>
+              <a:latin typeface="Lora" pitchFamily="2" charset="0"/>
+            </a:endParaRPr>
+          </a:p>
+        </p:txBody>
+      </p:sp>
     </p:spTree>
     <p:extLst>
       <p:ext uri="{BB962C8B-B14F-4D97-AF65-F5344CB8AC3E}">
@@ -11712,7 +18402,7 @@
 </p:sld>
 </file>
 
-<file path=ppt/slides/slide22.xml><?xml version="1.0" encoding="utf-8"?>
+<file path=ppt/slides/slide24.xml><?xml version="1.0" encoding="utf-8"?>
 <p:sld xmlns:a="http://schemas.openxmlformats.org/drawingml/2006/main" xmlns:r="http://schemas.openxmlformats.org/officeDocument/2006/relationships" xmlns:p="http://schemas.openxmlformats.org/presentationml/2006/main">
   <p:cSld>
     <p:spTree>
@@ -11764,7 +18454,7 @@
             <a:fld id="{D57F1E4F-1CFF-5643-939E-217C01CDF565}" type="slidenum">
               <a:rPr lang="en-US" smtClean="0"/>
               <a:pPr/>
-              <a:t>22</a:t>
+              <a:t>24</a:t>
             </a:fld>
             <a:endParaRPr lang="en-US" dirty="0"/>
           </a:p>
@@ -11828,6 +18518,288 @@
           </a:p>
         </p:txBody>
       </p:sp>
+      <p:pic>
+        <p:nvPicPr>
+          <p:cNvPr id="5" name="그림 4">
+            <a:extLst>
+              <a:ext uri="{FF2B5EF4-FFF2-40B4-BE49-F238E27FC236}">
+                <a16:creationId xmlns:a16="http://schemas.microsoft.com/office/drawing/2014/main" id="{97ED1426-C41E-BD79-2679-DC470AF3B2D6}"/>
+              </a:ext>
+            </a:extLst>
+          </p:cNvPr>
+          <p:cNvPicPr>
+            <a:picLocks noChangeAspect="1"/>
+          </p:cNvPicPr>
+          <p:nvPr/>
+        </p:nvPicPr>
+        <p:blipFill>
+          <a:blip r:embed="rId2"/>
+          <a:stretch>
+            <a:fillRect/>
+          </a:stretch>
+        </p:blipFill>
+        <p:spPr>
+          <a:xfrm>
+            <a:off x="1767466" y="1752504"/>
+            <a:ext cx="4467078" cy="4072925"/>
+          </a:xfrm>
+          <a:prstGeom prst="rect">
+            <a:avLst/>
+          </a:prstGeom>
+        </p:spPr>
+      </p:pic>
+      <p:sp>
+        <p:nvSpPr>
+          <p:cNvPr id="10" name="직사각형 9">
+            <a:extLst>
+              <a:ext uri="{FF2B5EF4-FFF2-40B4-BE49-F238E27FC236}">
+                <a16:creationId xmlns:a16="http://schemas.microsoft.com/office/drawing/2014/main" id="{6A80E212-B6B2-A504-6A2E-DCC6C015C9DF}"/>
+              </a:ext>
+            </a:extLst>
+          </p:cNvPr>
+          <p:cNvSpPr/>
+          <p:nvPr/>
+        </p:nvSpPr>
+        <p:spPr>
+          <a:xfrm>
+            <a:off x="3454401" y="1988400"/>
+            <a:ext cx="655782" cy="2823746"/>
+          </a:xfrm>
+          <a:prstGeom prst="rect">
+            <a:avLst/>
+          </a:prstGeom>
+          <a:noFill/>
+          <a:ln w="28575">
+            <a:solidFill>
+              <a:srgbClr val="00B0F0"/>
+            </a:solidFill>
+          </a:ln>
+        </p:spPr>
+        <p:style>
+          <a:lnRef idx="2">
+            <a:schemeClr val="accent1">
+              <a:shade val="15000"/>
+            </a:schemeClr>
+          </a:lnRef>
+          <a:fillRef idx="1">
+            <a:schemeClr val="accent1"/>
+          </a:fillRef>
+          <a:effectRef idx="0">
+            <a:schemeClr val="accent1"/>
+          </a:effectRef>
+          <a:fontRef idx="minor">
+            <a:schemeClr val="lt1"/>
+          </a:fontRef>
+        </p:style>
+        <p:txBody>
+          <a:bodyPr rtlCol="0" anchor="ctr"/>
+          <a:lstStyle/>
+          <a:p>
+            <a:pPr algn="ctr"/>
+            <a:endParaRPr lang="ko-KR" altLang="en-US"/>
+          </a:p>
+        </p:txBody>
+      </p:sp>
+      <p:cxnSp>
+        <p:nvCxnSpPr>
+          <p:cNvPr id="12" name="연결선: 꺾임 11">
+            <a:extLst>
+              <a:ext uri="{FF2B5EF4-FFF2-40B4-BE49-F238E27FC236}">
+                <a16:creationId xmlns:a16="http://schemas.microsoft.com/office/drawing/2014/main" id="{8D427B87-73DB-9D7A-1E52-8D70E976C23F}"/>
+              </a:ext>
+            </a:extLst>
+          </p:cNvPr>
+          <p:cNvCxnSpPr>
+            <a:cxnSpLocks/>
+            <a:stCxn id="10" idx="3"/>
+            <a:endCxn id="17" idx="2"/>
+          </p:cNvCxnSpPr>
+          <p:nvPr/>
+        </p:nvCxnSpPr>
+        <p:spPr>
+          <a:xfrm flipV="1">
+            <a:off x="4110183" y="2456639"/>
+            <a:ext cx="4326276" cy="943634"/>
+          </a:xfrm>
+          <a:prstGeom prst="bentConnector2">
+            <a:avLst/>
+          </a:prstGeom>
+          <a:ln w="28575">
+            <a:headEnd type="triangle"/>
+            <a:tailEnd type="triangle"/>
+          </a:ln>
+        </p:spPr>
+        <p:style>
+          <a:lnRef idx="1">
+            <a:schemeClr val="accent1"/>
+          </a:lnRef>
+          <a:fillRef idx="0">
+            <a:schemeClr val="accent1"/>
+          </a:fillRef>
+          <a:effectRef idx="0">
+            <a:schemeClr val="accent1"/>
+          </a:effectRef>
+          <a:fontRef idx="minor">
+            <a:schemeClr val="tx1"/>
+          </a:fontRef>
+        </p:style>
+      </p:cxnSp>
+      <p:sp>
+        <p:nvSpPr>
+          <p:cNvPr id="15" name="TextBox 14">
+            <a:extLst>
+              <a:ext uri="{FF2B5EF4-FFF2-40B4-BE49-F238E27FC236}">
+                <a16:creationId xmlns:a16="http://schemas.microsoft.com/office/drawing/2014/main" id="{81F85ECF-26E2-67D4-E12D-AF19B5C9B784}"/>
+              </a:ext>
+            </a:extLst>
+          </p:cNvPr>
+          <p:cNvSpPr txBox="1"/>
+          <p:nvPr/>
+        </p:nvSpPr>
+        <p:spPr>
+          <a:xfrm>
+            <a:off x="6731391" y="1766018"/>
+            <a:ext cx="3127802" cy="338554"/>
+          </a:xfrm>
+          <a:prstGeom prst="rect">
+            <a:avLst/>
+          </a:prstGeom>
+          <a:noFill/>
+        </p:spPr>
+        <p:txBody>
+          <a:bodyPr wrap="square">
+            <a:spAutoFit/>
+          </a:bodyPr>
+          <a:lstStyle/>
+          <a:p>
+            <a:r>
+              <a:rPr lang="ko-KR" altLang="ko-KR" sz="1600" dirty="0" err="1">
+                <a:latin typeface="D2Coding" panose="020B0609020101020101" pitchFamily="49" charset="-127"/>
+                <a:ea typeface="D2Coding" panose="020B0609020101020101" pitchFamily="49" charset="-127"/>
+              </a:rPr>
+              <a:t>attention_weights</a:t>
+            </a:r>
+            <a:r>
+              <a:rPr lang="en-US" altLang="ko-KR" sz="1600" dirty="0">
+                <a:latin typeface="D2Coding" panose="020B0609020101020101" pitchFamily="49" charset="-127"/>
+                <a:ea typeface="D2Coding" panose="020B0609020101020101" pitchFamily="49" charset="-127"/>
+              </a:rPr>
+              <a:t> (scores)</a:t>
+            </a:r>
+            <a:r>
+              <a:rPr lang="ko-KR" altLang="ko-KR" sz="1600" dirty="0">
+                <a:latin typeface="D2Coding" panose="020B0609020101020101" pitchFamily="49" charset="-127"/>
+                <a:ea typeface="D2Coding" panose="020B0609020101020101" pitchFamily="49" charset="-127"/>
+              </a:rPr>
+              <a:t> </a:t>
+            </a:r>
+            <a:endParaRPr lang="ko-KR" altLang="en-US" sz="1600" dirty="0">
+              <a:latin typeface="D2Coding" panose="020B0609020101020101" pitchFamily="49" charset="-127"/>
+              <a:ea typeface="D2Coding" panose="020B0609020101020101" pitchFamily="49" charset="-127"/>
+            </a:endParaRPr>
+          </a:p>
+        </p:txBody>
+      </p:sp>
+      <p:sp>
+        <p:nvSpPr>
+          <p:cNvPr id="17" name="TextBox 16">
+            <a:extLst>
+              <a:ext uri="{FF2B5EF4-FFF2-40B4-BE49-F238E27FC236}">
+                <a16:creationId xmlns:a16="http://schemas.microsoft.com/office/drawing/2014/main" id="{D303CE3E-8C4C-1C43-E24E-7DA8A2D1DDEA}"/>
+              </a:ext>
+            </a:extLst>
+          </p:cNvPr>
+          <p:cNvSpPr txBox="1"/>
+          <p:nvPr/>
+        </p:nvSpPr>
+        <p:spPr>
+          <a:xfrm>
+            <a:off x="6731391" y="2118085"/>
+            <a:ext cx="3410136" cy="338554"/>
+          </a:xfrm>
+          <a:prstGeom prst="rect">
+            <a:avLst/>
+          </a:prstGeom>
+          <a:noFill/>
+        </p:spPr>
+        <p:txBody>
+          <a:bodyPr wrap="square">
+            <a:spAutoFit/>
+          </a:bodyPr>
+          <a:lstStyle/>
+          <a:p>
+            <a:pPr indent="0" algn="l">
+              <a:buNone/>
+            </a:pPr>
+            <a:r>
+              <a:rPr lang="ko-KR" altLang="ko-KR" sz="1600" dirty="0">
+                <a:latin typeface="D2Coding" panose="020B0609020101020101" pitchFamily="49" charset="-127"/>
+                <a:ea typeface="D2Coding" panose="020B0609020101020101" pitchFamily="49" charset="-127"/>
+              </a:rPr>
+              <a:t>[0.0919, 0.646 , 0.0857, 0.1761]</a:t>
+            </a:r>
+          </a:p>
+        </p:txBody>
+      </p:sp>
+      <p:sp>
+        <p:nvSpPr>
+          <p:cNvPr id="22" name="TextBox 21">
+            <a:extLst>
+              <a:ext uri="{FF2B5EF4-FFF2-40B4-BE49-F238E27FC236}">
+                <a16:creationId xmlns:a16="http://schemas.microsoft.com/office/drawing/2014/main" id="{4A43EC94-DFD6-D05A-390B-A1F187DA8BE7}"/>
+              </a:ext>
+            </a:extLst>
+          </p:cNvPr>
+          <p:cNvSpPr txBox="1"/>
+          <p:nvPr/>
+        </p:nvSpPr>
+        <p:spPr>
+          <a:xfrm>
+            <a:off x="6966408" y="826899"/>
+            <a:ext cx="4600281" cy="369332"/>
+          </a:xfrm>
+          <a:prstGeom prst="rect">
+            <a:avLst/>
+          </a:prstGeom>
+          <a:noFill/>
+        </p:spPr>
+        <p:txBody>
+          <a:bodyPr wrap="square">
+            <a:spAutoFit/>
+          </a:bodyPr>
+          <a:lstStyle/>
+          <a:p>
+            <a:pPr indent="0" algn="r">
+              <a:buNone/>
+            </a:pPr>
+            <a:r>
+              <a:rPr lang="ko-KR" altLang="ko-KR" sz="1800" b="1" i="0" dirty="0" err="1">
+                <a:effectLst/>
+                <a:latin typeface="Lora" pitchFamily="2" charset="0"/>
+              </a:rPr>
+              <a:t>Dot-product</a:t>
+            </a:r>
+            <a:r>
+              <a:rPr lang="ko-KR" altLang="ko-KR" sz="1800" b="1" i="0" dirty="0">
+                <a:effectLst/>
+                <a:latin typeface="Lora" pitchFamily="2" charset="0"/>
+              </a:rPr>
+              <a:t> </a:t>
+            </a:r>
+            <a:r>
+              <a:rPr lang="ko-KR" altLang="ko-KR" sz="1800" b="1" i="0" dirty="0" err="1">
+                <a:effectLst/>
+                <a:latin typeface="Lora" pitchFamily="2" charset="0"/>
+              </a:rPr>
+              <a:t>attention</a:t>
+            </a:r>
+            <a:endParaRPr lang="ko-KR" altLang="ko-KR" sz="1800" b="1" i="0" dirty="0">
+              <a:effectLst/>
+              <a:latin typeface="Lora" pitchFamily="2" charset="0"/>
+            </a:endParaRPr>
+          </a:p>
+        </p:txBody>
+      </p:sp>
     </p:spTree>
     <p:extLst>
       <p:ext uri="{BB962C8B-B14F-4D97-AF65-F5344CB8AC3E}">
@@ -11841,7 +18813,7 @@
 </p:sld>
 </file>
 
-<file path=ppt/slides/slide23.xml><?xml version="1.0" encoding="utf-8"?>
+<file path=ppt/slides/slide25.xml><?xml version="1.0" encoding="utf-8"?>
 <p:sld xmlns:a="http://schemas.openxmlformats.org/drawingml/2006/main" xmlns:r="http://schemas.openxmlformats.org/officeDocument/2006/relationships" xmlns:p="http://schemas.openxmlformats.org/presentationml/2006/main">
   <p:cSld>
     <p:spTree>
@@ -11893,7 +18865,7 @@
             <a:fld id="{D57F1E4F-1CFF-5643-939E-217C01CDF565}" type="slidenum">
               <a:rPr lang="en-US" smtClean="0"/>
               <a:pPr/>
-              <a:t>23</a:t>
+              <a:t>25</a:t>
             </a:fld>
             <a:endParaRPr lang="en-US" dirty="0"/>
           </a:p>
@@ -12093,8 +19065,8 @@
           </a:p>
         </p:txBody>
       </p:sp>
-      <mc:AlternateContent xmlns:mc="http://schemas.openxmlformats.org/markup-compatibility/2006">
-        <mc:Choice xmlns:a14="http://schemas.microsoft.com/office/drawing/2010/main" Requires="a14">
+      <mc:AlternateContent xmlns:mc="http://schemas.openxmlformats.org/markup-compatibility/2006" xmlns:a14="http://schemas.microsoft.com/office/drawing/2010/main">
+        <mc:Choice Requires="a14">
           <p:sp>
             <p:nvSpPr>
               <p:cNvPr id="6" name="TextBox 5">
@@ -12456,7 +19428,7 @@
             </p:txBody>
           </p:sp>
         </mc:Choice>
-        <mc:Fallback>
+        <mc:Fallback xmlns="">
           <p:sp>
             <p:nvSpPr>
               <p:cNvPr id="6" name="TextBox 5">
@@ -13364,8 +20336,8 @@
           </a:p>
         </p:txBody>
       </p:sp>
-      <mc:AlternateContent xmlns:mc="http://schemas.openxmlformats.org/markup-compatibility/2006">
-        <mc:Choice xmlns:a14="http://schemas.microsoft.com/office/drawing/2010/main" Requires="a14">
+      <mc:AlternateContent xmlns:mc="http://schemas.openxmlformats.org/markup-compatibility/2006" xmlns:a14="http://schemas.microsoft.com/office/drawing/2010/main">
+        <mc:Choice Requires="a14">
           <p:sp>
             <p:nvSpPr>
               <p:cNvPr id="6" name="TextBox 5">
@@ -13469,7 +20441,7 @@
                     <m:sSub>
                       <m:sSubPr>
                         <m:ctrlPr>
-                          <a:rPr lang="ko-KR" altLang="en-US" b="1" smtClean="0">
+                          <a:rPr lang="ko-KR" altLang="en-US" b="1" i="1" smtClean="0">
                             <a:latin typeface="Cambria Math" panose="02040503050406030204" pitchFamily="18" charset="0"/>
                           </a:rPr>
                         </m:ctrlPr>
@@ -13599,7 +20571,7 @@
             </p:txBody>
           </p:sp>
         </mc:Choice>
-        <mc:Fallback>
+        <mc:Fallback xmlns="">
           <p:sp>
             <p:nvSpPr>
               <p:cNvPr id="6" name="TextBox 5">

--- a/Chapter 15 Language models and the Transformer.pptx
+++ b/Chapter 15 Language models and the Transformer.pptx
@@ -5,10 +5,10 @@
     <p:sldMasterId id="2147483660" r:id="rId1"/>
   </p:sldMasterIdLst>
   <p:notesMasterIdLst>
-    <p:notesMasterId r:id="rId27"/>
+    <p:notesMasterId r:id="rId38"/>
   </p:notesMasterIdLst>
   <p:handoutMasterIdLst>
-    <p:handoutMasterId r:id="rId28"/>
+    <p:handoutMasterId r:id="rId39"/>
   </p:handoutMasterIdLst>
   <p:sldIdLst>
     <p:sldId id="256" r:id="rId2"/>
@@ -30,12 +30,23 @@
     <p:sldId id="1151" r:id="rId18"/>
     <p:sldId id="1153" r:id="rId19"/>
     <p:sldId id="1154" r:id="rId20"/>
-    <p:sldId id="1155" r:id="rId21"/>
-    <p:sldId id="1159" r:id="rId22"/>
-    <p:sldId id="1160" r:id="rId23"/>
-    <p:sldId id="1156" r:id="rId24"/>
-    <p:sldId id="1157" r:id="rId25"/>
-    <p:sldId id="1158" r:id="rId26"/>
+    <p:sldId id="1172" r:id="rId21"/>
+    <p:sldId id="1155" r:id="rId22"/>
+    <p:sldId id="1159" r:id="rId23"/>
+    <p:sldId id="1160" r:id="rId24"/>
+    <p:sldId id="1156" r:id="rId25"/>
+    <p:sldId id="1157" r:id="rId26"/>
+    <p:sldId id="1158" r:id="rId27"/>
+    <p:sldId id="1162" r:id="rId28"/>
+    <p:sldId id="1161" r:id="rId29"/>
+    <p:sldId id="1163" r:id="rId30"/>
+    <p:sldId id="1165" r:id="rId31"/>
+    <p:sldId id="1166" r:id="rId32"/>
+    <p:sldId id="1167" r:id="rId33"/>
+    <p:sldId id="1168" r:id="rId34"/>
+    <p:sldId id="1169" r:id="rId35"/>
+    <p:sldId id="1170" r:id="rId36"/>
+    <p:sldId id="1171" r:id="rId37"/>
   </p:sldIdLst>
   <p:sldSz cx="12192000" cy="6858000"/>
   <p:notesSz cx="6858000" cy="9144000"/>
@@ -162,12 +173,23 @@
             <p14:sldId id="1151"/>
             <p14:sldId id="1153"/>
             <p14:sldId id="1154"/>
+            <p14:sldId id="1172"/>
             <p14:sldId id="1155"/>
             <p14:sldId id="1159"/>
             <p14:sldId id="1160"/>
             <p14:sldId id="1156"/>
             <p14:sldId id="1157"/>
             <p14:sldId id="1158"/>
+            <p14:sldId id="1162"/>
+            <p14:sldId id="1161"/>
+            <p14:sldId id="1163"/>
+            <p14:sldId id="1165"/>
+            <p14:sldId id="1166"/>
+            <p14:sldId id="1167"/>
+            <p14:sldId id="1168"/>
+            <p14:sldId id="1169"/>
+            <p14:sldId id="1170"/>
+            <p14:sldId id="1171"/>
           </p14:sldIdLst>
         </p14:section>
         <p14:section name="자세한 정보" id="{2CC34DB2-6590-42C0-AD4B-A04C6060184E}">
@@ -849,6 +871,91 @@
     <p:extLst>
       <p:ext uri="{BB962C8B-B14F-4D97-AF65-F5344CB8AC3E}">
         <p14:creationId xmlns:p14="http://schemas.microsoft.com/office/powerpoint/2010/main" val="1011769815"/>
+      </p:ext>
+    </p:extLst>
+  </p:cSld>
+  <p:clrMapOvr>
+    <a:masterClrMapping/>
+  </p:clrMapOvr>
+</p:notes>
+</file>
+
+<file path=ppt/notesSlides/notesSlide2.xml><?xml version="1.0" encoding="utf-8"?>
+<p:notes xmlns:a="http://schemas.openxmlformats.org/drawingml/2006/main" xmlns:r="http://schemas.openxmlformats.org/officeDocument/2006/relationships" xmlns:p="http://schemas.openxmlformats.org/presentationml/2006/main">
+  <p:cSld>
+    <p:spTree>
+      <p:nvGrpSpPr>
+        <p:cNvPr id="1" name=""/>
+        <p:cNvGrpSpPr/>
+        <p:nvPr/>
+      </p:nvGrpSpPr>
+      <p:grpSpPr>
+        <a:xfrm>
+          <a:off x="0" y="0"/>
+          <a:ext cx="0" cy="0"/>
+          <a:chOff x="0" y="0"/>
+          <a:chExt cx="0" cy="0"/>
+        </a:xfrm>
+      </p:grpSpPr>
+      <p:sp>
+        <p:nvSpPr>
+          <p:cNvPr id="2" name="슬라이드 이미지 개체 틀 1"/>
+          <p:cNvSpPr>
+            <a:spLocks noGrp="1" noRot="1" noChangeAspect="1"/>
+          </p:cNvSpPr>
+          <p:nvPr>
+            <p:ph type="sldImg"/>
+          </p:nvPr>
+        </p:nvSpPr>
+        <p:spPr/>
+      </p:sp>
+      <p:sp>
+        <p:nvSpPr>
+          <p:cNvPr id="3" name="슬라이드 노트 개체 틀 2"/>
+          <p:cNvSpPr>
+            <a:spLocks noGrp="1"/>
+          </p:cNvSpPr>
+          <p:nvPr>
+            <p:ph type="body" idx="1"/>
+          </p:nvPr>
+        </p:nvSpPr>
+        <p:spPr/>
+        <p:txBody>
+          <a:bodyPr/>
+          <a:lstStyle/>
+          <a:p>
+            <a:endParaRPr lang="ko-KR" altLang="en-US" dirty="0"/>
+          </a:p>
+        </p:txBody>
+      </p:sp>
+      <p:sp>
+        <p:nvSpPr>
+          <p:cNvPr id="4" name="슬라이드 번호 개체 틀 3"/>
+          <p:cNvSpPr>
+            <a:spLocks noGrp="1"/>
+          </p:cNvSpPr>
+          <p:nvPr>
+            <p:ph type="sldNum" sz="quarter" idx="5"/>
+          </p:nvPr>
+        </p:nvSpPr>
+        <p:spPr/>
+        <p:txBody>
+          <a:bodyPr/>
+          <a:lstStyle/>
+          <a:p>
+            <a:fld id="{DF61EA0F-A667-4B49-8422-0062BC55E249}" type="slidenum">
+              <a:rPr lang="en-US" altLang="ko-KR" noProof="0" smtClean="0"/>
+              <a:pPr/>
+              <a:t>20</a:t>
+            </a:fld>
+            <a:endParaRPr lang="ko-KR" altLang="en-US" noProof="0"/>
+          </a:p>
+        </p:txBody>
+      </p:sp>
+    </p:spTree>
+    <p:extLst>
+      <p:ext uri="{BB962C8B-B14F-4D97-AF65-F5344CB8AC3E}">
+        <p14:creationId xmlns:p14="http://schemas.microsoft.com/office/powerpoint/2010/main" val="3199640625"/>
       </p:ext>
     </p:extLst>
   </p:cSld>
@@ -12765,6 +12872,468 @@
         <p:cNvPr id="1" name="">
           <a:extLst>
             <a:ext uri="{FF2B5EF4-FFF2-40B4-BE49-F238E27FC236}">
+              <a16:creationId xmlns:a16="http://schemas.microsoft.com/office/drawing/2014/main" id="{0C3C98A2-8124-BA79-7AD4-0C80788B43AE}"/>
+            </a:ext>
+          </a:extLst>
+        </p:cNvPr>
+        <p:cNvGrpSpPr/>
+        <p:nvPr/>
+      </p:nvGrpSpPr>
+      <p:grpSpPr>
+        <a:xfrm>
+          <a:off x="0" y="0"/>
+          <a:ext cx="0" cy="0"/>
+          <a:chOff x="0" y="0"/>
+          <a:chExt cx="0" cy="0"/>
+        </a:xfrm>
+      </p:grpSpPr>
+      <p:pic>
+        <p:nvPicPr>
+          <p:cNvPr id="3082" name="Picture 10">
+            <a:extLst>
+              <a:ext uri="{FF2B5EF4-FFF2-40B4-BE49-F238E27FC236}">
+                <a16:creationId xmlns:a16="http://schemas.microsoft.com/office/drawing/2014/main" id="{7C6071FA-7C1A-CB7F-607E-63BFF4BAFFA9}"/>
+              </a:ext>
+            </a:extLst>
+          </p:cNvPr>
+          <p:cNvPicPr>
+            <a:picLocks noChangeAspect="1" noChangeArrowheads="1"/>
+          </p:cNvPicPr>
+          <p:nvPr/>
+        </p:nvPicPr>
+        <p:blipFill>
+          <a:blip r:embed="rId3">
+            <a:extLst>
+              <a:ext uri="{28A0092B-C50C-407E-A947-70E740481C1C}">
+                <a14:useLocalDpi xmlns:a14="http://schemas.microsoft.com/office/drawing/2010/main" val="0"/>
+              </a:ext>
+            </a:extLst>
+          </a:blip>
+          <a:srcRect/>
+          <a:stretch>
+            <a:fillRect/>
+          </a:stretch>
+        </p:blipFill>
+        <p:spPr bwMode="auto">
+          <a:xfrm>
+            <a:off x="313698" y="2499995"/>
+            <a:ext cx="7251057" cy="3449533"/>
+          </a:xfrm>
+          <a:prstGeom prst="rect">
+            <a:avLst/>
+          </a:prstGeom>
+          <a:noFill/>
+          <a:extLst>
+            <a:ext uri="{909E8E84-426E-40DD-AFC4-6F175D3DCCD1}">
+              <a14:hiddenFill xmlns:a14="http://schemas.microsoft.com/office/drawing/2010/main">
+                <a:solidFill>
+                  <a:srgbClr val="FFFFFF"/>
+                </a:solidFill>
+              </a14:hiddenFill>
+            </a:ext>
+          </a:extLst>
+        </p:spPr>
+      </p:pic>
+      <p:sp>
+        <p:nvSpPr>
+          <p:cNvPr id="4" name="슬라이드 번호 개체 틀 3">
+            <a:extLst>
+              <a:ext uri="{FF2B5EF4-FFF2-40B4-BE49-F238E27FC236}">
+                <a16:creationId xmlns:a16="http://schemas.microsoft.com/office/drawing/2014/main" id="{285FA262-DD16-AF08-3EDB-CED2E92475F3}"/>
+              </a:ext>
+            </a:extLst>
+          </p:cNvPr>
+          <p:cNvSpPr>
+            <a:spLocks noGrp="1"/>
+          </p:cNvSpPr>
+          <p:nvPr>
+            <p:ph type="sldNum" sz="quarter" idx="12"/>
+          </p:nvPr>
+        </p:nvSpPr>
+        <p:spPr>
+          <a:xfrm>
+            <a:off x="10514011" y="6036261"/>
+            <a:ext cx="753545" cy="365125"/>
+          </a:xfrm>
+        </p:spPr>
+        <p:txBody>
+          <a:bodyPr/>
+          <a:lstStyle/>
+          <a:p>
+            <a:fld id="{D57F1E4F-1CFF-5643-939E-217C01CDF565}" type="slidenum">
+              <a:rPr lang="en-US" smtClean="0"/>
+              <a:pPr/>
+              <a:t>20</a:t>
+            </a:fld>
+            <a:endParaRPr lang="en-US" dirty="0"/>
+          </a:p>
+        </p:txBody>
+      </p:sp>
+      <p:sp>
+        <p:nvSpPr>
+          <p:cNvPr id="3" name="제목 1">
+            <a:extLst>
+              <a:ext uri="{FF2B5EF4-FFF2-40B4-BE49-F238E27FC236}">
+                <a16:creationId xmlns:a16="http://schemas.microsoft.com/office/drawing/2014/main" id="{D384CA70-161B-17F2-D1B1-0D8609D6799A}"/>
+              </a:ext>
+            </a:extLst>
+          </p:cNvPr>
+          <p:cNvSpPr txBox="1">
+            <a:spLocks/>
+          </p:cNvSpPr>
+          <p:nvPr/>
+        </p:nvSpPr>
+        <p:spPr>
+          <a:xfrm>
+            <a:off x="475645" y="481983"/>
+            <a:ext cx="10353762" cy="766439"/>
+          </a:xfrm>
+          <a:prstGeom prst="rect">
+            <a:avLst/>
+          </a:prstGeom>
+        </p:spPr>
+        <p:txBody>
+          <a:bodyPr vert="horz" lIns="91440" tIns="45720" rIns="91440" bIns="45720" rtlCol="0" anchor="ctr">
+            <a:normAutofit/>
+          </a:bodyPr>
+          <a:lstStyle>
+            <a:lvl1pPr algn="ctr" defTabSz="914400" rtl="0" eaLnBrk="1" latinLnBrk="1" hangingPunct="1">
+              <a:lnSpc>
+                <a:spcPct val="90000"/>
+              </a:lnSpc>
+              <a:spcBef>
+                <a:spcPct val="0"/>
+              </a:spcBef>
+              <a:buNone/>
+              <a:defRPr sz="3200" kern="1200" cap="all" baseline="0">
+                <a:solidFill>
+                  <a:schemeClr val="tx1"/>
+                </a:solidFill>
+                <a:effectLst/>
+                <a:latin typeface="Batang" panose="02030600000101010101" pitchFamily="18" charset="-127"/>
+                <a:ea typeface="Batang" panose="02030600000101010101" pitchFamily="18" charset="-127"/>
+                <a:cs typeface="+mj-cs"/>
+              </a:defRPr>
+            </a:lvl1pPr>
+          </a:lstStyle>
+          <a:p>
+            <a:pPr algn="l"/>
+            <a:r>
+              <a:rPr lang="en-US" altLang="ko-KR" sz="2800" b="1" cap="none" dirty="0">
+                <a:latin typeface="Lora" pitchFamily="2" charset="0"/>
+              </a:rPr>
+              <a:t>The Transformer architecture</a:t>
+            </a:r>
+          </a:p>
+        </p:txBody>
+      </p:sp>
+      <p:sp>
+        <p:nvSpPr>
+          <p:cNvPr id="62" name="TextBox 61">
+            <a:extLst>
+              <a:ext uri="{FF2B5EF4-FFF2-40B4-BE49-F238E27FC236}">
+                <a16:creationId xmlns:a16="http://schemas.microsoft.com/office/drawing/2014/main" id="{B36A3FE9-4B12-4D83-A47F-850ADB6C9284}"/>
+              </a:ext>
+            </a:extLst>
+          </p:cNvPr>
+          <p:cNvSpPr txBox="1"/>
+          <p:nvPr/>
+        </p:nvSpPr>
+        <p:spPr>
+          <a:xfrm>
+            <a:off x="6966408" y="826899"/>
+            <a:ext cx="4600281" cy="369332"/>
+          </a:xfrm>
+          <a:prstGeom prst="rect">
+            <a:avLst/>
+          </a:prstGeom>
+          <a:noFill/>
+        </p:spPr>
+        <p:txBody>
+          <a:bodyPr wrap="square">
+            <a:spAutoFit/>
+          </a:bodyPr>
+          <a:lstStyle/>
+          <a:p>
+            <a:pPr indent="0" algn="r">
+              <a:buNone/>
+            </a:pPr>
+            <a:r>
+              <a:rPr lang="ko-KR" altLang="ko-KR" sz="1800" b="1" i="0" dirty="0" err="1">
+                <a:effectLst/>
+                <a:latin typeface="Lora" pitchFamily="2" charset="0"/>
+              </a:rPr>
+              <a:t>Dot-product</a:t>
+            </a:r>
+            <a:r>
+              <a:rPr lang="ko-KR" altLang="ko-KR" sz="1800" b="1" i="0" dirty="0">
+                <a:effectLst/>
+                <a:latin typeface="Lora" pitchFamily="2" charset="0"/>
+              </a:rPr>
+              <a:t> </a:t>
+            </a:r>
+            <a:r>
+              <a:rPr lang="ko-KR" altLang="ko-KR" sz="1800" b="1" i="0" dirty="0" err="1">
+                <a:effectLst/>
+                <a:latin typeface="Lora" pitchFamily="2" charset="0"/>
+              </a:rPr>
+              <a:t>attention</a:t>
+            </a:r>
+            <a:endParaRPr lang="ko-KR" altLang="ko-KR" sz="1800" b="1" i="0" dirty="0">
+              <a:effectLst/>
+              <a:latin typeface="Lora" pitchFamily="2" charset="0"/>
+            </a:endParaRPr>
+          </a:p>
+        </p:txBody>
+      </p:sp>
+      <p:pic>
+        <p:nvPicPr>
+          <p:cNvPr id="3076" name="Picture 4">
+            <a:extLst>
+              <a:ext uri="{FF2B5EF4-FFF2-40B4-BE49-F238E27FC236}">
+                <a16:creationId xmlns:a16="http://schemas.microsoft.com/office/drawing/2014/main" id="{CD669AAA-54B3-98CF-C051-BF2F06E8A0C9}"/>
+              </a:ext>
+            </a:extLst>
+          </p:cNvPr>
+          <p:cNvPicPr>
+            <a:picLocks noChangeAspect="1" noChangeArrowheads="1"/>
+          </p:cNvPicPr>
+          <p:nvPr/>
+        </p:nvPicPr>
+        <p:blipFill>
+          <a:blip r:embed="rId4">
+            <a:extLst>
+              <a:ext uri="{28A0092B-C50C-407E-A947-70E740481C1C}">
+                <a14:useLocalDpi xmlns:a14="http://schemas.microsoft.com/office/drawing/2010/main" val="0"/>
+              </a:ext>
+            </a:extLst>
+          </a:blip>
+          <a:srcRect/>
+          <a:stretch>
+            <a:fillRect/>
+          </a:stretch>
+        </p:blipFill>
+        <p:spPr bwMode="auto">
+          <a:xfrm>
+            <a:off x="7548880" y="2499995"/>
+            <a:ext cx="4331909" cy="3467878"/>
+          </a:xfrm>
+          <a:prstGeom prst="rect">
+            <a:avLst/>
+          </a:prstGeom>
+          <a:noFill/>
+          <a:extLst>
+            <a:ext uri="{909E8E84-426E-40DD-AFC4-6F175D3DCCD1}">
+              <a14:hiddenFill xmlns:a14="http://schemas.microsoft.com/office/drawing/2010/main">
+                <a:solidFill>
+                  <a:srgbClr val="FFFFFF"/>
+                </a:solidFill>
+              </a14:hiddenFill>
+            </a:ext>
+          </a:extLst>
+        </p:spPr>
+      </p:pic>
+      <p:pic>
+        <p:nvPicPr>
+          <p:cNvPr id="7" name="그림 6">
+            <a:extLst>
+              <a:ext uri="{FF2B5EF4-FFF2-40B4-BE49-F238E27FC236}">
+                <a16:creationId xmlns:a16="http://schemas.microsoft.com/office/drawing/2014/main" id="{9878B6AB-E92F-575A-2BB1-A9BE449105BB}"/>
+              </a:ext>
+            </a:extLst>
+          </p:cNvPr>
+          <p:cNvPicPr>
+            <a:picLocks noChangeAspect="1"/>
+          </p:cNvPicPr>
+          <p:nvPr/>
+        </p:nvPicPr>
+        <p:blipFill>
+          <a:blip r:embed="rId5"/>
+          <a:stretch>
+            <a:fillRect/>
+          </a:stretch>
+        </p:blipFill>
+        <p:spPr>
+          <a:xfrm>
+            <a:off x="1903664" y="4172215"/>
+            <a:ext cx="825308" cy="969738"/>
+          </a:xfrm>
+          <a:prstGeom prst="rect">
+            <a:avLst/>
+          </a:prstGeom>
+        </p:spPr>
+      </p:pic>
+      <p:pic>
+        <p:nvPicPr>
+          <p:cNvPr id="11" name="그림 10">
+            <a:extLst>
+              <a:ext uri="{FF2B5EF4-FFF2-40B4-BE49-F238E27FC236}">
+                <a16:creationId xmlns:a16="http://schemas.microsoft.com/office/drawing/2014/main" id="{22D3A837-B3CC-CBED-65B8-CE7CE1B28E98}"/>
+              </a:ext>
+            </a:extLst>
+          </p:cNvPr>
+          <p:cNvPicPr>
+            <a:picLocks noChangeAspect="1"/>
+          </p:cNvPicPr>
+          <p:nvPr/>
+        </p:nvPicPr>
+        <p:blipFill>
+          <a:blip r:embed="rId6"/>
+          <a:stretch>
+            <a:fillRect/>
+          </a:stretch>
+        </p:blipFill>
+        <p:spPr>
+          <a:xfrm>
+            <a:off x="1283904" y="3195320"/>
+            <a:ext cx="927070" cy="766439"/>
+          </a:xfrm>
+          <a:prstGeom prst="rect">
+            <a:avLst/>
+          </a:prstGeom>
+        </p:spPr>
+      </p:pic>
+      <p:sp>
+        <p:nvSpPr>
+          <p:cNvPr id="12" name="TextBox 11">
+            <a:extLst>
+              <a:ext uri="{FF2B5EF4-FFF2-40B4-BE49-F238E27FC236}">
+                <a16:creationId xmlns:a16="http://schemas.microsoft.com/office/drawing/2014/main" id="{ACF5F620-4B5E-E90A-BF27-690A6AEB5EF1}"/>
+              </a:ext>
+            </a:extLst>
+          </p:cNvPr>
+          <p:cNvSpPr txBox="1"/>
+          <p:nvPr/>
+        </p:nvSpPr>
+        <p:spPr>
+          <a:xfrm>
+            <a:off x="599440" y="1248422"/>
+            <a:ext cx="11318240" cy="793166"/>
+          </a:xfrm>
+          <a:prstGeom prst="rect">
+            <a:avLst/>
+          </a:prstGeom>
+          <a:noFill/>
+        </p:spPr>
+        <p:txBody>
+          <a:bodyPr wrap="square" rtlCol="0">
+            <a:spAutoFit/>
+          </a:bodyPr>
+          <a:lstStyle/>
+          <a:p>
+            <a:pPr>
+              <a:lnSpc>
+                <a:spcPct val="150000"/>
+              </a:lnSpc>
+            </a:pPr>
+            <a:r>
+              <a:rPr lang="en-US" altLang="ko-KR" sz="1600" dirty="0">
+                <a:latin typeface="D2Coding" panose="020B0609020101020101" pitchFamily="49" charset="-127"/>
+                <a:ea typeface="D2Coding" panose="020B0609020101020101" pitchFamily="49" charset="-127"/>
+              </a:rPr>
+              <a:t>2</a:t>
+            </a:r>
+            <a:r>
+              <a:rPr lang="ko-KR" altLang="en-US" sz="1600" dirty="0">
+                <a:latin typeface="D2Coding" panose="020B0609020101020101" pitchFamily="49" charset="-127"/>
+                <a:ea typeface="D2Coding" panose="020B0609020101020101" pitchFamily="49" charset="-127"/>
+              </a:rPr>
+              <a:t>차원 </a:t>
+            </a:r>
+            <a:r>
+              <a:rPr lang="en-US" altLang="ko-KR" sz="1600" dirty="0">
+                <a:latin typeface="D2Coding" panose="020B0609020101020101" pitchFamily="49" charset="-127"/>
+                <a:ea typeface="D2Coding" panose="020B0609020101020101" pitchFamily="49" charset="-127"/>
+              </a:rPr>
+              <a:t>Word Embedding</a:t>
+            </a:r>
+            <a:r>
+              <a:rPr lang="ko-KR" altLang="en-US" sz="1600" dirty="0">
+                <a:latin typeface="D2Coding" panose="020B0609020101020101" pitchFamily="49" charset="-127"/>
+                <a:ea typeface="D2Coding" panose="020B0609020101020101" pitchFamily="49" charset="-127"/>
+              </a:rPr>
+              <a:t>하여 시각화한 후 각 포인트의 내적</a:t>
+            </a:r>
+            <a:r>
+              <a:rPr lang="en-US" altLang="ko-KR" sz="1600" dirty="0">
+                <a:latin typeface="D2Coding" panose="020B0609020101020101" pitchFamily="49" charset="-127"/>
+                <a:ea typeface="D2Coding" panose="020B0609020101020101" pitchFamily="49" charset="-127"/>
+              </a:rPr>
+              <a:t>(Dot-product)</a:t>
+            </a:r>
+            <a:r>
+              <a:rPr lang="ko-KR" altLang="en-US" sz="1600" dirty="0">
+                <a:latin typeface="D2Coding" panose="020B0609020101020101" pitchFamily="49" charset="-127"/>
+                <a:ea typeface="D2Coding" panose="020B0609020101020101" pitchFamily="49" charset="-127"/>
+              </a:rPr>
+              <a:t>과 코사인 유사성</a:t>
+            </a:r>
+            <a:r>
+              <a:rPr lang="en-US" altLang="ko-KR" sz="1600" dirty="0">
+                <a:latin typeface="D2Coding" panose="020B0609020101020101" pitchFamily="49" charset="-127"/>
+                <a:ea typeface="D2Coding" panose="020B0609020101020101" pitchFamily="49" charset="-127"/>
+              </a:rPr>
+              <a:t>(Cosine Similarity)</a:t>
+            </a:r>
+            <a:r>
+              <a:rPr lang="ko-KR" altLang="en-US" sz="1600" dirty="0">
+                <a:latin typeface="D2Coding" panose="020B0609020101020101" pitchFamily="49" charset="-127"/>
+                <a:ea typeface="D2Coding" panose="020B0609020101020101" pitchFamily="49" charset="-127"/>
+              </a:rPr>
+              <a:t>을 계산하면 특성</a:t>
+            </a:r>
+            <a:r>
+              <a:rPr lang="en-US" altLang="ko-KR" sz="1600" dirty="0">
+                <a:latin typeface="D2Coding" panose="020B0609020101020101" pitchFamily="49" charset="-127"/>
+                <a:ea typeface="D2Coding" panose="020B0609020101020101" pitchFamily="49" charset="-127"/>
+              </a:rPr>
+              <a:t>(</a:t>
+            </a:r>
+            <a:r>
+              <a:rPr lang="ko-KR" altLang="en-US" sz="1600" dirty="0">
+                <a:latin typeface="D2Coding" panose="020B0609020101020101" pitchFamily="49" charset="-127"/>
+                <a:ea typeface="D2Coding" panose="020B0609020101020101" pitchFamily="49" charset="-127"/>
+              </a:rPr>
+              <a:t>차원</a:t>
+            </a:r>
+            <a:r>
+              <a:rPr lang="en-US" altLang="ko-KR" sz="1600" dirty="0">
+                <a:latin typeface="D2Coding" panose="020B0609020101020101" pitchFamily="49" charset="-127"/>
+                <a:ea typeface="D2Coding" panose="020B0609020101020101" pitchFamily="49" charset="-127"/>
+              </a:rPr>
+              <a:t>)</a:t>
+            </a:r>
+            <a:r>
+              <a:rPr lang="ko-KR" altLang="en-US" sz="1600" dirty="0">
+                <a:latin typeface="D2Coding" panose="020B0609020101020101" pitchFamily="49" charset="-127"/>
+                <a:ea typeface="D2Coding" panose="020B0609020101020101" pitchFamily="49" charset="-127"/>
+              </a:rPr>
+              <a:t>이 비슷한 데이터 포인트의 내적과 코사인 유사성이 커지게 됨 </a:t>
+            </a:r>
+          </a:p>
+        </p:txBody>
+      </p:sp>
+    </p:spTree>
+    <p:extLst>
+      <p:ext uri="{BB962C8B-B14F-4D97-AF65-F5344CB8AC3E}">
+        <p14:creationId xmlns:p14="http://schemas.microsoft.com/office/powerpoint/2010/main" val="1268207376"/>
+      </p:ext>
+    </p:extLst>
+  </p:cSld>
+  <p:clrMapOvr>
+    <a:masterClrMapping/>
+  </p:clrMapOvr>
+</p:sld>
+</file>
+
+<file path=ppt/slides/slide21.xml><?xml version="1.0" encoding="utf-8"?>
+<p:sld xmlns:a="http://schemas.openxmlformats.org/drawingml/2006/main" xmlns:r="http://schemas.openxmlformats.org/officeDocument/2006/relationships" xmlns:p="http://schemas.openxmlformats.org/presentationml/2006/main">
+  <p:cSld>
+    <p:spTree>
+      <p:nvGrpSpPr>
+        <p:cNvPr id="1" name="">
+          <a:extLst>
+            <a:ext uri="{FF2B5EF4-FFF2-40B4-BE49-F238E27FC236}">
               <a16:creationId xmlns:a16="http://schemas.microsoft.com/office/drawing/2014/main" id="{4022595E-F380-3DED-F8D7-C89968203333}"/>
             </a:ext>
           </a:extLst>
@@ -12809,7 +13378,7 @@
             <a:fld id="{D57F1E4F-1CFF-5643-939E-217C01CDF565}" type="slidenum">
               <a:rPr lang="en-US" smtClean="0"/>
               <a:pPr/>
-              <a:t>20</a:t>
+              <a:t>21</a:t>
             </a:fld>
             <a:endParaRPr lang="en-US" dirty="0"/>
           </a:p>
@@ -12918,7 +13487,7 @@
         <p:spPr>
           <a:xfrm>
             <a:off x="6964219" y="1317714"/>
-            <a:ext cx="4549998" cy="3910366"/>
+            <a:ext cx="4831520" cy="3910366"/>
           </a:xfrm>
           <a:prstGeom prst="rect">
             <a:avLst/>
@@ -13176,7 +13745,7 @@
                 <a:latin typeface="D2Coding" panose="020B0609020101020101" pitchFamily="49" charset="-127"/>
                 <a:ea typeface="D2Coding" panose="020B0609020101020101" pitchFamily="49" charset="-127"/>
               </a:rPr>
-              <a:t> 맥스 값을 구한 후 </a:t>
+              <a:t> 값</a:t>
             </a:r>
             <a:r>
               <a:rPr lang="en-US" altLang="ko-KR" sz="1400" dirty="0">
@@ -13186,8 +13755,25 @@
                 <a:latin typeface="D2Coding" panose="020B0609020101020101" pitchFamily="49" charset="-127"/>
                 <a:ea typeface="D2Coding" panose="020B0609020101020101" pitchFamily="49" charset="-127"/>
               </a:rPr>
-              <a:t>(scaling)</a:t>
-            </a:r>
+              <a:t>(attention weight)</a:t>
+            </a:r>
+            <a:r>
+              <a:rPr lang="ko-KR" altLang="en-US" sz="1400" dirty="0">
+                <a:solidFill>
+                  <a:srgbClr val="000000"/>
+                </a:solidFill>
+                <a:latin typeface="D2Coding" panose="020B0609020101020101" pitchFamily="49" charset="-127"/>
+                <a:ea typeface="D2Coding" panose="020B0609020101020101" pitchFamily="49" charset="-127"/>
+              </a:rPr>
+              <a:t>을 구한 후</a:t>
+            </a:r>
+            <a:endParaRPr lang="en-US" altLang="ko-KR" sz="1400" dirty="0">
+              <a:solidFill>
+                <a:srgbClr val="000000"/>
+              </a:solidFill>
+              <a:latin typeface="D2Coding" panose="020B0609020101020101" pitchFamily="49" charset="-127"/>
+              <a:ea typeface="D2Coding" panose="020B0609020101020101" pitchFamily="49" charset="-127"/>
+            </a:endParaRPr>
           </a:p>
           <a:p>
             <a:pPr lvl="1">
@@ -13388,10 +13974,10 @@
           <p:nvPr/>
         </p:nvPicPr>
         <p:blipFill>
-          <a:blip>
+          <a:blip r:embed="rId3">
             <a:extLst>
               <a:ext uri="{96DAC541-7B7A-43D3-8B79-37D633B846F1}">
-                <asvg:svgBlip xmlns:asvg="http://schemas.microsoft.com/office/drawing/2016/SVG/main" r:embed="rId3"/>
+                <asvg:svgBlip xmlns:asvg="http://schemas.microsoft.com/office/drawing/2016/SVG/main" r:embed="rId4"/>
               </a:ext>
             </a:extLst>
           </a:blip>
@@ -13424,10 +14010,10 @@
           <p:nvPr/>
         </p:nvPicPr>
         <p:blipFill>
-          <a:blip>
+          <a:blip r:embed="rId5">
             <a:extLst>
               <a:ext uri="{96DAC541-7B7A-43D3-8B79-37D633B846F1}">
-                <asvg:svgBlip xmlns:asvg="http://schemas.microsoft.com/office/drawing/2016/SVG/main" r:embed="rId4"/>
+                <asvg:svgBlip xmlns:asvg="http://schemas.microsoft.com/office/drawing/2016/SVG/main" r:embed="rId6"/>
               </a:ext>
             </a:extLst>
           </a:blip>
@@ -13460,10 +14046,10 @@
           <p:nvPr/>
         </p:nvPicPr>
         <p:blipFill>
-          <a:blip>
+          <a:blip r:embed="rId7">
             <a:extLst>
               <a:ext uri="{96DAC541-7B7A-43D3-8B79-37D633B846F1}">
-                <asvg:svgBlip xmlns:asvg="http://schemas.microsoft.com/office/drawing/2016/SVG/main" r:embed="rId5"/>
+                <asvg:svgBlip xmlns:asvg="http://schemas.microsoft.com/office/drawing/2016/SVG/main" r:embed="rId8"/>
               </a:ext>
             </a:extLst>
           </a:blip>
@@ -13539,10 +14125,10 @@
           <p:nvPr/>
         </p:nvPicPr>
         <p:blipFill>
-          <a:blip>
+          <a:blip r:embed="rId3">
             <a:extLst>
               <a:ext uri="{96DAC541-7B7A-43D3-8B79-37D633B846F1}">
-                <asvg:svgBlip xmlns:asvg="http://schemas.microsoft.com/office/drawing/2016/SVG/main" r:embed="rId3"/>
+                <asvg:svgBlip xmlns:asvg="http://schemas.microsoft.com/office/drawing/2016/SVG/main" r:embed="rId4"/>
               </a:ext>
             </a:extLst>
           </a:blip>
@@ -13575,10 +14161,10 @@
           <p:nvPr/>
         </p:nvPicPr>
         <p:blipFill>
-          <a:blip>
+          <a:blip r:embed="rId5">
             <a:extLst>
               <a:ext uri="{96DAC541-7B7A-43D3-8B79-37D633B846F1}">
-                <asvg:svgBlip xmlns:asvg="http://schemas.microsoft.com/office/drawing/2016/SVG/main" r:embed="rId4"/>
+                <asvg:svgBlip xmlns:asvg="http://schemas.microsoft.com/office/drawing/2016/SVG/main" r:embed="rId6"/>
               </a:ext>
             </a:extLst>
           </a:blip>
@@ -13611,10 +14197,10 @@
           <p:nvPr/>
         </p:nvPicPr>
         <p:blipFill>
-          <a:blip>
+          <a:blip r:embed="rId7">
             <a:extLst>
               <a:ext uri="{96DAC541-7B7A-43D3-8B79-37D633B846F1}">
-                <asvg:svgBlip xmlns:asvg="http://schemas.microsoft.com/office/drawing/2016/SVG/main" r:embed="rId5"/>
+                <asvg:svgBlip xmlns:asvg="http://schemas.microsoft.com/office/drawing/2016/SVG/main" r:embed="rId8"/>
               </a:ext>
             </a:extLst>
           </a:blip>
@@ -14067,14 +14653,12 @@
           <a:lstStyle/>
           <a:p>
             <a:r>
-              <a:rPr lang="ko-KR" altLang="ko-KR" sz="1400" dirty="0" err="1">
-                <a:solidFill>
-                  <a:srgbClr val="000000"/>
-                </a:solidFill>
-                <a:latin typeface="D2Coding" panose="020B0609020101020101" pitchFamily="49" charset="-127"/>
-                <a:ea typeface="D2Coding" panose="020B0609020101020101" pitchFamily="49" charset="-127"/>
-              </a:rPr>
+              <a:rPr lang="en-US" altLang="ko-KR" sz="1400" dirty="0" err="1"/>
               <a:t>raw_scores</a:t>
+            </a:r>
+            <a:r>
+              <a:rPr lang="en-US" altLang="ko-KR" sz="1400" dirty="0"/>
+              <a:t> </a:t>
             </a:r>
             <a:r>
               <a:rPr lang="ko-KR" altLang="ko-KR" sz="1400" dirty="0">
@@ -14245,6 +14829,24 @@
           </a:p>
           <a:p>
             <a:r>
+              <a:rPr lang="en-US" altLang="ko-KR" sz="1400" dirty="0" err="1"/>
+              <a:t>attention_weights</a:t>
+            </a:r>
+            <a:r>
+              <a:rPr lang="en-US" altLang="ko-KR" sz="1400" dirty="0"/>
+              <a:t> </a:t>
+            </a:r>
+            <a:r>
+              <a:rPr lang="ko-KR" altLang="ko-KR" sz="1400" dirty="0">
+                <a:solidFill>
+                  <a:srgbClr val="000000"/>
+                </a:solidFill>
+                <a:latin typeface="D2Coding" panose="020B0609020101020101" pitchFamily="49" charset="-127"/>
+                <a:ea typeface="D2Coding" panose="020B0609020101020101" pitchFamily="49" charset="-127"/>
+              </a:rPr>
+              <a:t> = </a:t>
+            </a:r>
+            <a:r>
               <a:rPr lang="ko-KR" altLang="ko-KR" sz="1400" dirty="0" err="1">
                 <a:solidFill>
                   <a:srgbClr val="000000"/>
@@ -14252,7 +14854,7 @@
                 <a:latin typeface="D2Coding" panose="020B0609020101020101" pitchFamily="49" charset="-127"/>
                 <a:ea typeface="D2Coding" panose="020B0609020101020101" pitchFamily="49" charset="-127"/>
               </a:rPr>
-              <a:t>attention_weights</a:t>
+              <a:t>softmax</a:t>
             </a:r>
             <a:r>
               <a:rPr lang="ko-KR" altLang="ko-KR" sz="1400" dirty="0">
@@ -14262,37 +14864,15 @@
                 <a:latin typeface="D2Coding" panose="020B0609020101020101" pitchFamily="49" charset="-127"/>
                 <a:ea typeface="D2Coding" panose="020B0609020101020101" pitchFamily="49" charset="-127"/>
               </a:rPr>
-              <a:t> = </a:t>
-            </a:r>
-            <a:r>
-              <a:rPr lang="ko-KR" altLang="ko-KR" sz="1400" dirty="0" err="1">
-                <a:solidFill>
-                  <a:srgbClr val="000000"/>
-                </a:solidFill>
-                <a:latin typeface="D2Coding" panose="020B0609020101020101" pitchFamily="49" charset="-127"/>
-                <a:ea typeface="D2Coding" panose="020B0609020101020101" pitchFamily="49" charset="-127"/>
-              </a:rPr>
-              <a:t>softmax</a:t>
-            </a:r>
-            <a:r>
-              <a:rPr lang="ko-KR" altLang="ko-KR" sz="1400" dirty="0">
-                <a:solidFill>
-                  <a:srgbClr val="000000"/>
-                </a:solidFill>
-                <a:latin typeface="D2Coding" panose="020B0609020101020101" pitchFamily="49" charset="-127"/>
-                <a:ea typeface="D2Coding" panose="020B0609020101020101" pitchFamily="49" charset="-127"/>
-              </a:rPr>
               <a:t>(</a:t>
             </a:r>
             <a:r>
-              <a:rPr lang="ko-KR" altLang="ko-KR" sz="1400" dirty="0" err="1">
-                <a:solidFill>
-                  <a:srgbClr val="000000"/>
-                </a:solidFill>
-                <a:latin typeface="D2Coding" panose="020B0609020101020101" pitchFamily="49" charset="-127"/>
-                <a:ea typeface="D2Coding" panose="020B0609020101020101" pitchFamily="49" charset="-127"/>
-              </a:rPr>
-              <a:t>scores</a:t>
+              <a:rPr lang="en-US" altLang="ko-KR" sz="1400" dirty="0" err="1"/>
+              <a:t>raw_scores</a:t>
+            </a:r>
+            <a:r>
+              <a:rPr lang="en-US" altLang="ko-KR" sz="1400" dirty="0"/>
+              <a:t> </a:t>
             </a:r>
             <a:r>
               <a:rPr lang="ko-KR" altLang="ko-KR" sz="1400" dirty="0">
@@ -14362,14 +14942,12 @@
               <a:t>(</a:t>
             </a:r>
             <a:r>
-              <a:rPr lang="ko-KR" altLang="ko-KR" sz="1400" dirty="0" err="1">
-                <a:solidFill>
-                  <a:srgbClr val="000000"/>
-                </a:solidFill>
-                <a:latin typeface="D2Coding" panose="020B0609020101020101" pitchFamily="49" charset="-127"/>
-                <a:ea typeface="D2Coding" panose="020B0609020101020101" pitchFamily="49" charset="-127"/>
-              </a:rPr>
-              <a:t>scores</a:t>
+              <a:rPr lang="en-US" altLang="ko-KR" sz="1400" dirty="0" err="1"/>
+              <a:t>attention_weights</a:t>
+            </a:r>
+            <a:r>
+              <a:rPr lang="en-US" altLang="ko-KR" sz="1400" dirty="0"/>
+              <a:t> </a:t>
             </a:r>
             <a:r>
               <a:rPr lang="ko-KR" altLang="ko-KR" sz="1400" dirty="0">
@@ -14419,7 +14997,7 @@
           <p:nvPr/>
         </p:nvPicPr>
         <p:blipFill>
-          <a:blip r:embed="rId6">
+          <a:blip r:embed="rId9">
             <a:duotone>
               <a:prstClr val="black"/>
               <a:schemeClr val="accent3">
@@ -14501,6 +15079,408 @@
           </a:p>
         </p:txBody>
       </p:sp>
+      <p:sp>
+        <p:nvSpPr>
+          <p:cNvPr id="6" name="TextBox 5">
+            <a:extLst>
+              <a:ext uri="{FF2B5EF4-FFF2-40B4-BE49-F238E27FC236}">
+                <a16:creationId xmlns:a16="http://schemas.microsoft.com/office/drawing/2014/main" id="{8AB5C2E5-D6C0-FB5A-9AB2-8CCB4BC38C9E}"/>
+              </a:ext>
+            </a:extLst>
+          </p:cNvPr>
+          <p:cNvSpPr txBox="1"/>
+          <p:nvPr/>
+        </p:nvSpPr>
+        <p:spPr>
+          <a:xfrm>
+            <a:off x="954113" y="5864396"/>
+            <a:ext cx="6096000" cy="923330"/>
+          </a:xfrm>
+          <a:prstGeom prst="rect">
+            <a:avLst/>
+          </a:prstGeom>
+          <a:noFill/>
+        </p:spPr>
+        <p:txBody>
+          <a:bodyPr wrap="square">
+            <a:spAutoFit/>
+          </a:bodyPr>
+          <a:lstStyle/>
+          <a:p>
+            <a:pPr algn="l" latinLnBrk="0">
+              <a:buNone/>
+            </a:pPr>
+            <a:r>
+              <a:rPr lang="en-US" altLang="ko-KR" b="0" i="0" dirty="0">
+                <a:solidFill>
+                  <a:srgbClr val="000000"/>
+                </a:solidFill>
+                <a:effectLst/>
+                <a:latin typeface="Ubuntu Sans Mono"/>
+              </a:rPr>
+              <a:t>scores </a:t>
+            </a:r>
+            <a:r>
+              <a:rPr lang="en-US" altLang="ko-KR" b="0" i="0" dirty="0">
+                <a:solidFill>
+                  <a:srgbClr val="9A6E3A"/>
+                </a:solidFill>
+                <a:effectLst/>
+                <a:latin typeface="Ubuntu Sans Mono"/>
+              </a:rPr>
+              <a:t>=</a:t>
+            </a:r>
+            <a:r>
+              <a:rPr lang="en-US" altLang="ko-KR" b="0" i="0" dirty="0">
+                <a:solidFill>
+                  <a:srgbClr val="000000"/>
+                </a:solidFill>
+                <a:effectLst/>
+                <a:latin typeface="Ubuntu Sans Mono"/>
+              </a:rPr>
+              <a:t> </a:t>
+            </a:r>
+            <a:r>
+              <a:rPr lang="en-US" altLang="ko-KR" b="0" i="0" dirty="0">
+                <a:solidFill>
+                  <a:srgbClr val="999999"/>
+                </a:solidFill>
+                <a:effectLst/>
+                <a:latin typeface="Ubuntu Sans Mono"/>
+              </a:rPr>
+              <a:t>[</a:t>
+            </a:r>
+            <a:r>
+              <a:rPr lang="en-US" altLang="ko-KR" b="0" i="0" dirty="0">
+                <a:solidFill>
+                  <a:srgbClr val="000000"/>
+                </a:solidFill>
+                <a:effectLst/>
+                <a:latin typeface="Ubuntu Sans Mono"/>
+              </a:rPr>
+              <a:t>score</a:t>
+            </a:r>
+            <a:r>
+              <a:rPr lang="en-US" altLang="ko-KR" b="0" i="0" dirty="0">
+                <a:solidFill>
+                  <a:srgbClr val="999999"/>
+                </a:solidFill>
+                <a:effectLst/>
+                <a:latin typeface="Ubuntu Sans Mono"/>
+              </a:rPr>
+              <a:t>(</a:t>
+            </a:r>
+            <a:r>
+              <a:rPr lang="en-US" altLang="ko-KR" b="0" i="0" dirty="0">
+                <a:solidFill>
+                  <a:srgbClr val="000000"/>
+                </a:solidFill>
+                <a:effectLst/>
+                <a:latin typeface="Ubuntu Sans Mono"/>
+              </a:rPr>
+              <a:t>target</a:t>
+            </a:r>
+            <a:r>
+              <a:rPr lang="en-US" altLang="ko-KR" b="0" i="0" dirty="0">
+                <a:solidFill>
+                  <a:srgbClr val="999999"/>
+                </a:solidFill>
+                <a:effectLst/>
+                <a:latin typeface="Ubuntu Sans Mono"/>
+              </a:rPr>
+              <a:t>,</a:t>
+            </a:r>
+            <a:r>
+              <a:rPr lang="en-US" altLang="ko-KR" b="0" i="0" dirty="0">
+                <a:solidFill>
+                  <a:srgbClr val="000000"/>
+                </a:solidFill>
+                <a:effectLst/>
+                <a:latin typeface="Ubuntu Sans Mono"/>
+              </a:rPr>
+              <a:t> source</a:t>
+            </a:r>
+            <a:r>
+              <a:rPr lang="en-US" altLang="ko-KR" b="0" i="0" dirty="0">
+                <a:solidFill>
+                  <a:srgbClr val="999999"/>
+                </a:solidFill>
+                <a:effectLst/>
+                <a:latin typeface="Ubuntu Sans Mono"/>
+              </a:rPr>
+              <a:t>)</a:t>
+            </a:r>
+            <a:r>
+              <a:rPr lang="en-US" altLang="ko-KR" b="0" i="0" dirty="0">
+                <a:solidFill>
+                  <a:srgbClr val="000000"/>
+                </a:solidFill>
+                <a:effectLst/>
+                <a:latin typeface="Ubuntu Sans Mono"/>
+              </a:rPr>
+              <a:t> </a:t>
+            </a:r>
+            <a:r>
+              <a:rPr lang="en-US" altLang="ko-KR" b="0" i="0" dirty="0">
+                <a:solidFill>
+                  <a:srgbClr val="0077AA"/>
+                </a:solidFill>
+                <a:effectLst/>
+                <a:latin typeface="Ubuntu Sans Mono"/>
+              </a:rPr>
+              <a:t>for</a:t>
+            </a:r>
+            <a:r>
+              <a:rPr lang="en-US" altLang="ko-KR" b="0" i="0" dirty="0">
+                <a:solidFill>
+                  <a:srgbClr val="000000"/>
+                </a:solidFill>
+                <a:effectLst/>
+                <a:latin typeface="Ubuntu Sans Mono"/>
+              </a:rPr>
+              <a:t> source </a:t>
+            </a:r>
+            <a:r>
+              <a:rPr lang="en-US" altLang="ko-KR" b="0" i="0" dirty="0">
+                <a:solidFill>
+                  <a:srgbClr val="0077AA"/>
+                </a:solidFill>
+                <a:effectLst/>
+                <a:latin typeface="Ubuntu Sans Mono"/>
+              </a:rPr>
+              <a:t>in</a:t>
+            </a:r>
+            <a:r>
+              <a:rPr lang="en-US" altLang="ko-KR" b="0" i="0" dirty="0">
+                <a:solidFill>
+                  <a:srgbClr val="000000"/>
+                </a:solidFill>
+                <a:effectLst/>
+                <a:latin typeface="Ubuntu Sans Mono"/>
+              </a:rPr>
+              <a:t> sources</a:t>
+            </a:r>
+            <a:r>
+              <a:rPr lang="en-US" altLang="ko-KR" b="0" i="0" dirty="0">
+                <a:solidFill>
+                  <a:srgbClr val="999999"/>
+                </a:solidFill>
+                <a:effectLst/>
+                <a:latin typeface="Ubuntu Sans Mono"/>
+              </a:rPr>
+              <a:t>]</a:t>
+            </a:r>
+            <a:endParaRPr lang="en-US" altLang="ko-KR" b="0" i="0" dirty="0">
+              <a:solidFill>
+                <a:srgbClr val="000000"/>
+              </a:solidFill>
+              <a:effectLst/>
+              <a:latin typeface="Ubuntu Sans Mono"/>
+            </a:endParaRPr>
+          </a:p>
+          <a:p>
+            <a:pPr algn="l" latinLnBrk="0">
+              <a:buNone/>
+            </a:pPr>
+            <a:r>
+              <a:rPr lang="en-US" altLang="ko-KR" b="0" i="0" dirty="0">
+                <a:solidFill>
+                  <a:srgbClr val="000000"/>
+                </a:solidFill>
+                <a:effectLst/>
+                <a:latin typeface="Ubuntu Sans Mono"/>
+              </a:rPr>
+              <a:t>scores </a:t>
+            </a:r>
+            <a:r>
+              <a:rPr lang="en-US" altLang="ko-KR" b="0" i="0" dirty="0">
+                <a:solidFill>
+                  <a:srgbClr val="9A6E3A"/>
+                </a:solidFill>
+                <a:effectLst/>
+                <a:latin typeface="Ubuntu Sans Mono"/>
+              </a:rPr>
+              <a:t>=</a:t>
+            </a:r>
+            <a:r>
+              <a:rPr lang="en-US" altLang="ko-KR" b="0" i="0" dirty="0">
+                <a:solidFill>
+                  <a:srgbClr val="000000"/>
+                </a:solidFill>
+                <a:effectLst/>
+                <a:latin typeface="Ubuntu Sans Mono"/>
+              </a:rPr>
+              <a:t> </a:t>
+            </a:r>
+            <a:r>
+              <a:rPr lang="en-US" altLang="ko-KR" b="0" i="0" dirty="0" err="1">
+                <a:solidFill>
+                  <a:srgbClr val="000000"/>
+                </a:solidFill>
+                <a:effectLst/>
+                <a:latin typeface="Ubuntu Sans Mono"/>
+              </a:rPr>
+              <a:t>softmax</a:t>
+            </a:r>
+            <a:r>
+              <a:rPr lang="en-US" altLang="ko-KR" b="0" i="0" dirty="0">
+                <a:solidFill>
+                  <a:srgbClr val="999999"/>
+                </a:solidFill>
+                <a:effectLst/>
+                <a:latin typeface="Ubuntu Sans Mono"/>
+              </a:rPr>
+              <a:t>(</a:t>
+            </a:r>
+            <a:r>
+              <a:rPr lang="en-US" altLang="ko-KR" b="0" i="0" dirty="0">
+                <a:solidFill>
+                  <a:srgbClr val="000000"/>
+                </a:solidFill>
+                <a:effectLst/>
+                <a:latin typeface="Ubuntu Sans Mono"/>
+              </a:rPr>
+              <a:t>scores</a:t>
+            </a:r>
+            <a:r>
+              <a:rPr lang="en-US" altLang="ko-KR" b="0" i="0" dirty="0">
+                <a:solidFill>
+                  <a:srgbClr val="999999"/>
+                </a:solidFill>
+                <a:effectLst/>
+                <a:latin typeface="Ubuntu Sans Mono"/>
+              </a:rPr>
+              <a:t>)</a:t>
+            </a:r>
+            <a:endParaRPr lang="en-US" altLang="ko-KR" b="0" i="0" dirty="0">
+              <a:solidFill>
+                <a:srgbClr val="000000"/>
+              </a:solidFill>
+              <a:effectLst/>
+              <a:latin typeface="Ubuntu Sans Mono"/>
+            </a:endParaRPr>
+          </a:p>
+          <a:p>
+            <a:pPr algn="l">
+              <a:buNone/>
+            </a:pPr>
+            <a:r>
+              <a:rPr lang="en-US" altLang="ko-KR" b="0" i="0" dirty="0">
+                <a:solidFill>
+                  <a:srgbClr val="000000"/>
+                </a:solidFill>
+                <a:effectLst/>
+                <a:latin typeface="Ubuntu Sans Mono"/>
+              </a:rPr>
+              <a:t>combined </a:t>
+            </a:r>
+            <a:r>
+              <a:rPr lang="en-US" altLang="ko-KR" b="0" i="0" dirty="0">
+                <a:solidFill>
+                  <a:srgbClr val="9A6E3A"/>
+                </a:solidFill>
+                <a:effectLst/>
+                <a:latin typeface="Ubuntu Sans Mono"/>
+              </a:rPr>
+              <a:t>=</a:t>
+            </a:r>
+            <a:r>
+              <a:rPr lang="en-US" altLang="ko-KR" b="0" i="0" dirty="0">
+                <a:solidFill>
+                  <a:srgbClr val="000000"/>
+                </a:solidFill>
+                <a:effectLst/>
+                <a:latin typeface="Ubuntu Sans Mono"/>
+              </a:rPr>
+              <a:t> </a:t>
+            </a:r>
+            <a:r>
+              <a:rPr lang="en-US" altLang="ko-KR" b="0" i="0" dirty="0" err="1">
+                <a:solidFill>
+                  <a:srgbClr val="000000"/>
+                </a:solidFill>
+                <a:effectLst/>
+                <a:latin typeface="Ubuntu Sans Mono"/>
+              </a:rPr>
+              <a:t>np</a:t>
+            </a:r>
+            <a:r>
+              <a:rPr lang="en-US" altLang="ko-KR" b="0" i="0" dirty="0" err="1">
+                <a:solidFill>
+                  <a:srgbClr val="999999"/>
+                </a:solidFill>
+                <a:effectLst/>
+                <a:latin typeface="Ubuntu Sans Mono"/>
+              </a:rPr>
+              <a:t>.</a:t>
+            </a:r>
+            <a:r>
+              <a:rPr lang="en-US" altLang="ko-KR" b="0" i="0" dirty="0" err="1">
+                <a:solidFill>
+                  <a:srgbClr val="669900"/>
+                </a:solidFill>
+                <a:effectLst/>
+                <a:latin typeface="Ubuntu Sans Mono"/>
+              </a:rPr>
+              <a:t>sum</a:t>
+            </a:r>
+            <a:r>
+              <a:rPr lang="en-US" altLang="ko-KR" b="0" i="0" dirty="0">
+                <a:solidFill>
+                  <a:srgbClr val="999999"/>
+                </a:solidFill>
+                <a:effectLst/>
+                <a:latin typeface="Ubuntu Sans Mono"/>
+              </a:rPr>
+              <a:t>(</a:t>
+            </a:r>
+            <a:r>
+              <a:rPr lang="en-US" altLang="ko-KR" b="0" i="0" dirty="0">
+                <a:solidFill>
+                  <a:srgbClr val="000000"/>
+                </a:solidFill>
+                <a:effectLst/>
+                <a:latin typeface="Ubuntu Sans Mono"/>
+              </a:rPr>
+              <a:t>scores </a:t>
+            </a:r>
+            <a:r>
+              <a:rPr lang="en-US" altLang="ko-KR" b="0" i="0" dirty="0">
+                <a:solidFill>
+                  <a:srgbClr val="9A6E3A"/>
+                </a:solidFill>
+                <a:effectLst/>
+                <a:latin typeface="Ubuntu Sans Mono"/>
+              </a:rPr>
+              <a:t>*</a:t>
+            </a:r>
+            <a:r>
+              <a:rPr lang="en-US" altLang="ko-KR" b="0" i="0" dirty="0">
+                <a:solidFill>
+                  <a:srgbClr val="000000"/>
+                </a:solidFill>
+                <a:effectLst/>
+                <a:latin typeface="Ubuntu Sans Mono"/>
+              </a:rPr>
+              <a:t> sources</a:t>
+            </a:r>
+            <a:r>
+              <a:rPr lang="en-US" altLang="ko-KR" b="0" i="0" dirty="0">
+                <a:solidFill>
+                  <a:srgbClr val="999999"/>
+                </a:solidFill>
+                <a:effectLst/>
+                <a:latin typeface="Ubuntu Sans Mono"/>
+              </a:rPr>
+              <a:t>)</a:t>
+            </a:r>
+            <a:endParaRPr lang="en-US" altLang="ko-KR" b="0" i="0" dirty="0">
+              <a:effectLst/>
+              <a:latin typeface="Courier New" panose="02070309020205020404" pitchFamily="49" charset="0"/>
+            </a:endParaRPr>
+          </a:p>
+        </p:txBody>
+      </p:sp>
     </p:spTree>
     <p:extLst>
       <p:ext uri="{BB962C8B-B14F-4D97-AF65-F5344CB8AC3E}">
@@ -14514,7 +15494,7 @@
 </p:sld>
 </file>
 
-<file path=ppt/slides/slide21.xml><?xml version="1.0" encoding="utf-8"?>
+<file path=ppt/slides/slide22.xml><?xml version="1.0" encoding="utf-8"?>
 <p:sld xmlns:a="http://schemas.openxmlformats.org/drawingml/2006/main" xmlns:r="http://schemas.openxmlformats.org/officeDocument/2006/relationships" xmlns:p="http://schemas.openxmlformats.org/presentationml/2006/main">
   <p:cSld>
     <p:spTree>
@@ -14566,7 +15546,7 @@
             <a:fld id="{D57F1E4F-1CFF-5643-939E-217C01CDF565}" type="slidenum">
               <a:rPr lang="en-US" smtClean="0"/>
               <a:pPr/>
-              <a:t>21</a:t>
+              <a:t>22</a:t>
             </a:fld>
             <a:endParaRPr lang="en-US" dirty="0"/>
           </a:p>
@@ -15768,7 +16748,7 @@
 </p:sld>
 </file>
 
-<file path=ppt/slides/slide22.xml><?xml version="1.0" encoding="utf-8"?>
+<file path=ppt/slides/slide23.xml><?xml version="1.0" encoding="utf-8"?>
 <p:sld xmlns:a="http://schemas.openxmlformats.org/drawingml/2006/main" xmlns:r="http://schemas.openxmlformats.org/officeDocument/2006/relationships" xmlns:p="http://schemas.openxmlformats.org/presentationml/2006/main">
   <p:cSld>
     <p:spTree>
@@ -15820,7 +16800,7 @@
             <a:fld id="{D57F1E4F-1CFF-5643-939E-217C01CDF565}" type="slidenum">
               <a:rPr lang="en-US" smtClean="0"/>
               <a:pPr/>
-              <a:t>22</a:t>
+              <a:t>23</a:t>
             </a:fld>
             <a:endParaRPr lang="en-US" dirty="0"/>
           </a:p>
@@ -15979,7 +16959,7 @@
               <a:buNone/>
             </a:pPr>
             <a:r>
-              <a:rPr lang="ko-KR" altLang="ko-KR" sz="1400" b="0" dirty="0" err="1">
+              <a:rPr lang="ko-KR" altLang="ko-KR" sz="1400" b="1" dirty="0" err="1">
                 <a:effectLst/>
                 <a:latin typeface="D2Coding" panose="020B0609020101020101" pitchFamily="49" charset="-127"/>
                 <a:ea typeface="D2Coding" panose="020B0609020101020101" pitchFamily="49" charset="-127"/>
@@ -15987,7 +16967,7 @@
               <a:t>raw_scores</a:t>
             </a:r>
             <a:r>
-              <a:rPr lang="ko-KR" altLang="ko-KR" sz="1400" b="0" dirty="0">
+              <a:rPr lang="ko-KR" altLang="ko-KR" sz="1400" b="1" dirty="0">
                 <a:effectLst/>
                 <a:latin typeface="D2Coding" panose="020B0609020101020101" pitchFamily="49" charset="-127"/>
                 <a:ea typeface="D2Coding" panose="020B0609020101020101" pitchFamily="49" charset="-127"/>
@@ -15995,7 +16975,7 @@
               <a:t> = </a:t>
             </a:r>
             <a:r>
-              <a:rPr lang="ko-KR" altLang="ko-KR" sz="1400" b="0" dirty="0" err="1">
+              <a:rPr lang="ko-KR" altLang="ko-KR" sz="1400" b="1" dirty="0" err="1">
                 <a:effectLst/>
                 <a:latin typeface="D2Coding" panose="020B0609020101020101" pitchFamily="49" charset="-127"/>
                 <a:ea typeface="D2Coding" panose="020B0609020101020101" pitchFamily="49" charset="-127"/>
@@ -16003,7 +16983,7 @@
               <a:t>np.array</a:t>
             </a:r>
             <a:r>
-              <a:rPr lang="ko-KR" altLang="ko-KR" sz="1400" b="0" dirty="0">
+              <a:rPr lang="ko-KR" altLang="ko-KR" sz="1400" b="1" dirty="0">
                 <a:effectLst/>
                 <a:latin typeface="D2Coding" panose="020B0609020101020101" pitchFamily="49" charset="-127"/>
                 <a:ea typeface="D2Coding" panose="020B0609020101020101" pitchFamily="49" charset="-127"/>
@@ -16011,7 +16991,7 @@
               <a:t>([</a:t>
             </a:r>
             <a:r>
-              <a:rPr lang="ko-KR" altLang="ko-KR" sz="1400" b="0" dirty="0" err="1">
+              <a:rPr lang="ko-KR" altLang="ko-KR" sz="1400" b="1" dirty="0" err="1">
                 <a:effectLst/>
                 <a:latin typeface="D2Coding" panose="020B0609020101020101" pitchFamily="49" charset="-127"/>
                 <a:ea typeface="D2Coding" panose="020B0609020101020101" pitchFamily="49" charset="-127"/>
@@ -16019,7 +16999,7 @@
               <a:t>score</a:t>
             </a:r>
             <a:r>
-              <a:rPr lang="ko-KR" altLang="ko-KR" sz="1400" b="0" dirty="0">
+              <a:rPr lang="ko-KR" altLang="ko-KR" sz="1400" b="1" dirty="0">
                 <a:effectLst/>
                 <a:latin typeface="D2Coding" panose="020B0609020101020101" pitchFamily="49" charset="-127"/>
                 <a:ea typeface="D2Coding" panose="020B0609020101020101" pitchFamily="49" charset="-127"/>
@@ -16027,7 +17007,7 @@
               <a:t>(</a:t>
             </a:r>
             <a:r>
-              <a:rPr lang="ko-KR" altLang="ko-KR" sz="1400" b="0" dirty="0" err="1">
+              <a:rPr lang="ko-KR" altLang="ko-KR" sz="1400" b="1" dirty="0" err="1">
                 <a:effectLst/>
                 <a:latin typeface="D2Coding" panose="020B0609020101020101" pitchFamily="49" charset="-127"/>
                 <a:ea typeface="D2Coding" panose="020B0609020101020101" pitchFamily="49" charset="-127"/>
@@ -16035,7 +17015,7 @@
               <a:t>target</a:t>
             </a:r>
             <a:r>
-              <a:rPr lang="ko-KR" altLang="ko-KR" sz="1400" b="0" dirty="0">
+              <a:rPr lang="ko-KR" altLang="ko-KR" sz="1400" b="1" dirty="0">
                 <a:effectLst/>
                 <a:latin typeface="D2Coding" panose="020B0609020101020101" pitchFamily="49" charset="-127"/>
                 <a:ea typeface="D2Coding" panose="020B0609020101020101" pitchFamily="49" charset="-127"/>
@@ -16043,7 +17023,7 @@
               <a:t>, </a:t>
             </a:r>
             <a:r>
-              <a:rPr lang="ko-KR" altLang="ko-KR" sz="1400" b="0" dirty="0" err="1">
+              <a:rPr lang="ko-KR" altLang="ko-KR" sz="1400" b="1" dirty="0" err="1">
                 <a:effectLst/>
                 <a:latin typeface="D2Coding" panose="020B0609020101020101" pitchFamily="49" charset="-127"/>
                 <a:ea typeface="D2Coding" panose="020B0609020101020101" pitchFamily="49" charset="-127"/>
@@ -16051,7 +17031,7 @@
               <a:t>s</a:t>
             </a:r>
             <a:r>
-              <a:rPr lang="ko-KR" altLang="ko-KR" sz="1400" b="0" dirty="0">
+              <a:rPr lang="ko-KR" altLang="ko-KR" sz="1400" b="1" dirty="0">
                 <a:effectLst/>
                 <a:latin typeface="D2Coding" panose="020B0609020101020101" pitchFamily="49" charset="-127"/>
                 <a:ea typeface="D2Coding" panose="020B0609020101020101" pitchFamily="49" charset="-127"/>
@@ -16059,7 +17039,7 @@
               <a:t>) </a:t>
             </a:r>
             <a:r>
-              <a:rPr lang="ko-KR" altLang="ko-KR" sz="1400" b="0" dirty="0" err="1">
+              <a:rPr lang="ko-KR" altLang="ko-KR" sz="1400" b="1" dirty="0" err="1">
                 <a:effectLst/>
                 <a:latin typeface="D2Coding" panose="020B0609020101020101" pitchFamily="49" charset="-127"/>
                 <a:ea typeface="D2Coding" panose="020B0609020101020101" pitchFamily="49" charset="-127"/>
@@ -16067,7 +17047,7 @@
               <a:t>for</a:t>
             </a:r>
             <a:r>
-              <a:rPr lang="ko-KR" altLang="ko-KR" sz="1400" b="0" dirty="0">
+              <a:rPr lang="ko-KR" altLang="ko-KR" sz="1400" b="1" dirty="0">
                 <a:effectLst/>
                 <a:latin typeface="D2Coding" panose="020B0609020101020101" pitchFamily="49" charset="-127"/>
                 <a:ea typeface="D2Coding" panose="020B0609020101020101" pitchFamily="49" charset="-127"/>
@@ -16075,7 +17055,7 @@
               <a:t> </a:t>
             </a:r>
             <a:r>
-              <a:rPr lang="ko-KR" altLang="ko-KR" sz="1400" b="0" dirty="0" err="1">
+              <a:rPr lang="ko-KR" altLang="ko-KR" sz="1400" b="1" dirty="0" err="1">
                 <a:effectLst/>
                 <a:latin typeface="D2Coding" panose="020B0609020101020101" pitchFamily="49" charset="-127"/>
                 <a:ea typeface="D2Coding" panose="020B0609020101020101" pitchFamily="49" charset="-127"/>
@@ -16083,7 +17063,7 @@
               <a:t>s</a:t>
             </a:r>
             <a:r>
-              <a:rPr lang="ko-KR" altLang="ko-KR" sz="1400" b="0" dirty="0">
+              <a:rPr lang="ko-KR" altLang="ko-KR" sz="1400" b="1" dirty="0">
                 <a:effectLst/>
                 <a:latin typeface="D2Coding" panose="020B0609020101020101" pitchFamily="49" charset="-127"/>
                 <a:ea typeface="D2Coding" panose="020B0609020101020101" pitchFamily="49" charset="-127"/>
@@ -16091,7 +17071,7 @@
               <a:t> </a:t>
             </a:r>
             <a:r>
-              <a:rPr lang="ko-KR" altLang="ko-KR" sz="1400" b="0" dirty="0" err="1">
+              <a:rPr lang="ko-KR" altLang="ko-KR" sz="1400" b="1" dirty="0" err="1">
                 <a:effectLst/>
                 <a:latin typeface="D2Coding" panose="020B0609020101020101" pitchFamily="49" charset="-127"/>
                 <a:ea typeface="D2Coding" panose="020B0609020101020101" pitchFamily="49" charset="-127"/>
@@ -16099,7 +17079,7 @@
               <a:t>in</a:t>
             </a:r>
             <a:r>
-              <a:rPr lang="ko-KR" altLang="ko-KR" sz="1400" b="0" dirty="0">
+              <a:rPr lang="ko-KR" altLang="ko-KR" sz="1400" b="1" dirty="0">
                 <a:effectLst/>
                 <a:latin typeface="D2Coding" panose="020B0609020101020101" pitchFamily="49" charset="-127"/>
                 <a:ea typeface="D2Coding" panose="020B0609020101020101" pitchFamily="49" charset="-127"/>
@@ -16107,7 +17087,7 @@
               <a:t> </a:t>
             </a:r>
             <a:r>
-              <a:rPr lang="ko-KR" altLang="ko-KR" sz="1400" b="0" dirty="0" err="1">
+              <a:rPr lang="ko-KR" altLang="ko-KR" sz="1400" b="1" dirty="0" err="1">
                 <a:effectLst/>
                 <a:latin typeface="D2Coding" panose="020B0609020101020101" pitchFamily="49" charset="-127"/>
                 <a:ea typeface="D2Coding" panose="020B0609020101020101" pitchFamily="49" charset="-127"/>
@@ -16115,7 +17095,7 @@
               <a:t>sources</a:t>
             </a:r>
             <a:r>
-              <a:rPr lang="ko-KR" altLang="ko-KR" sz="1400" b="0" dirty="0">
+              <a:rPr lang="ko-KR" altLang="ko-KR" sz="1400" b="1" dirty="0">
                 <a:effectLst/>
                 <a:latin typeface="D2Coding" panose="020B0609020101020101" pitchFamily="49" charset="-127"/>
                 <a:ea typeface="D2Coding" panose="020B0609020101020101" pitchFamily="49" charset="-127"/>
@@ -16288,42 +17268,42 @@
               </a:lnSpc>
             </a:pPr>
             <a:r>
-              <a:rPr lang="ko-KR" altLang="ko-KR" sz="1400" dirty="0" err="1">
+              <a:rPr lang="ko-KR" altLang="ko-KR" sz="1400" b="1" dirty="0" err="1">
                 <a:latin typeface="D2Coding" panose="020B0609020101020101" pitchFamily="49" charset="-127"/>
                 <a:ea typeface="D2Coding" panose="020B0609020101020101" pitchFamily="49" charset="-127"/>
               </a:rPr>
               <a:t>attention_weights</a:t>
             </a:r>
             <a:r>
-              <a:rPr lang="ko-KR" altLang="ko-KR" sz="1400" dirty="0">
+              <a:rPr lang="ko-KR" altLang="ko-KR" sz="1400" b="1" dirty="0">
                 <a:latin typeface="D2Coding" panose="020B0609020101020101" pitchFamily="49" charset="-127"/>
                 <a:ea typeface="D2Coding" panose="020B0609020101020101" pitchFamily="49" charset="-127"/>
               </a:rPr>
               <a:t> = </a:t>
             </a:r>
             <a:r>
-              <a:rPr lang="ko-KR" altLang="ko-KR" sz="1400" dirty="0" err="1">
+              <a:rPr lang="ko-KR" altLang="ko-KR" sz="1400" b="1" dirty="0" err="1">
                 <a:latin typeface="D2Coding" panose="020B0609020101020101" pitchFamily="49" charset="-127"/>
                 <a:ea typeface="D2Coding" panose="020B0609020101020101" pitchFamily="49" charset="-127"/>
               </a:rPr>
               <a:t>softmax</a:t>
             </a:r>
             <a:r>
-              <a:rPr lang="ko-KR" altLang="ko-KR" sz="1400" dirty="0">
+              <a:rPr lang="ko-KR" altLang="ko-KR" sz="1400" b="1" dirty="0">
                 <a:latin typeface="D2Coding" panose="020B0609020101020101" pitchFamily="49" charset="-127"/>
                 <a:ea typeface="D2Coding" panose="020B0609020101020101" pitchFamily="49" charset="-127"/>
               </a:rPr>
               <a:t>(</a:t>
             </a:r>
             <a:r>
-              <a:rPr lang="ko-KR" altLang="ko-KR" sz="1400" dirty="0" err="1">
+              <a:rPr lang="ko-KR" altLang="ko-KR" sz="1400" b="1" dirty="0" err="1">
                 <a:latin typeface="D2Coding" panose="020B0609020101020101" pitchFamily="49" charset="-127"/>
                 <a:ea typeface="D2Coding" panose="020B0609020101020101" pitchFamily="49" charset="-127"/>
               </a:rPr>
               <a:t>raw_scores</a:t>
             </a:r>
             <a:r>
-              <a:rPr lang="ko-KR" altLang="ko-KR" sz="1400" dirty="0">
+              <a:rPr lang="ko-KR" altLang="ko-KR" sz="1400" b="1" dirty="0">
                 <a:latin typeface="D2Coding" panose="020B0609020101020101" pitchFamily="49" charset="-127"/>
                 <a:ea typeface="D2Coding" panose="020B0609020101020101" pitchFamily="49" charset="-127"/>
               </a:rPr>
@@ -16816,7 +17796,7 @@
               <a:buNone/>
             </a:pPr>
             <a:r>
-              <a:rPr lang="ko-KR" altLang="ko-KR" sz="1400" b="0" dirty="0" err="1">
+              <a:rPr lang="ko-KR" altLang="ko-KR" sz="1400" b="1" dirty="0" err="1">
                 <a:effectLst/>
                 <a:latin typeface="D2Coding" panose="020B0609020101020101" pitchFamily="49" charset="-127"/>
                 <a:ea typeface="D2Coding" panose="020B0609020101020101" pitchFamily="49" charset="-127"/>
@@ -16824,7 +17804,7 @@
               <a:t>combined</a:t>
             </a:r>
             <a:r>
-              <a:rPr lang="ko-KR" altLang="ko-KR" sz="1400" b="0" dirty="0">
+              <a:rPr lang="ko-KR" altLang="ko-KR" sz="1400" b="1" dirty="0">
                 <a:effectLst/>
                 <a:latin typeface="D2Coding" panose="020B0609020101020101" pitchFamily="49" charset="-127"/>
                 <a:ea typeface="D2Coding" panose="020B0609020101020101" pitchFamily="49" charset="-127"/>
@@ -16832,7 +17812,7 @@
               <a:t> = </a:t>
             </a:r>
             <a:r>
-              <a:rPr lang="ko-KR" altLang="ko-KR" sz="1400" b="0" dirty="0" err="1">
+              <a:rPr lang="ko-KR" altLang="ko-KR" sz="1400" b="1" dirty="0" err="1">
                 <a:effectLst/>
                 <a:latin typeface="D2Coding" panose="020B0609020101020101" pitchFamily="49" charset="-127"/>
                 <a:ea typeface="D2Coding" panose="020B0609020101020101" pitchFamily="49" charset="-127"/>
@@ -16840,7 +17820,7 @@
               <a:t>np.sum</a:t>
             </a:r>
             <a:r>
-              <a:rPr lang="ko-KR" altLang="ko-KR" sz="1400" b="0" dirty="0">
+              <a:rPr lang="ko-KR" altLang="ko-KR" sz="1400" b="1" dirty="0">
                 <a:effectLst/>
                 <a:latin typeface="D2Coding" panose="020B0609020101020101" pitchFamily="49" charset="-127"/>
                 <a:ea typeface="D2Coding" panose="020B0609020101020101" pitchFamily="49" charset="-127"/>
@@ -16848,7 +17828,7 @@
               <a:t>(</a:t>
             </a:r>
             <a:r>
-              <a:rPr lang="ko-KR" altLang="ko-KR" sz="1400" b="0" dirty="0" err="1">
+              <a:rPr lang="ko-KR" altLang="ko-KR" sz="1400" b="1" dirty="0" err="1">
                 <a:effectLst/>
                 <a:latin typeface="D2Coding" panose="020B0609020101020101" pitchFamily="49" charset="-127"/>
                 <a:ea typeface="D2Coding" panose="020B0609020101020101" pitchFamily="49" charset="-127"/>
@@ -16856,7 +17836,7 @@
               <a:t>attention_weights</a:t>
             </a:r>
             <a:r>
-              <a:rPr lang="ko-KR" altLang="ko-KR" sz="1400" b="0" dirty="0">
+              <a:rPr lang="ko-KR" altLang="ko-KR" sz="1400" b="1" dirty="0">
                 <a:effectLst/>
                 <a:latin typeface="D2Coding" panose="020B0609020101020101" pitchFamily="49" charset="-127"/>
                 <a:ea typeface="D2Coding" panose="020B0609020101020101" pitchFamily="49" charset="-127"/>
@@ -16864,7 +17844,7 @@
               <a:t>[:, </a:t>
             </a:r>
             <a:r>
-              <a:rPr lang="ko-KR" altLang="ko-KR" sz="1400" b="0" dirty="0" err="1">
+              <a:rPr lang="ko-KR" altLang="ko-KR" sz="1400" b="1" dirty="0" err="1">
                 <a:effectLst/>
                 <a:latin typeface="D2Coding" panose="020B0609020101020101" pitchFamily="49" charset="-127"/>
                 <a:ea typeface="D2Coding" panose="020B0609020101020101" pitchFamily="49" charset="-127"/>
@@ -16872,7 +17852,7 @@
               <a:t>np.newaxis</a:t>
             </a:r>
             <a:r>
-              <a:rPr lang="ko-KR" altLang="ko-KR" sz="1400" b="0" dirty="0">
+              <a:rPr lang="ko-KR" altLang="ko-KR" sz="1400" b="1" dirty="0">
                 <a:effectLst/>
                 <a:latin typeface="D2Coding" panose="020B0609020101020101" pitchFamily="49" charset="-127"/>
                 <a:ea typeface="D2Coding" panose="020B0609020101020101" pitchFamily="49" charset="-127"/>
@@ -16880,7 +17860,7 @@
               <a:t>] * </a:t>
             </a:r>
             <a:r>
-              <a:rPr lang="ko-KR" altLang="ko-KR" sz="1400" b="0" dirty="0" err="1">
+              <a:rPr lang="ko-KR" altLang="ko-KR" sz="1400" b="1" dirty="0" err="1">
                 <a:effectLst/>
                 <a:latin typeface="D2Coding" panose="020B0609020101020101" pitchFamily="49" charset="-127"/>
                 <a:ea typeface="D2Coding" panose="020B0609020101020101" pitchFamily="49" charset="-127"/>
@@ -16888,7 +17868,7 @@
               <a:t>sources</a:t>
             </a:r>
             <a:r>
-              <a:rPr lang="ko-KR" altLang="ko-KR" sz="1400" b="0" dirty="0">
+              <a:rPr lang="ko-KR" altLang="ko-KR" sz="1400" b="1" dirty="0">
                 <a:effectLst/>
                 <a:latin typeface="D2Coding" panose="020B0609020101020101" pitchFamily="49" charset="-127"/>
                 <a:ea typeface="D2Coding" panose="020B0609020101020101" pitchFamily="49" charset="-127"/>
@@ -16896,7 +17876,7 @@
               <a:t>, </a:t>
             </a:r>
             <a:r>
-              <a:rPr lang="ko-KR" altLang="ko-KR" sz="1400" b="0" dirty="0" err="1">
+              <a:rPr lang="ko-KR" altLang="ko-KR" sz="1400" b="1" dirty="0" err="1">
                 <a:effectLst/>
                 <a:latin typeface="D2Coding" panose="020B0609020101020101" pitchFamily="49" charset="-127"/>
                 <a:ea typeface="D2Coding" panose="020B0609020101020101" pitchFamily="49" charset="-127"/>
@@ -16904,7 +17884,7 @@
               <a:t>axis</a:t>
             </a:r>
             <a:r>
-              <a:rPr lang="ko-KR" altLang="ko-KR" sz="1400" b="0" dirty="0">
+              <a:rPr lang="ko-KR" altLang="ko-KR" sz="1400" b="1" dirty="0">
                 <a:effectLst/>
                 <a:latin typeface="D2Coding" panose="020B0609020101020101" pitchFamily="49" charset="-127"/>
                 <a:ea typeface="D2Coding" panose="020B0609020101020101" pitchFamily="49" charset="-127"/>
@@ -17064,6 +18044,170 @@
           </a:p>
         </p:txBody>
       </p:sp>
+      <p:sp>
+        <p:nvSpPr>
+          <p:cNvPr id="2" name="TextBox 1">
+            <a:extLst>
+              <a:ext uri="{FF2B5EF4-FFF2-40B4-BE49-F238E27FC236}">
+                <a16:creationId xmlns:a16="http://schemas.microsoft.com/office/drawing/2014/main" id="{D637A705-6C0A-0F98-0A35-AF5ED9B660B6}"/>
+              </a:ext>
+            </a:extLst>
+          </p:cNvPr>
+          <p:cNvSpPr txBox="1"/>
+          <p:nvPr/>
+        </p:nvSpPr>
+        <p:spPr>
+          <a:xfrm>
+            <a:off x="5972175" y="88235"/>
+            <a:ext cx="6096000" cy="923330"/>
+          </a:xfrm>
+          <a:prstGeom prst="rect">
+            <a:avLst/>
+          </a:prstGeom>
+          <a:noFill/>
+        </p:spPr>
+        <p:txBody>
+          <a:bodyPr wrap="square">
+            <a:spAutoFit/>
+          </a:bodyPr>
+          <a:lstStyle/>
+          <a:p>
+            <a:r>
+              <a:rPr lang="en-US" altLang="ko-KR" dirty="0">
+                <a:latin typeface="Courier New" panose="02070309020205020404" pitchFamily="49" charset="0"/>
+              </a:rPr>
+              <a:t>sum(score(target, source) * source)</a:t>
+            </a:r>
+            <a:r>
+              <a:rPr lang="ko-KR" altLang="en-US" dirty="0"/>
+              <a:t>로 요약할 수 있습니다</a:t>
+            </a:r>
+            <a:r>
+              <a:rPr lang="en-US" altLang="ko-KR" dirty="0"/>
+              <a:t>. </a:t>
+            </a:r>
+            <a:r>
+              <a:rPr lang="ko-KR" altLang="en-US" dirty="0"/>
+              <a:t>이를 다른 입력 명칭을 사용하여 동일하게 </a:t>
+            </a:r>
+            <a:r>
+              <a:rPr lang="en-US" altLang="ko-KR" dirty="0">
+                <a:latin typeface="Courier New" panose="02070309020205020404" pitchFamily="49" charset="0"/>
+              </a:rPr>
+              <a:t>sum(score(query, key) * value)</a:t>
+            </a:r>
+            <a:endParaRPr lang="ko-KR" altLang="en-US" dirty="0"/>
+          </a:p>
+        </p:txBody>
+      </p:sp>
+      <p:pic>
+        <p:nvPicPr>
+          <p:cNvPr id="6" name="그래픽 5" descr="배지 1 단색으로 채워진">
+            <a:extLst>
+              <a:ext uri="{FF2B5EF4-FFF2-40B4-BE49-F238E27FC236}">
+                <a16:creationId xmlns:a16="http://schemas.microsoft.com/office/drawing/2014/main" id="{8D1A90B7-98C0-4091-55B0-6CCC630E5C7D}"/>
+              </a:ext>
+            </a:extLst>
+          </p:cNvPr>
+          <p:cNvPicPr>
+            <a:picLocks noChangeAspect="1"/>
+          </p:cNvPicPr>
+          <p:nvPr/>
+        </p:nvPicPr>
+        <p:blipFill>
+          <a:blip r:embed="rId2">
+            <a:extLst>
+              <a:ext uri="{96DAC541-7B7A-43D3-8B79-37D633B846F1}">
+                <asvg:svgBlip xmlns:asvg="http://schemas.microsoft.com/office/drawing/2016/SVG/main" r:embed="rId3"/>
+              </a:ext>
+            </a:extLst>
+          </a:blip>
+          <a:stretch>
+            <a:fillRect/>
+          </a:stretch>
+        </p:blipFill>
+        <p:spPr>
+          <a:xfrm>
+            <a:off x="287258" y="1912376"/>
+            <a:ext cx="276330" cy="276330"/>
+          </a:xfrm>
+          <a:prstGeom prst="rect">
+            <a:avLst/>
+          </a:prstGeom>
+        </p:spPr>
+      </p:pic>
+      <p:pic>
+        <p:nvPicPr>
+          <p:cNvPr id="7" name="그래픽 6" descr="배지 단색으로 채워진">
+            <a:extLst>
+              <a:ext uri="{FF2B5EF4-FFF2-40B4-BE49-F238E27FC236}">
+                <a16:creationId xmlns:a16="http://schemas.microsoft.com/office/drawing/2014/main" id="{48FB9DEE-5FDF-19C5-8AFE-697612A6DC68}"/>
+              </a:ext>
+            </a:extLst>
+          </p:cNvPr>
+          <p:cNvPicPr>
+            <a:picLocks noChangeAspect="1"/>
+          </p:cNvPicPr>
+          <p:nvPr/>
+        </p:nvPicPr>
+        <p:blipFill>
+          <a:blip r:embed="rId4">
+            <a:extLst>
+              <a:ext uri="{96DAC541-7B7A-43D3-8B79-37D633B846F1}">
+                <asvg:svgBlip xmlns:asvg="http://schemas.microsoft.com/office/drawing/2016/SVG/main" r:embed="rId5"/>
+              </a:ext>
+            </a:extLst>
+          </a:blip>
+          <a:stretch>
+            <a:fillRect/>
+          </a:stretch>
+        </p:blipFill>
+        <p:spPr>
+          <a:xfrm>
+            <a:off x="287258" y="3171720"/>
+            <a:ext cx="276330" cy="276330"/>
+          </a:xfrm>
+          <a:prstGeom prst="rect">
+            <a:avLst/>
+          </a:prstGeom>
+        </p:spPr>
+      </p:pic>
+      <p:pic>
+        <p:nvPicPr>
+          <p:cNvPr id="8" name="그래픽 7" descr="배지 3 단색으로 채워진">
+            <a:extLst>
+              <a:ext uri="{FF2B5EF4-FFF2-40B4-BE49-F238E27FC236}">
+                <a16:creationId xmlns:a16="http://schemas.microsoft.com/office/drawing/2014/main" id="{81DAE5CF-BC30-62E7-0DC1-7E18E9F10864}"/>
+              </a:ext>
+            </a:extLst>
+          </p:cNvPr>
+          <p:cNvPicPr>
+            <a:picLocks noChangeAspect="1"/>
+          </p:cNvPicPr>
+          <p:nvPr/>
+        </p:nvPicPr>
+        <p:blipFill>
+          <a:blip r:embed="rId6">
+            <a:extLst>
+              <a:ext uri="{96DAC541-7B7A-43D3-8B79-37D633B846F1}">
+                <asvg:svgBlip xmlns:asvg="http://schemas.microsoft.com/office/drawing/2016/SVG/main" r:embed="rId7"/>
+              </a:ext>
+            </a:extLst>
+          </a:blip>
+          <a:stretch>
+            <a:fillRect/>
+          </a:stretch>
+        </p:blipFill>
+        <p:spPr>
+          <a:xfrm>
+            <a:off x="287258" y="5089981"/>
+            <a:ext cx="276330" cy="276330"/>
+          </a:xfrm>
+          <a:prstGeom prst="rect">
+            <a:avLst/>
+          </a:prstGeom>
+        </p:spPr>
+      </p:pic>
     </p:spTree>
     <p:extLst>
       <p:ext uri="{BB962C8B-B14F-4D97-AF65-F5344CB8AC3E}">
@@ -17077,7 +18221,7 @@
 </p:sld>
 </file>
 
-<file path=ppt/slides/slide23.xml><?xml version="1.0" encoding="utf-8"?>
+<file path=ppt/slides/slide24.xml><?xml version="1.0" encoding="utf-8"?>
 <p:sld xmlns:a="http://schemas.openxmlformats.org/drawingml/2006/main" xmlns:r="http://schemas.openxmlformats.org/officeDocument/2006/relationships" xmlns:p="http://schemas.openxmlformats.org/presentationml/2006/main">
   <p:cSld>
     <p:spTree>
@@ -17129,7 +18273,7 @@
             <a:fld id="{D57F1E4F-1CFF-5643-939E-217C01CDF565}" type="slidenum">
               <a:rPr lang="en-US" smtClean="0"/>
               <a:pPr/>
-              <a:t>23</a:t>
+              <a:t>24</a:t>
             </a:fld>
             <a:endParaRPr lang="en-US" dirty="0"/>
           </a:p>
@@ -17427,49 +18571,6 @@
       </p:sp>
       <p:sp>
         <p:nvSpPr>
-          <p:cNvPr id="17" name="TextBox 16">
-            <a:extLst>
-              <a:ext uri="{FF2B5EF4-FFF2-40B4-BE49-F238E27FC236}">
-                <a16:creationId xmlns:a16="http://schemas.microsoft.com/office/drawing/2014/main" id="{6F8D586B-E5DC-F053-E5A6-159ABD6EE8B3}"/>
-              </a:ext>
-            </a:extLst>
-          </p:cNvPr>
-          <p:cNvSpPr txBox="1"/>
-          <p:nvPr/>
-        </p:nvSpPr>
-        <p:spPr>
-          <a:xfrm>
-            <a:off x="3053757" y="4179119"/>
-            <a:ext cx="2247549" cy="338554"/>
-          </a:xfrm>
-          <a:prstGeom prst="rect">
-            <a:avLst/>
-          </a:prstGeom>
-          <a:noFill/>
-        </p:spPr>
-        <p:txBody>
-          <a:bodyPr wrap="square">
-            <a:spAutoFit/>
-          </a:bodyPr>
-          <a:lstStyle/>
-          <a:p>
-            <a:pPr algn="ctr"/>
-            <a:r>
-              <a:rPr lang="en-US" altLang="ko-KR" sz="1600" dirty="0">
-                <a:solidFill>
-                  <a:srgbClr val="000000"/>
-                </a:solidFill>
-                <a:latin typeface="D2Coding" panose="020B0609020101020101" pitchFamily="49" charset="-127"/>
-                <a:ea typeface="D2Coding" panose="020B0609020101020101" pitchFamily="49" charset="-127"/>
-              </a:rPr>
-              <a:t>Attention Mechanism</a:t>
-            </a:r>
-            <a:endParaRPr lang="ko-KR" altLang="en-US" sz="1600" dirty="0"/>
-          </a:p>
-        </p:txBody>
-      </p:sp>
-      <p:sp>
-        <p:nvSpPr>
           <p:cNvPr id="22" name="TextBox 21">
             <a:extLst>
               <a:ext uri="{FF2B5EF4-FFF2-40B4-BE49-F238E27FC236}">
@@ -18202,20 +19303,19 @@
           </p:cNvPr>
           <p:cNvCxnSpPr>
             <a:cxnSpLocks/>
-            <a:stCxn id="24" idx="1"/>
+            <a:stCxn id="24" idx="2"/>
             <a:endCxn id="9" idx="0"/>
           </p:cNvCxnSpPr>
           <p:nvPr/>
         </p:nvCxnSpPr>
         <p:spPr>
-          <a:xfrm rot="10800000" flipH="1" flipV="1">
-            <a:off x="3644511" y="2217918"/>
-            <a:ext cx="533022" cy="3541343"/>
+          <a:xfrm rot="5400000">
+            <a:off x="2778235" y="4032715"/>
+            <a:ext cx="3125845" cy="327248"/>
           </a:xfrm>
-          <a:prstGeom prst="bentConnector4">
+          <a:prstGeom prst="bentConnector3">
             <a:avLst>
-              <a:gd name="adj1" fmla="val -42888"/>
-              <a:gd name="adj2" fmla="val 55866"/>
+              <a:gd name="adj1" fmla="val 50000"/>
             </a:avLst>
           </a:prstGeom>
           <a:ln w="28575">
@@ -18389,6 +19489,51 @@
           </a:p>
         </p:txBody>
       </p:sp>
+      <p:sp>
+        <p:nvSpPr>
+          <p:cNvPr id="17" name="TextBox 16">
+            <a:extLst>
+              <a:ext uri="{FF2B5EF4-FFF2-40B4-BE49-F238E27FC236}">
+                <a16:creationId xmlns:a16="http://schemas.microsoft.com/office/drawing/2014/main" id="{6F8D586B-E5DC-F053-E5A6-159ABD6EE8B3}"/>
+              </a:ext>
+            </a:extLst>
+          </p:cNvPr>
+          <p:cNvSpPr txBox="1"/>
+          <p:nvPr/>
+        </p:nvSpPr>
+        <p:spPr>
+          <a:xfrm>
+            <a:off x="2868115" y="4360995"/>
+            <a:ext cx="2247549" cy="338554"/>
+          </a:xfrm>
+          <a:prstGeom prst="rect">
+            <a:avLst/>
+          </a:prstGeom>
+          <a:solidFill>
+            <a:schemeClr val="bg1"/>
+          </a:solidFill>
+        </p:spPr>
+        <p:txBody>
+          <a:bodyPr wrap="square">
+            <a:spAutoFit/>
+          </a:bodyPr>
+          <a:lstStyle/>
+          <a:p>
+            <a:pPr algn="ctr"/>
+            <a:r>
+              <a:rPr lang="en-US" altLang="ko-KR" sz="1600" dirty="0">
+                <a:solidFill>
+                  <a:srgbClr val="000000"/>
+                </a:solidFill>
+                <a:latin typeface="D2Coding" panose="020B0609020101020101" pitchFamily="49" charset="-127"/>
+                <a:ea typeface="D2Coding" panose="020B0609020101020101" pitchFamily="49" charset="-127"/>
+              </a:rPr>
+              <a:t>Attention Mechanism</a:t>
+            </a:r>
+            <a:endParaRPr lang="ko-KR" altLang="en-US" sz="1600" dirty="0"/>
+          </a:p>
+        </p:txBody>
+      </p:sp>
     </p:spTree>
     <p:extLst>
       <p:ext uri="{BB962C8B-B14F-4D97-AF65-F5344CB8AC3E}">
@@ -18402,7 +19547,7 @@
 </p:sld>
 </file>
 
-<file path=ppt/slides/slide24.xml><?xml version="1.0" encoding="utf-8"?>
+<file path=ppt/slides/slide25.xml><?xml version="1.0" encoding="utf-8"?>
 <p:sld xmlns:a="http://schemas.openxmlformats.org/drawingml/2006/main" xmlns:r="http://schemas.openxmlformats.org/officeDocument/2006/relationships" xmlns:p="http://schemas.openxmlformats.org/presentationml/2006/main">
   <p:cSld>
     <p:spTree>
@@ -18454,7 +19599,7 @@
             <a:fld id="{D57F1E4F-1CFF-5643-939E-217C01CDF565}" type="slidenum">
               <a:rPr lang="en-US" smtClean="0"/>
               <a:pPr/>
-              <a:t>24</a:t>
+              <a:t>25</a:t>
             </a:fld>
             <a:endParaRPr lang="en-US" dirty="0"/>
           </a:p>
@@ -18540,8 +19685,8 @@
         </p:blipFill>
         <p:spPr>
           <a:xfrm>
-            <a:off x="1767466" y="1752504"/>
-            <a:ext cx="4467078" cy="4072925"/>
+            <a:off x="1767466" y="1742979"/>
+            <a:ext cx="3804659" cy="3468955"/>
           </a:xfrm>
           <a:prstGeom prst="rect">
             <a:avLst/>
@@ -18562,8 +19707,8 @@
         </p:nvSpPr>
         <p:spPr>
           <a:xfrm>
-            <a:off x="3454401" y="1988400"/>
-            <a:ext cx="655782" cy="2823746"/>
+            <a:off x="3159126" y="1893150"/>
+            <a:ext cx="655782" cy="2497875"/>
           </a:xfrm>
           <a:prstGeom prst="rect">
             <a:avLst/>
@@ -18618,8 +19763,8 @@
         </p:nvCxnSpPr>
         <p:spPr>
           <a:xfrm flipV="1">
-            <a:off x="4110183" y="2456639"/>
-            <a:ext cx="4326276" cy="943634"/>
+            <a:off x="3814908" y="2456639"/>
+            <a:ext cx="4621551" cy="685449"/>
           </a:xfrm>
           <a:prstGeom prst="bentConnector2">
             <a:avLst/>
@@ -18813,7 +19958,7 @@
 </p:sld>
 </file>
 
-<file path=ppt/slides/slide25.xml><?xml version="1.0" encoding="utf-8"?>
+<file path=ppt/slides/slide26.xml><?xml version="1.0" encoding="utf-8"?>
 <p:sld xmlns:a="http://schemas.openxmlformats.org/drawingml/2006/main" xmlns:r="http://schemas.openxmlformats.org/officeDocument/2006/relationships" xmlns:p="http://schemas.openxmlformats.org/presentationml/2006/main">
   <p:cSld>
     <p:spTree>
@@ -18865,7 +20010,7 @@
             <a:fld id="{D57F1E4F-1CFF-5643-939E-217C01CDF565}" type="slidenum">
               <a:rPr lang="en-US" smtClean="0"/>
               <a:pPr/>
-              <a:t>25</a:t>
+              <a:t>26</a:t>
             </a:fld>
             <a:endParaRPr lang="en-US" dirty="0"/>
           </a:p>
@@ -18929,10 +20074,3787 @@
           </a:p>
         </p:txBody>
       </p:sp>
+      <p:sp>
+        <p:nvSpPr>
+          <p:cNvPr id="5" name="TextBox 4">
+            <a:extLst>
+              <a:ext uri="{FF2B5EF4-FFF2-40B4-BE49-F238E27FC236}">
+                <a16:creationId xmlns:a16="http://schemas.microsoft.com/office/drawing/2014/main" id="{36742539-1047-AADF-A318-E21EC294A720}"/>
+              </a:ext>
+            </a:extLst>
+          </p:cNvPr>
+          <p:cNvSpPr txBox="1"/>
+          <p:nvPr/>
+        </p:nvSpPr>
+        <p:spPr>
+          <a:xfrm>
+            <a:off x="600074" y="1383864"/>
+            <a:ext cx="8686801" cy="1246495"/>
+          </a:xfrm>
+          <a:prstGeom prst="rect">
+            <a:avLst/>
+          </a:prstGeom>
+          <a:solidFill>
+            <a:srgbClr val="76E3FF"/>
+          </a:solidFill>
+        </p:spPr>
+        <p:txBody>
+          <a:bodyPr wrap="square">
+            <a:spAutoFit/>
+          </a:bodyPr>
+          <a:lstStyle/>
+          <a:p>
+            <a:r>
+              <a:rPr lang="ko-KR" altLang="en-US" sz="1500" dirty="0">
+                <a:latin typeface="D2Coding" panose="020B0609020101020101" pitchFamily="49" charset="-127"/>
+                <a:ea typeface="D2Coding" panose="020B0609020101020101" pitchFamily="49" charset="-127"/>
+              </a:rPr>
+              <a:t># </a:t>
+            </a:r>
+            <a:r>
+              <a:rPr lang="ko-KR" altLang="en-US" sz="1500" dirty="0" err="1">
+                <a:latin typeface="D2Coding" panose="020B0609020101020101" pitchFamily="49" charset="-127"/>
+                <a:ea typeface="D2Coding" panose="020B0609020101020101" pitchFamily="49" charset="-127"/>
+              </a:rPr>
+              <a:t>target</a:t>
+            </a:r>
+            <a:r>
+              <a:rPr lang="ko-KR" altLang="en-US" sz="1500" dirty="0">
+                <a:latin typeface="D2Coding" panose="020B0609020101020101" pitchFamily="49" charset="-127"/>
+                <a:ea typeface="D2Coding" panose="020B0609020101020101" pitchFamily="49" charset="-127"/>
+              </a:rPr>
+              <a:t> = </a:t>
+            </a:r>
+            <a:r>
+              <a:rPr lang="ko-KR" altLang="en-US" sz="1500" dirty="0" err="1">
+                <a:latin typeface="D2Coding" panose="020B0609020101020101" pitchFamily="49" charset="-127"/>
+                <a:ea typeface="D2Coding" panose="020B0609020101020101" pitchFamily="49" charset="-127"/>
+              </a:rPr>
+              <a:t>Query</a:t>
+            </a:r>
+            <a:r>
+              <a:rPr lang="ko-KR" altLang="en-US" sz="1500" dirty="0">
+                <a:latin typeface="D2Coding" panose="020B0609020101020101" pitchFamily="49" charset="-127"/>
+                <a:ea typeface="D2Coding" panose="020B0609020101020101" pitchFamily="49" charset="-127"/>
+              </a:rPr>
+              <a:t> 역할 / </a:t>
+            </a:r>
+            <a:r>
+              <a:rPr lang="ko-KR" altLang="en-US" sz="1500" dirty="0" err="1">
+                <a:latin typeface="D2Coding" panose="020B0609020101020101" pitchFamily="49" charset="-127"/>
+                <a:ea typeface="D2Coding" panose="020B0609020101020101" pitchFamily="49" charset="-127"/>
+              </a:rPr>
+              <a:t>s</a:t>
+            </a:r>
+            <a:r>
+              <a:rPr lang="ko-KR" altLang="en-US" sz="1500" dirty="0">
+                <a:latin typeface="D2Coding" panose="020B0609020101020101" pitchFamily="49" charset="-127"/>
+                <a:ea typeface="D2Coding" panose="020B0609020101020101" pitchFamily="49" charset="-127"/>
+              </a:rPr>
+              <a:t> = </a:t>
+            </a:r>
+            <a:r>
+              <a:rPr lang="ko-KR" altLang="en-US" sz="1500" dirty="0" err="1">
+                <a:latin typeface="D2Coding" panose="020B0609020101020101" pitchFamily="49" charset="-127"/>
+                <a:ea typeface="D2Coding" panose="020B0609020101020101" pitchFamily="49" charset="-127"/>
+              </a:rPr>
+              <a:t>Key와</a:t>
+            </a:r>
+            <a:r>
+              <a:rPr lang="ko-KR" altLang="en-US" sz="1500" dirty="0">
+                <a:latin typeface="D2Coding" panose="020B0609020101020101" pitchFamily="49" charset="-127"/>
+                <a:ea typeface="D2Coding" panose="020B0609020101020101" pitchFamily="49" charset="-127"/>
+              </a:rPr>
+              <a:t> </a:t>
+            </a:r>
+            <a:r>
+              <a:rPr lang="ko-KR" altLang="en-US" sz="1500" dirty="0" err="1">
+                <a:latin typeface="D2Coding" panose="020B0609020101020101" pitchFamily="49" charset="-127"/>
+                <a:ea typeface="D2Coding" panose="020B0609020101020101" pitchFamily="49" charset="-127"/>
+              </a:rPr>
+              <a:t>Value</a:t>
+            </a:r>
+            <a:r>
+              <a:rPr lang="ko-KR" altLang="en-US" sz="1500" dirty="0">
+                <a:latin typeface="D2Coding" panose="020B0609020101020101" pitchFamily="49" charset="-127"/>
+                <a:ea typeface="D2Coding" panose="020B0609020101020101" pitchFamily="49" charset="-127"/>
+              </a:rPr>
+              <a:t> 역할을 동시에 함 (재탕)</a:t>
+            </a:r>
+          </a:p>
+          <a:p>
+            <a:r>
+              <a:rPr lang="ko-KR" altLang="en-US" sz="1500" dirty="0" err="1">
+                <a:latin typeface="D2Coding" panose="020B0609020101020101" pitchFamily="49" charset="-127"/>
+                <a:ea typeface="D2Coding" panose="020B0609020101020101" pitchFamily="49" charset="-127"/>
+              </a:rPr>
+              <a:t>raw_scores</a:t>
+            </a:r>
+            <a:r>
+              <a:rPr lang="ko-KR" altLang="en-US" sz="1500" dirty="0">
+                <a:latin typeface="D2Coding" panose="020B0609020101020101" pitchFamily="49" charset="-127"/>
+                <a:ea typeface="D2Coding" panose="020B0609020101020101" pitchFamily="49" charset="-127"/>
+              </a:rPr>
+              <a:t> = </a:t>
+            </a:r>
+            <a:r>
+              <a:rPr lang="ko-KR" altLang="en-US" sz="1500" dirty="0" err="1">
+                <a:latin typeface="D2Coding" panose="020B0609020101020101" pitchFamily="49" charset="-127"/>
+                <a:ea typeface="D2Coding" panose="020B0609020101020101" pitchFamily="49" charset="-127"/>
+              </a:rPr>
+              <a:t>np.array</a:t>
+            </a:r>
+            <a:r>
+              <a:rPr lang="ko-KR" altLang="en-US" sz="1500" dirty="0">
+                <a:latin typeface="D2Coding" panose="020B0609020101020101" pitchFamily="49" charset="-127"/>
+                <a:ea typeface="D2Coding" panose="020B0609020101020101" pitchFamily="49" charset="-127"/>
+              </a:rPr>
+              <a:t>([</a:t>
+            </a:r>
+            <a:r>
+              <a:rPr lang="ko-KR" altLang="en-US" sz="1500" dirty="0" err="1">
+                <a:latin typeface="D2Coding" panose="020B0609020101020101" pitchFamily="49" charset="-127"/>
+                <a:ea typeface="D2Coding" panose="020B0609020101020101" pitchFamily="49" charset="-127"/>
+              </a:rPr>
+              <a:t>score</a:t>
+            </a:r>
+            <a:r>
+              <a:rPr lang="ko-KR" altLang="en-US" sz="1500" dirty="0">
+                <a:latin typeface="D2Coding" panose="020B0609020101020101" pitchFamily="49" charset="-127"/>
+                <a:ea typeface="D2Coding" panose="020B0609020101020101" pitchFamily="49" charset="-127"/>
+              </a:rPr>
+              <a:t>(</a:t>
+            </a:r>
+            <a:r>
+              <a:rPr lang="ko-KR" altLang="en-US" sz="1500" dirty="0" err="1">
+                <a:latin typeface="D2Coding" panose="020B0609020101020101" pitchFamily="49" charset="-127"/>
+                <a:ea typeface="D2Coding" panose="020B0609020101020101" pitchFamily="49" charset="-127"/>
+              </a:rPr>
+              <a:t>target</a:t>
+            </a:r>
+            <a:r>
+              <a:rPr lang="ko-KR" altLang="en-US" sz="1500" dirty="0">
+                <a:latin typeface="D2Coding" panose="020B0609020101020101" pitchFamily="49" charset="-127"/>
+                <a:ea typeface="D2Coding" panose="020B0609020101020101" pitchFamily="49" charset="-127"/>
+              </a:rPr>
+              <a:t>, </a:t>
+            </a:r>
+            <a:r>
+              <a:rPr lang="ko-KR" altLang="en-US" sz="1500" dirty="0" err="1">
+                <a:latin typeface="D2Coding" panose="020B0609020101020101" pitchFamily="49" charset="-127"/>
+                <a:ea typeface="D2Coding" panose="020B0609020101020101" pitchFamily="49" charset="-127"/>
+              </a:rPr>
+              <a:t>s</a:t>
+            </a:r>
+            <a:r>
+              <a:rPr lang="ko-KR" altLang="en-US" sz="1500" dirty="0">
+                <a:latin typeface="D2Coding" panose="020B0609020101020101" pitchFamily="49" charset="-127"/>
+                <a:ea typeface="D2Coding" panose="020B0609020101020101" pitchFamily="49" charset="-127"/>
+              </a:rPr>
+              <a:t>) </a:t>
+            </a:r>
+            <a:r>
+              <a:rPr lang="ko-KR" altLang="en-US" sz="1500" dirty="0" err="1">
+                <a:latin typeface="D2Coding" panose="020B0609020101020101" pitchFamily="49" charset="-127"/>
+                <a:ea typeface="D2Coding" panose="020B0609020101020101" pitchFamily="49" charset="-127"/>
+              </a:rPr>
+              <a:t>for</a:t>
+            </a:r>
+            <a:r>
+              <a:rPr lang="ko-KR" altLang="en-US" sz="1500" dirty="0">
+                <a:latin typeface="D2Coding" panose="020B0609020101020101" pitchFamily="49" charset="-127"/>
+                <a:ea typeface="D2Coding" panose="020B0609020101020101" pitchFamily="49" charset="-127"/>
+              </a:rPr>
+              <a:t> </a:t>
+            </a:r>
+            <a:r>
+              <a:rPr lang="ko-KR" altLang="en-US" sz="1500" dirty="0" err="1">
+                <a:latin typeface="D2Coding" panose="020B0609020101020101" pitchFamily="49" charset="-127"/>
+                <a:ea typeface="D2Coding" panose="020B0609020101020101" pitchFamily="49" charset="-127"/>
+              </a:rPr>
+              <a:t>s</a:t>
+            </a:r>
+            <a:r>
+              <a:rPr lang="ko-KR" altLang="en-US" sz="1500" dirty="0">
+                <a:latin typeface="D2Coding" panose="020B0609020101020101" pitchFamily="49" charset="-127"/>
+                <a:ea typeface="D2Coding" panose="020B0609020101020101" pitchFamily="49" charset="-127"/>
+              </a:rPr>
+              <a:t> </a:t>
+            </a:r>
+            <a:r>
+              <a:rPr lang="ko-KR" altLang="en-US" sz="1500" dirty="0" err="1">
+                <a:latin typeface="D2Coding" panose="020B0609020101020101" pitchFamily="49" charset="-127"/>
+                <a:ea typeface="D2Coding" panose="020B0609020101020101" pitchFamily="49" charset="-127"/>
+              </a:rPr>
+              <a:t>in</a:t>
+            </a:r>
+            <a:r>
+              <a:rPr lang="ko-KR" altLang="en-US" sz="1500" dirty="0">
+                <a:latin typeface="D2Coding" panose="020B0609020101020101" pitchFamily="49" charset="-127"/>
+                <a:ea typeface="D2Coding" panose="020B0609020101020101" pitchFamily="49" charset="-127"/>
+              </a:rPr>
+              <a:t> </a:t>
+            </a:r>
+            <a:r>
+              <a:rPr lang="ko-KR" altLang="en-US" sz="1500" dirty="0" err="1">
+                <a:latin typeface="D2Coding" panose="020B0609020101020101" pitchFamily="49" charset="-127"/>
+                <a:ea typeface="D2Coding" panose="020B0609020101020101" pitchFamily="49" charset="-127"/>
+              </a:rPr>
+              <a:t>sources</a:t>
+            </a:r>
+            <a:r>
+              <a:rPr lang="ko-KR" altLang="en-US" sz="1500" dirty="0">
+                <a:latin typeface="D2Coding" panose="020B0609020101020101" pitchFamily="49" charset="-127"/>
+                <a:ea typeface="D2Coding" panose="020B0609020101020101" pitchFamily="49" charset="-127"/>
+              </a:rPr>
+              <a:t>]) # 여기서 </a:t>
+            </a:r>
+            <a:r>
+              <a:rPr lang="ko-KR" altLang="en-US" sz="1500" dirty="0" err="1">
+                <a:latin typeface="D2Coding" panose="020B0609020101020101" pitchFamily="49" charset="-127"/>
+                <a:ea typeface="D2Coding" panose="020B0609020101020101" pitchFamily="49" charset="-127"/>
+              </a:rPr>
+              <a:t>s</a:t>
+            </a:r>
+            <a:r>
+              <a:rPr lang="ko-KR" altLang="en-US" sz="1500" dirty="0">
+                <a:latin typeface="D2Coding" panose="020B0609020101020101" pitchFamily="49" charset="-127"/>
+                <a:ea typeface="D2Coding" panose="020B0609020101020101" pitchFamily="49" charset="-127"/>
+              </a:rPr>
+              <a:t> (기준)</a:t>
+            </a:r>
+          </a:p>
+          <a:p>
+            <a:r>
+              <a:rPr lang="ko-KR" altLang="en-US" sz="1500" dirty="0" err="1">
+                <a:latin typeface="D2Coding" panose="020B0609020101020101" pitchFamily="49" charset="-127"/>
+                <a:ea typeface="D2Coding" panose="020B0609020101020101" pitchFamily="49" charset="-127"/>
+              </a:rPr>
+              <a:t>attention_weights</a:t>
+            </a:r>
+            <a:r>
+              <a:rPr lang="ko-KR" altLang="en-US" sz="1500" dirty="0">
+                <a:latin typeface="D2Coding" panose="020B0609020101020101" pitchFamily="49" charset="-127"/>
+                <a:ea typeface="D2Coding" panose="020B0609020101020101" pitchFamily="49" charset="-127"/>
+              </a:rPr>
+              <a:t> = </a:t>
+            </a:r>
+            <a:r>
+              <a:rPr lang="ko-KR" altLang="en-US" sz="1500" dirty="0" err="1">
+                <a:latin typeface="D2Coding" panose="020B0609020101020101" pitchFamily="49" charset="-127"/>
+                <a:ea typeface="D2Coding" panose="020B0609020101020101" pitchFamily="49" charset="-127"/>
+              </a:rPr>
+              <a:t>softmax</a:t>
+            </a:r>
+            <a:r>
+              <a:rPr lang="ko-KR" altLang="en-US" sz="1500" dirty="0">
+                <a:latin typeface="D2Coding" panose="020B0609020101020101" pitchFamily="49" charset="-127"/>
+                <a:ea typeface="D2Coding" panose="020B0609020101020101" pitchFamily="49" charset="-127"/>
+              </a:rPr>
+              <a:t>(</a:t>
+            </a:r>
+            <a:r>
+              <a:rPr lang="ko-KR" altLang="en-US" sz="1500" dirty="0" err="1">
+                <a:latin typeface="D2Coding" panose="020B0609020101020101" pitchFamily="49" charset="-127"/>
+                <a:ea typeface="D2Coding" panose="020B0609020101020101" pitchFamily="49" charset="-127"/>
+              </a:rPr>
+              <a:t>raw_scores</a:t>
+            </a:r>
+            <a:r>
+              <a:rPr lang="ko-KR" altLang="en-US" sz="1500" dirty="0">
+                <a:latin typeface="D2Coding" panose="020B0609020101020101" pitchFamily="49" charset="-127"/>
+                <a:ea typeface="D2Coding" panose="020B0609020101020101" pitchFamily="49" charset="-127"/>
+              </a:rPr>
+              <a:t>)</a:t>
+            </a:r>
+          </a:p>
+          <a:p>
+            <a:r>
+              <a:rPr lang="ko-KR" altLang="en-US" sz="1500" dirty="0">
+                <a:latin typeface="D2Coding" panose="020B0609020101020101" pitchFamily="49" charset="-127"/>
+                <a:ea typeface="D2Coding" panose="020B0609020101020101" pitchFamily="49" charset="-127"/>
+              </a:rPr>
+              <a:t># 최종 합산</a:t>
+            </a:r>
+          </a:p>
+          <a:p>
+            <a:r>
+              <a:rPr lang="ko-KR" altLang="en-US" sz="1500" dirty="0" err="1">
+                <a:latin typeface="D2Coding" panose="020B0609020101020101" pitchFamily="49" charset="-127"/>
+                <a:ea typeface="D2Coding" panose="020B0609020101020101" pitchFamily="49" charset="-127"/>
+              </a:rPr>
+              <a:t>combined</a:t>
+            </a:r>
+            <a:r>
+              <a:rPr lang="ko-KR" altLang="en-US" sz="1500" dirty="0">
+                <a:latin typeface="D2Coding" panose="020B0609020101020101" pitchFamily="49" charset="-127"/>
+                <a:ea typeface="D2Coding" panose="020B0609020101020101" pitchFamily="49" charset="-127"/>
+              </a:rPr>
+              <a:t> = </a:t>
+            </a:r>
+            <a:r>
+              <a:rPr lang="ko-KR" altLang="en-US" sz="1500" dirty="0" err="1">
+                <a:latin typeface="D2Coding" panose="020B0609020101020101" pitchFamily="49" charset="-127"/>
+                <a:ea typeface="D2Coding" panose="020B0609020101020101" pitchFamily="49" charset="-127"/>
+              </a:rPr>
+              <a:t>np.sum</a:t>
+            </a:r>
+            <a:r>
+              <a:rPr lang="ko-KR" altLang="en-US" sz="1500" dirty="0">
+                <a:latin typeface="D2Coding" panose="020B0609020101020101" pitchFamily="49" charset="-127"/>
+                <a:ea typeface="D2Coding" panose="020B0609020101020101" pitchFamily="49" charset="-127"/>
+              </a:rPr>
+              <a:t>(</a:t>
+            </a:r>
+            <a:r>
+              <a:rPr lang="ko-KR" altLang="en-US" sz="1500" dirty="0" err="1">
+                <a:latin typeface="D2Coding" panose="020B0609020101020101" pitchFamily="49" charset="-127"/>
+                <a:ea typeface="D2Coding" panose="020B0609020101020101" pitchFamily="49" charset="-127"/>
+              </a:rPr>
+              <a:t>attention_weights</a:t>
+            </a:r>
+            <a:r>
+              <a:rPr lang="ko-KR" altLang="en-US" sz="1500" dirty="0">
+                <a:latin typeface="D2Coding" panose="020B0609020101020101" pitchFamily="49" charset="-127"/>
+                <a:ea typeface="D2Coding" panose="020B0609020101020101" pitchFamily="49" charset="-127"/>
+              </a:rPr>
+              <a:t>[:, </a:t>
+            </a:r>
+            <a:r>
+              <a:rPr lang="ko-KR" altLang="en-US" sz="1500" dirty="0" err="1">
+                <a:latin typeface="D2Coding" panose="020B0609020101020101" pitchFamily="49" charset="-127"/>
+                <a:ea typeface="D2Coding" panose="020B0609020101020101" pitchFamily="49" charset="-127"/>
+              </a:rPr>
+              <a:t>np.newaxis</a:t>
+            </a:r>
+            <a:r>
+              <a:rPr lang="ko-KR" altLang="en-US" sz="1500" dirty="0">
+                <a:latin typeface="D2Coding" panose="020B0609020101020101" pitchFamily="49" charset="-127"/>
+                <a:ea typeface="D2Coding" panose="020B0609020101020101" pitchFamily="49" charset="-127"/>
+              </a:rPr>
+              <a:t>] * </a:t>
+            </a:r>
+            <a:r>
+              <a:rPr lang="ko-KR" altLang="en-US" sz="1500" dirty="0" err="1">
+                <a:latin typeface="D2Coding" panose="020B0609020101020101" pitchFamily="49" charset="-127"/>
+                <a:ea typeface="D2Coding" panose="020B0609020101020101" pitchFamily="49" charset="-127"/>
+              </a:rPr>
+              <a:t>sources</a:t>
+            </a:r>
+            <a:r>
+              <a:rPr lang="ko-KR" altLang="en-US" sz="1500" dirty="0">
+                <a:latin typeface="D2Coding" panose="020B0609020101020101" pitchFamily="49" charset="-127"/>
+                <a:ea typeface="D2Coding" panose="020B0609020101020101" pitchFamily="49" charset="-127"/>
+              </a:rPr>
+              <a:t>, </a:t>
+            </a:r>
+            <a:r>
+              <a:rPr lang="ko-KR" altLang="en-US" sz="1500" dirty="0" err="1">
+                <a:latin typeface="D2Coding" panose="020B0609020101020101" pitchFamily="49" charset="-127"/>
+                <a:ea typeface="D2Coding" panose="020B0609020101020101" pitchFamily="49" charset="-127"/>
+              </a:rPr>
+              <a:t>axis</a:t>
+            </a:r>
+            <a:r>
+              <a:rPr lang="ko-KR" altLang="en-US" sz="1500" dirty="0">
+                <a:latin typeface="D2Coding" panose="020B0609020101020101" pitchFamily="49" charset="-127"/>
+                <a:ea typeface="D2Coding" panose="020B0609020101020101" pitchFamily="49" charset="-127"/>
+              </a:rPr>
+              <a:t>=0) # 여기서 또 </a:t>
+            </a:r>
+            <a:r>
+              <a:rPr lang="ko-KR" altLang="en-US" sz="1500" dirty="0" err="1">
+                <a:latin typeface="D2Coding" panose="020B0609020101020101" pitchFamily="49" charset="-127"/>
+                <a:ea typeface="D2Coding" panose="020B0609020101020101" pitchFamily="49" charset="-127"/>
+              </a:rPr>
+              <a:t>sources</a:t>
+            </a:r>
+            <a:endParaRPr lang="ko-KR" altLang="en-US" sz="1500" dirty="0">
+              <a:latin typeface="D2Coding" panose="020B0609020101020101" pitchFamily="49" charset="-127"/>
+              <a:ea typeface="D2Coding" panose="020B0609020101020101" pitchFamily="49" charset="-127"/>
+            </a:endParaRPr>
+          </a:p>
+        </p:txBody>
+      </p:sp>
+      <p:sp>
+        <p:nvSpPr>
+          <p:cNvPr id="7" name="TextBox 6">
+            <a:extLst>
+              <a:ext uri="{FF2B5EF4-FFF2-40B4-BE49-F238E27FC236}">
+                <a16:creationId xmlns:a16="http://schemas.microsoft.com/office/drawing/2014/main" id="{87B95FD4-7953-6D6C-949B-752175600DF8}"/>
+              </a:ext>
+            </a:extLst>
+          </p:cNvPr>
+          <p:cNvSpPr txBox="1"/>
+          <p:nvPr/>
+        </p:nvSpPr>
+        <p:spPr>
+          <a:xfrm>
+            <a:off x="600074" y="3400425"/>
+            <a:ext cx="7981952" cy="2631490"/>
+          </a:xfrm>
+          <a:prstGeom prst="rect">
+            <a:avLst/>
+          </a:prstGeom>
+          <a:solidFill>
+            <a:srgbClr val="76E3FF"/>
+          </a:solidFill>
+        </p:spPr>
+        <p:txBody>
+          <a:bodyPr wrap="square">
+            <a:spAutoFit/>
+          </a:bodyPr>
+          <a:lstStyle/>
+          <a:p>
+            <a:r>
+              <a:rPr lang="ko-KR" altLang="en-US" sz="1500" dirty="0">
+                <a:latin typeface="D2Coding" panose="020B0609020101020101" pitchFamily="49" charset="-127"/>
+                <a:ea typeface="D2Coding" panose="020B0609020101020101" pitchFamily="49" charset="-127"/>
+              </a:rPr>
+              <a:t># </a:t>
+            </a:r>
+            <a:r>
+              <a:rPr lang="en-US" altLang="ko-KR" sz="1500" dirty="0">
+                <a:latin typeface="D2Coding" panose="020B0609020101020101" pitchFamily="49" charset="-127"/>
+                <a:ea typeface="D2Coding" panose="020B0609020101020101" pitchFamily="49" charset="-127"/>
+              </a:rPr>
+              <a:t>1</a:t>
+            </a:r>
+            <a:r>
+              <a:rPr lang="ko-KR" altLang="en-US" sz="1500" dirty="0">
+                <a:latin typeface="D2Coding" panose="020B0609020101020101" pitchFamily="49" charset="-127"/>
+                <a:ea typeface="D2Coding" panose="020B0609020101020101" pitchFamily="49" charset="-127"/>
+              </a:rPr>
+              <a:t>. 먼저 가중치 행렬(</a:t>
+            </a:r>
+            <a:r>
+              <a:rPr lang="ko-KR" altLang="en-US" sz="1500" dirty="0" err="1">
+                <a:latin typeface="D2Coding" panose="020B0609020101020101" pitchFamily="49" charset="-127"/>
+                <a:ea typeface="D2Coding" panose="020B0609020101020101" pitchFamily="49" charset="-127"/>
+              </a:rPr>
+              <a:t>W</a:t>
+            </a:r>
+            <a:r>
+              <a:rPr lang="ko-KR" altLang="en-US" sz="1500" dirty="0">
+                <a:latin typeface="D2Coding" panose="020B0609020101020101" pitchFamily="49" charset="-127"/>
+                <a:ea typeface="D2Coding" panose="020B0609020101020101" pitchFamily="49" charset="-127"/>
+              </a:rPr>
+              <a:t>)을 곱해 </a:t>
+            </a:r>
+            <a:r>
+              <a:rPr lang="ko-KR" altLang="en-US" sz="1500" dirty="0" err="1">
+                <a:latin typeface="D2Coding" panose="020B0609020101020101" pitchFamily="49" charset="-127"/>
+                <a:ea typeface="D2Coding" panose="020B0609020101020101" pitchFamily="49" charset="-127"/>
+              </a:rPr>
+              <a:t>sources를</a:t>
+            </a:r>
+            <a:r>
+              <a:rPr lang="ko-KR" altLang="en-US" sz="1500" dirty="0">
+                <a:latin typeface="D2Coding" panose="020B0609020101020101" pitchFamily="49" charset="-127"/>
+                <a:ea typeface="D2Coding" panose="020B0609020101020101" pitchFamily="49" charset="-127"/>
+              </a:rPr>
+              <a:t> </a:t>
+            </a:r>
+            <a:r>
+              <a:rPr lang="ko-KR" altLang="en-US" sz="1500" dirty="0" err="1">
+                <a:latin typeface="D2Coding" panose="020B0609020101020101" pitchFamily="49" charset="-127"/>
+                <a:ea typeface="D2Coding" panose="020B0609020101020101" pitchFamily="49" charset="-127"/>
+              </a:rPr>
+              <a:t>keys와</a:t>
+            </a:r>
+            <a:r>
+              <a:rPr lang="ko-KR" altLang="en-US" sz="1500" dirty="0">
+                <a:latin typeface="D2Coding" panose="020B0609020101020101" pitchFamily="49" charset="-127"/>
+                <a:ea typeface="D2Coding" panose="020B0609020101020101" pitchFamily="49" charset="-127"/>
+              </a:rPr>
+              <a:t> </a:t>
+            </a:r>
+            <a:r>
+              <a:rPr lang="ko-KR" altLang="en-US" sz="1500" dirty="0" err="1">
+                <a:latin typeface="D2Coding" panose="020B0609020101020101" pitchFamily="49" charset="-127"/>
+                <a:ea typeface="D2Coding" panose="020B0609020101020101" pitchFamily="49" charset="-127"/>
+              </a:rPr>
+              <a:t>values로</a:t>
+            </a:r>
+            <a:r>
+              <a:rPr lang="ko-KR" altLang="en-US" sz="1500" dirty="0">
+                <a:latin typeface="D2Coding" panose="020B0609020101020101" pitchFamily="49" charset="-127"/>
+                <a:ea typeface="D2Coding" panose="020B0609020101020101" pitchFamily="49" charset="-127"/>
+              </a:rPr>
+              <a:t> 완전히 분리해 둡니다.</a:t>
+            </a:r>
+          </a:p>
+          <a:p>
+            <a:r>
+              <a:rPr lang="ko-KR" altLang="en-US" sz="1500" dirty="0" err="1">
+                <a:latin typeface="D2Coding" panose="020B0609020101020101" pitchFamily="49" charset="-127"/>
+                <a:ea typeface="D2Coding" panose="020B0609020101020101" pitchFamily="49" charset="-127"/>
+              </a:rPr>
+              <a:t>query</a:t>
+            </a:r>
+            <a:r>
+              <a:rPr lang="ko-KR" altLang="en-US" sz="1500" dirty="0">
+                <a:latin typeface="D2Coding" panose="020B0609020101020101" pitchFamily="49" charset="-127"/>
+                <a:ea typeface="D2Coding" panose="020B0609020101020101" pitchFamily="49" charset="-127"/>
+              </a:rPr>
+              <a:t> = </a:t>
+            </a:r>
+            <a:r>
+              <a:rPr lang="ko-KR" altLang="en-US" sz="1500" dirty="0" err="1">
+                <a:latin typeface="D2Coding" panose="020B0609020101020101" pitchFamily="49" charset="-127"/>
+                <a:ea typeface="D2Coding" panose="020B0609020101020101" pitchFamily="49" charset="-127"/>
+              </a:rPr>
+              <a:t>np.dot</a:t>
+            </a:r>
+            <a:r>
+              <a:rPr lang="ko-KR" altLang="en-US" sz="1500" dirty="0">
+                <a:latin typeface="D2Coding" panose="020B0609020101020101" pitchFamily="49" charset="-127"/>
+                <a:ea typeface="D2Coding" panose="020B0609020101020101" pitchFamily="49" charset="-127"/>
+              </a:rPr>
+              <a:t>(</a:t>
+            </a:r>
+            <a:r>
+              <a:rPr lang="ko-KR" altLang="en-US" sz="1500" dirty="0" err="1">
+                <a:latin typeface="D2Coding" panose="020B0609020101020101" pitchFamily="49" charset="-127"/>
+                <a:ea typeface="D2Coding" panose="020B0609020101020101" pitchFamily="49" charset="-127"/>
+              </a:rPr>
+              <a:t>target</a:t>
+            </a:r>
+            <a:r>
+              <a:rPr lang="ko-KR" altLang="en-US" sz="1500" dirty="0">
+                <a:latin typeface="D2Coding" panose="020B0609020101020101" pitchFamily="49" charset="-127"/>
+                <a:ea typeface="D2Coding" panose="020B0609020101020101" pitchFamily="49" charset="-127"/>
+              </a:rPr>
+              <a:t>, W_Q)</a:t>
+            </a:r>
+          </a:p>
+          <a:p>
+            <a:r>
+              <a:rPr lang="ko-KR" altLang="en-US" sz="1500" dirty="0" err="1">
+                <a:latin typeface="D2Coding" panose="020B0609020101020101" pitchFamily="49" charset="-127"/>
+                <a:ea typeface="D2Coding" panose="020B0609020101020101" pitchFamily="49" charset="-127"/>
+              </a:rPr>
+              <a:t>keys</a:t>
+            </a:r>
+            <a:r>
+              <a:rPr lang="ko-KR" altLang="en-US" sz="1500" dirty="0">
+                <a:latin typeface="D2Coding" panose="020B0609020101020101" pitchFamily="49" charset="-127"/>
+                <a:ea typeface="D2Coding" panose="020B0609020101020101" pitchFamily="49" charset="-127"/>
+              </a:rPr>
+              <a:t> = </a:t>
+            </a:r>
+            <a:r>
+              <a:rPr lang="ko-KR" altLang="en-US" sz="1500" dirty="0" err="1">
+                <a:latin typeface="D2Coding" panose="020B0609020101020101" pitchFamily="49" charset="-127"/>
+                <a:ea typeface="D2Coding" panose="020B0609020101020101" pitchFamily="49" charset="-127"/>
+              </a:rPr>
+              <a:t>np.dot</a:t>
+            </a:r>
+            <a:r>
+              <a:rPr lang="ko-KR" altLang="en-US" sz="1500" dirty="0">
+                <a:latin typeface="D2Coding" panose="020B0609020101020101" pitchFamily="49" charset="-127"/>
+                <a:ea typeface="D2Coding" panose="020B0609020101020101" pitchFamily="49" charset="-127"/>
+              </a:rPr>
+              <a:t>(</a:t>
+            </a:r>
+            <a:r>
+              <a:rPr lang="ko-KR" altLang="en-US" sz="1500" dirty="0" err="1">
+                <a:latin typeface="D2Coding" panose="020B0609020101020101" pitchFamily="49" charset="-127"/>
+                <a:ea typeface="D2Coding" panose="020B0609020101020101" pitchFamily="49" charset="-127"/>
+              </a:rPr>
+              <a:t>sources</a:t>
+            </a:r>
+            <a:r>
+              <a:rPr lang="ko-KR" altLang="en-US" sz="1500" dirty="0">
+                <a:latin typeface="D2Coding" panose="020B0609020101020101" pitchFamily="49" charset="-127"/>
+                <a:ea typeface="D2Coding" panose="020B0609020101020101" pitchFamily="49" charset="-127"/>
+              </a:rPr>
+              <a:t>, W_K)    # 점수 매기기 전용 (기존의 </a:t>
+            </a:r>
+            <a:r>
+              <a:rPr lang="ko-KR" altLang="en-US" sz="1500" dirty="0" err="1">
+                <a:latin typeface="D2Coding" panose="020B0609020101020101" pitchFamily="49" charset="-127"/>
+                <a:ea typeface="D2Coding" panose="020B0609020101020101" pitchFamily="49" charset="-127"/>
+              </a:rPr>
+              <a:t>score</a:t>
+            </a:r>
+            <a:r>
+              <a:rPr lang="ko-KR" altLang="en-US" sz="1500" dirty="0">
+                <a:latin typeface="D2Coding" panose="020B0609020101020101" pitchFamily="49" charset="-127"/>
+                <a:ea typeface="D2Coding" panose="020B0609020101020101" pitchFamily="49" charset="-127"/>
+              </a:rPr>
+              <a:t> 함수 안의 </a:t>
+            </a:r>
+            <a:r>
+              <a:rPr lang="ko-KR" altLang="en-US" sz="1500" dirty="0" err="1">
+                <a:latin typeface="D2Coding" panose="020B0609020101020101" pitchFamily="49" charset="-127"/>
+                <a:ea typeface="D2Coding" panose="020B0609020101020101" pitchFamily="49" charset="-127"/>
+              </a:rPr>
+              <a:t>s</a:t>
+            </a:r>
+            <a:r>
+              <a:rPr lang="ko-KR" altLang="en-US" sz="1500" dirty="0">
+                <a:latin typeface="D2Coding" panose="020B0609020101020101" pitchFamily="49" charset="-127"/>
+                <a:ea typeface="D2Coding" panose="020B0609020101020101" pitchFamily="49" charset="-127"/>
+              </a:rPr>
+              <a:t> 대체)</a:t>
+            </a:r>
+          </a:p>
+          <a:p>
+            <a:r>
+              <a:rPr lang="ko-KR" altLang="en-US" sz="1500" dirty="0" err="1">
+                <a:latin typeface="D2Coding" panose="020B0609020101020101" pitchFamily="49" charset="-127"/>
+                <a:ea typeface="D2Coding" panose="020B0609020101020101" pitchFamily="49" charset="-127"/>
+              </a:rPr>
+              <a:t>values</a:t>
+            </a:r>
+            <a:r>
+              <a:rPr lang="ko-KR" altLang="en-US" sz="1500" dirty="0">
+                <a:latin typeface="D2Coding" panose="020B0609020101020101" pitchFamily="49" charset="-127"/>
+                <a:ea typeface="D2Coding" panose="020B0609020101020101" pitchFamily="49" charset="-127"/>
+              </a:rPr>
+              <a:t> = </a:t>
+            </a:r>
+            <a:r>
+              <a:rPr lang="ko-KR" altLang="en-US" sz="1500" dirty="0" err="1">
+                <a:latin typeface="D2Coding" panose="020B0609020101020101" pitchFamily="49" charset="-127"/>
+                <a:ea typeface="D2Coding" panose="020B0609020101020101" pitchFamily="49" charset="-127"/>
+              </a:rPr>
+              <a:t>np.dot</a:t>
+            </a:r>
+            <a:r>
+              <a:rPr lang="ko-KR" altLang="en-US" sz="1500" dirty="0">
+                <a:latin typeface="D2Coding" panose="020B0609020101020101" pitchFamily="49" charset="-127"/>
+                <a:ea typeface="D2Coding" panose="020B0609020101020101" pitchFamily="49" charset="-127"/>
+              </a:rPr>
+              <a:t>(</a:t>
+            </a:r>
+            <a:r>
+              <a:rPr lang="ko-KR" altLang="en-US" sz="1500" dirty="0" err="1">
+                <a:latin typeface="D2Coding" panose="020B0609020101020101" pitchFamily="49" charset="-127"/>
+                <a:ea typeface="D2Coding" panose="020B0609020101020101" pitchFamily="49" charset="-127"/>
+              </a:rPr>
+              <a:t>sources</a:t>
+            </a:r>
+            <a:r>
+              <a:rPr lang="ko-KR" altLang="en-US" sz="1500" dirty="0">
+                <a:latin typeface="D2Coding" panose="020B0609020101020101" pitchFamily="49" charset="-127"/>
+                <a:ea typeface="D2Coding" panose="020B0609020101020101" pitchFamily="49" charset="-127"/>
+              </a:rPr>
+              <a:t>, W_V)  # 실제 알맹이 전용 (기존의 최종 합산 </a:t>
+            </a:r>
+            <a:r>
+              <a:rPr lang="ko-KR" altLang="en-US" sz="1500" dirty="0" err="1">
+                <a:latin typeface="D2Coding" panose="020B0609020101020101" pitchFamily="49" charset="-127"/>
+                <a:ea typeface="D2Coding" panose="020B0609020101020101" pitchFamily="49" charset="-127"/>
+              </a:rPr>
+              <a:t>sources</a:t>
+            </a:r>
+            <a:r>
+              <a:rPr lang="ko-KR" altLang="en-US" sz="1500" dirty="0">
+                <a:latin typeface="D2Coding" panose="020B0609020101020101" pitchFamily="49" charset="-127"/>
+                <a:ea typeface="D2Coding" panose="020B0609020101020101" pitchFamily="49" charset="-127"/>
+              </a:rPr>
+              <a:t> 대체)</a:t>
+            </a:r>
+          </a:p>
+          <a:p>
+            <a:endParaRPr lang="ko-KR" altLang="en-US" sz="1500" dirty="0">
+              <a:latin typeface="D2Coding" panose="020B0609020101020101" pitchFamily="49" charset="-127"/>
+              <a:ea typeface="D2Coding" panose="020B0609020101020101" pitchFamily="49" charset="-127"/>
+            </a:endParaRPr>
+          </a:p>
+          <a:p>
+            <a:r>
+              <a:rPr lang="ko-KR" altLang="en-US" sz="1500" dirty="0">
+                <a:latin typeface="D2Coding" panose="020B0609020101020101" pitchFamily="49" charset="-127"/>
+                <a:ea typeface="D2Coding" panose="020B0609020101020101" pitchFamily="49" charset="-127"/>
+              </a:rPr>
+              <a:t># </a:t>
+            </a:r>
+            <a:r>
+              <a:rPr lang="en-US" altLang="ko-KR" sz="1500" dirty="0">
+                <a:latin typeface="D2Coding" panose="020B0609020101020101" pitchFamily="49" charset="-127"/>
+                <a:ea typeface="D2Coding" panose="020B0609020101020101" pitchFamily="49" charset="-127"/>
+              </a:rPr>
+              <a:t>2</a:t>
+            </a:r>
+            <a:r>
+              <a:rPr lang="ko-KR" altLang="en-US" sz="1500" dirty="0">
+                <a:latin typeface="D2Coding" panose="020B0609020101020101" pitchFamily="49" charset="-127"/>
+                <a:ea typeface="D2Coding" panose="020B0609020101020101" pitchFamily="49" charset="-127"/>
+              </a:rPr>
+              <a:t>. 점수 계산 (</a:t>
+            </a:r>
+            <a:r>
+              <a:rPr lang="ko-KR" altLang="en-US" sz="1500" dirty="0" err="1">
+                <a:latin typeface="D2Coding" panose="020B0609020101020101" pitchFamily="49" charset="-127"/>
+                <a:ea typeface="D2Coding" panose="020B0609020101020101" pitchFamily="49" charset="-127"/>
+              </a:rPr>
+              <a:t>Query와</a:t>
+            </a:r>
+            <a:r>
+              <a:rPr lang="ko-KR" altLang="en-US" sz="1500" dirty="0">
+                <a:latin typeface="D2Coding" panose="020B0609020101020101" pitchFamily="49" charset="-127"/>
+                <a:ea typeface="D2Coding" panose="020B0609020101020101" pitchFamily="49" charset="-127"/>
+              </a:rPr>
+              <a:t> </a:t>
+            </a:r>
+            <a:r>
+              <a:rPr lang="ko-KR" altLang="en-US" sz="1500" dirty="0" err="1">
+                <a:latin typeface="D2Coding" panose="020B0609020101020101" pitchFamily="49" charset="-127"/>
+                <a:ea typeface="D2Coding" panose="020B0609020101020101" pitchFamily="49" charset="-127"/>
+              </a:rPr>
+              <a:t>Key를</a:t>
+            </a:r>
+            <a:r>
+              <a:rPr lang="ko-KR" altLang="en-US" sz="1500" dirty="0">
+                <a:latin typeface="D2Coding" panose="020B0609020101020101" pitchFamily="49" charset="-127"/>
+                <a:ea typeface="D2Coding" panose="020B0609020101020101" pitchFamily="49" charset="-127"/>
+              </a:rPr>
+              <a:t> 비교)</a:t>
+            </a:r>
+          </a:p>
+          <a:p>
+            <a:r>
+              <a:rPr lang="ko-KR" altLang="en-US" sz="1500" dirty="0" err="1">
+                <a:latin typeface="D2Coding" panose="020B0609020101020101" pitchFamily="49" charset="-127"/>
+                <a:ea typeface="D2Coding" panose="020B0609020101020101" pitchFamily="49" charset="-127"/>
+              </a:rPr>
+              <a:t>raw_scores</a:t>
+            </a:r>
+            <a:r>
+              <a:rPr lang="ko-KR" altLang="en-US" sz="1500" dirty="0">
+                <a:latin typeface="D2Coding" panose="020B0609020101020101" pitchFamily="49" charset="-127"/>
+                <a:ea typeface="D2Coding" panose="020B0609020101020101" pitchFamily="49" charset="-127"/>
+              </a:rPr>
+              <a:t> = </a:t>
+            </a:r>
+            <a:r>
+              <a:rPr lang="ko-KR" altLang="en-US" sz="1500" dirty="0" err="1">
+                <a:latin typeface="D2Coding" panose="020B0609020101020101" pitchFamily="49" charset="-127"/>
+                <a:ea typeface="D2Coding" panose="020B0609020101020101" pitchFamily="49" charset="-127"/>
+              </a:rPr>
+              <a:t>np.array</a:t>
+            </a:r>
+            <a:r>
+              <a:rPr lang="ko-KR" altLang="en-US" sz="1500" dirty="0">
+                <a:latin typeface="D2Coding" panose="020B0609020101020101" pitchFamily="49" charset="-127"/>
+                <a:ea typeface="D2Coding" panose="020B0609020101020101" pitchFamily="49" charset="-127"/>
+              </a:rPr>
+              <a:t>([</a:t>
+            </a:r>
+            <a:r>
+              <a:rPr lang="ko-KR" altLang="en-US" sz="1500" dirty="0" err="1">
+                <a:latin typeface="D2Coding" panose="020B0609020101020101" pitchFamily="49" charset="-127"/>
+                <a:ea typeface="D2Coding" panose="020B0609020101020101" pitchFamily="49" charset="-127"/>
+              </a:rPr>
+              <a:t>score</a:t>
+            </a:r>
+            <a:r>
+              <a:rPr lang="ko-KR" altLang="en-US" sz="1500" dirty="0">
+                <a:latin typeface="D2Coding" panose="020B0609020101020101" pitchFamily="49" charset="-127"/>
+                <a:ea typeface="D2Coding" panose="020B0609020101020101" pitchFamily="49" charset="-127"/>
+              </a:rPr>
+              <a:t>(</a:t>
+            </a:r>
+            <a:r>
+              <a:rPr lang="ko-KR" altLang="en-US" sz="1500" dirty="0" err="1">
+                <a:latin typeface="D2Coding" panose="020B0609020101020101" pitchFamily="49" charset="-127"/>
+                <a:ea typeface="D2Coding" panose="020B0609020101020101" pitchFamily="49" charset="-127"/>
+              </a:rPr>
+              <a:t>query</a:t>
+            </a:r>
+            <a:r>
+              <a:rPr lang="ko-KR" altLang="en-US" sz="1500" dirty="0">
+                <a:latin typeface="D2Coding" panose="020B0609020101020101" pitchFamily="49" charset="-127"/>
+                <a:ea typeface="D2Coding" panose="020B0609020101020101" pitchFamily="49" charset="-127"/>
+              </a:rPr>
+              <a:t>, k) </a:t>
+            </a:r>
+            <a:r>
+              <a:rPr lang="ko-KR" altLang="en-US" sz="1500" dirty="0" err="1">
+                <a:latin typeface="D2Coding" panose="020B0609020101020101" pitchFamily="49" charset="-127"/>
+                <a:ea typeface="D2Coding" panose="020B0609020101020101" pitchFamily="49" charset="-127"/>
+              </a:rPr>
+              <a:t>for</a:t>
+            </a:r>
+            <a:r>
+              <a:rPr lang="ko-KR" altLang="en-US" sz="1500" dirty="0">
+                <a:latin typeface="D2Coding" panose="020B0609020101020101" pitchFamily="49" charset="-127"/>
+                <a:ea typeface="D2Coding" panose="020B0609020101020101" pitchFamily="49" charset="-127"/>
+              </a:rPr>
+              <a:t> k </a:t>
+            </a:r>
+            <a:r>
+              <a:rPr lang="ko-KR" altLang="en-US" sz="1500" dirty="0" err="1">
+                <a:latin typeface="D2Coding" panose="020B0609020101020101" pitchFamily="49" charset="-127"/>
+                <a:ea typeface="D2Coding" panose="020B0609020101020101" pitchFamily="49" charset="-127"/>
+              </a:rPr>
+              <a:t>in</a:t>
+            </a:r>
+            <a:r>
+              <a:rPr lang="ko-KR" altLang="en-US" sz="1500" dirty="0">
+                <a:latin typeface="D2Coding" panose="020B0609020101020101" pitchFamily="49" charset="-127"/>
+                <a:ea typeface="D2Coding" panose="020B0609020101020101" pitchFamily="49" charset="-127"/>
+              </a:rPr>
+              <a:t> </a:t>
+            </a:r>
+            <a:r>
+              <a:rPr lang="ko-KR" altLang="en-US" sz="1500" dirty="0" err="1">
+                <a:latin typeface="D2Coding" panose="020B0609020101020101" pitchFamily="49" charset="-127"/>
+                <a:ea typeface="D2Coding" panose="020B0609020101020101" pitchFamily="49" charset="-127"/>
+              </a:rPr>
+              <a:t>keys</a:t>
+            </a:r>
+            <a:r>
+              <a:rPr lang="ko-KR" altLang="en-US" sz="1500" dirty="0">
+                <a:latin typeface="D2Coding" panose="020B0609020101020101" pitchFamily="49" charset="-127"/>
+                <a:ea typeface="D2Coding" panose="020B0609020101020101" pitchFamily="49" charset="-127"/>
+              </a:rPr>
+              <a:t>]) </a:t>
+            </a:r>
+          </a:p>
+          <a:p>
+            <a:r>
+              <a:rPr lang="ko-KR" altLang="en-US" sz="1500" dirty="0" err="1">
+                <a:latin typeface="D2Coding" panose="020B0609020101020101" pitchFamily="49" charset="-127"/>
+                <a:ea typeface="D2Coding" panose="020B0609020101020101" pitchFamily="49" charset="-127"/>
+              </a:rPr>
+              <a:t>attention_weights</a:t>
+            </a:r>
+            <a:r>
+              <a:rPr lang="ko-KR" altLang="en-US" sz="1500" dirty="0">
+                <a:latin typeface="D2Coding" panose="020B0609020101020101" pitchFamily="49" charset="-127"/>
+                <a:ea typeface="D2Coding" panose="020B0609020101020101" pitchFamily="49" charset="-127"/>
+              </a:rPr>
+              <a:t> = </a:t>
+            </a:r>
+            <a:r>
+              <a:rPr lang="ko-KR" altLang="en-US" sz="1500" dirty="0" err="1">
+                <a:latin typeface="D2Coding" panose="020B0609020101020101" pitchFamily="49" charset="-127"/>
+                <a:ea typeface="D2Coding" panose="020B0609020101020101" pitchFamily="49" charset="-127"/>
+              </a:rPr>
+              <a:t>softmax</a:t>
+            </a:r>
+            <a:r>
+              <a:rPr lang="ko-KR" altLang="en-US" sz="1500" dirty="0">
+                <a:latin typeface="D2Coding" panose="020B0609020101020101" pitchFamily="49" charset="-127"/>
+                <a:ea typeface="D2Coding" panose="020B0609020101020101" pitchFamily="49" charset="-127"/>
+              </a:rPr>
+              <a:t>(</a:t>
+            </a:r>
+            <a:r>
+              <a:rPr lang="ko-KR" altLang="en-US" sz="1500" dirty="0" err="1">
+                <a:latin typeface="D2Coding" panose="020B0609020101020101" pitchFamily="49" charset="-127"/>
+                <a:ea typeface="D2Coding" panose="020B0609020101020101" pitchFamily="49" charset="-127"/>
+              </a:rPr>
+              <a:t>raw_scores</a:t>
+            </a:r>
+            <a:r>
+              <a:rPr lang="ko-KR" altLang="en-US" sz="1500" dirty="0">
+                <a:latin typeface="D2Coding" panose="020B0609020101020101" pitchFamily="49" charset="-127"/>
+                <a:ea typeface="D2Coding" panose="020B0609020101020101" pitchFamily="49" charset="-127"/>
+              </a:rPr>
+              <a:t>)</a:t>
+            </a:r>
+          </a:p>
+          <a:p>
+            <a:endParaRPr lang="ko-KR" altLang="en-US" sz="1500" dirty="0">
+              <a:latin typeface="D2Coding" panose="020B0609020101020101" pitchFamily="49" charset="-127"/>
+              <a:ea typeface="D2Coding" panose="020B0609020101020101" pitchFamily="49" charset="-127"/>
+            </a:endParaRPr>
+          </a:p>
+          <a:p>
+            <a:r>
+              <a:rPr lang="ko-KR" altLang="en-US" sz="1500" dirty="0">
+                <a:latin typeface="D2Coding" panose="020B0609020101020101" pitchFamily="49" charset="-127"/>
+                <a:ea typeface="D2Coding" panose="020B0609020101020101" pitchFamily="49" charset="-127"/>
+              </a:rPr>
+              <a:t># </a:t>
+            </a:r>
+            <a:r>
+              <a:rPr lang="en-US" altLang="ko-KR" sz="1500" dirty="0">
+                <a:latin typeface="D2Coding" panose="020B0609020101020101" pitchFamily="49" charset="-127"/>
+                <a:ea typeface="D2Coding" panose="020B0609020101020101" pitchFamily="49" charset="-127"/>
+              </a:rPr>
+              <a:t>3</a:t>
+            </a:r>
+            <a:r>
+              <a:rPr lang="ko-KR" altLang="en-US" sz="1500" dirty="0">
+                <a:latin typeface="D2Coding" panose="020B0609020101020101" pitchFamily="49" charset="-127"/>
+                <a:ea typeface="D2Coding" panose="020B0609020101020101" pitchFamily="49" charset="-127"/>
+              </a:rPr>
+              <a:t>. 최종 합산 (</a:t>
+            </a:r>
+            <a:r>
+              <a:rPr lang="ko-KR" altLang="en-US" sz="1500" dirty="0" err="1">
+                <a:latin typeface="D2Coding" panose="020B0609020101020101" pitchFamily="49" charset="-127"/>
+                <a:ea typeface="D2Coding" panose="020B0609020101020101" pitchFamily="49" charset="-127"/>
+              </a:rPr>
+              <a:t>Value를</a:t>
+            </a:r>
+            <a:r>
+              <a:rPr lang="ko-KR" altLang="en-US" sz="1500" dirty="0">
+                <a:latin typeface="D2Coding" panose="020B0609020101020101" pitchFamily="49" charset="-127"/>
+                <a:ea typeface="D2Coding" panose="020B0609020101020101" pitchFamily="49" charset="-127"/>
+              </a:rPr>
+              <a:t> 곱함)</a:t>
+            </a:r>
+          </a:p>
+          <a:p>
+            <a:r>
+              <a:rPr lang="ko-KR" altLang="en-US" sz="1500" dirty="0" err="1">
+                <a:latin typeface="D2Coding" panose="020B0609020101020101" pitchFamily="49" charset="-127"/>
+                <a:ea typeface="D2Coding" panose="020B0609020101020101" pitchFamily="49" charset="-127"/>
+              </a:rPr>
+              <a:t>combined</a:t>
+            </a:r>
+            <a:r>
+              <a:rPr lang="ko-KR" altLang="en-US" sz="1500" dirty="0">
+                <a:latin typeface="D2Coding" panose="020B0609020101020101" pitchFamily="49" charset="-127"/>
+                <a:ea typeface="D2Coding" panose="020B0609020101020101" pitchFamily="49" charset="-127"/>
+              </a:rPr>
+              <a:t> = </a:t>
+            </a:r>
+            <a:r>
+              <a:rPr lang="ko-KR" altLang="en-US" sz="1500" dirty="0" err="1">
+                <a:latin typeface="D2Coding" panose="020B0609020101020101" pitchFamily="49" charset="-127"/>
+                <a:ea typeface="D2Coding" panose="020B0609020101020101" pitchFamily="49" charset="-127"/>
+              </a:rPr>
+              <a:t>np.sum</a:t>
+            </a:r>
+            <a:r>
+              <a:rPr lang="ko-KR" altLang="en-US" sz="1500" dirty="0">
+                <a:latin typeface="D2Coding" panose="020B0609020101020101" pitchFamily="49" charset="-127"/>
+                <a:ea typeface="D2Coding" panose="020B0609020101020101" pitchFamily="49" charset="-127"/>
+              </a:rPr>
+              <a:t>(</a:t>
+            </a:r>
+            <a:r>
+              <a:rPr lang="ko-KR" altLang="en-US" sz="1500" dirty="0" err="1">
+                <a:latin typeface="D2Coding" panose="020B0609020101020101" pitchFamily="49" charset="-127"/>
+                <a:ea typeface="D2Coding" panose="020B0609020101020101" pitchFamily="49" charset="-127"/>
+              </a:rPr>
+              <a:t>attention_weights</a:t>
+            </a:r>
+            <a:r>
+              <a:rPr lang="ko-KR" altLang="en-US" sz="1500" dirty="0">
+                <a:latin typeface="D2Coding" panose="020B0609020101020101" pitchFamily="49" charset="-127"/>
+                <a:ea typeface="D2Coding" panose="020B0609020101020101" pitchFamily="49" charset="-127"/>
+              </a:rPr>
+              <a:t>[:, </a:t>
+            </a:r>
+            <a:r>
+              <a:rPr lang="ko-KR" altLang="en-US" sz="1500" dirty="0" err="1">
+                <a:latin typeface="D2Coding" panose="020B0609020101020101" pitchFamily="49" charset="-127"/>
+                <a:ea typeface="D2Coding" panose="020B0609020101020101" pitchFamily="49" charset="-127"/>
+              </a:rPr>
+              <a:t>np.newaxis</a:t>
+            </a:r>
+            <a:r>
+              <a:rPr lang="ko-KR" altLang="en-US" sz="1500" dirty="0">
+                <a:latin typeface="D2Coding" panose="020B0609020101020101" pitchFamily="49" charset="-127"/>
+                <a:ea typeface="D2Coding" panose="020B0609020101020101" pitchFamily="49" charset="-127"/>
+              </a:rPr>
+              <a:t>] * </a:t>
+            </a:r>
+            <a:r>
+              <a:rPr lang="ko-KR" altLang="en-US" sz="1500" dirty="0" err="1">
+                <a:latin typeface="D2Coding" panose="020B0609020101020101" pitchFamily="49" charset="-127"/>
+                <a:ea typeface="D2Coding" panose="020B0609020101020101" pitchFamily="49" charset="-127"/>
+              </a:rPr>
+              <a:t>values</a:t>
+            </a:r>
+            <a:r>
+              <a:rPr lang="ko-KR" altLang="en-US" sz="1500" dirty="0">
+                <a:latin typeface="D2Coding" panose="020B0609020101020101" pitchFamily="49" charset="-127"/>
+                <a:ea typeface="D2Coding" panose="020B0609020101020101" pitchFamily="49" charset="-127"/>
+              </a:rPr>
+              <a:t>, </a:t>
+            </a:r>
+            <a:r>
+              <a:rPr lang="ko-KR" altLang="en-US" sz="1500" dirty="0" err="1">
+                <a:latin typeface="D2Coding" panose="020B0609020101020101" pitchFamily="49" charset="-127"/>
+                <a:ea typeface="D2Coding" panose="020B0609020101020101" pitchFamily="49" charset="-127"/>
+              </a:rPr>
+              <a:t>axis</a:t>
+            </a:r>
+            <a:r>
+              <a:rPr lang="ko-KR" altLang="en-US" sz="1500" dirty="0">
+                <a:latin typeface="D2Coding" panose="020B0609020101020101" pitchFamily="49" charset="-127"/>
+                <a:ea typeface="D2Coding" panose="020B0609020101020101" pitchFamily="49" charset="-127"/>
+              </a:rPr>
+              <a:t>=0)</a:t>
+            </a:r>
+          </a:p>
+        </p:txBody>
+      </p:sp>
+      <p:sp>
+        <p:nvSpPr>
+          <p:cNvPr id="11" name="설명선: 선(강조선) 10">
+            <a:extLst>
+              <a:ext uri="{FF2B5EF4-FFF2-40B4-BE49-F238E27FC236}">
+                <a16:creationId xmlns:a16="http://schemas.microsoft.com/office/drawing/2014/main" id="{074597CC-5B92-16E9-A4E0-1E54945799A1}"/>
+              </a:ext>
+            </a:extLst>
+          </p:cNvPr>
+          <p:cNvSpPr/>
+          <p:nvPr/>
+        </p:nvSpPr>
+        <p:spPr>
+          <a:xfrm>
+            <a:off x="8975982" y="3133725"/>
+            <a:ext cx="2892167" cy="2819400"/>
+          </a:xfrm>
+          <a:prstGeom prst="accentCallout1">
+            <a:avLst>
+              <a:gd name="adj1" fmla="val 18750"/>
+              <a:gd name="adj2" fmla="val -8333"/>
+              <a:gd name="adj3" fmla="val 22237"/>
+              <a:gd name="adj4" fmla="val -13251"/>
+            </a:avLst>
+          </a:prstGeom>
+          <a:solidFill>
+            <a:schemeClr val="accent6">
+              <a:lumMod val="20000"/>
+              <a:lumOff val="80000"/>
+            </a:schemeClr>
+          </a:solidFill>
+        </p:spPr>
+        <p:style>
+          <a:lnRef idx="2">
+            <a:schemeClr val="accent1">
+              <a:shade val="15000"/>
+            </a:schemeClr>
+          </a:lnRef>
+          <a:fillRef idx="1">
+            <a:schemeClr val="accent1"/>
+          </a:fillRef>
+          <a:effectRef idx="0">
+            <a:schemeClr val="accent1"/>
+          </a:effectRef>
+          <a:fontRef idx="minor">
+            <a:schemeClr val="lt1"/>
+          </a:fontRef>
+        </p:style>
+        <p:txBody>
+          <a:bodyPr rtlCol="0" anchor="ctr"/>
+          <a:lstStyle/>
+          <a:p>
+            <a:pPr marL="171450" indent="-171450">
+              <a:buFont typeface="Wingdings" panose="05000000000000000000" pitchFamily="2" charset="2"/>
+              <a:buChar char="§"/>
+            </a:pPr>
+            <a:r>
+              <a:rPr lang="en-US" altLang="ko-KR" sz="1200" dirty="0">
+                <a:solidFill>
+                  <a:schemeClr val="tx1"/>
+                </a:solidFill>
+                <a:latin typeface="D2Coding" panose="020B0609020101020101" pitchFamily="49" charset="-127"/>
+                <a:ea typeface="D2Coding" panose="020B0609020101020101" pitchFamily="49" charset="-127"/>
+              </a:rPr>
+              <a:t>_Q</a:t>
+            </a:r>
+            <a:r>
+              <a:rPr lang="ko-KR" altLang="en-US" sz="1200" dirty="0">
+                <a:solidFill>
+                  <a:schemeClr val="tx1"/>
+                </a:solidFill>
+                <a:latin typeface="D2Coding" panose="020B0609020101020101" pitchFamily="49" charset="-127"/>
+                <a:ea typeface="D2Coding" panose="020B0609020101020101" pitchFamily="49" charset="-127"/>
+              </a:rPr>
+              <a:t>와 </a:t>
+            </a:r>
+            <a:r>
+              <a:rPr lang="en-US" altLang="ko-KR" sz="1200" dirty="0">
+                <a:solidFill>
+                  <a:schemeClr val="tx1"/>
+                </a:solidFill>
+                <a:latin typeface="D2Coding" panose="020B0609020101020101" pitchFamily="49" charset="-127"/>
+                <a:ea typeface="D2Coding" panose="020B0609020101020101" pitchFamily="49" charset="-127"/>
+              </a:rPr>
+              <a:t>W_K</a:t>
+            </a:r>
+            <a:r>
+              <a:rPr lang="ko-KR" altLang="en-US" sz="1200" dirty="0">
+                <a:solidFill>
+                  <a:schemeClr val="tx1"/>
+                </a:solidFill>
+                <a:latin typeface="D2Coding" panose="020B0609020101020101" pitchFamily="49" charset="-127"/>
+                <a:ea typeface="D2Coding" panose="020B0609020101020101" pitchFamily="49" charset="-127"/>
+              </a:rPr>
+              <a:t>라는 학습 가능한 파라미터</a:t>
+            </a:r>
+            <a:r>
+              <a:rPr lang="en-US" altLang="ko-KR" sz="1200" dirty="0">
+                <a:solidFill>
+                  <a:schemeClr val="tx1"/>
+                </a:solidFill>
+                <a:latin typeface="D2Coding" panose="020B0609020101020101" pitchFamily="49" charset="-127"/>
+                <a:ea typeface="D2Coding" panose="020B0609020101020101" pitchFamily="49" charset="-127"/>
+              </a:rPr>
+              <a:t>(</a:t>
+            </a:r>
+            <a:r>
+              <a:rPr lang="ko-KR" altLang="en-US" sz="1200" dirty="0">
+                <a:solidFill>
+                  <a:schemeClr val="tx1"/>
+                </a:solidFill>
+                <a:latin typeface="D2Coding" panose="020B0609020101020101" pitchFamily="49" charset="-127"/>
+                <a:ea typeface="D2Coding" panose="020B0609020101020101" pitchFamily="49" charset="-127"/>
+              </a:rPr>
+              <a:t>행렬</a:t>
+            </a:r>
+            <a:r>
+              <a:rPr lang="en-US" altLang="ko-KR" sz="1200" dirty="0">
+                <a:solidFill>
+                  <a:schemeClr val="tx1"/>
+                </a:solidFill>
+                <a:latin typeface="D2Coding" panose="020B0609020101020101" pitchFamily="49" charset="-127"/>
+                <a:ea typeface="D2Coding" panose="020B0609020101020101" pitchFamily="49" charset="-127"/>
+              </a:rPr>
+              <a:t>)</a:t>
+            </a:r>
+            <a:r>
+              <a:rPr lang="ko-KR" altLang="en-US" sz="1200" dirty="0">
+                <a:solidFill>
+                  <a:schemeClr val="tx1"/>
+                </a:solidFill>
+                <a:latin typeface="D2Coding" panose="020B0609020101020101" pitchFamily="49" charset="-127"/>
+                <a:ea typeface="D2Coding" panose="020B0609020101020101" pitchFamily="49" charset="-127"/>
+              </a:rPr>
+              <a:t>를 가정하고 행렬 </a:t>
+            </a:r>
+            <a:r>
+              <a:rPr lang="en-US" altLang="ko-KR" sz="1200" dirty="0">
+                <a:solidFill>
+                  <a:schemeClr val="tx1"/>
+                </a:solidFill>
+                <a:latin typeface="D2Coding" panose="020B0609020101020101" pitchFamily="49" charset="-127"/>
+                <a:ea typeface="D2Coding" panose="020B0609020101020101" pitchFamily="49" charset="-127"/>
+              </a:rPr>
+              <a:t>W</a:t>
+            </a:r>
+            <a:r>
+              <a:rPr lang="ko-KR" altLang="en-US" sz="1200" dirty="0">
+                <a:solidFill>
+                  <a:schemeClr val="tx1"/>
+                </a:solidFill>
+                <a:latin typeface="D2Coding" panose="020B0609020101020101" pitchFamily="49" charset="-127"/>
+                <a:ea typeface="D2Coding" panose="020B0609020101020101" pitchFamily="49" charset="-127"/>
+              </a:rPr>
+              <a:t>의 숫자가 </a:t>
+            </a:r>
+            <a:r>
+              <a:rPr lang="ko-KR" altLang="en-US" sz="1200" dirty="0" err="1">
+                <a:solidFill>
+                  <a:schemeClr val="tx1"/>
+                </a:solidFill>
+                <a:latin typeface="D2Coding" panose="020B0609020101020101" pitchFamily="49" charset="-127"/>
+                <a:ea typeface="D2Coding" panose="020B0609020101020101" pitchFamily="49" charset="-127"/>
+              </a:rPr>
+              <a:t>무엇이냐에</a:t>
+            </a:r>
+            <a:r>
+              <a:rPr lang="ko-KR" altLang="en-US" sz="1200" dirty="0">
+                <a:solidFill>
+                  <a:schemeClr val="tx1"/>
+                </a:solidFill>
+                <a:latin typeface="D2Coding" panose="020B0609020101020101" pitchFamily="49" charset="-127"/>
+                <a:ea typeface="D2Coding" panose="020B0609020101020101" pitchFamily="49" charset="-127"/>
+              </a:rPr>
+              <a:t> 따라 이 </a:t>
+            </a:r>
+            <a:r>
+              <a:rPr lang="ko-KR" altLang="en-US" sz="1200" dirty="0" err="1">
+                <a:solidFill>
+                  <a:schemeClr val="tx1"/>
+                </a:solidFill>
+                <a:latin typeface="D2Coding" panose="020B0609020101020101" pitchFamily="49" charset="-127"/>
+                <a:ea typeface="D2Coding" panose="020B0609020101020101" pitchFamily="49" charset="-127"/>
+              </a:rPr>
+              <a:t>어텐션</a:t>
+            </a:r>
+            <a:r>
+              <a:rPr lang="ko-KR" altLang="en-US" sz="1200" dirty="0">
+                <a:solidFill>
+                  <a:schemeClr val="tx1"/>
+                </a:solidFill>
+                <a:latin typeface="D2Coding" panose="020B0609020101020101" pitchFamily="49" charset="-127"/>
+                <a:ea typeface="D2Coding" panose="020B0609020101020101" pitchFamily="49" charset="-127"/>
+              </a:rPr>
+              <a:t> 모델은 데이터를 늘릴 수도</a:t>
+            </a:r>
+            <a:r>
+              <a:rPr lang="en-US" altLang="ko-KR" sz="1200" dirty="0">
+                <a:solidFill>
+                  <a:schemeClr val="tx1"/>
+                </a:solidFill>
+                <a:latin typeface="D2Coding" panose="020B0609020101020101" pitchFamily="49" charset="-127"/>
+                <a:ea typeface="D2Coding" panose="020B0609020101020101" pitchFamily="49" charset="-127"/>
+              </a:rPr>
+              <a:t>, </a:t>
+            </a:r>
+            <a:r>
+              <a:rPr lang="ko-KR" altLang="en-US" sz="1200" dirty="0">
+                <a:solidFill>
+                  <a:schemeClr val="tx1"/>
+                </a:solidFill>
+                <a:latin typeface="D2Coding" panose="020B0609020101020101" pitchFamily="49" charset="-127"/>
+                <a:ea typeface="D2Coding" panose="020B0609020101020101" pitchFamily="49" charset="-127"/>
+              </a:rPr>
+              <a:t>회전시킬 수도</a:t>
+            </a:r>
+            <a:r>
+              <a:rPr lang="en-US" altLang="ko-KR" sz="1200" dirty="0">
+                <a:solidFill>
+                  <a:schemeClr val="tx1"/>
+                </a:solidFill>
+                <a:latin typeface="D2Coding" panose="020B0609020101020101" pitchFamily="49" charset="-127"/>
+                <a:ea typeface="D2Coding" panose="020B0609020101020101" pitchFamily="49" charset="-127"/>
+              </a:rPr>
+              <a:t>, </a:t>
+            </a:r>
+            <a:r>
+              <a:rPr lang="ko-KR" altLang="en-US" sz="1200" dirty="0">
+                <a:solidFill>
+                  <a:schemeClr val="tx1"/>
+                </a:solidFill>
+                <a:latin typeface="D2Coding" panose="020B0609020101020101" pitchFamily="49" charset="-127"/>
+                <a:ea typeface="D2Coding" panose="020B0609020101020101" pitchFamily="49" charset="-127"/>
+              </a:rPr>
+              <a:t>특정 차원을 찌그러뜨릴 수도 </a:t>
+            </a:r>
+            <a:r>
+              <a:rPr lang="en-US" altLang="ko-KR" sz="1200" dirty="0">
+                <a:solidFill>
+                  <a:schemeClr val="tx1"/>
+                </a:solidFill>
+                <a:latin typeface="D2Coding" panose="020B0609020101020101" pitchFamily="49" charset="-127"/>
+                <a:ea typeface="D2Coding" panose="020B0609020101020101" pitchFamily="49" charset="-127"/>
+              </a:rPr>
+              <a:t>data</a:t>
+            </a:r>
+            <a:r>
+              <a:rPr lang="ko-KR" altLang="en-US" sz="1200" dirty="0">
+                <a:solidFill>
+                  <a:schemeClr val="tx1"/>
+                </a:solidFill>
+                <a:latin typeface="D2Coding" panose="020B0609020101020101" pitchFamily="49" charset="-127"/>
+                <a:ea typeface="D2Coding" panose="020B0609020101020101" pitchFamily="49" charset="-127"/>
+              </a:rPr>
+              <a:t> </a:t>
+            </a:r>
+            <a:r>
+              <a:rPr lang="en-US" altLang="ko-KR" sz="1200" dirty="0">
+                <a:solidFill>
+                  <a:schemeClr val="tx1"/>
+                </a:solidFill>
+                <a:latin typeface="D2Coding" panose="020B0609020101020101" pitchFamily="49" charset="-127"/>
+                <a:ea typeface="D2Coding" panose="020B0609020101020101" pitchFamily="49" charset="-127"/>
+              </a:rPr>
+              <a:t>representation</a:t>
+            </a:r>
+            <a:r>
+              <a:rPr lang="ko-KR" altLang="en-US" sz="1200" dirty="0">
+                <a:solidFill>
+                  <a:schemeClr val="tx1"/>
+                </a:solidFill>
+                <a:latin typeface="D2Coding" panose="020B0609020101020101" pitchFamily="49" charset="-127"/>
+                <a:ea typeface="D2Coding" panose="020B0609020101020101" pitchFamily="49" charset="-127"/>
+              </a:rPr>
+              <a:t>이 가능하게 되어</a:t>
+            </a:r>
+            <a:endParaRPr lang="en-US" altLang="ko-KR" sz="1200" dirty="0">
+              <a:solidFill>
+                <a:schemeClr val="tx1"/>
+              </a:solidFill>
+              <a:latin typeface="D2Coding" panose="020B0609020101020101" pitchFamily="49" charset="-127"/>
+              <a:ea typeface="D2Coding" panose="020B0609020101020101" pitchFamily="49" charset="-127"/>
+            </a:endParaRPr>
+          </a:p>
+          <a:p>
+            <a:pPr marL="285750" indent="-285750">
+              <a:buFont typeface="Wingdings" panose="05000000000000000000" pitchFamily="2" charset="2"/>
+              <a:buChar char="§"/>
+            </a:pPr>
+            <a:endParaRPr lang="en-US" altLang="ko-KR" dirty="0">
+              <a:latin typeface="D2Coding" panose="020B0609020101020101" pitchFamily="49" charset="-127"/>
+              <a:ea typeface="D2Coding" panose="020B0609020101020101" pitchFamily="49" charset="-127"/>
+            </a:endParaRPr>
+          </a:p>
+          <a:p>
+            <a:pPr marL="171450" indent="-171450">
+              <a:buFont typeface="Wingdings" panose="05000000000000000000" pitchFamily="2" charset="2"/>
+              <a:buChar char="§"/>
+            </a:pPr>
+            <a:r>
+              <a:rPr lang="ko-KR" altLang="en-US" sz="1200" dirty="0">
+                <a:solidFill>
+                  <a:schemeClr val="tx1"/>
+                </a:solidFill>
+                <a:latin typeface="D2Coding" panose="020B0609020101020101" pitchFamily="49" charset="-127"/>
+                <a:ea typeface="D2Coding" panose="020B0609020101020101" pitchFamily="49" charset="-127"/>
+              </a:rPr>
+              <a:t>즉</a:t>
+            </a:r>
+            <a:r>
+              <a:rPr lang="en-US" altLang="ko-KR" sz="1200" dirty="0">
+                <a:solidFill>
+                  <a:schemeClr val="tx1"/>
+                </a:solidFill>
+                <a:latin typeface="D2Coding" panose="020B0609020101020101" pitchFamily="49" charset="-127"/>
+                <a:ea typeface="D2Coding" panose="020B0609020101020101" pitchFamily="49" charset="-127"/>
+              </a:rPr>
+              <a:t>, </a:t>
+            </a:r>
+            <a:r>
+              <a:rPr lang="ko-KR" altLang="en-US" sz="1200" dirty="0">
+                <a:solidFill>
+                  <a:schemeClr val="tx1"/>
+                </a:solidFill>
+                <a:latin typeface="D2Coding" panose="020B0609020101020101" pitchFamily="49" charset="-127"/>
+                <a:ea typeface="D2Coding" panose="020B0609020101020101" pitchFamily="49" charset="-127"/>
+              </a:rPr>
+              <a:t>모델이 학습을 통해 표현할 수 있는 관계성의 가짓수</a:t>
+            </a:r>
+            <a:r>
+              <a:rPr lang="en-US" altLang="ko-KR" sz="1200" dirty="0">
+                <a:solidFill>
+                  <a:schemeClr val="tx1"/>
+                </a:solidFill>
+                <a:latin typeface="D2Coding" panose="020B0609020101020101" pitchFamily="49" charset="-127"/>
+                <a:ea typeface="D2Coding" panose="020B0609020101020101" pitchFamily="49" charset="-127"/>
+              </a:rPr>
+              <a:t>(</a:t>
+            </a:r>
+            <a:r>
+              <a:rPr lang="ko-KR" altLang="en-US" sz="1200" dirty="0">
+                <a:solidFill>
+                  <a:schemeClr val="tx1"/>
+                </a:solidFill>
+                <a:latin typeface="D2Coding" panose="020B0609020101020101" pitchFamily="49" charset="-127"/>
+                <a:ea typeface="D2Coding" panose="020B0609020101020101" pitchFamily="49" charset="-127"/>
+              </a:rPr>
+              <a:t>함수의 후보들</a:t>
+            </a:r>
+            <a:r>
+              <a:rPr lang="en-US" altLang="ko-KR" sz="1200" dirty="0">
+                <a:solidFill>
+                  <a:schemeClr val="tx1"/>
+                </a:solidFill>
+                <a:latin typeface="D2Coding" panose="020B0609020101020101" pitchFamily="49" charset="-127"/>
+                <a:ea typeface="D2Coding" panose="020B0609020101020101" pitchFamily="49" charset="-127"/>
+              </a:rPr>
+              <a:t>)</a:t>
+            </a:r>
+            <a:r>
+              <a:rPr lang="ko-KR" altLang="en-US" sz="1200" dirty="0">
+                <a:solidFill>
+                  <a:schemeClr val="tx1"/>
+                </a:solidFill>
+                <a:latin typeface="D2Coding" panose="020B0609020101020101" pitchFamily="49" charset="-127"/>
+                <a:ea typeface="D2Coding" panose="020B0609020101020101" pitchFamily="49" charset="-127"/>
+              </a:rPr>
+              <a:t>가 수억</a:t>
+            </a:r>
+            <a:r>
+              <a:rPr lang="en-US" altLang="ko-KR" sz="1200" dirty="0">
+                <a:solidFill>
+                  <a:schemeClr val="tx1"/>
+                </a:solidFill>
+                <a:latin typeface="D2Coding" panose="020B0609020101020101" pitchFamily="49" charset="-127"/>
+                <a:ea typeface="D2Coding" panose="020B0609020101020101" pitchFamily="49" charset="-127"/>
+              </a:rPr>
+              <a:t>, </a:t>
+            </a:r>
+            <a:r>
+              <a:rPr lang="ko-KR" altLang="en-US" sz="1200" dirty="0">
+                <a:solidFill>
+                  <a:schemeClr val="tx1"/>
+                </a:solidFill>
+                <a:latin typeface="D2Coding" panose="020B0609020101020101" pitchFamily="49" charset="-127"/>
+                <a:ea typeface="D2Coding" panose="020B0609020101020101" pitchFamily="49" charset="-127"/>
+              </a:rPr>
+              <a:t>수조 개로 늘어난 것입니다</a:t>
+            </a:r>
+            <a:r>
+              <a:rPr lang="en-US" altLang="ko-KR" sz="1200" dirty="0">
+                <a:solidFill>
+                  <a:schemeClr val="tx1"/>
+                </a:solidFill>
+                <a:latin typeface="D2Coding" panose="020B0609020101020101" pitchFamily="49" charset="-127"/>
+                <a:ea typeface="D2Coding" panose="020B0609020101020101" pitchFamily="49" charset="-127"/>
+              </a:rPr>
+              <a:t>. </a:t>
+            </a:r>
+            <a:r>
+              <a:rPr lang="ko-KR" altLang="en-US" sz="1200" dirty="0">
+                <a:solidFill>
+                  <a:schemeClr val="tx1"/>
+                </a:solidFill>
+                <a:latin typeface="D2Coding" panose="020B0609020101020101" pitchFamily="49" charset="-127"/>
+                <a:ea typeface="D2Coding" panose="020B0609020101020101" pitchFamily="49" charset="-127"/>
+              </a:rPr>
+              <a:t>이것은 </a:t>
+            </a:r>
+            <a:r>
+              <a:rPr lang="en-US" altLang="ko-KR" sz="1200" dirty="0">
+                <a:solidFill>
+                  <a:schemeClr val="tx1"/>
+                </a:solidFill>
+                <a:latin typeface="D2Coding" panose="020B0609020101020101" pitchFamily="49" charset="-127"/>
+                <a:ea typeface="D2Coding" panose="020B0609020101020101" pitchFamily="49" charset="-127"/>
+              </a:rPr>
+              <a:t>"</a:t>
+            </a:r>
+            <a:r>
+              <a:rPr lang="ko-KR" altLang="en-US" sz="1200" dirty="0">
+                <a:solidFill>
+                  <a:schemeClr val="tx1"/>
+                </a:solidFill>
+                <a:latin typeface="D2Coding" panose="020B0609020101020101" pitchFamily="49" charset="-127"/>
+                <a:ea typeface="D2Coding" panose="020B0609020101020101" pitchFamily="49" charset="-127"/>
+              </a:rPr>
+              <a:t>가설 공간을 훨씬 더 풍부하게 만들어 줌</a:t>
+            </a:r>
+          </a:p>
+        </p:txBody>
+      </p:sp>
+      <p:sp>
+        <p:nvSpPr>
+          <p:cNvPr id="12" name="설명선: 선(강조선) 11">
+            <a:extLst>
+              <a:ext uri="{FF2B5EF4-FFF2-40B4-BE49-F238E27FC236}">
+                <a16:creationId xmlns:a16="http://schemas.microsoft.com/office/drawing/2014/main" id="{57B4367C-8247-34B9-0338-40B441E54151}"/>
+              </a:ext>
+            </a:extLst>
+          </p:cNvPr>
+          <p:cNvSpPr/>
+          <p:nvPr/>
+        </p:nvSpPr>
+        <p:spPr>
+          <a:xfrm>
+            <a:off x="9680832" y="1383864"/>
+            <a:ext cx="2082544" cy="1246495"/>
+          </a:xfrm>
+          <a:prstGeom prst="accentCallout1">
+            <a:avLst>
+              <a:gd name="adj1" fmla="val 18750"/>
+              <a:gd name="adj2" fmla="val -8333"/>
+              <a:gd name="adj3" fmla="val 24529"/>
+              <a:gd name="adj4" fmla="val -19654"/>
+            </a:avLst>
+          </a:prstGeom>
+          <a:solidFill>
+            <a:schemeClr val="accent6">
+              <a:lumMod val="20000"/>
+              <a:lumOff val="80000"/>
+            </a:schemeClr>
+          </a:solidFill>
+        </p:spPr>
+        <p:style>
+          <a:lnRef idx="2">
+            <a:schemeClr val="accent1">
+              <a:shade val="15000"/>
+            </a:schemeClr>
+          </a:lnRef>
+          <a:fillRef idx="1">
+            <a:schemeClr val="accent1"/>
+          </a:fillRef>
+          <a:effectRef idx="0">
+            <a:schemeClr val="accent1"/>
+          </a:effectRef>
+          <a:fontRef idx="minor">
+            <a:schemeClr val="lt1"/>
+          </a:fontRef>
+        </p:style>
+        <p:txBody>
+          <a:bodyPr rtlCol="0" anchor="ctr"/>
+          <a:lstStyle/>
+          <a:p>
+            <a:pPr marL="171450" indent="-171450">
+              <a:buFont typeface="Wingdings" panose="05000000000000000000" pitchFamily="2" charset="2"/>
+              <a:buChar char="§"/>
+            </a:pPr>
+            <a:r>
+              <a:rPr lang="ko-KR" altLang="en-US" sz="1200" dirty="0">
+                <a:solidFill>
+                  <a:schemeClr val="tx1"/>
+                </a:solidFill>
+                <a:latin typeface="D2Coding" panose="020B0609020101020101" pitchFamily="49" charset="-127"/>
+                <a:ea typeface="D2Coding" panose="020B0609020101020101" pitchFamily="49" charset="-127"/>
+              </a:rPr>
+              <a:t>고정된 </a:t>
+            </a:r>
+            <a:r>
+              <a:rPr lang="ko-KR" altLang="en-US" sz="1200" dirty="0" err="1">
+                <a:solidFill>
+                  <a:schemeClr val="tx1"/>
+                </a:solidFill>
+                <a:latin typeface="D2Coding" panose="020B0609020101020101" pitchFamily="49" charset="-127"/>
+                <a:ea typeface="D2Coding" panose="020B0609020101020101" pitchFamily="49" charset="-127"/>
+              </a:rPr>
+              <a:t>임베딩이</a:t>
+            </a:r>
+            <a:r>
+              <a:rPr lang="ko-KR" altLang="en-US" sz="1200" dirty="0">
+                <a:solidFill>
+                  <a:schemeClr val="tx1"/>
+                </a:solidFill>
+                <a:latin typeface="D2Coding" panose="020B0609020101020101" pitchFamily="49" charset="-127"/>
+                <a:ea typeface="D2Coding" panose="020B0609020101020101" pitchFamily="49" charset="-127"/>
+              </a:rPr>
+              <a:t> 약점</a:t>
+            </a:r>
+            <a:r>
+              <a:rPr lang="en-US" altLang="ko-KR" sz="1200" dirty="0">
+                <a:solidFill>
+                  <a:schemeClr val="tx1"/>
+                </a:solidFill>
+                <a:latin typeface="D2Coding" panose="020B0609020101020101" pitchFamily="49" charset="-127"/>
+                <a:ea typeface="D2Coding" panose="020B0609020101020101" pitchFamily="49" charset="-127"/>
+              </a:rPr>
+              <a:t>, apple</a:t>
+            </a:r>
+            <a:r>
+              <a:rPr lang="ko-KR" altLang="en-US" sz="1200" dirty="0">
+                <a:solidFill>
+                  <a:schemeClr val="tx1"/>
+                </a:solidFill>
+                <a:latin typeface="D2Coding" panose="020B0609020101020101" pitchFamily="49" charset="-127"/>
+                <a:ea typeface="D2Coding" panose="020B0609020101020101" pitchFamily="49" charset="-127"/>
+              </a:rPr>
+              <a:t>이 </a:t>
+            </a:r>
+            <a:r>
+              <a:rPr lang="en-US" altLang="ko-KR" sz="1200" dirty="0">
+                <a:solidFill>
+                  <a:schemeClr val="tx1"/>
+                </a:solidFill>
+                <a:latin typeface="D2Coding" panose="020B0609020101020101" pitchFamily="49" charset="-127"/>
+                <a:ea typeface="D2Coding" panose="020B0609020101020101" pitchFamily="49" charset="-127"/>
+              </a:rPr>
+              <a:t>target</a:t>
+            </a:r>
+            <a:r>
+              <a:rPr lang="ko-KR" altLang="en-US" sz="1200" dirty="0">
+                <a:solidFill>
+                  <a:schemeClr val="tx1"/>
+                </a:solidFill>
+                <a:latin typeface="D2Coding" panose="020B0609020101020101" pitchFamily="49" charset="-127"/>
+                <a:ea typeface="D2Coding" panose="020B0609020101020101" pitchFamily="49" charset="-127"/>
+              </a:rPr>
+              <a:t>인 경우에도 </a:t>
+            </a:r>
+            <a:r>
+              <a:rPr lang="en-US" altLang="ko-KR" sz="1200" dirty="0">
+                <a:solidFill>
+                  <a:schemeClr val="tx1"/>
+                </a:solidFill>
+                <a:latin typeface="D2Coding" panose="020B0609020101020101" pitchFamily="49" charset="-127"/>
+                <a:ea typeface="D2Coding" panose="020B0609020101020101" pitchFamily="49" charset="-127"/>
+              </a:rPr>
+              <a:t>sources</a:t>
+            </a:r>
+            <a:r>
+              <a:rPr lang="ko-KR" altLang="en-US" sz="1200" dirty="0">
+                <a:solidFill>
+                  <a:schemeClr val="tx1"/>
+                </a:solidFill>
+                <a:latin typeface="D2Coding" panose="020B0609020101020101" pitchFamily="49" charset="-127"/>
+                <a:ea typeface="D2Coding" panose="020B0609020101020101" pitchFamily="49" charset="-127"/>
+              </a:rPr>
+              <a:t>에 </a:t>
+            </a:r>
+            <a:r>
+              <a:rPr lang="ko-KR" altLang="en-US" sz="1200" dirty="0" err="1">
+                <a:solidFill>
+                  <a:schemeClr val="tx1"/>
+                </a:solidFill>
+                <a:latin typeface="D2Coding" panose="020B0609020101020101" pitchFamily="49" charset="-127"/>
+                <a:ea typeface="D2Coding" panose="020B0609020101020101" pitchFamily="49" charset="-127"/>
+              </a:rPr>
+              <a:t>맥킨토시나</a:t>
+            </a:r>
+            <a:r>
+              <a:rPr lang="en-US" altLang="ko-KR" sz="1200" dirty="0">
+                <a:solidFill>
+                  <a:schemeClr val="tx1"/>
+                </a:solidFill>
+                <a:latin typeface="D2Coding" panose="020B0609020101020101" pitchFamily="49" charset="-127"/>
+                <a:ea typeface="D2Coding" panose="020B0609020101020101" pitchFamily="49" charset="-127"/>
+              </a:rPr>
+              <a:t>, </a:t>
+            </a:r>
+            <a:r>
+              <a:rPr lang="ko-KR" altLang="en-US" sz="1200" dirty="0">
+                <a:solidFill>
+                  <a:schemeClr val="tx1"/>
+                </a:solidFill>
+                <a:latin typeface="D2Coding" panose="020B0609020101020101" pitchFamily="49" charset="-127"/>
+                <a:ea typeface="D2Coding" panose="020B0609020101020101" pitchFamily="49" charset="-127"/>
+              </a:rPr>
+              <a:t>아이폰 등과 같은 단어와 연관성을 찾기 </a:t>
+            </a:r>
+            <a:r>
+              <a:rPr lang="ko-KR" altLang="en-US" sz="1200" dirty="0" err="1">
+                <a:solidFill>
+                  <a:schemeClr val="tx1"/>
+                </a:solidFill>
+                <a:latin typeface="D2Coding" panose="020B0609020101020101" pitchFamily="49" charset="-127"/>
+                <a:ea typeface="D2Coding" panose="020B0609020101020101" pitchFamily="49" charset="-127"/>
+              </a:rPr>
+              <a:t>힘등</a:t>
+            </a:r>
+            <a:endParaRPr lang="ko-KR" altLang="en-US" sz="1200" dirty="0">
+              <a:solidFill>
+                <a:schemeClr val="tx1"/>
+              </a:solidFill>
+              <a:latin typeface="D2Coding" panose="020B0609020101020101" pitchFamily="49" charset="-127"/>
+              <a:ea typeface="D2Coding" panose="020B0609020101020101" pitchFamily="49" charset="-127"/>
+            </a:endParaRPr>
+          </a:p>
+        </p:txBody>
+      </p:sp>
+      <p:sp>
+        <p:nvSpPr>
+          <p:cNvPr id="13" name="화살표: 아래쪽 12">
+            <a:extLst>
+              <a:ext uri="{FF2B5EF4-FFF2-40B4-BE49-F238E27FC236}">
+                <a16:creationId xmlns:a16="http://schemas.microsoft.com/office/drawing/2014/main" id="{D2CE9684-F397-CE45-DA5F-7FA117778FB7}"/>
+              </a:ext>
+            </a:extLst>
+          </p:cNvPr>
+          <p:cNvSpPr/>
+          <p:nvPr/>
+        </p:nvSpPr>
+        <p:spPr>
+          <a:xfrm>
+            <a:off x="3495676" y="2765801"/>
+            <a:ext cx="571499" cy="491749"/>
+          </a:xfrm>
+          <a:prstGeom prst="downArrow">
+            <a:avLst>
+              <a:gd name="adj1" fmla="val 52391"/>
+              <a:gd name="adj2" fmla="val 50000"/>
+            </a:avLst>
+          </a:prstGeom>
+        </p:spPr>
+        <p:style>
+          <a:lnRef idx="2">
+            <a:schemeClr val="accent1">
+              <a:shade val="15000"/>
+            </a:schemeClr>
+          </a:lnRef>
+          <a:fillRef idx="1">
+            <a:schemeClr val="accent1"/>
+          </a:fillRef>
+          <a:effectRef idx="0">
+            <a:schemeClr val="accent1"/>
+          </a:effectRef>
+          <a:fontRef idx="minor">
+            <a:schemeClr val="lt1"/>
+          </a:fontRef>
+        </p:style>
+        <p:txBody>
+          <a:bodyPr rtlCol="0" anchor="ctr"/>
+          <a:lstStyle/>
+          <a:p>
+            <a:pPr algn="ctr"/>
+            <a:endParaRPr lang="ko-KR" altLang="en-US"/>
+          </a:p>
+        </p:txBody>
+      </p:sp>
+      <p:sp>
+        <p:nvSpPr>
+          <p:cNvPr id="14" name="TextBox 13">
+            <a:extLst>
+              <a:ext uri="{FF2B5EF4-FFF2-40B4-BE49-F238E27FC236}">
+                <a16:creationId xmlns:a16="http://schemas.microsoft.com/office/drawing/2014/main" id="{DC62F35F-BD2E-6AA4-45A9-9B80F01E966B}"/>
+              </a:ext>
+            </a:extLst>
+          </p:cNvPr>
+          <p:cNvSpPr txBox="1"/>
+          <p:nvPr/>
+        </p:nvSpPr>
+        <p:spPr>
+          <a:xfrm>
+            <a:off x="6966408" y="826899"/>
+            <a:ext cx="4600281" cy="369332"/>
+          </a:xfrm>
+          <a:prstGeom prst="rect">
+            <a:avLst/>
+          </a:prstGeom>
+          <a:noFill/>
+        </p:spPr>
+        <p:txBody>
+          <a:bodyPr wrap="square">
+            <a:spAutoFit/>
+          </a:bodyPr>
+          <a:lstStyle/>
+          <a:p>
+            <a:pPr indent="0" algn="r">
+              <a:buNone/>
+            </a:pPr>
+            <a:r>
+              <a:rPr lang="ko-KR" altLang="ko-KR" sz="1800" b="1" i="0" dirty="0" err="1">
+                <a:effectLst/>
+                <a:latin typeface="Lora" pitchFamily="2" charset="0"/>
+              </a:rPr>
+              <a:t>Dot-product</a:t>
+            </a:r>
+            <a:r>
+              <a:rPr lang="ko-KR" altLang="ko-KR" sz="1800" b="1" i="0" dirty="0">
+                <a:effectLst/>
+                <a:latin typeface="Lora" pitchFamily="2" charset="0"/>
+              </a:rPr>
+              <a:t> </a:t>
+            </a:r>
+            <a:r>
+              <a:rPr lang="ko-KR" altLang="ko-KR" sz="1800" b="1" i="0" dirty="0" err="1">
+                <a:effectLst/>
+                <a:latin typeface="Lora" pitchFamily="2" charset="0"/>
+              </a:rPr>
+              <a:t>attention</a:t>
+            </a:r>
+            <a:endParaRPr lang="ko-KR" altLang="ko-KR" sz="1800" b="1" i="0" dirty="0">
+              <a:effectLst/>
+              <a:latin typeface="Lora" pitchFamily="2" charset="0"/>
+            </a:endParaRPr>
+          </a:p>
+        </p:txBody>
+      </p:sp>
     </p:spTree>
     <p:extLst>
       <p:ext uri="{BB962C8B-B14F-4D97-AF65-F5344CB8AC3E}">
         <p14:creationId xmlns:p14="http://schemas.microsoft.com/office/powerpoint/2010/main" val="3644008806"/>
+      </p:ext>
+    </p:extLst>
+  </p:cSld>
+  <p:clrMapOvr>
+    <a:masterClrMapping/>
+  </p:clrMapOvr>
+</p:sld>
+</file>
+
+<file path=ppt/slides/slide27.xml><?xml version="1.0" encoding="utf-8"?>
+<p:sld xmlns:a="http://schemas.openxmlformats.org/drawingml/2006/main" xmlns:r="http://schemas.openxmlformats.org/officeDocument/2006/relationships" xmlns:p="http://schemas.openxmlformats.org/presentationml/2006/main">
+  <p:cSld>
+    <p:spTree>
+      <p:nvGrpSpPr>
+        <p:cNvPr id="1" name="">
+          <a:extLst>
+            <a:ext uri="{FF2B5EF4-FFF2-40B4-BE49-F238E27FC236}">
+              <a16:creationId xmlns:a16="http://schemas.microsoft.com/office/drawing/2014/main" id="{40652095-7E9D-6124-A4C4-1764B4C58995}"/>
+            </a:ext>
+          </a:extLst>
+        </p:cNvPr>
+        <p:cNvGrpSpPr/>
+        <p:nvPr/>
+      </p:nvGrpSpPr>
+      <p:grpSpPr>
+        <a:xfrm>
+          <a:off x="0" y="0"/>
+          <a:ext cx="0" cy="0"/>
+          <a:chOff x="0" y="0"/>
+          <a:chExt cx="0" cy="0"/>
+        </a:xfrm>
+      </p:grpSpPr>
+      <p:sp>
+        <p:nvSpPr>
+          <p:cNvPr id="4" name="슬라이드 번호 개체 틀 3">
+            <a:extLst>
+              <a:ext uri="{FF2B5EF4-FFF2-40B4-BE49-F238E27FC236}">
+                <a16:creationId xmlns:a16="http://schemas.microsoft.com/office/drawing/2014/main" id="{B37F369A-A8A1-4007-314C-12738C63778D}"/>
+              </a:ext>
+            </a:extLst>
+          </p:cNvPr>
+          <p:cNvSpPr>
+            <a:spLocks noGrp="1"/>
+          </p:cNvSpPr>
+          <p:nvPr>
+            <p:ph type="sldNum" sz="quarter" idx="12"/>
+          </p:nvPr>
+        </p:nvSpPr>
+        <p:spPr>
+          <a:xfrm>
+            <a:off x="10514011" y="6036261"/>
+            <a:ext cx="753545" cy="365125"/>
+          </a:xfrm>
+        </p:spPr>
+        <p:txBody>
+          <a:bodyPr/>
+          <a:lstStyle/>
+          <a:p>
+            <a:fld id="{D57F1E4F-1CFF-5643-939E-217C01CDF565}" type="slidenum">
+              <a:rPr lang="en-US" smtClean="0"/>
+              <a:pPr/>
+              <a:t>27</a:t>
+            </a:fld>
+            <a:endParaRPr lang="en-US" dirty="0"/>
+          </a:p>
+        </p:txBody>
+      </p:sp>
+      <p:sp>
+        <p:nvSpPr>
+          <p:cNvPr id="3" name="제목 1">
+            <a:extLst>
+              <a:ext uri="{FF2B5EF4-FFF2-40B4-BE49-F238E27FC236}">
+                <a16:creationId xmlns:a16="http://schemas.microsoft.com/office/drawing/2014/main" id="{38FF8E2D-0FF1-DD0A-8E12-C59DC9C6B6FB}"/>
+              </a:ext>
+            </a:extLst>
+          </p:cNvPr>
+          <p:cNvSpPr txBox="1">
+            <a:spLocks/>
+          </p:cNvSpPr>
+          <p:nvPr/>
+        </p:nvSpPr>
+        <p:spPr>
+          <a:xfrm>
+            <a:off x="475645" y="481983"/>
+            <a:ext cx="10353762" cy="766439"/>
+          </a:xfrm>
+          <a:prstGeom prst="rect">
+            <a:avLst/>
+          </a:prstGeom>
+        </p:spPr>
+        <p:txBody>
+          <a:bodyPr vert="horz" lIns="91440" tIns="45720" rIns="91440" bIns="45720" rtlCol="0" anchor="ctr">
+            <a:normAutofit/>
+          </a:bodyPr>
+          <a:lstStyle>
+            <a:lvl1pPr algn="ctr" defTabSz="914400" rtl="0" eaLnBrk="1" latinLnBrk="1" hangingPunct="1">
+              <a:lnSpc>
+                <a:spcPct val="90000"/>
+              </a:lnSpc>
+              <a:spcBef>
+                <a:spcPct val="0"/>
+              </a:spcBef>
+              <a:buNone/>
+              <a:defRPr sz="3200" kern="1200" cap="all" baseline="0">
+                <a:solidFill>
+                  <a:schemeClr val="tx1"/>
+                </a:solidFill>
+                <a:effectLst/>
+                <a:latin typeface="Batang" panose="02030600000101010101" pitchFamily="18" charset="-127"/>
+                <a:ea typeface="Batang" panose="02030600000101010101" pitchFamily="18" charset="-127"/>
+                <a:cs typeface="+mj-cs"/>
+              </a:defRPr>
+            </a:lvl1pPr>
+          </a:lstStyle>
+          <a:p>
+            <a:pPr algn="l"/>
+            <a:r>
+              <a:rPr lang="en-US" altLang="ko-KR" sz="2800" b="1" cap="none" dirty="0">
+                <a:latin typeface="Lora" pitchFamily="2" charset="0"/>
+              </a:rPr>
+              <a:t>The Transformer architecture</a:t>
+            </a:r>
+          </a:p>
+        </p:txBody>
+      </p:sp>
+      <p:pic>
+        <p:nvPicPr>
+          <p:cNvPr id="5" name="그림 4">
+            <a:extLst>
+              <a:ext uri="{FF2B5EF4-FFF2-40B4-BE49-F238E27FC236}">
+                <a16:creationId xmlns:a16="http://schemas.microsoft.com/office/drawing/2014/main" id="{EF5622AD-2E95-BAA7-E12F-D392FDB0F5B8}"/>
+              </a:ext>
+            </a:extLst>
+          </p:cNvPr>
+          <p:cNvPicPr>
+            <a:picLocks noChangeAspect="1"/>
+          </p:cNvPicPr>
+          <p:nvPr/>
+        </p:nvPicPr>
+        <p:blipFill>
+          <a:blip r:embed="rId2"/>
+          <a:stretch>
+            <a:fillRect/>
+          </a:stretch>
+        </p:blipFill>
+        <p:spPr>
+          <a:xfrm>
+            <a:off x="2068525" y="2617391"/>
+            <a:ext cx="7026249" cy="2301439"/>
+          </a:xfrm>
+          <a:prstGeom prst="rect">
+            <a:avLst/>
+          </a:prstGeom>
+        </p:spPr>
+      </p:pic>
+      <p:sp>
+        <p:nvSpPr>
+          <p:cNvPr id="6" name="TextBox 5">
+            <a:extLst>
+              <a:ext uri="{FF2B5EF4-FFF2-40B4-BE49-F238E27FC236}">
+                <a16:creationId xmlns:a16="http://schemas.microsoft.com/office/drawing/2014/main" id="{E1221C5F-4532-D2D4-37C6-6814A7AF334D}"/>
+              </a:ext>
+            </a:extLst>
+          </p:cNvPr>
+          <p:cNvSpPr txBox="1"/>
+          <p:nvPr/>
+        </p:nvSpPr>
+        <p:spPr>
+          <a:xfrm>
+            <a:off x="6966408" y="826899"/>
+            <a:ext cx="4600281" cy="369332"/>
+          </a:xfrm>
+          <a:prstGeom prst="rect">
+            <a:avLst/>
+          </a:prstGeom>
+          <a:noFill/>
+        </p:spPr>
+        <p:txBody>
+          <a:bodyPr wrap="square">
+            <a:spAutoFit/>
+          </a:bodyPr>
+          <a:lstStyle/>
+          <a:p>
+            <a:pPr indent="0" algn="r">
+              <a:buNone/>
+            </a:pPr>
+            <a:r>
+              <a:rPr lang="ko-KR" altLang="ko-KR" sz="1800" b="1" i="0" dirty="0" err="1">
+                <a:effectLst/>
+                <a:latin typeface="Lora" pitchFamily="2" charset="0"/>
+              </a:rPr>
+              <a:t>Dot-product</a:t>
+            </a:r>
+            <a:r>
+              <a:rPr lang="ko-KR" altLang="ko-KR" sz="1800" b="1" i="0" dirty="0">
+                <a:effectLst/>
+                <a:latin typeface="Lora" pitchFamily="2" charset="0"/>
+              </a:rPr>
+              <a:t> </a:t>
+            </a:r>
+            <a:r>
+              <a:rPr lang="ko-KR" altLang="ko-KR" sz="1800" b="1" i="0" dirty="0" err="1">
+                <a:effectLst/>
+                <a:latin typeface="Lora" pitchFamily="2" charset="0"/>
+              </a:rPr>
+              <a:t>attention</a:t>
+            </a:r>
+            <a:endParaRPr lang="ko-KR" altLang="ko-KR" sz="1800" b="1" i="0" dirty="0">
+              <a:effectLst/>
+              <a:latin typeface="Lora" pitchFamily="2" charset="0"/>
+            </a:endParaRPr>
+          </a:p>
+        </p:txBody>
+      </p:sp>
+      <mc:AlternateContent xmlns:mc="http://schemas.openxmlformats.org/markup-compatibility/2006">
+        <mc:Choice xmlns:a14="http://schemas.microsoft.com/office/drawing/2010/main" Requires="a14">
+          <p:sp>
+            <p:nvSpPr>
+              <p:cNvPr id="9" name="TextBox 8">
+                <a:extLst>
+                  <a:ext uri="{FF2B5EF4-FFF2-40B4-BE49-F238E27FC236}">
+                    <a16:creationId xmlns:a16="http://schemas.microsoft.com/office/drawing/2014/main" id="{57E46BD3-B69B-B7AC-E23D-0DC0C491EF87}"/>
+                  </a:ext>
+                </a:extLst>
+              </p:cNvPr>
+              <p:cNvSpPr txBox="1"/>
+              <p:nvPr/>
+            </p:nvSpPr>
+            <p:spPr>
+              <a:xfrm>
+                <a:off x="542924" y="1286727"/>
+                <a:ext cx="11134725" cy="879984"/>
+              </a:xfrm>
+              <a:prstGeom prst="rect">
+                <a:avLst/>
+              </a:prstGeom>
+              <a:noFill/>
+            </p:spPr>
+            <p:txBody>
+              <a:bodyPr wrap="square">
+                <a:spAutoFit/>
+              </a:bodyPr>
+              <a:lstStyle/>
+              <a:p>
+                <a:pPr>
+                  <a:lnSpc>
+                    <a:spcPct val="150000"/>
+                  </a:lnSpc>
+                </a:pPr>
+                <a:r>
+                  <a:rPr lang="ko-KR" altLang="en-US" dirty="0">
+                    <a:latin typeface="D2Coding" panose="020B0609020101020101" pitchFamily="49" charset="-127"/>
+                    <a:ea typeface="D2Coding" panose="020B0609020101020101" pitchFamily="49" charset="-127"/>
+                  </a:rPr>
+                  <a:t>입력되는 벡터의 차원을 </a:t>
+                </a:r>
+                <a14:m>
+                  <m:oMath xmlns:m="http://schemas.openxmlformats.org/officeDocument/2006/math">
+                    <m:sSub>
+                      <m:sSubPr>
+                        <m:ctrlPr>
+                          <a:rPr lang="en-US" altLang="ko-KR" i="1" smtClean="0">
+                            <a:latin typeface="Cambria Math" panose="02040503050406030204" pitchFamily="18" charset="0"/>
+                            <a:ea typeface="D2Coding" panose="020B0609020101020101" pitchFamily="49" charset="-127"/>
+                          </a:rPr>
+                        </m:ctrlPr>
+                      </m:sSubPr>
+                      <m:e>
+                        <m:r>
+                          <a:rPr lang="en-US" altLang="ko-KR" b="0" i="1" smtClean="0">
+                            <a:latin typeface="Cambria Math" panose="02040503050406030204" pitchFamily="18" charset="0"/>
+                            <a:ea typeface="D2Coding" panose="020B0609020101020101" pitchFamily="49" charset="-127"/>
+                          </a:rPr>
+                          <m:t>𝑑</m:t>
+                        </m:r>
+                      </m:e>
+                      <m:sub>
+                        <m:r>
+                          <a:rPr lang="en-US" altLang="ko-KR" b="0" i="1" smtClean="0">
+                            <a:latin typeface="Cambria Math" panose="02040503050406030204" pitchFamily="18" charset="0"/>
+                            <a:ea typeface="D2Coding" panose="020B0609020101020101" pitchFamily="49" charset="-127"/>
+                          </a:rPr>
+                          <m:t>𝑚𝑜𝑑𝑒𝑙</m:t>
+                        </m:r>
+                      </m:sub>
+                    </m:sSub>
+                  </m:oMath>
+                </a14:m>
+                <a:r>
+                  <a:rPr lang="ko-KR" altLang="en-US" dirty="0">
+                    <a:latin typeface="D2Coding" panose="020B0609020101020101" pitchFamily="49" charset="-127"/>
+                    <a:ea typeface="D2Coding" panose="020B0609020101020101" pitchFamily="49" charset="-127"/>
+                  </a:rPr>
+                  <a:t>이라 하고, 우리가 투영(</a:t>
+                </a:r>
+                <a:r>
+                  <a:rPr lang="ko-KR" altLang="en-US" dirty="0" err="1">
+                    <a:latin typeface="D2Coding" panose="020B0609020101020101" pitchFamily="49" charset="-127"/>
+                    <a:ea typeface="D2Coding" panose="020B0609020101020101" pitchFamily="49" charset="-127"/>
+                  </a:rPr>
+                  <a:t>Projection</a:t>
+                </a:r>
+                <a:r>
+                  <a:rPr lang="ko-KR" altLang="en-US" dirty="0">
+                    <a:latin typeface="D2Coding" panose="020B0609020101020101" pitchFamily="49" charset="-127"/>
+                    <a:ea typeface="D2Coding" panose="020B0609020101020101" pitchFamily="49" charset="-127"/>
+                  </a:rPr>
+                  <a:t>)시켜서 보낼 새로운 공간의 차원을 각각 </a:t>
+                </a:r>
+                <a14:m>
+                  <m:oMath xmlns:m="http://schemas.openxmlformats.org/officeDocument/2006/math">
+                    <m:sSub>
+                      <m:sSubPr>
+                        <m:ctrlPr>
+                          <a:rPr lang="en-US" altLang="ko-KR" i="1">
+                            <a:latin typeface="Cambria Math" panose="02040503050406030204" pitchFamily="18" charset="0"/>
+                            <a:ea typeface="D2Coding" panose="020B0609020101020101" pitchFamily="49" charset="-127"/>
+                          </a:rPr>
+                        </m:ctrlPr>
+                      </m:sSubPr>
+                      <m:e>
+                        <m:r>
+                          <a:rPr lang="en-US" altLang="ko-KR" i="1">
+                            <a:latin typeface="Cambria Math" panose="02040503050406030204" pitchFamily="18" charset="0"/>
+                            <a:ea typeface="D2Coding" panose="020B0609020101020101" pitchFamily="49" charset="-127"/>
+                          </a:rPr>
+                          <m:t>𝑑</m:t>
+                        </m:r>
+                      </m:e>
+                      <m:sub>
+                        <m:r>
+                          <a:rPr lang="en-US" altLang="ko-KR" b="1" i="1" smtClean="0">
+                            <a:latin typeface="Cambria Math" panose="02040503050406030204" pitchFamily="18" charset="0"/>
+                            <a:ea typeface="D2Coding" panose="020B0609020101020101" pitchFamily="49" charset="-127"/>
+                          </a:rPr>
+                          <m:t>𝒌</m:t>
+                        </m:r>
+                      </m:sub>
+                    </m:sSub>
+                  </m:oMath>
+                </a14:m>
+                <a:r>
+                  <a:rPr lang="ko-KR" altLang="en-US" dirty="0">
+                    <a:latin typeface="D2Coding" panose="020B0609020101020101" pitchFamily="49" charset="-127"/>
+                    <a:ea typeface="D2Coding" panose="020B0609020101020101" pitchFamily="49" charset="-127"/>
+                  </a:rPr>
+                  <a:t>(</a:t>
+                </a:r>
+                <a:r>
+                  <a:rPr lang="ko-KR" altLang="en-US" dirty="0" err="1">
+                    <a:latin typeface="D2Coding" panose="020B0609020101020101" pitchFamily="49" charset="-127"/>
+                    <a:ea typeface="D2Coding" panose="020B0609020101020101" pitchFamily="49" charset="-127"/>
+                  </a:rPr>
+                  <a:t>Query와</a:t>
+                </a:r>
+                <a:r>
+                  <a:rPr lang="ko-KR" altLang="en-US" dirty="0">
+                    <a:latin typeface="D2Coding" panose="020B0609020101020101" pitchFamily="49" charset="-127"/>
+                    <a:ea typeface="D2Coding" panose="020B0609020101020101" pitchFamily="49" charset="-127"/>
+                  </a:rPr>
+                  <a:t> </a:t>
+                </a:r>
+                <a:r>
+                  <a:rPr lang="ko-KR" altLang="en-US" dirty="0" err="1">
+                    <a:latin typeface="D2Coding" panose="020B0609020101020101" pitchFamily="49" charset="-127"/>
+                    <a:ea typeface="D2Coding" panose="020B0609020101020101" pitchFamily="49" charset="-127"/>
+                  </a:rPr>
+                  <a:t>Key의</a:t>
+                </a:r>
+                <a:r>
+                  <a:rPr lang="ko-KR" altLang="en-US" dirty="0">
+                    <a:latin typeface="D2Coding" panose="020B0609020101020101" pitchFamily="49" charset="-127"/>
+                    <a:ea typeface="D2Coding" panose="020B0609020101020101" pitchFamily="49" charset="-127"/>
+                  </a:rPr>
+                  <a:t> 차원), </a:t>
+                </a:r>
+                <a14:m>
+                  <m:oMath xmlns:m="http://schemas.openxmlformats.org/officeDocument/2006/math">
+                    <m:sSub>
+                      <m:sSubPr>
+                        <m:ctrlPr>
+                          <a:rPr lang="en-US" altLang="ko-KR" i="1">
+                            <a:latin typeface="Cambria Math" panose="02040503050406030204" pitchFamily="18" charset="0"/>
+                            <a:ea typeface="D2Coding" panose="020B0609020101020101" pitchFamily="49" charset="-127"/>
+                          </a:rPr>
+                        </m:ctrlPr>
+                      </m:sSubPr>
+                      <m:e>
+                        <m:r>
+                          <a:rPr lang="en-US" altLang="ko-KR" i="1">
+                            <a:latin typeface="Cambria Math" panose="02040503050406030204" pitchFamily="18" charset="0"/>
+                            <a:ea typeface="D2Coding" panose="020B0609020101020101" pitchFamily="49" charset="-127"/>
+                          </a:rPr>
+                          <m:t>𝑑</m:t>
+                        </m:r>
+                      </m:e>
+                      <m:sub>
+                        <m:r>
+                          <a:rPr lang="en-US" altLang="ko-KR" b="0" i="1" smtClean="0">
+                            <a:latin typeface="Cambria Math" panose="02040503050406030204" pitchFamily="18" charset="0"/>
+                            <a:ea typeface="D2Coding" panose="020B0609020101020101" pitchFamily="49" charset="-127"/>
+                          </a:rPr>
+                          <m:t>𝑣</m:t>
+                        </m:r>
+                      </m:sub>
+                    </m:sSub>
+                  </m:oMath>
+                </a14:m>
+                <a:r>
+                  <a:rPr lang="ko-KR" altLang="en-US" dirty="0">
+                    <a:latin typeface="D2Coding" panose="020B0609020101020101" pitchFamily="49" charset="-127"/>
+                    <a:ea typeface="D2Coding" panose="020B0609020101020101" pitchFamily="49" charset="-127"/>
+                  </a:rPr>
+                  <a:t>(</a:t>
+                </a:r>
+                <a:r>
+                  <a:rPr lang="ko-KR" altLang="en-US" dirty="0" err="1">
+                    <a:latin typeface="D2Coding" panose="020B0609020101020101" pitchFamily="49" charset="-127"/>
+                    <a:ea typeface="D2Coding" panose="020B0609020101020101" pitchFamily="49" charset="-127"/>
+                  </a:rPr>
+                  <a:t>Value의</a:t>
+                </a:r>
+                <a:r>
+                  <a:rPr lang="ko-KR" altLang="en-US" dirty="0">
+                    <a:latin typeface="D2Coding" panose="020B0609020101020101" pitchFamily="49" charset="-127"/>
+                    <a:ea typeface="D2Coding" panose="020B0609020101020101" pitchFamily="49" charset="-127"/>
+                  </a:rPr>
+                  <a:t> 차원)라고</a:t>
+                </a:r>
+                <a:r>
+                  <a:rPr lang="en-US" altLang="ko-KR" dirty="0">
+                    <a:latin typeface="D2Coding" panose="020B0609020101020101" pitchFamily="49" charset="-127"/>
+                    <a:ea typeface="D2Coding" panose="020B0609020101020101" pitchFamily="49" charset="-127"/>
+                  </a:rPr>
+                  <a:t> </a:t>
+                </a:r>
+                <a:r>
+                  <a:rPr lang="ko-KR" altLang="en-US" dirty="0">
+                    <a:latin typeface="D2Coding" panose="020B0609020101020101" pitchFamily="49" charset="-127"/>
+                    <a:ea typeface="D2Coding" panose="020B0609020101020101" pitchFamily="49" charset="-127"/>
+                  </a:rPr>
+                  <a:t>하면 각 가중치 행렬의 </a:t>
+                </a:r>
+                <a:r>
+                  <a:rPr lang="ko-KR" altLang="en-US" dirty="0" err="1">
+                    <a:latin typeface="D2Coding" panose="020B0609020101020101" pitchFamily="49" charset="-127"/>
+                    <a:ea typeface="D2Coding" panose="020B0609020101020101" pitchFamily="49" charset="-127"/>
+                  </a:rPr>
+                  <a:t>Shape은</a:t>
+                </a:r>
+                <a:r>
+                  <a:rPr lang="ko-KR" altLang="en-US" dirty="0">
+                    <a:latin typeface="D2Coding" panose="020B0609020101020101" pitchFamily="49" charset="-127"/>
+                    <a:ea typeface="D2Coding" panose="020B0609020101020101" pitchFamily="49" charset="-127"/>
+                  </a:rPr>
+                  <a:t> 다음과 같음</a:t>
+                </a:r>
+              </a:p>
+            </p:txBody>
+          </p:sp>
+        </mc:Choice>
+        <mc:Fallback>
+          <p:sp>
+            <p:nvSpPr>
+              <p:cNvPr id="9" name="TextBox 8">
+                <a:extLst>
+                  <a:ext uri="{FF2B5EF4-FFF2-40B4-BE49-F238E27FC236}">
+                    <a16:creationId xmlns:a16="http://schemas.microsoft.com/office/drawing/2014/main" id="{57E46BD3-B69B-B7AC-E23D-0DC0C491EF87}"/>
+                  </a:ext>
+                </a:extLst>
+              </p:cNvPr>
+              <p:cNvSpPr txBox="1">
+                <a:spLocks noRot="1" noChangeAspect="1" noMove="1" noResize="1" noEditPoints="1" noAdjustHandles="1" noChangeArrowheads="1" noChangeShapeType="1" noTextEdit="1"/>
+              </p:cNvSpPr>
+              <p:nvPr/>
+            </p:nvSpPr>
+            <p:spPr>
+              <a:xfrm>
+                <a:off x="542924" y="1286727"/>
+                <a:ext cx="11134725" cy="879984"/>
+              </a:xfrm>
+              <a:prstGeom prst="rect">
+                <a:avLst/>
+              </a:prstGeom>
+              <a:blipFill>
+                <a:blip r:embed="rId3"/>
+                <a:stretch>
+                  <a:fillRect l="-438" b="-10417"/>
+                </a:stretch>
+              </a:blipFill>
+            </p:spPr>
+            <p:txBody>
+              <a:bodyPr/>
+              <a:lstStyle/>
+              <a:p>
+                <a:r>
+                  <a:rPr lang="ko-KR" altLang="en-US">
+                    <a:noFill/>
+                  </a:rPr>
+                  <a:t> </a:t>
+                </a:r>
+              </a:p>
+            </p:txBody>
+          </p:sp>
+        </mc:Fallback>
+      </mc:AlternateContent>
+      <p:sp>
+        <p:nvSpPr>
+          <p:cNvPr id="10" name="TextBox 9">
+            <a:extLst>
+              <a:ext uri="{FF2B5EF4-FFF2-40B4-BE49-F238E27FC236}">
+                <a16:creationId xmlns:a16="http://schemas.microsoft.com/office/drawing/2014/main" id="{2D269311-680F-7BF2-13EB-6EA2F59016CE}"/>
+              </a:ext>
+            </a:extLst>
+          </p:cNvPr>
+          <p:cNvSpPr txBox="1"/>
+          <p:nvPr/>
+        </p:nvSpPr>
+        <p:spPr>
+          <a:xfrm>
+            <a:off x="2028825" y="5190295"/>
+            <a:ext cx="2028825" cy="1162498"/>
+          </a:xfrm>
+          <a:prstGeom prst="rect">
+            <a:avLst/>
+          </a:prstGeom>
+          <a:noFill/>
+        </p:spPr>
+        <p:txBody>
+          <a:bodyPr wrap="square">
+            <a:spAutoFit/>
+          </a:bodyPr>
+          <a:lstStyle/>
+          <a:p>
+            <a:pPr algn="ctr">
+              <a:lnSpc>
+                <a:spcPct val="150000"/>
+              </a:lnSpc>
+            </a:pPr>
+            <a:r>
+              <a:rPr lang="en-US" altLang="ko-KR" sz="1600" dirty="0">
+                <a:latin typeface="D2Coding" panose="020B0609020101020101" pitchFamily="49" charset="-127"/>
+                <a:ea typeface="D2Coding" panose="020B0609020101020101" pitchFamily="49" charset="-127"/>
+              </a:rPr>
+              <a:t>Deep</a:t>
+            </a:r>
+            <a:r>
+              <a:rPr lang="ko-KR" altLang="en-US" sz="1600" dirty="0">
+                <a:latin typeface="D2Coding" panose="020B0609020101020101" pitchFamily="49" charset="-127"/>
+                <a:ea typeface="D2Coding" panose="020B0609020101020101" pitchFamily="49" charset="-127"/>
+              </a:rPr>
+              <a:t> </a:t>
+            </a:r>
+            <a:r>
+              <a:rPr lang="en-US" altLang="ko-KR" sz="1600" dirty="0">
+                <a:latin typeface="D2Coding" panose="020B0609020101020101" pitchFamily="49" charset="-127"/>
+                <a:ea typeface="D2Coding" panose="020B0609020101020101" pitchFamily="49" charset="-127"/>
+              </a:rPr>
+              <a:t>Learning</a:t>
+            </a:r>
+            <a:r>
+              <a:rPr lang="ko-KR" altLang="en-US" sz="1600" dirty="0">
+                <a:latin typeface="D2Coding" panose="020B0609020101020101" pitchFamily="49" charset="-127"/>
+                <a:ea typeface="D2Coding" panose="020B0609020101020101" pitchFamily="49" charset="-127"/>
+              </a:rPr>
+              <a:t> 이 학습하여 최적의 </a:t>
+            </a:r>
+            <a:r>
+              <a:rPr lang="en-US" altLang="ko-KR" sz="1600" dirty="0">
+                <a:latin typeface="D2Coding" panose="020B0609020101020101" pitchFamily="49" charset="-127"/>
+                <a:ea typeface="D2Coding" panose="020B0609020101020101" pitchFamily="49" charset="-127"/>
+              </a:rPr>
+              <a:t>parameters</a:t>
+            </a:r>
+            <a:r>
+              <a:rPr lang="ko-KR" altLang="en-US" sz="1600" dirty="0">
+                <a:latin typeface="D2Coding" panose="020B0609020101020101" pitchFamily="49" charset="-127"/>
+                <a:ea typeface="D2Coding" panose="020B0609020101020101" pitchFamily="49" charset="-127"/>
+              </a:rPr>
+              <a:t>를</a:t>
+            </a:r>
+            <a:r>
+              <a:rPr lang="en-US" altLang="ko-KR" sz="1600" dirty="0">
+                <a:latin typeface="D2Coding" panose="020B0609020101020101" pitchFamily="49" charset="-127"/>
+                <a:ea typeface="D2Coding" panose="020B0609020101020101" pitchFamily="49" charset="-127"/>
+              </a:rPr>
+              <a:t> </a:t>
+            </a:r>
+            <a:r>
+              <a:rPr lang="ko-KR" altLang="en-US" sz="1600" dirty="0">
+                <a:latin typeface="D2Coding" panose="020B0609020101020101" pitchFamily="49" charset="-127"/>
+                <a:ea typeface="D2Coding" panose="020B0609020101020101" pitchFamily="49" charset="-127"/>
+              </a:rPr>
+              <a:t>찾기</a:t>
+            </a:r>
+            <a:r>
+              <a:rPr lang="en-US" altLang="ko-KR" sz="1600" dirty="0">
+                <a:latin typeface="D2Coding" panose="020B0609020101020101" pitchFamily="49" charset="-127"/>
+                <a:ea typeface="D2Coding" panose="020B0609020101020101" pitchFamily="49" charset="-127"/>
+              </a:rPr>
+              <a:t>!</a:t>
+            </a:r>
+            <a:endParaRPr lang="ko-KR" altLang="en-US" sz="1600" dirty="0">
+              <a:latin typeface="D2Coding" panose="020B0609020101020101" pitchFamily="49" charset="-127"/>
+              <a:ea typeface="D2Coding" panose="020B0609020101020101" pitchFamily="49" charset="-127"/>
+            </a:endParaRPr>
+          </a:p>
+        </p:txBody>
+      </p:sp>
+      <p:sp>
+        <p:nvSpPr>
+          <p:cNvPr id="11" name="직사각형 10">
+            <a:extLst>
+              <a:ext uri="{FF2B5EF4-FFF2-40B4-BE49-F238E27FC236}">
+                <a16:creationId xmlns:a16="http://schemas.microsoft.com/office/drawing/2014/main" id="{B5C6986B-91DE-E5D6-2EDB-1EB0ED3A9810}"/>
+              </a:ext>
+            </a:extLst>
+          </p:cNvPr>
+          <p:cNvSpPr/>
+          <p:nvPr/>
+        </p:nvSpPr>
+        <p:spPr>
+          <a:xfrm>
+            <a:off x="1933574" y="3019425"/>
+            <a:ext cx="2124076" cy="2038350"/>
+          </a:xfrm>
+          <a:prstGeom prst="rect">
+            <a:avLst/>
+          </a:prstGeom>
+          <a:noFill/>
+          <a:ln w="28575"/>
+        </p:spPr>
+        <p:style>
+          <a:lnRef idx="2">
+            <a:schemeClr val="accent1">
+              <a:shade val="15000"/>
+            </a:schemeClr>
+          </a:lnRef>
+          <a:fillRef idx="1">
+            <a:schemeClr val="accent1"/>
+          </a:fillRef>
+          <a:effectRef idx="0">
+            <a:schemeClr val="accent1"/>
+          </a:effectRef>
+          <a:fontRef idx="minor">
+            <a:schemeClr val="lt1"/>
+          </a:fontRef>
+        </p:style>
+        <p:txBody>
+          <a:bodyPr rtlCol="0" anchor="ctr"/>
+          <a:lstStyle/>
+          <a:p>
+            <a:pPr algn="ctr"/>
+            <a:endParaRPr lang="ko-KR" altLang="en-US"/>
+          </a:p>
+        </p:txBody>
+      </p:sp>
+    </p:spTree>
+    <p:extLst>
+      <p:ext uri="{BB962C8B-B14F-4D97-AF65-F5344CB8AC3E}">
+        <p14:creationId xmlns:p14="http://schemas.microsoft.com/office/powerpoint/2010/main" val="4241956887"/>
+      </p:ext>
+    </p:extLst>
+  </p:cSld>
+  <p:clrMapOvr>
+    <a:masterClrMapping/>
+  </p:clrMapOvr>
+  <p:timing>
+    <p:tnLst>
+      <p:par>
+        <p:cTn id="1" dur="indefinite" restart="never" nodeType="tmRoot">
+          <p:childTnLst>
+            <p:seq concurrent="1" nextAc="seek">
+              <p:cTn id="2" dur="indefinite" nodeType="mainSeq">
+                <p:childTnLst>
+                  <p:par>
+                    <p:cTn id="3" fill="hold">
+                      <p:stCondLst>
+                        <p:cond delay="indefinite"/>
+                      </p:stCondLst>
+                      <p:childTnLst>
+                        <p:par>
+                          <p:cTn id="4" fill="hold">
+                            <p:stCondLst>
+                              <p:cond delay="0"/>
+                            </p:stCondLst>
+                            <p:childTnLst>
+                              <p:par>
+                                <p:cTn id="5" presetID="1" presetClass="entr" presetSubtype="0" fill="hold" grpId="0" nodeType="clickEffect">
+                                  <p:stCondLst>
+                                    <p:cond delay="0"/>
+                                  </p:stCondLst>
+                                  <p:childTnLst>
+                                    <p:set>
+                                      <p:cBhvr>
+                                        <p:cTn id="6" dur="1" fill="hold">
+                                          <p:stCondLst>
+                                            <p:cond delay="0"/>
+                                          </p:stCondLst>
+                                        </p:cTn>
+                                        <p:tgtEl>
+                                          <p:spTgt spid="11"/>
+                                        </p:tgtEl>
+                                        <p:attrNameLst>
+                                          <p:attrName>style.visibility</p:attrName>
+                                        </p:attrNameLst>
+                                      </p:cBhvr>
+                                      <p:to>
+                                        <p:strVal val="visible"/>
+                                      </p:to>
+                                    </p:set>
+                                  </p:childTnLst>
+                                </p:cTn>
+                              </p:par>
+                              <p:par>
+                                <p:cTn id="7" presetID="1" presetClass="entr" presetSubtype="0" fill="hold" grpId="0" nodeType="withEffect">
+                                  <p:stCondLst>
+                                    <p:cond delay="0"/>
+                                  </p:stCondLst>
+                                  <p:childTnLst>
+                                    <p:set>
+                                      <p:cBhvr>
+                                        <p:cTn id="8" dur="1" fill="hold">
+                                          <p:stCondLst>
+                                            <p:cond delay="0"/>
+                                          </p:stCondLst>
+                                        </p:cTn>
+                                        <p:tgtEl>
+                                          <p:spTgt spid="10"/>
+                                        </p:tgtEl>
+                                        <p:attrNameLst>
+                                          <p:attrName>style.visibility</p:attrName>
+                                        </p:attrNameLst>
+                                      </p:cBhvr>
+                                      <p:to>
+                                        <p:strVal val="visible"/>
+                                      </p:to>
+                                    </p:set>
+                                  </p:childTnLst>
+                                </p:cTn>
+                              </p:par>
+                            </p:childTnLst>
+                          </p:cTn>
+                        </p:par>
+                      </p:childTnLst>
+                    </p:cTn>
+                  </p:par>
+                </p:childTnLst>
+              </p:cTn>
+              <p:prevCondLst>
+                <p:cond evt="onPrev" delay="0">
+                  <p:tgtEl>
+                    <p:sldTgt/>
+                  </p:tgtEl>
+                </p:cond>
+              </p:prevCondLst>
+              <p:nextCondLst>
+                <p:cond evt="onNext" delay="0">
+                  <p:tgtEl>
+                    <p:sldTgt/>
+                  </p:tgtEl>
+                </p:cond>
+              </p:nextCondLst>
+            </p:seq>
+          </p:childTnLst>
+        </p:cTn>
+      </p:par>
+    </p:tnLst>
+    <p:bldLst>
+      <p:bldP spid="10" grpId="0"/>
+      <p:bldP spid="11" grpId="0" animBg="1"/>
+    </p:bldLst>
+  </p:timing>
+</p:sld>
+</file>
+
+<file path=ppt/slides/slide28.xml><?xml version="1.0" encoding="utf-8"?>
+<p:sld xmlns:a="http://schemas.openxmlformats.org/drawingml/2006/main" xmlns:r="http://schemas.openxmlformats.org/officeDocument/2006/relationships" xmlns:p="http://schemas.openxmlformats.org/presentationml/2006/main">
+  <p:cSld>
+    <p:spTree>
+      <p:nvGrpSpPr>
+        <p:cNvPr id="1" name="">
+          <a:extLst>
+            <a:ext uri="{FF2B5EF4-FFF2-40B4-BE49-F238E27FC236}">
+              <a16:creationId xmlns:a16="http://schemas.microsoft.com/office/drawing/2014/main" id="{512D0BDF-C167-0276-F333-6493FB0C3823}"/>
+            </a:ext>
+          </a:extLst>
+        </p:cNvPr>
+        <p:cNvGrpSpPr/>
+        <p:nvPr/>
+      </p:nvGrpSpPr>
+      <p:grpSpPr>
+        <a:xfrm>
+          <a:off x="0" y="0"/>
+          <a:ext cx="0" cy="0"/>
+          <a:chOff x="0" y="0"/>
+          <a:chExt cx="0" cy="0"/>
+        </a:xfrm>
+      </p:grpSpPr>
+      <p:sp>
+        <p:nvSpPr>
+          <p:cNvPr id="4" name="슬라이드 번호 개체 틀 3">
+            <a:extLst>
+              <a:ext uri="{FF2B5EF4-FFF2-40B4-BE49-F238E27FC236}">
+                <a16:creationId xmlns:a16="http://schemas.microsoft.com/office/drawing/2014/main" id="{E1316891-4BD4-1077-8F3C-92C62683B0FF}"/>
+              </a:ext>
+            </a:extLst>
+          </p:cNvPr>
+          <p:cNvSpPr>
+            <a:spLocks noGrp="1"/>
+          </p:cNvSpPr>
+          <p:nvPr>
+            <p:ph type="sldNum" sz="quarter" idx="12"/>
+          </p:nvPr>
+        </p:nvSpPr>
+        <p:spPr>
+          <a:xfrm>
+            <a:off x="10514011" y="6036261"/>
+            <a:ext cx="753545" cy="365125"/>
+          </a:xfrm>
+        </p:spPr>
+        <p:txBody>
+          <a:bodyPr/>
+          <a:lstStyle/>
+          <a:p>
+            <a:fld id="{D57F1E4F-1CFF-5643-939E-217C01CDF565}" type="slidenum">
+              <a:rPr lang="en-US" smtClean="0"/>
+              <a:pPr/>
+              <a:t>28</a:t>
+            </a:fld>
+            <a:endParaRPr lang="en-US" dirty="0"/>
+          </a:p>
+        </p:txBody>
+      </p:sp>
+      <p:sp>
+        <p:nvSpPr>
+          <p:cNvPr id="3" name="제목 1">
+            <a:extLst>
+              <a:ext uri="{FF2B5EF4-FFF2-40B4-BE49-F238E27FC236}">
+                <a16:creationId xmlns:a16="http://schemas.microsoft.com/office/drawing/2014/main" id="{76B9E82E-2365-75E6-DB9F-2A53B94107C7}"/>
+              </a:ext>
+            </a:extLst>
+          </p:cNvPr>
+          <p:cNvSpPr txBox="1">
+            <a:spLocks/>
+          </p:cNvSpPr>
+          <p:nvPr/>
+        </p:nvSpPr>
+        <p:spPr>
+          <a:xfrm>
+            <a:off x="475645" y="481983"/>
+            <a:ext cx="10353762" cy="766439"/>
+          </a:xfrm>
+          <a:prstGeom prst="rect">
+            <a:avLst/>
+          </a:prstGeom>
+        </p:spPr>
+        <p:txBody>
+          <a:bodyPr vert="horz" lIns="91440" tIns="45720" rIns="91440" bIns="45720" rtlCol="0" anchor="ctr">
+            <a:normAutofit/>
+          </a:bodyPr>
+          <a:lstStyle>
+            <a:lvl1pPr algn="ctr" defTabSz="914400" rtl="0" eaLnBrk="1" latinLnBrk="1" hangingPunct="1">
+              <a:lnSpc>
+                <a:spcPct val="90000"/>
+              </a:lnSpc>
+              <a:spcBef>
+                <a:spcPct val="0"/>
+              </a:spcBef>
+              <a:buNone/>
+              <a:defRPr sz="3200" kern="1200" cap="all" baseline="0">
+                <a:solidFill>
+                  <a:schemeClr val="tx1"/>
+                </a:solidFill>
+                <a:effectLst/>
+                <a:latin typeface="Batang" panose="02030600000101010101" pitchFamily="18" charset="-127"/>
+                <a:ea typeface="Batang" panose="02030600000101010101" pitchFamily="18" charset="-127"/>
+                <a:cs typeface="+mj-cs"/>
+              </a:defRPr>
+            </a:lvl1pPr>
+          </a:lstStyle>
+          <a:p>
+            <a:pPr algn="l"/>
+            <a:r>
+              <a:rPr lang="en-US" altLang="ko-KR" sz="2800" b="1" cap="none" dirty="0">
+                <a:latin typeface="Lora" pitchFamily="2" charset="0"/>
+              </a:rPr>
+              <a:t>The Transformer architecture</a:t>
+            </a:r>
+          </a:p>
+        </p:txBody>
+      </p:sp>
+      <mc:AlternateContent xmlns:mc="http://schemas.openxmlformats.org/markup-compatibility/2006">
+        <mc:Choice xmlns:a14="http://schemas.microsoft.com/office/drawing/2010/main" Requires="a14">
+          <p:sp>
+            <p:nvSpPr>
+              <p:cNvPr id="5" name="TextBox 4">
+                <a:extLst>
+                  <a:ext uri="{FF2B5EF4-FFF2-40B4-BE49-F238E27FC236}">
+                    <a16:creationId xmlns:a16="http://schemas.microsoft.com/office/drawing/2014/main" id="{7D777C00-5634-18D8-500C-B1B4670E4BA8}"/>
+                  </a:ext>
+                </a:extLst>
+              </p:cNvPr>
+              <p:cNvSpPr txBox="1"/>
+              <p:nvPr/>
+            </p:nvSpPr>
+            <p:spPr>
+              <a:xfrm>
+                <a:off x="625311" y="1196231"/>
+                <a:ext cx="10810875" cy="2717732"/>
+              </a:xfrm>
+              <a:prstGeom prst="rect">
+                <a:avLst/>
+              </a:prstGeom>
+              <a:noFill/>
+            </p:spPr>
+            <p:txBody>
+              <a:bodyPr wrap="square">
+                <a:spAutoFit/>
+              </a:bodyPr>
+              <a:lstStyle/>
+              <a:p>
+                <a:pPr>
+                  <a:lnSpc>
+                    <a:spcPct val="150000"/>
+                  </a:lnSpc>
+                  <a:buFont typeface="+mj-lt"/>
+                  <a:buAutoNum type="arabicPeriod"/>
+                </a:pPr>
+                <a:r>
+                  <a:rPr lang="ko-KR" altLang="en-US" sz="1600" b="1" dirty="0">
+                    <a:latin typeface="D2Coding" panose="020B0609020101020101" pitchFamily="49" charset="-127"/>
+                    <a:ea typeface="D2Coding" panose="020B0609020101020101" pitchFamily="49" charset="-127"/>
+                  </a:rPr>
+                  <a:t>스케일링</a:t>
+                </a:r>
+                <a:r>
+                  <a:rPr lang="en-US" altLang="ko-KR" sz="1600" b="1" dirty="0">
+                    <a:latin typeface="D2Coding" panose="020B0609020101020101" pitchFamily="49" charset="-127"/>
+                    <a:ea typeface="D2Coding" panose="020B0609020101020101" pitchFamily="49" charset="-127"/>
+                  </a:rPr>
+                  <a:t>(</a:t>
+                </a:r>
+                <a14:m>
+                  <m:oMath xmlns:m="http://schemas.openxmlformats.org/officeDocument/2006/math">
+                    <m:rad>
+                      <m:radPr>
+                        <m:degHide m:val="on"/>
+                        <m:ctrlPr>
+                          <a:rPr lang="en-US" altLang="ko-KR" sz="1600" b="1" dirty="0" smtClean="0">
+                            <a:latin typeface="Cambria Math" panose="02040503050406030204" pitchFamily="18" charset="0"/>
+                          </a:rPr>
+                        </m:ctrlPr>
+                      </m:radPr>
+                      <m:deg/>
+                      <m:e>
+                        <m:sSub>
+                          <m:sSubPr>
+                            <m:ctrlPr>
+                              <a:rPr lang="en-US" altLang="ko-KR" sz="1600" b="1" dirty="0">
+                                <a:latin typeface="Cambria Math" panose="02040503050406030204" pitchFamily="18" charset="0"/>
+                              </a:rPr>
+                            </m:ctrlPr>
+                          </m:sSubPr>
+                          <m:e>
+                            <m:r>
+                              <a:rPr lang="en-US" altLang="ko-KR" sz="1600" b="1" i="1" dirty="0">
+                                <a:latin typeface="Cambria Math" panose="02040503050406030204" pitchFamily="18" charset="0"/>
+                              </a:rPr>
+                              <m:t>𝑑</m:t>
+                            </m:r>
+                          </m:e>
+                          <m:sub>
+                            <m:r>
+                              <a:rPr lang="en-US" altLang="ko-KR" sz="1600" b="1" i="1" dirty="0">
+                                <a:latin typeface="Cambria Math" panose="02040503050406030204" pitchFamily="18" charset="0"/>
+                              </a:rPr>
+                              <m:t>𝑘</m:t>
+                            </m:r>
+                          </m:sub>
+                        </m:sSub>
+                      </m:e>
+                    </m:rad>
+                  </m:oMath>
+                </a14:m>
+                <a:r>
+                  <a:rPr lang="ko-KR" altLang="en-US" sz="1600" b="1" dirty="0">
+                    <a:latin typeface="D2Coding" panose="020B0609020101020101" pitchFamily="49" charset="-127"/>
+                    <a:ea typeface="D2Coding" panose="020B0609020101020101" pitchFamily="49" charset="-127"/>
+                  </a:rPr>
+                  <a:t>로 나누기</a:t>
+                </a:r>
+                <a:r>
+                  <a:rPr lang="en-US" altLang="ko-KR" sz="1600" b="1" dirty="0">
+                    <a:latin typeface="D2Coding" panose="020B0609020101020101" pitchFamily="49" charset="-127"/>
+                    <a:ea typeface="D2Coding" panose="020B0609020101020101" pitchFamily="49" charset="-127"/>
+                  </a:rPr>
+                  <a:t>):</a:t>
+                </a:r>
+                <a:r>
+                  <a:rPr lang="ko-KR" altLang="en-US" sz="1600" dirty="0">
+                    <a:latin typeface="D2Coding" panose="020B0609020101020101" pitchFamily="49" charset="-127"/>
+                    <a:ea typeface="D2Coding" panose="020B0609020101020101" pitchFamily="49" charset="-127"/>
+                  </a:rPr>
+                  <a:t> </a:t>
+                </a:r>
+                <a:r>
+                  <a:rPr lang="en-US" altLang="ko-KR" sz="1600" b="1" dirty="0">
+                    <a:latin typeface="D2Coding" panose="020B0609020101020101" pitchFamily="49" charset="-127"/>
+                    <a:ea typeface="D2Coding" panose="020B0609020101020101" pitchFamily="49" charset="-127"/>
+                  </a:rPr>
+                  <a:t>Scaled Dot-Product Attention</a:t>
+                </a:r>
+              </a:p>
+              <a:p>
+                <a:pPr lvl="1">
+                  <a:lnSpc>
+                    <a:spcPct val="150000"/>
+                  </a:lnSpc>
+                </a:pPr>
+                <a:r>
+                  <a:rPr lang="ko-KR" altLang="en-US" sz="1600" dirty="0" err="1">
+                    <a:latin typeface="D2Coding" panose="020B0609020101020101" pitchFamily="49" charset="-127"/>
+                    <a:ea typeface="D2Coding" panose="020B0609020101020101" pitchFamily="49" charset="-127"/>
+                  </a:rPr>
+                  <a:t>어텐션</a:t>
+                </a:r>
+                <a:r>
+                  <a:rPr lang="ko-KR" altLang="en-US" sz="1600" dirty="0">
+                    <a:latin typeface="D2Coding" panose="020B0609020101020101" pitchFamily="49" charset="-127"/>
+                    <a:ea typeface="D2Coding" panose="020B0609020101020101" pitchFamily="49" charset="-127"/>
+                  </a:rPr>
+                  <a:t> 점수</a:t>
+                </a:r>
+                <a:r>
+                  <a:rPr lang="en-US" altLang="ko-KR" sz="1600" dirty="0">
+                    <a:latin typeface="D2Coding" panose="020B0609020101020101" pitchFamily="49" charset="-127"/>
+                    <a:ea typeface="D2Coding" panose="020B0609020101020101" pitchFamily="49" charset="-127"/>
+                  </a:rPr>
+                  <a:t>(Query</a:t>
+                </a:r>
+                <a:r>
+                  <a:rPr lang="ko-KR" altLang="en-US" sz="1600" dirty="0">
+                    <a:latin typeface="D2Coding" panose="020B0609020101020101" pitchFamily="49" charset="-127"/>
+                    <a:ea typeface="D2Coding" panose="020B0609020101020101" pitchFamily="49" charset="-127"/>
+                  </a:rPr>
+                  <a:t>와 </a:t>
+                </a:r>
+                <a:r>
+                  <a:rPr lang="en-US" altLang="ko-KR" sz="1600" dirty="0">
+                    <a:latin typeface="D2Coding" panose="020B0609020101020101" pitchFamily="49" charset="-127"/>
+                    <a:ea typeface="D2Coding" panose="020B0609020101020101" pitchFamily="49" charset="-127"/>
+                  </a:rPr>
+                  <a:t>Key</a:t>
+                </a:r>
+                <a:r>
+                  <a:rPr lang="ko-KR" altLang="en-US" sz="1600" dirty="0">
+                    <a:latin typeface="D2Coding" panose="020B0609020101020101" pitchFamily="49" charset="-127"/>
+                    <a:ea typeface="D2Coding" panose="020B0609020101020101" pitchFamily="49" charset="-127"/>
+                  </a:rPr>
+                  <a:t>의 내적</a:t>
+                </a:r>
+                <a:r>
+                  <a:rPr lang="en-US" altLang="ko-KR" sz="1600" dirty="0">
+                    <a:latin typeface="D2Coding" panose="020B0609020101020101" pitchFamily="49" charset="-127"/>
+                    <a:ea typeface="D2Coding" panose="020B0609020101020101" pitchFamily="49" charset="-127"/>
+                  </a:rPr>
+                  <a:t>) </a:t>
+                </a:r>
+                <a:r>
+                  <a:rPr lang="ko-KR" altLang="en-US" sz="1600" dirty="0">
+                    <a:latin typeface="D2Coding" panose="020B0609020101020101" pitchFamily="49" charset="-127"/>
+                    <a:ea typeface="D2Coding" panose="020B0609020101020101" pitchFamily="49" charset="-127"/>
+                  </a:rPr>
+                  <a:t>값이 너무 커지면 </a:t>
+                </a:r>
+                <a:r>
+                  <a:rPr lang="ko-KR" altLang="en-US" sz="1600" dirty="0" err="1">
+                    <a:latin typeface="D2Coding" panose="020B0609020101020101" pitchFamily="49" charset="-127"/>
+                    <a:ea typeface="D2Coding" panose="020B0609020101020101" pitchFamily="49" charset="-127"/>
+                  </a:rPr>
+                  <a:t>소프트맥스</a:t>
+                </a:r>
+                <a:r>
+                  <a:rPr lang="ko-KR" altLang="en-US" sz="1600" dirty="0">
+                    <a:latin typeface="D2Coding" panose="020B0609020101020101" pitchFamily="49" charset="-127"/>
+                    <a:ea typeface="D2Coding" panose="020B0609020101020101" pitchFamily="49" charset="-127"/>
+                  </a:rPr>
+                  <a:t> 함수 특성상 </a:t>
+                </a:r>
+                <a:r>
+                  <a:rPr lang="ko-KR" altLang="en-US" sz="1600" dirty="0" err="1">
+                    <a:latin typeface="D2Coding" panose="020B0609020101020101" pitchFamily="49" charset="-127"/>
+                    <a:ea typeface="D2Coding" panose="020B0609020101020101" pitchFamily="49" charset="-127"/>
+                  </a:rPr>
+                  <a:t>미분값</a:t>
+                </a:r>
+                <a:r>
+                  <a:rPr lang="en-US" altLang="ko-KR" sz="1600" dirty="0">
+                    <a:latin typeface="D2Coding" panose="020B0609020101020101" pitchFamily="49" charset="-127"/>
+                    <a:ea typeface="D2Coding" panose="020B0609020101020101" pitchFamily="49" charset="-127"/>
+                  </a:rPr>
+                  <a:t>(gradient)</a:t>
+                </a:r>
+                <a:r>
+                  <a:rPr lang="ko-KR" altLang="en-US" sz="1600" dirty="0">
+                    <a:latin typeface="D2Coding" panose="020B0609020101020101" pitchFamily="49" charset="-127"/>
+                    <a:ea typeface="D2Coding" panose="020B0609020101020101" pitchFamily="49" charset="-127"/>
+                  </a:rPr>
+                  <a:t>이 </a:t>
+                </a:r>
+                <a:r>
+                  <a:rPr lang="en-US" altLang="ko-KR" sz="1600" dirty="0">
+                    <a:latin typeface="D2Coding" panose="020B0609020101020101" pitchFamily="49" charset="-127"/>
+                    <a:ea typeface="D2Coding" panose="020B0609020101020101" pitchFamily="49" charset="-127"/>
+                  </a:rPr>
+                  <a:t>0</a:t>
+                </a:r>
+                <a:r>
+                  <a:rPr lang="ko-KR" altLang="en-US" sz="1600" dirty="0">
+                    <a:latin typeface="D2Coding" panose="020B0609020101020101" pitchFamily="49" charset="-127"/>
+                    <a:ea typeface="D2Coding" panose="020B0609020101020101" pitchFamily="49" charset="-127"/>
+                  </a:rPr>
+                  <a:t>에 가까워져 학습이 안 되는 문제를 방지하기 위해 차원 수의 제곱근으로 점수를 낮춰주는 것</a:t>
+                </a:r>
+                <a:endParaRPr lang="en-US" altLang="ko-KR" sz="1600" dirty="0">
+                  <a:latin typeface="D2Coding" panose="020B0609020101020101" pitchFamily="49" charset="-127"/>
+                  <a:ea typeface="D2Coding" panose="020B0609020101020101" pitchFamily="49" charset="-127"/>
+                </a:endParaRPr>
+              </a:p>
+              <a:p>
+                <a:pPr lvl="1">
+                  <a:lnSpc>
+                    <a:spcPct val="150000"/>
+                  </a:lnSpc>
+                </a:pPr>
+                <a:endParaRPr lang="en-US" altLang="ko-KR" sz="1600" dirty="0">
+                  <a:latin typeface="D2Coding" panose="020B0609020101020101" pitchFamily="49" charset="-127"/>
+                  <a:ea typeface="D2Coding" panose="020B0609020101020101" pitchFamily="49" charset="-127"/>
+                </a:endParaRPr>
+              </a:p>
+              <a:p>
+                <a:pPr>
+                  <a:lnSpc>
+                    <a:spcPct val="150000"/>
+                  </a:lnSpc>
+                  <a:buFont typeface="+mj-lt"/>
+                  <a:buAutoNum type="arabicPeriod"/>
+                </a:pPr>
+                <a:r>
+                  <a:rPr lang="ko-KR" altLang="en-US" sz="1600" b="1" dirty="0">
+                    <a:latin typeface="D2Coding" panose="020B0609020101020101" pitchFamily="49" charset="-127"/>
+                    <a:ea typeface="D2Coding" panose="020B0609020101020101" pitchFamily="49" charset="-127"/>
+                  </a:rPr>
+                  <a:t>멀티 헤드 </a:t>
+                </a:r>
+                <a:r>
+                  <a:rPr lang="ko-KR" altLang="en-US" sz="1600" b="1" dirty="0" err="1">
+                    <a:latin typeface="D2Coding" panose="020B0609020101020101" pitchFamily="49" charset="-127"/>
+                    <a:ea typeface="D2Coding" panose="020B0609020101020101" pitchFamily="49" charset="-127"/>
+                  </a:rPr>
+                  <a:t>어텐션</a:t>
+                </a:r>
+                <a:r>
+                  <a:rPr lang="en-US" altLang="ko-KR" sz="1600" b="1" dirty="0">
+                    <a:latin typeface="D2Coding" panose="020B0609020101020101" pitchFamily="49" charset="-127"/>
+                    <a:ea typeface="D2Coding" panose="020B0609020101020101" pitchFamily="49" charset="-127"/>
+                  </a:rPr>
+                  <a:t>(Multi-Head Attention)</a:t>
+                </a:r>
+              </a:p>
+              <a:p>
+                <a:pPr lvl="1">
+                  <a:lnSpc>
+                    <a:spcPct val="150000"/>
+                  </a:lnSpc>
+                </a:pPr>
+                <a:r>
+                  <a:rPr lang="ko-KR" altLang="en-US" sz="1600" dirty="0">
+                    <a:latin typeface="D2Coding" panose="020B0609020101020101" pitchFamily="49" charset="-127"/>
+                    <a:ea typeface="D2Coding" panose="020B0609020101020101" pitchFamily="49" charset="-127"/>
+                  </a:rPr>
+                  <a:t>하나의 </a:t>
+                </a:r>
+                <a:r>
+                  <a:rPr lang="ko-KR" altLang="en-US" sz="1600" dirty="0" err="1">
+                    <a:latin typeface="D2Coding" panose="020B0609020101020101" pitchFamily="49" charset="-127"/>
+                    <a:ea typeface="D2Coding" panose="020B0609020101020101" pitchFamily="49" charset="-127"/>
+                  </a:rPr>
+                  <a:t>어텐션만</a:t>
+                </a:r>
+                <a:r>
+                  <a:rPr lang="ko-KR" altLang="en-US" sz="1600" dirty="0">
+                    <a:latin typeface="D2Coding" panose="020B0609020101020101" pitchFamily="49" charset="-127"/>
+                    <a:ea typeface="D2Coding" panose="020B0609020101020101" pitchFamily="49" charset="-127"/>
+                  </a:rPr>
+                  <a:t> 쓰면 여러 중요한 정보가 한데 섞여 </a:t>
+                </a:r>
+                <a:r>
+                  <a:rPr lang="ko-KR" altLang="en-US" sz="1600" dirty="0" err="1">
+                    <a:latin typeface="D2Coding" panose="020B0609020101020101" pitchFamily="49" charset="-127"/>
+                    <a:ea typeface="D2Coding" panose="020B0609020101020101" pitchFamily="49" charset="-127"/>
+                  </a:rPr>
+                  <a:t>뭉개지므로</a:t>
+                </a:r>
+                <a:r>
+                  <a:rPr lang="en-US" altLang="ko-KR" sz="1600" dirty="0">
+                    <a:latin typeface="D2Coding" panose="020B0609020101020101" pitchFamily="49" charset="-127"/>
+                    <a:ea typeface="D2Coding" panose="020B0609020101020101" pitchFamily="49" charset="-127"/>
+                  </a:rPr>
+                  <a:t>, </a:t>
+                </a:r>
+                <a:r>
+                  <a:rPr lang="ko-KR" altLang="en-US" sz="1600" dirty="0">
+                    <a:latin typeface="D2Coding" panose="020B0609020101020101" pitchFamily="49" charset="-127"/>
+                    <a:ea typeface="D2Coding" panose="020B0609020101020101" pitchFamily="49" charset="-127"/>
+                  </a:rPr>
+                  <a:t>마치 여러 명의 전문가</a:t>
+                </a:r>
+                <a:r>
+                  <a:rPr lang="en-US" altLang="ko-KR" sz="1600" dirty="0">
+                    <a:latin typeface="D2Coding" panose="020B0609020101020101" pitchFamily="49" charset="-127"/>
+                    <a:ea typeface="D2Coding" panose="020B0609020101020101" pitchFamily="49" charset="-127"/>
+                  </a:rPr>
+                  <a:t>(Heads)</a:t>
+                </a:r>
+                <a:r>
+                  <a:rPr lang="ko-KR" altLang="en-US" sz="1600" dirty="0">
+                    <a:latin typeface="D2Coding" panose="020B0609020101020101" pitchFamily="49" charset="-127"/>
+                    <a:ea typeface="D2Coding" panose="020B0609020101020101" pitchFamily="49" charset="-127"/>
+                  </a:rPr>
+                  <a:t>가 각자 다른 관점</a:t>
+                </a:r>
+                <a:r>
+                  <a:rPr lang="en-US" altLang="ko-KR" sz="1600" dirty="0">
+                    <a:latin typeface="D2Coding" panose="020B0609020101020101" pitchFamily="49" charset="-127"/>
+                    <a:ea typeface="D2Coding" panose="020B0609020101020101" pitchFamily="49" charset="-127"/>
+                  </a:rPr>
+                  <a:t>(</a:t>
+                </a:r>
+                <a:r>
+                  <a:rPr lang="ko-KR" altLang="en-US" sz="1600" dirty="0">
+                    <a:latin typeface="D2Coding" panose="020B0609020101020101" pitchFamily="49" charset="-127"/>
+                    <a:ea typeface="D2Coding" panose="020B0609020101020101" pitchFamily="49" charset="-127"/>
+                  </a:rPr>
+                  <a:t>파라미터</a:t>
+                </a:r>
+                <a:r>
+                  <a:rPr lang="en-US" altLang="ko-KR" sz="1600" dirty="0">
+                    <a:latin typeface="D2Coding" panose="020B0609020101020101" pitchFamily="49" charset="-127"/>
+                    <a:ea typeface="D2Coding" panose="020B0609020101020101" pitchFamily="49" charset="-127"/>
+                  </a:rPr>
+                  <a:t>)</a:t>
+                </a:r>
+                <a:r>
+                  <a:rPr lang="ko-KR" altLang="en-US" sz="1600" dirty="0">
+                    <a:latin typeface="D2Coding" panose="020B0609020101020101" pitchFamily="49" charset="-127"/>
+                    <a:ea typeface="D2Coding" panose="020B0609020101020101" pitchFamily="49" charset="-127"/>
+                  </a:rPr>
+                  <a:t>으로 문장을 분석하게 한 뒤 의견을 종합하는 방식</a:t>
+                </a:r>
+                <a:endParaRPr lang="en-US" altLang="ko-KR" sz="1600" dirty="0">
+                  <a:latin typeface="D2Coding" panose="020B0609020101020101" pitchFamily="49" charset="-127"/>
+                  <a:ea typeface="D2Coding" panose="020B0609020101020101" pitchFamily="49" charset="-127"/>
+                </a:endParaRPr>
+              </a:p>
+            </p:txBody>
+          </p:sp>
+        </mc:Choice>
+        <mc:Fallback>
+          <p:sp>
+            <p:nvSpPr>
+              <p:cNvPr id="5" name="TextBox 4">
+                <a:extLst>
+                  <a:ext uri="{FF2B5EF4-FFF2-40B4-BE49-F238E27FC236}">
+                    <a16:creationId xmlns:a16="http://schemas.microsoft.com/office/drawing/2014/main" id="{7D777C00-5634-18D8-500C-B1B4670E4BA8}"/>
+                  </a:ext>
+                </a:extLst>
+              </p:cNvPr>
+              <p:cNvSpPr txBox="1">
+                <a:spLocks noRot="1" noChangeAspect="1" noMove="1" noResize="1" noEditPoints="1" noAdjustHandles="1" noChangeArrowheads="1" noChangeShapeType="1" noTextEdit="1"/>
+              </p:cNvSpPr>
+              <p:nvPr/>
+            </p:nvSpPr>
+            <p:spPr>
+              <a:xfrm>
+                <a:off x="625311" y="1196231"/>
+                <a:ext cx="10810875" cy="2717732"/>
+              </a:xfrm>
+              <a:prstGeom prst="rect">
+                <a:avLst/>
+              </a:prstGeom>
+              <a:blipFill>
+                <a:blip r:embed="rId2"/>
+                <a:stretch>
+                  <a:fillRect l="-282" b="-1794"/>
+                </a:stretch>
+              </a:blipFill>
+            </p:spPr>
+            <p:txBody>
+              <a:bodyPr/>
+              <a:lstStyle/>
+              <a:p>
+                <a:r>
+                  <a:rPr lang="ko-KR" altLang="en-US">
+                    <a:noFill/>
+                  </a:rPr>
+                  <a:t> </a:t>
+                </a:r>
+              </a:p>
+            </p:txBody>
+          </p:sp>
+        </mc:Fallback>
+      </mc:AlternateContent>
+      <p:sp>
+        <p:nvSpPr>
+          <p:cNvPr id="6" name="TextBox 5">
+            <a:extLst>
+              <a:ext uri="{FF2B5EF4-FFF2-40B4-BE49-F238E27FC236}">
+                <a16:creationId xmlns:a16="http://schemas.microsoft.com/office/drawing/2014/main" id="{11D58650-FA2D-BECC-ECD9-D072827B175D}"/>
+              </a:ext>
+            </a:extLst>
+          </p:cNvPr>
+          <p:cNvSpPr txBox="1"/>
+          <p:nvPr/>
+        </p:nvSpPr>
+        <p:spPr>
+          <a:xfrm>
+            <a:off x="6966408" y="826899"/>
+            <a:ext cx="4600281" cy="369332"/>
+          </a:xfrm>
+          <a:prstGeom prst="rect">
+            <a:avLst/>
+          </a:prstGeom>
+          <a:noFill/>
+        </p:spPr>
+        <p:txBody>
+          <a:bodyPr wrap="square">
+            <a:spAutoFit/>
+          </a:bodyPr>
+          <a:lstStyle/>
+          <a:p>
+            <a:pPr indent="0" algn="r">
+              <a:buNone/>
+            </a:pPr>
+            <a:r>
+              <a:rPr lang="ko-KR" altLang="ko-KR" sz="1800" b="1" i="0" dirty="0" err="1">
+                <a:effectLst/>
+                <a:latin typeface="Lora" pitchFamily="2" charset="0"/>
+              </a:rPr>
+              <a:t>Dot-product</a:t>
+            </a:r>
+            <a:r>
+              <a:rPr lang="ko-KR" altLang="ko-KR" sz="1800" b="1" i="0" dirty="0">
+                <a:effectLst/>
+                <a:latin typeface="Lora" pitchFamily="2" charset="0"/>
+              </a:rPr>
+              <a:t> </a:t>
+            </a:r>
+            <a:r>
+              <a:rPr lang="ko-KR" altLang="ko-KR" sz="1800" b="1" i="0" dirty="0" err="1">
+                <a:effectLst/>
+                <a:latin typeface="Lora" pitchFamily="2" charset="0"/>
+              </a:rPr>
+              <a:t>attention</a:t>
+            </a:r>
+            <a:endParaRPr lang="ko-KR" altLang="ko-KR" sz="1800" b="1" i="0" dirty="0">
+              <a:effectLst/>
+              <a:latin typeface="Lora" pitchFamily="2" charset="0"/>
+            </a:endParaRPr>
+          </a:p>
+        </p:txBody>
+      </p:sp>
+      <p:pic>
+        <p:nvPicPr>
+          <p:cNvPr id="2050" name="Picture 2">
+            <a:extLst>
+              <a:ext uri="{FF2B5EF4-FFF2-40B4-BE49-F238E27FC236}">
+                <a16:creationId xmlns:a16="http://schemas.microsoft.com/office/drawing/2014/main" id="{F9B4EB5B-3787-FEE7-CA61-683BB93586BD}"/>
+              </a:ext>
+            </a:extLst>
+          </p:cNvPr>
+          <p:cNvPicPr>
+            <a:picLocks noChangeAspect="1" noChangeArrowheads="1"/>
+          </p:cNvPicPr>
+          <p:nvPr/>
+        </p:nvPicPr>
+        <p:blipFill>
+          <a:blip r:embed="rId3">
+            <a:extLst>
+              <a:ext uri="{28A0092B-C50C-407E-A947-70E740481C1C}">
+                <a14:useLocalDpi xmlns:a14="http://schemas.microsoft.com/office/drawing/2010/main" val="0"/>
+              </a:ext>
+            </a:extLst>
+          </a:blip>
+          <a:srcRect/>
+          <a:stretch>
+            <a:fillRect/>
+          </a:stretch>
+        </p:blipFill>
+        <p:spPr bwMode="auto">
+          <a:xfrm>
+            <a:off x="1149010" y="4014236"/>
+            <a:ext cx="5446492" cy="2387150"/>
+          </a:xfrm>
+          <a:prstGeom prst="rect">
+            <a:avLst/>
+          </a:prstGeom>
+          <a:noFill/>
+          <a:extLst>
+            <a:ext uri="{909E8E84-426E-40DD-AFC4-6F175D3DCCD1}">
+              <a14:hiddenFill xmlns:a14="http://schemas.microsoft.com/office/drawing/2010/main">
+                <a:solidFill>
+                  <a:srgbClr val="FFFFFF"/>
+                </a:solidFill>
+              </a14:hiddenFill>
+            </a:ext>
+          </a:extLst>
+        </p:spPr>
+      </p:pic>
+      <p:sp>
+        <p:nvSpPr>
+          <p:cNvPr id="8" name="설명선: 선(강조선) 7">
+            <a:extLst>
+              <a:ext uri="{FF2B5EF4-FFF2-40B4-BE49-F238E27FC236}">
+                <a16:creationId xmlns:a16="http://schemas.microsoft.com/office/drawing/2014/main" id="{692EB135-7323-7885-16BE-43CE88CE441D}"/>
+              </a:ext>
+            </a:extLst>
+          </p:cNvPr>
+          <p:cNvSpPr/>
+          <p:nvPr/>
+        </p:nvSpPr>
+        <p:spPr>
+          <a:xfrm>
+            <a:off x="7282653" y="4120295"/>
+            <a:ext cx="3309148" cy="2175032"/>
+          </a:xfrm>
+          <a:prstGeom prst="accentCallout1">
+            <a:avLst>
+              <a:gd name="adj1" fmla="val 18750"/>
+              <a:gd name="adj2" fmla="val -8333"/>
+              <a:gd name="adj3" fmla="val 44512"/>
+              <a:gd name="adj4" fmla="val -81042"/>
+            </a:avLst>
+          </a:prstGeom>
+          <a:solidFill>
+            <a:schemeClr val="accent6">
+              <a:lumMod val="20000"/>
+              <a:lumOff val="80000"/>
+            </a:schemeClr>
+          </a:solidFill>
+        </p:spPr>
+        <p:style>
+          <a:lnRef idx="2">
+            <a:schemeClr val="accent1">
+              <a:shade val="15000"/>
+            </a:schemeClr>
+          </a:lnRef>
+          <a:fillRef idx="1">
+            <a:schemeClr val="accent1"/>
+          </a:fillRef>
+          <a:effectRef idx="0">
+            <a:schemeClr val="accent1"/>
+          </a:effectRef>
+          <a:fontRef idx="minor">
+            <a:schemeClr val="lt1"/>
+          </a:fontRef>
+        </p:style>
+        <p:txBody>
+          <a:bodyPr rtlCol="0" anchor="ctr"/>
+          <a:lstStyle/>
+          <a:p>
+            <a:pPr marL="171450" indent="-171450">
+              <a:buFont typeface="Wingdings" panose="05000000000000000000" pitchFamily="2" charset="2"/>
+              <a:buChar char="§"/>
+            </a:pPr>
+            <a:r>
+              <a:rPr lang="en-US" altLang="ko-KR" sz="1200" dirty="0">
+                <a:solidFill>
+                  <a:schemeClr val="tx1"/>
+                </a:solidFill>
+                <a:latin typeface="D2Coding" panose="020B0609020101020101" pitchFamily="49" charset="-127"/>
+                <a:ea typeface="D2Coding" panose="020B0609020101020101" pitchFamily="49" charset="-127"/>
+              </a:rPr>
+              <a:t>Head 1 (</a:t>
+            </a:r>
+            <a:r>
+              <a:rPr lang="ko-KR" altLang="en-US" sz="1200" dirty="0">
+                <a:solidFill>
+                  <a:schemeClr val="tx1"/>
+                </a:solidFill>
+                <a:latin typeface="D2Coding" panose="020B0609020101020101" pitchFamily="49" charset="-127"/>
+                <a:ea typeface="D2Coding" panose="020B0609020101020101" pitchFamily="49" charset="-127"/>
+              </a:rPr>
+              <a:t>주어 전문가</a:t>
+            </a:r>
+            <a:r>
+              <a:rPr lang="en-US" altLang="ko-KR" sz="1200" dirty="0">
+                <a:solidFill>
+                  <a:schemeClr val="tx1"/>
+                </a:solidFill>
+                <a:latin typeface="D2Coding" panose="020B0609020101020101" pitchFamily="49" charset="-127"/>
+                <a:ea typeface="D2Coding" panose="020B0609020101020101" pitchFamily="49" charset="-127"/>
+              </a:rPr>
+              <a:t>): "</a:t>
+            </a:r>
+            <a:r>
+              <a:rPr lang="ko-KR" altLang="en-US" sz="1200" dirty="0">
+                <a:solidFill>
+                  <a:schemeClr val="tx1"/>
+                </a:solidFill>
+                <a:latin typeface="D2Coding" panose="020B0609020101020101" pitchFamily="49" charset="-127"/>
+                <a:ea typeface="D2Coding" panose="020B0609020101020101" pitchFamily="49" charset="-127"/>
+              </a:rPr>
+              <a:t>나는 이 문장에서 </a:t>
+            </a:r>
+            <a:r>
+              <a:rPr lang="en-US" altLang="ko-KR" sz="1200" dirty="0">
+                <a:solidFill>
+                  <a:schemeClr val="tx1"/>
+                </a:solidFill>
+                <a:latin typeface="D2Coding" panose="020B0609020101020101" pitchFamily="49" charset="-127"/>
+                <a:ea typeface="D2Coding" panose="020B0609020101020101" pitchFamily="49" charset="-127"/>
+              </a:rPr>
+              <a:t>'</a:t>
+            </a:r>
+            <a:r>
+              <a:rPr lang="ko-KR" altLang="en-US" sz="1200" dirty="0">
+                <a:solidFill>
+                  <a:schemeClr val="tx1"/>
+                </a:solidFill>
+                <a:latin typeface="D2Coding" panose="020B0609020101020101" pitchFamily="49" charset="-127"/>
+                <a:ea typeface="D2Coding" panose="020B0609020101020101" pitchFamily="49" charset="-127"/>
+              </a:rPr>
+              <a:t>누가</a:t>
+            </a:r>
+            <a:r>
+              <a:rPr lang="en-US" altLang="ko-KR" sz="1200" dirty="0">
+                <a:solidFill>
+                  <a:schemeClr val="tx1"/>
+                </a:solidFill>
+                <a:latin typeface="D2Coding" panose="020B0609020101020101" pitchFamily="49" charset="-127"/>
+                <a:ea typeface="D2Coding" panose="020B0609020101020101" pitchFamily="49" charset="-127"/>
+              </a:rPr>
+              <a:t>(</a:t>
+            </a:r>
+            <a:r>
+              <a:rPr lang="ko-KR" altLang="en-US" sz="1200" dirty="0">
+                <a:solidFill>
+                  <a:schemeClr val="tx1"/>
+                </a:solidFill>
+                <a:latin typeface="D2Coding" panose="020B0609020101020101" pitchFamily="49" charset="-127"/>
+                <a:ea typeface="D2Coding" panose="020B0609020101020101" pitchFamily="49" charset="-127"/>
+              </a:rPr>
+              <a:t>주어</a:t>
+            </a:r>
+            <a:r>
+              <a:rPr lang="en-US" altLang="ko-KR" sz="1200" dirty="0">
+                <a:solidFill>
+                  <a:schemeClr val="tx1"/>
+                </a:solidFill>
+                <a:latin typeface="D2Coding" panose="020B0609020101020101" pitchFamily="49" charset="-127"/>
+                <a:ea typeface="D2Coding" panose="020B0609020101020101" pitchFamily="49" charset="-127"/>
+              </a:rPr>
+              <a:t>)' </a:t>
+            </a:r>
+            <a:r>
+              <a:rPr lang="ko-KR" altLang="en-US" sz="1200" dirty="0" err="1">
+                <a:solidFill>
+                  <a:schemeClr val="tx1"/>
+                </a:solidFill>
+                <a:latin typeface="D2Coding" panose="020B0609020101020101" pitchFamily="49" charset="-127"/>
+                <a:ea typeface="D2Coding" panose="020B0609020101020101" pitchFamily="49" charset="-127"/>
+              </a:rPr>
+              <a:t>행동했는지에만</a:t>
+            </a:r>
+            <a:r>
+              <a:rPr lang="ko-KR" altLang="en-US" sz="1200" dirty="0">
+                <a:solidFill>
+                  <a:schemeClr val="tx1"/>
+                </a:solidFill>
+                <a:latin typeface="D2Coding" panose="020B0609020101020101" pitchFamily="49" charset="-127"/>
+                <a:ea typeface="D2Coding" panose="020B0609020101020101" pitchFamily="49" charset="-127"/>
+              </a:rPr>
+              <a:t> 집중해서 점수를 매기겠어</a:t>
+            </a:r>
+            <a:r>
+              <a:rPr lang="en-US" altLang="ko-KR" sz="1200" dirty="0">
+                <a:solidFill>
+                  <a:schemeClr val="tx1"/>
+                </a:solidFill>
+                <a:latin typeface="D2Coding" panose="020B0609020101020101" pitchFamily="49" charset="-127"/>
+                <a:ea typeface="D2Coding" panose="020B0609020101020101" pitchFamily="49" charset="-127"/>
+              </a:rPr>
+              <a:t>."</a:t>
+            </a:r>
+          </a:p>
+          <a:p>
+            <a:pPr marL="171450" indent="-171450">
+              <a:buFont typeface="Wingdings" panose="05000000000000000000" pitchFamily="2" charset="2"/>
+              <a:buChar char="§"/>
+            </a:pPr>
+            <a:endParaRPr lang="en-US" altLang="ko-KR" sz="1200" dirty="0">
+              <a:solidFill>
+                <a:schemeClr val="tx1"/>
+              </a:solidFill>
+              <a:latin typeface="D2Coding" panose="020B0609020101020101" pitchFamily="49" charset="-127"/>
+              <a:ea typeface="D2Coding" panose="020B0609020101020101" pitchFamily="49" charset="-127"/>
+            </a:endParaRPr>
+          </a:p>
+          <a:p>
+            <a:pPr marL="171450" indent="-171450">
+              <a:buFont typeface="Wingdings" panose="05000000000000000000" pitchFamily="2" charset="2"/>
+              <a:buChar char="§"/>
+            </a:pPr>
+            <a:r>
+              <a:rPr lang="en-US" altLang="ko-KR" sz="1200" dirty="0">
+                <a:solidFill>
+                  <a:schemeClr val="tx1"/>
+                </a:solidFill>
+                <a:latin typeface="D2Coding" panose="020B0609020101020101" pitchFamily="49" charset="-127"/>
+                <a:ea typeface="D2Coding" panose="020B0609020101020101" pitchFamily="49" charset="-127"/>
+              </a:rPr>
+              <a:t>Head 2 (</a:t>
+            </a:r>
+            <a:r>
+              <a:rPr lang="ko-KR" altLang="en-US" sz="1200" dirty="0">
+                <a:solidFill>
+                  <a:schemeClr val="tx1"/>
+                </a:solidFill>
+                <a:latin typeface="D2Coding" panose="020B0609020101020101" pitchFamily="49" charset="-127"/>
+                <a:ea typeface="D2Coding" panose="020B0609020101020101" pitchFamily="49" charset="-127"/>
+              </a:rPr>
+              <a:t>문장 부호 전문가</a:t>
+            </a:r>
+            <a:r>
+              <a:rPr lang="en-US" altLang="ko-KR" sz="1200" dirty="0">
+                <a:solidFill>
+                  <a:schemeClr val="tx1"/>
+                </a:solidFill>
+                <a:latin typeface="D2Coding" panose="020B0609020101020101" pitchFamily="49" charset="-127"/>
+                <a:ea typeface="D2Coding" panose="020B0609020101020101" pitchFamily="49" charset="-127"/>
+              </a:rPr>
+              <a:t>): "</a:t>
+            </a:r>
+            <a:r>
+              <a:rPr lang="ko-KR" altLang="en-US" sz="1200" dirty="0">
+                <a:solidFill>
+                  <a:schemeClr val="tx1"/>
+                </a:solidFill>
+                <a:latin typeface="D2Coding" panose="020B0609020101020101" pitchFamily="49" charset="-127"/>
+                <a:ea typeface="D2Coding" panose="020B0609020101020101" pitchFamily="49" charset="-127"/>
+              </a:rPr>
+              <a:t>나는 문장의 흐름이 어디서 끊기는지 </a:t>
+            </a:r>
+            <a:r>
+              <a:rPr lang="en-US" altLang="ko-KR" sz="1200" dirty="0">
+                <a:solidFill>
+                  <a:schemeClr val="tx1"/>
+                </a:solidFill>
+                <a:latin typeface="D2Coding" panose="020B0609020101020101" pitchFamily="49" charset="-127"/>
+                <a:ea typeface="D2Coding" panose="020B0609020101020101" pitchFamily="49" charset="-127"/>
+              </a:rPr>
+              <a:t>'</a:t>
+            </a:r>
+            <a:r>
+              <a:rPr lang="ko-KR" altLang="en-US" sz="1200" dirty="0">
+                <a:solidFill>
+                  <a:schemeClr val="tx1"/>
+                </a:solidFill>
+                <a:latin typeface="D2Coding" panose="020B0609020101020101" pitchFamily="49" charset="-127"/>
+                <a:ea typeface="D2Coding" panose="020B0609020101020101" pitchFamily="49" charset="-127"/>
+              </a:rPr>
+              <a:t>마침표나 쉼표</a:t>
+            </a:r>
+            <a:r>
+              <a:rPr lang="en-US" altLang="ko-KR" sz="1200" dirty="0">
+                <a:solidFill>
+                  <a:schemeClr val="tx1"/>
+                </a:solidFill>
+                <a:latin typeface="D2Coding" panose="020B0609020101020101" pitchFamily="49" charset="-127"/>
+                <a:ea typeface="D2Coding" panose="020B0609020101020101" pitchFamily="49" charset="-127"/>
+              </a:rPr>
+              <a:t>'</a:t>
+            </a:r>
+            <a:r>
+              <a:rPr lang="ko-KR" altLang="en-US" sz="1200" dirty="0">
+                <a:solidFill>
+                  <a:schemeClr val="tx1"/>
+                </a:solidFill>
+                <a:latin typeface="D2Coding" panose="020B0609020101020101" pitchFamily="49" charset="-127"/>
+                <a:ea typeface="D2Coding" panose="020B0609020101020101" pitchFamily="49" charset="-127"/>
+              </a:rPr>
+              <a:t>의 관계만 보겠어</a:t>
+            </a:r>
+            <a:r>
+              <a:rPr lang="en-US" altLang="ko-KR" sz="1200" dirty="0">
+                <a:solidFill>
+                  <a:schemeClr val="tx1"/>
+                </a:solidFill>
+                <a:latin typeface="D2Coding" panose="020B0609020101020101" pitchFamily="49" charset="-127"/>
+                <a:ea typeface="D2Coding" panose="020B0609020101020101" pitchFamily="49" charset="-127"/>
+              </a:rPr>
+              <a:t>."</a:t>
+            </a:r>
+          </a:p>
+          <a:p>
+            <a:pPr marL="171450" indent="-171450">
+              <a:buFont typeface="Wingdings" panose="05000000000000000000" pitchFamily="2" charset="2"/>
+              <a:buChar char="§"/>
+            </a:pPr>
+            <a:endParaRPr lang="en-US" altLang="ko-KR" sz="1200" dirty="0">
+              <a:solidFill>
+                <a:schemeClr val="tx1"/>
+              </a:solidFill>
+              <a:latin typeface="D2Coding" panose="020B0609020101020101" pitchFamily="49" charset="-127"/>
+              <a:ea typeface="D2Coding" panose="020B0609020101020101" pitchFamily="49" charset="-127"/>
+            </a:endParaRPr>
+          </a:p>
+          <a:p>
+            <a:pPr marL="171450" indent="-171450">
+              <a:buFont typeface="Wingdings" panose="05000000000000000000" pitchFamily="2" charset="2"/>
+              <a:buChar char="§"/>
+            </a:pPr>
+            <a:r>
+              <a:rPr lang="en-US" altLang="ko-KR" sz="1200" dirty="0">
+                <a:solidFill>
+                  <a:schemeClr val="tx1"/>
+                </a:solidFill>
+                <a:latin typeface="D2Coding" panose="020B0609020101020101" pitchFamily="49" charset="-127"/>
+                <a:ea typeface="D2Coding" panose="020B0609020101020101" pitchFamily="49" charset="-127"/>
+              </a:rPr>
+              <a:t>Head 3 (</a:t>
+            </a:r>
+            <a:r>
+              <a:rPr lang="ko-KR" altLang="en-US" sz="1200" dirty="0">
+                <a:solidFill>
+                  <a:schemeClr val="tx1"/>
+                </a:solidFill>
+                <a:latin typeface="D2Coding" panose="020B0609020101020101" pitchFamily="49" charset="-127"/>
+                <a:ea typeface="D2Coding" panose="020B0609020101020101" pitchFamily="49" charset="-127"/>
+              </a:rPr>
+              <a:t>동사 전문가</a:t>
+            </a:r>
+            <a:r>
+              <a:rPr lang="en-US" altLang="ko-KR" sz="1200" dirty="0">
+                <a:solidFill>
+                  <a:schemeClr val="tx1"/>
+                </a:solidFill>
+                <a:latin typeface="D2Coding" panose="020B0609020101020101" pitchFamily="49" charset="-127"/>
+                <a:ea typeface="D2Coding" panose="020B0609020101020101" pitchFamily="49" charset="-127"/>
+              </a:rPr>
+              <a:t>): "</a:t>
+            </a:r>
+            <a:r>
+              <a:rPr lang="ko-KR" altLang="en-US" sz="1200" dirty="0">
+                <a:solidFill>
+                  <a:schemeClr val="tx1"/>
+                </a:solidFill>
+                <a:latin typeface="D2Coding" panose="020B0609020101020101" pitchFamily="49" charset="-127"/>
+                <a:ea typeface="D2Coding" panose="020B0609020101020101" pitchFamily="49" charset="-127"/>
+              </a:rPr>
+              <a:t>나는 </a:t>
+            </a:r>
+            <a:r>
+              <a:rPr lang="en-US" altLang="ko-KR" sz="1200" dirty="0">
+                <a:solidFill>
+                  <a:schemeClr val="tx1"/>
+                </a:solidFill>
+                <a:latin typeface="D2Coding" panose="020B0609020101020101" pitchFamily="49" charset="-127"/>
+                <a:ea typeface="D2Coding" panose="020B0609020101020101" pitchFamily="49" charset="-127"/>
+              </a:rPr>
+              <a:t>'</a:t>
+            </a:r>
+            <a:r>
+              <a:rPr lang="ko-KR" altLang="en-US" sz="1200" dirty="0">
+                <a:solidFill>
+                  <a:schemeClr val="tx1"/>
+                </a:solidFill>
+                <a:latin typeface="D2Coding" panose="020B0609020101020101" pitchFamily="49" charset="-127"/>
+                <a:ea typeface="D2Coding" panose="020B0609020101020101" pitchFamily="49" charset="-127"/>
+              </a:rPr>
+              <a:t>행동</a:t>
+            </a:r>
+            <a:r>
+              <a:rPr lang="en-US" altLang="ko-KR" sz="1200" dirty="0">
+                <a:solidFill>
+                  <a:schemeClr val="tx1"/>
+                </a:solidFill>
+                <a:latin typeface="D2Coding" panose="020B0609020101020101" pitchFamily="49" charset="-127"/>
+                <a:ea typeface="D2Coding" panose="020B0609020101020101" pitchFamily="49" charset="-127"/>
+              </a:rPr>
+              <a:t>(</a:t>
+            </a:r>
+            <a:r>
+              <a:rPr lang="ko-KR" altLang="en-US" sz="1200" dirty="0">
+                <a:solidFill>
+                  <a:schemeClr val="tx1"/>
+                </a:solidFill>
+                <a:latin typeface="D2Coding" panose="020B0609020101020101" pitchFamily="49" charset="-127"/>
+                <a:ea typeface="D2Coding" panose="020B0609020101020101" pitchFamily="49" charset="-127"/>
+              </a:rPr>
+              <a:t>동사</a:t>
+            </a:r>
+            <a:r>
+              <a:rPr lang="en-US" altLang="ko-KR" sz="1200" dirty="0">
+                <a:solidFill>
+                  <a:schemeClr val="tx1"/>
+                </a:solidFill>
+                <a:latin typeface="D2Coding" panose="020B0609020101020101" pitchFamily="49" charset="-127"/>
+                <a:ea typeface="D2Coding" panose="020B0609020101020101" pitchFamily="49" charset="-127"/>
+              </a:rPr>
+              <a:t>)'</a:t>
+            </a:r>
+            <a:r>
+              <a:rPr lang="ko-KR" altLang="en-US" sz="1200" dirty="0">
+                <a:solidFill>
+                  <a:schemeClr val="tx1"/>
+                </a:solidFill>
+                <a:latin typeface="D2Coding" panose="020B0609020101020101" pitchFamily="49" charset="-127"/>
+                <a:ea typeface="D2Coding" panose="020B0609020101020101" pitchFamily="49" charset="-127"/>
+              </a:rPr>
+              <a:t>의 연관성만 </a:t>
+            </a:r>
+            <a:r>
+              <a:rPr lang="ko-KR" altLang="en-US" sz="1200" dirty="0" err="1">
+                <a:solidFill>
+                  <a:schemeClr val="tx1"/>
+                </a:solidFill>
+                <a:latin typeface="D2Coding" panose="020B0609020101020101" pitchFamily="49" charset="-127"/>
+                <a:ea typeface="D2Coding" panose="020B0609020101020101" pitchFamily="49" charset="-127"/>
+              </a:rPr>
+              <a:t>추적하겠어</a:t>
+            </a:r>
+            <a:r>
+              <a:rPr lang="en-US" altLang="ko-KR" sz="1200" dirty="0">
+                <a:solidFill>
+                  <a:schemeClr val="tx1"/>
+                </a:solidFill>
+                <a:latin typeface="D2Coding" panose="020B0609020101020101" pitchFamily="49" charset="-127"/>
+                <a:ea typeface="D2Coding" panose="020B0609020101020101" pitchFamily="49" charset="-127"/>
+              </a:rPr>
+              <a:t>."</a:t>
+            </a:r>
+            <a:endParaRPr lang="ko-KR" altLang="en-US" sz="1200" dirty="0">
+              <a:solidFill>
+                <a:schemeClr val="tx1"/>
+              </a:solidFill>
+              <a:latin typeface="D2Coding" panose="020B0609020101020101" pitchFamily="49" charset="-127"/>
+              <a:ea typeface="D2Coding" panose="020B0609020101020101" pitchFamily="49" charset="-127"/>
+            </a:endParaRPr>
+          </a:p>
+        </p:txBody>
+      </p:sp>
+    </p:spTree>
+    <p:extLst>
+      <p:ext uri="{BB962C8B-B14F-4D97-AF65-F5344CB8AC3E}">
+        <p14:creationId xmlns:p14="http://schemas.microsoft.com/office/powerpoint/2010/main" val="3496383971"/>
+      </p:ext>
+    </p:extLst>
+  </p:cSld>
+  <p:clrMapOvr>
+    <a:masterClrMapping/>
+  </p:clrMapOvr>
+</p:sld>
+</file>
+
+<file path=ppt/slides/slide29.xml><?xml version="1.0" encoding="utf-8"?>
+<p:sld xmlns:a="http://schemas.openxmlformats.org/drawingml/2006/main" xmlns:r="http://schemas.openxmlformats.org/officeDocument/2006/relationships" xmlns:p="http://schemas.openxmlformats.org/presentationml/2006/main">
+  <p:cSld>
+    <p:spTree>
+      <p:nvGrpSpPr>
+        <p:cNvPr id="1" name="">
+          <a:extLst>
+            <a:ext uri="{FF2B5EF4-FFF2-40B4-BE49-F238E27FC236}">
+              <a16:creationId xmlns:a16="http://schemas.microsoft.com/office/drawing/2014/main" id="{3BD058E7-2E75-6BED-6DB1-CBC2C651275E}"/>
+            </a:ext>
+          </a:extLst>
+        </p:cNvPr>
+        <p:cNvGrpSpPr/>
+        <p:nvPr/>
+      </p:nvGrpSpPr>
+      <p:grpSpPr>
+        <a:xfrm>
+          <a:off x="0" y="0"/>
+          <a:ext cx="0" cy="0"/>
+          <a:chOff x="0" y="0"/>
+          <a:chExt cx="0" cy="0"/>
+        </a:xfrm>
+      </p:grpSpPr>
+      <p:sp>
+        <p:nvSpPr>
+          <p:cNvPr id="4" name="슬라이드 번호 개체 틀 3">
+            <a:extLst>
+              <a:ext uri="{FF2B5EF4-FFF2-40B4-BE49-F238E27FC236}">
+                <a16:creationId xmlns:a16="http://schemas.microsoft.com/office/drawing/2014/main" id="{EC4A4EFA-471D-442F-41F1-7B3C441CAA17}"/>
+              </a:ext>
+            </a:extLst>
+          </p:cNvPr>
+          <p:cNvSpPr>
+            <a:spLocks noGrp="1"/>
+          </p:cNvSpPr>
+          <p:nvPr>
+            <p:ph type="sldNum" sz="quarter" idx="12"/>
+          </p:nvPr>
+        </p:nvSpPr>
+        <p:spPr>
+          <a:xfrm>
+            <a:off x="10514011" y="6036261"/>
+            <a:ext cx="753545" cy="365125"/>
+          </a:xfrm>
+        </p:spPr>
+        <p:txBody>
+          <a:bodyPr/>
+          <a:lstStyle/>
+          <a:p>
+            <a:fld id="{D57F1E4F-1CFF-5643-939E-217C01CDF565}" type="slidenum">
+              <a:rPr lang="en-US" smtClean="0"/>
+              <a:pPr/>
+              <a:t>29</a:t>
+            </a:fld>
+            <a:endParaRPr lang="en-US" dirty="0"/>
+          </a:p>
+        </p:txBody>
+      </p:sp>
+      <p:sp>
+        <p:nvSpPr>
+          <p:cNvPr id="3" name="제목 1">
+            <a:extLst>
+              <a:ext uri="{FF2B5EF4-FFF2-40B4-BE49-F238E27FC236}">
+                <a16:creationId xmlns:a16="http://schemas.microsoft.com/office/drawing/2014/main" id="{377ACB4F-4DB5-2C50-48C1-492B76C920C4}"/>
+              </a:ext>
+            </a:extLst>
+          </p:cNvPr>
+          <p:cNvSpPr txBox="1">
+            <a:spLocks/>
+          </p:cNvSpPr>
+          <p:nvPr/>
+        </p:nvSpPr>
+        <p:spPr>
+          <a:xfrm>
+            <a:off x="475645" y="481983"/>
+            <a:ext cx="10353762" cy="766439"/>
+          </a:xfrm>
+          <a:prstGeom prst="rect">
+            <a:avLst/>
+          </a:prstGeom>
+        </p:spPr>
+        <p:txBody>
+          <a:bodyPr vert="horz" lIns="91440" tIns="45720" rIns="91440" bIns="45720" rtlCol="0" anchor="ctr">
+            <a:normAutofit/>
+          </a:bodyPr>
+          <a:lstStyle>
+            <a:lvl1pPr algn="ctr" defTabSz="914400" rtl="0" eaLnBrk="1" latinLnBrk="1" hangingPunct="1">
+              <a:lnSpc>
+                <a:spcPct val="90000"/>
+              </a:lnSpc>
+              <a:spcBef>
+                <a:spcPct val="0"/>
+              </a:spcBef>
+              <a:buNone/>
+              <a:defRPr sz="3200" kern="1200" cap="all" baseline="0">
+                <a:solidFill>
+                  <a:schemeClr val="tx1"/>
+                </a:solidFill>
+                <a:effectLst/>
+                <a:latin typeface="Batang" panose="02030600000101010101" pitchFamily="18" charset="-127"/>
+                <a:ea typeface="Batang" panose="02030600000101010101" pitchFamily="18" charset="-127"/>
+                <a:cs typeface="+mj-cs"/>
+              </a:defRPr>
+            </a:lvl1pPr>
+          </a:lstStyle>
+          <a:p>
+            <a:pPr algn="l"/>
+            <a:r>
+              <a:rPr lang="en-US" altLang="ko-KR" sz="2800" b="1" cap="none" dirty="0">
+                <a:latin typeface="Lora" pitchFamily="2" charset="0"/>
+              </a:rPr>
+              <a:t>The Transformer architecture</a:t>
+            </a:r>
+          </a:p>
+        </p:txBody>
+      </p:sp>
+      <p:sp>
+        <p:nvSpPr>
+          <p:cNvPr id="2" name="TextBox 1">
+            <a:extLst>
+              <a:ext uri="{FF2B5EF4-FFF2-40B4-BE49-F238E27FC236}">
+                <a16:creationId xmlns:a16="http://schemas.microsoft.com/office/drawing/2014/main" id="{8B8AC6F2-B4C2-727B-91AE-BB7CB491850A}"/>
+              </a:ext>
+            </a:extLst>
+          </p:cNvPr>
+          <p:cNvSpPr txBox="1"/>
+          <p:nvPr/>
+        </p:nvSpPr>
+        <p:spPr>
+          <a:xfrm>
+            <a:off x="6966408" y="826899"/>
+            <a:ext cx="4600281" cy="369332"/>
+          </a:xfrm>
+          <a:prstGeom prst="rect">
+            <a:avLst/>
+          </a:prstGeom>
+          <a:noFill/>
+        </p:spPr>
+        <p:txBody>
+          <a:bodyPr wrap="square">
+            <a:spAutoFit/>
+          </a:bodyPr>
+          <a:lstStyle/>
+          <a:p>
+            <a:pPr algn="r"/>
+            <a:r>
+              <a:rPr lang="en-US" altLang="ko-KR" b="1" dirty="0">
+                <a:latin typeface="Lora" pitchFamily="2" charset="0"/>
+              </a:rPr>
+              <a:t>Transformer encoder block</a:t>
+            </a:r>
+          </a:p>
+        </p:txBody>
+      </p:sp>
+    </p:spTree>
+    <p:extLst>
+      <p:ext uri="{BB962C8B-B14F-4D97-AF65-F5344CB8AC3E}">
+        <p14:creationId xmlns:p14="http://schemas.microsoft.com/office/powerpoint/2010/main" val="161072973"/>
       </p:ext>
     </p:extLst>
   </p:cSld>
@@ -19477,6 +24399,1175 @@
     <p:extLst>
       <p:ext uri="{BB962C8B-B14F-4D97-AF65-F5344CB8AC3E}">
         <p14:creationId xmlns:p14="http://schemas.microsoft.com/office/powerpoint/2010/main" val="291432717"/>
+      </p:ext>
+    </p:extLst>
+  </p:cSld>
+  <p:clrMapOvr>
+    <a:masterClrMapping/>
+  </p:clrMapOvr>
+</p:sld>
+</file>
+
+<file path=ppt/slides/slide30.xml><?xml version="1.0" encoding="utf-8"?>
+<p:sld xmlns:a="http://schemas.openxmlformats.org/drawingml/2006/main" xmlns:r="http://schemas.openxmlformats.org/officeDocument/2006/relationships" xmlns:p="http://schemas.openxmlformats.org/presentationml/2006/main">
+  <p:cSld>
+    <p:spTree>
+      <p:nvGrpSpPr>
+        <p:cNvPr id="1" name="">
+          <a:extLst>
+            <a:ext uri="{FF2B5EF4-FFF2-40B4-BE49-F238E27FC236}">
+              <a16:creationId xmlns:a16="http://schemas.microsoft.com/office/drawing/2014/main" id="{8BF51AB6-C939-8353-8B90-093C02A59554}"/>
+            </a:ext>
+          </a:extLst>
+        </p:cNvPr>
+        <p:cNvGrpSpPr/>
+        <p:nvPr/>
+      </p:nvGrpSpPr>
+      <p:grpSpPr>
+        <a:xfrm>
+          <a:off x="0" y="0"/>
+          <a:ext cx="0" cy="0"/>
+          <a:chOff x="0" y="0"/>
+          <a:chExt cx="0" cy="0"/>
+        </a:xfrm>
+      </p:grpSpPr>
+      <p:sp>
+        <p:nvSpPr>
+          <p:cNvPr id="4" name="슬라이드 번호 개체 틀 3">
+            <a:extLst>
+              <a:ext uri="{FF2B5EF4-FFF2-40B4-BE49-F238E27FC236}">
+                <a16:creationId xmlns:a16="http://schemas.microsoft.com/office/drawing/2014/main" id="{39219A56-E812-EC9D-4AC5-81DFD81FE4C8}"/>
+              </a:ext>
+            </a:extLst>
+          </p:cNvPr>
+          <p:cNvSpPr>
+            <a:spLocks noGrp="1"/>
+          </p:cNvSpPr>
+          <p:nvPr>
+            <p:ph type="sldNum" sz="quarter" idx="12"/>
+          </p:nvPr>
+        </p:nvSpPr>
+        <p:spPr>
+          <a:xfrm>
+            <a:off x="10514011" y="6036261"/>
+            <a:ext cx="753545" cy="365125"/>
+          </a:xfrm>
+        </p:spPr>
+        <p:txBody>
+          <a:bodyPr/>
+          <a:lstStyle/>
+          <a:p>
+            <a:fld id="{D57F1E4F-1CFF-5643-939E-217C01CDF565}" type="slidenum">
+              <a:rPr lang="en-US" smtClean="0"/>
+              <a:pPr/>
+              <a:t>30</a:t>
+            </a:fld>
+            <a:endParaRPr lang="en-US" dirty="0"/>
+          </a:p>
+        </p:txBody>
+      </p:sp>
+      <p:sp>
+        <p:nvSpPr>
+          <p:cNvPr id="3" name="제목 1">
+            <a:extLst>
+              <a:ext uri="{FF2B5EF4-FFF2-40B4-BE49-F238E27FC236}">
+                <a16:creationId xmlns:a16="http://schemas.microsoft.com/office/drawing/2014/main" id="{9200C2E9-B33E-45AB-6008-39876A11BBC3}"/>
+              </a:ext>
+            </a:extLst>
+          </p:cNvPr>
+          <p:cNvSpPr txBox="1">
+            <a:spLocks/>
+          </p:cNvSpPr>
+          <p:nvPr/>
+        </p:nvSpPr>
+        <p:spPr>
+          <a:xfrm>
+            <a:off x="475645" y="481983"/>
+            <a:ext cx="10353762" cy="766439"/>
+          </a:xfrm>
+          <a:prstGeom prst="rect">
+            <a:avLst/>
+          </a:prstGeom>
+        </p:spPr>
+        <p:txBody>
+          <a:bodyPr vert="horz" lIns="91440" tIns="45720" rIns="91440" bIns="45720" rtlCol="0" anchor="ctr">
+            <a:normAutofit/>
+          </a:bodyPr>
+          <a:lstStyle>
+            <a:lvl1pPr algn="ctr" defTabSz="914400" rtl="0" eaLnBrk="1" latinLnBrk="1" hangingPunct="1">
+              <a:lnSpc>
+                <a:spcPct val="90000"/>
+              </a:lnSpc>
+              <a:spcBef>
+                <a:spcPct val="0"/>
+              </a:spcBef>
+              <a:buNone/>
+              <a:defRPr sz="3200" kern="1200" cap="all" baseline="0">
+                <a:solidFill>
+                  <a:schemeClr val="tx1"/>
+                </a:solidFill>
+                <a:effectLst/>
+                <a:latin typeface="Batang" panose="02030600000101010101" pitchFamily="18" charset="-127"/>
+                <a:ea typeface="Batang" panose="02030600000101010101" pitchFamily="18" charset="-127"/>
+                <a:cs typeface="+mj-cs"/>
+              </a:defRPr>
+            </a:lvl1pPr>
+          </a:lstStyle>
+          <a:p>
+            <a:pPr algn="l"/>
+            <a:r>
+              <a:rPr lang="en-US" altLang="ko-KR" sz="2800" b="1" cap="none" dirty="0">
+                <a:latin typeface="Lora" pitchFamily="2" charset="0"/>
+              </a:rPr>
+              <a:t>The Transformer architecture</a:t>
+            </a:r>
+          </a:p>
+        </p:txBody>
+      </p:sp>
+      <p:sp>
+        <p:nvSpPr>
+          <p:cNvPr id="2" name="TextBox 1">
+            <a:extLst>
+              <a:ext uri="{FF2B5EF4-FFF2-40B4-BE49-F238E27FC236}">
+                <a16:creationId xmlns:a16="http://schemas.microsoft.com/office/drawing/2014/main" id="{7B6D8129-A3B4-895F-DE26-A71D33F91BB5}"/>
+              </a:ext>
+            </a:extLst>
+          </p:cNvPr>
+          <p:cNvSpPr txBox="1"/>
+          <p:nvPr/>
+        </p:nvSpPr>
+        <p:spPr>
+          <a:xfrm>
+            <a:off x="6966408" y="826899"/>
+            <a:ext cx="4600281" cy="369332"/>
+          </a:xfrm>
+          <a:prstGeom prst="rect">
+            <a:avLst/>
+          </a:prstGeom>
+          <a:noFill/>
+        </p:spPr>
+        <p:txBody>
+          <a:bodyPr wrap="square">
+            <a:spAutoFit/>
+          </a:bodyPr>
+          <a:lstStyle/>
+          <a:p>
+            <a:pPr algn="r"/>
+            <a:r>
+              <a:rPr lang="en-US" altLang="ko-KR" b="1" dirty="0">
+                <a:latin typeface="Lora" pitchFamily="2" charset="0"/>
+              </a:rPr>
+              <a:t>Transformer encoder block</a:t>
+            </a:r>
+          </a:p>
+        </p:txBody>
+      </p:sp>
+    </p:spTree>
+    <p:extLst>
+      <p:ext uri="{BB962C8B-B14F-4D97-AF65-F5344CB8AC3E}">
+        <p14:creationId xmlns:p14="http://schemas.microsoft.com/office/powerpoint/2010/main" val="517972858"/>
+      </p:ext>
+    </p:extLst>
+  </p:cSld>
+  <p:clrMapOvr>
+    <a:masterClrMapping/>
+  </p:clrMapOvr>
+</p:sld>
+</file>
+
+<file path=ppt/slides/slide31.xml><?xml version="1.0" encoding="utf-8"?>
+<p:sld xmlns:a="http://schemas.openxmlformats.org/drawingml/2006/main" xmlns:r="http://schemas.openxmlformats.org/officeDocument/2006/relationships" xmlns:p="http://schemas.openxmlformats.org/presentationml/2006/main">
+  <p:cSld>
+    <p:spTree>
+      <p:nvGrpSpPr>
+        <p:cNvPr id="1" name="">
+          <a:extLst>
+            <a:ext uri="{FF2B5EF4-FFF2-40B4-BE49-F238E27FC236}">
+              <a16:creationId xmlns:a16="http://schemas.microsoft.com/office/drawing/2014/main" id="{FF818BB9-FF88-AC42-C02A-5169F3B74A16}"/>
+            </a:ext>
+          </a:extLst>
+        </p:cNvPr>
+        <p:cNvGrpSpPr/>
+        <p:nvPr/>
+      </p:nvGrpSpPr>
+      <p:grpSpPr>
+        <a:xfrm>
+          <a:off x="0" y="0"/>
+          <a:ext cx="0" cy="0"/>
+          <a:chOff x="0" y="0"/>
+          <a:chExt cx="0" cy="0"/>
+        </a:xfrm>
+      </p:grpSpPr>
+      <p:sp>
+        <p:nvSpPr>
+          <p:cNvPr id="4" name="슬라이드 번호 개체 틀 3">
+            <a:extLst>
+              <a:ext uri="{FF2B5EF4-FFF2-40B4-BE49-F238E27FC236}">
+                <a16:creationId xmlns:a16="http://schemas.microsoft.com/office/drawing/2014/main" id="{95E75F44-3F26-3C0C-75D6-9E483188966C}"/>
+              </a:ext>
+            </a:extLst>
+          </p:cNvPr>
+          <p:cNvSpPr>
+            <a:spLocks noGrp="1"/>
+          </p:cNvSpPr>
+          <p:nvPr>
+            <p:ph type="sldNum" sz="quarter" idx="12"/>
+          </p:nvPr>
+        </p:nvSpPr>
+        <p:spPr>
+          <a:xfrm>
+            <a:off x="10514011" y="6036261"/>
+            <a:ext cx="753545" cy="365125"/>
+          </a:xfrm>
+        </p:spPr>
+        <p:txBody>
+          <a:bodyPr/>
+          <a:lstStyle/>
+          <a:p>
+            <a:fld id="{D57F1E4F-1CFF-5643-939E-217C01CDF565}" type="slidenum">
+              <a:rPr lang="en-US" smtClean="0"/>
+              <a:pPr/>
+              <a:t>31</a:t>
+            </a:fld>
+            <a:endParaRPr lang="en-US" dirty="0"/>
+          </a:p>
+        </p:txBody>
+      </p:sp>
+      <p:sp>
+        <p:nvSpPr>
+          <p:cNvPr id="3" name="제목 1">
+            <a:extLst>
+              <a:ext uri="{FF2B5EF4-FFF2-40B4-BE49-F238E27FC236}">
+                <a16:creationId xmlns:a16="http://schemas.microsoft.com/office/drawing/2014/main" id="{50C3227B-BEC3-BF17-6247-ECD2C17D9B1D}"/>
+              </a:ext>
+            </a:extLst>
+          </p:cNvPr>
+          <p:cNvSpPr txBox="1">
+            <a:spLocks/>
+          </p:cNvSpPr>
+          <p:nvPr/>
+        </p:nvSpPr>
+        <p:spPr>
+          <a:xfrm>
+            <a:off x="475645" y="481983"/>
+            <a:ext cx="10353762" cy="766439"/>
+          </a:xfrm>
+          <a:prstGeom prst="rect">
+            <a:avLst/>
+          </a:prstGeom>
+        </p:spPr>
+        <p:txBody>
+          <a:bodyPr vert="horz" lIns="91440" tIns="45720" rIns="91440" bIns="45720" rtlCol="0" anchor="ctr">
+            <a:normAutofit/>
+          </a:bodyPr>
+          <a:lstStyle>
+            <a:lvl1pPr algn="ctr" defTabSz="914400" rtl="0" eaLnBrk="1" latinLnBrk="1" hangingPunct="1">
+              <a:lnSpc>
+                <a:spcPct val="90000"/>
+              </a:lnSpc>
+              <a:spcBef>
+                <a:spcPct val="0"/>
+              </a:spcBef>
+              <a:buNone/>
+              <a:defRPr sz="3200" kern="1200" cap="all" baseline="0">
+                <a:solidFill>
+                  <a:schemeClr val="tx1"/>
+                </a:solidFill>
+                <a:effectLst/>
+                <a:latin typeface="Batang" panose="02030600000101010101" pitchFamily="18" charset="-127"/>
+                <a:ea typeface="Batang" panose="02030600000101010101" pitchFamily="18" charset="-127"/>
+                <a:cs typeface="+mj-cs"/>
+              </a:defRPr>
+            </a:lvl1pPr>
+          </a:lstStyle>
+          <a:p>
+            <a:pPr algn="l"/>
+            <a:r>
+              <a:rPr lang="en-US" altLang="ko-KR" sz="2800" b="1" cap="none" dirty="0">
+                <a:latin typeface="Lora" pitchFamily="2" charset="0"/>
+              </a:rPr>
+              <a:t>The Transformer architecture</a:t>
+            </a:r>
+          </a:p>
+        </p:txBody>
+      </p:sp>
+      <p:sp>
+        <p:nvSpPr>
+          <p:cNvPr id="2" name="TextBox 1">
+            <a:extLst>
+              <a:ext uri="{FF2B5EF4-FFF2-40B4-BE49-F238E27FC236}">
+                <a16:creationId xmlns:a16="http://schemas.microsoft.com/office/drawing/2014/main" id="{21C43261-8309-ABA6-C334-C8ED1EB623F1}"/>
+              </a:ext>
+            </a:extLst>
+          </p:cNvPr>
+          <p:cNvSpPr txBox="1"/>
+          <p:nvPr/>
+        </p:nvSpPr>
+        <p:spPr>
+          <a:xfrm>
+            <a:off x="6966408" y="826899"/>
+            <a:ext cx="4600281" cy="369332"/>
+          </a:xfrm>
+          <a:prstGeom prst="rect">
+            <a:avLst/>
+          </a:prstGeom>
+          <a:noFill/>
+        </p:spPr>
+        <p:txBody>
+          <a:bodyPr wrap="square">
+            <a:spAutoFit/>
+          </a:bodyPr>
+          <a:lstStyle/>
+          <a:p>
+            <a:pPr algn="r"/>
+            <a:r>
+              <a:rPr lang="en-US" altLang="ko-KR" b="1" dirty="0">
+                <a:latin typeface="Lora" pitchFamily="2" charset="0"/>
+              </a:rPr>
+              <a:t>Transformer encoder block</a:t>
+            </a:r>
+          </a:p>
+        </p:txBody>
+      </p:sp>
+    </p:spTree>
+    <p:extLst>
+      <p:ext uri="{BB962C8B-B14F-4D97-AF65-F5344CB8AC3E}">
+        <p14:creationId xmlns:p14="http://schemas.microsoft.com/office/powerpoint/2010/main" val="2241170252"/>
+      </p:ext>
+    </p:extLst>
+  </p:cSld>
+  <p:clrMapOvr>
+    <a:masterClrMapping/>
+  </p:clrMapOvr>
+</p:sld>
+</file>
+
+<file path=ppt/slides/slide32.xml><?xml version="1.0" encoding="utf-8"?>
+<p:sld xmlns:a="http://schemas.openxmlformats.org/drawingml/2006/main" xmlns:r="http://schemas.openxmlformats.org/officeDocument/2006/relationships" xmlns:p="http://schemas.openxmlformats.org/presentationml/2006/main">
+  <p:cSld>
+    <p:spTree>
+      <p:nvGrpSpPr>
+        <p:cNvPr id="1" name="">
+          <a:extLst>
+            <a:ext uri="{FF2B5EF4-FFF2-40B4-BE49-F238E27FC236}">
+              <a16:creationId xmlns:a16="http://schemas.microsoft.com/office/drawing/2014/main" id="{F4D372C5-41FC-9754-4830-C0B67ADEB27D}"/>
+            </a:ext>
+          </a:extLst>
+        </p:cNvPr>
+        <p:cNvGrpSpPr/>
+        <p:nvPr/>
+      </p:nvGrpSpPr>
+      <p:grpSpPr>
+        <a:xfrm>
+          <a:off x="0" y="0"/>
+          <a:ext cx="0" cy="0"/>
+          <a:chOff x="0" y="0"/>
+          <a:chExt cx="0" cy="0"/>
+        </a:xfrm>
+      </p:grpSpPr>
+      <p:sp>
+        <p:nvSpPr>
+          <p:cNvPr id="4" name="슬라이드 번호 개체 틀 3">
+            <a:extLst>
+              <a:ext uri="{FF2B5EF4-FFF2-40B4-BE49-F238E27FC236}">
+                <a16:creationId xmlns:a16="http://schemas.microsoft.com/office/drawing/2014/main" id="{52C883BE-47E8-D5DA-A28E-954BBA54AB86}"/>
+              </a:ext>
+            </a:extLst>
+          </p:cNvPr>
+          <p:cNvSpPr>
+            <a:spLocks noGrp="1"/>
+          </p:cNvSpPr>
+          <p:nvPr>
+            <p:ph type="sldNum" sz="quarter" idx="12"/>
+          </p:nvPr>
+        </p:nvSpPr>
+        <p:spPr>
+          <a:xfrm>
+            <a:off x="10514011" y="6036261"/>
+            <a:ext cx="753545" cy="365125"/>
+          </a:xfrm>
+        </p:spPr>
+        <p:txBody>
+          <a:bodyPr/>
+          <a:lstStyle/>
+          <a:p>
+            <a:fld id="{D57F1E4F-1CFF-5643-939E-217C01CDF565}" type="slidenum">
+              <a:rPr lang="en-US" smtClean="0"/>
+              <a:pPr/>
+              <a:t>32</a:t>
+            </a:fld>
+            <a:endParaRPr lang="en-US" dirty="0"/>
+          </a:p>
+        </p:txBody>
+      </p:sp>
+      <p:sp>
+        <p:nvSpPr>
+          <p:cNvPr id="3" name="제목 1">
+            <a:extLst>
+              <a:ext uri="{FF2B5EF4-FFF2-40B4-BE49-F238E27FC236}">
+                <a16:creationId xmlns:a16="http://schemas.microsoft.com/office/drawing/2014/main" id="{4FF1BE88-7706-6316-E74F-CA94894F0E37}"/>
+              </a:ext>
+            </a:extLst>
+          </p:cNvPr>
+          <p:cNvSpPr txBox="1">
+            <a:spLocks/>
+          </p:cNvSpPr>
+          <p:nvPr/>
+        </p:nvSpPr>
+        <p:spPr>
+          <a:xfrm>
+            <a:off x="475645" y="481983"/>
+            <a:ext cx="10353762" cy="766439"/>
+          </a:xfrm>
+          <a:prstGeom prst="rect">
+            <a:avLst/>
+          </a:prstGeom>
+        </p:spPr>
+        <p:txBody>
+          <a:bodyPr vert="horz" lIns="91440" tIns="45720" rIns="91440" bIns="45720" rtlCol="0" anchor="ctr">
+            <a:normAutofit/>
+          </a:bodyPr>
+          <a:lstStyle>
+            <a:lvl1pPr algn="ctr" defTabSz="914400" rtl="0" eaLnBrk="1" latinLnBrk="1" hangingPunct="1">
+              <a:lnSpc>
+                <a:spcPct val="90000"/>
+              </a:lnSpc>
+              <a:spcBef>
+                <a:spcPct val="0"/>
+              </a:spcBef>
+              <a:buNone/>
+              <a:defRPr sz="3200" kern="1200" cap="all" baseline="0">
+                <a:solidFill>
+                  <a:schemeClr val="tx1"/>
+                </a:solidFill>
+                <a:effectLst/>
+                <a:latin typeface="Batang" panose="02030600000101010101" pitchFamily="18" charset="-127"/>
+                <a:ea typeface="Batang" panose="02030600000101010101" pitchFamily="18" charset="-127"/>
+                <a:cs typeface="+mj-cs"/>
+              </a:defRPr>
+            </a:lvl1pPr>
+          </a:lstStyle>
+          <a:p>
+            <a:pPr algn="l"/>
+            <a:r>
+              <a:rPr lang="en-US" altLang="ko-KR" sz="2800" b="1" cap="none" dirty="0">
+                <a:latin typeface="Lora" pitchFamily="2" charset="0"/>
+              </a:rPr>
+              <a:t>The Transformer architecture</a:t>
+            </a:r>
+          </a:p>
+        </p:txBody>
+      </p:sp>
+      <p:sp>
+        <p:nvSpPr>
+          <p:cNvPr id="2" name="TextBox 1">
+            <a:extLst>
+              <a:ext uri="{FF2B5EF4-FFF2-40B4-BE49-F238E27FC236}">
+                <a16:creationId xmlns:a16="http://schemas.microsoft.com/office/drawing/2014/main" id="{0F64AE2D-BB99-563F-8847-E8512FC74CB1}"/>
+              </a:ext>
+            </a:extLst>
+          </p:cNvPr>
+          <p:cNvSpPr txBox="1"/>
+          <p:nvPr/>
+        </p:nvSpPr>
+        <p:spPr>
+          <a:xfrm>
+            <a:off x="6966408" y="826899"/>
+            <a:ext cx="4600281" cy="369332"/>
+          </a:xfrm>
+          <a:prstGeom prst="rect">
+            <a:avLst/>
+          </a:prstGeom>
+          <a:noFill/>
+        </p:spPr>
+        <p:txBody>
+          <a:bodyPr wrap="square">
+            <a:spAutoFit/>
+          </a:bodyPr>
+          <a:lstStyle/>
+          <a:p>
+            <a:pPr algn="r"/>
+            <a:r>
+              <a:rPr lang="en-US" altLang="ko-KR" b="1" dirty="0">
+                <a:latin typeface="Lora" pitchFamily="2" charset="0"/>
+              </a:rPr>
+              <a:t>Transformer encoder block</a:t>
+            </a:r>
+          </a:p>
+        </p:txBody>
+      </p:sp>
+    </p:spTree>
+    <p:extLst>
+      <p:ext uri="{BB962C8B-B14F-4D97-AF65-F5344CB8AC3E}">
+        <p14:creationId xmlns:p14="http://schemas.microsoft.com/office/powerpoint/2010/main" val="1870135119"/>
+      </p:ext>
+    </p:extLst>
+  </p:cSld>
+  <p:clrMapOvr>
+    <a:masterClrMapping/>
+  </p:clrMapOvr>
+</p:sld>
+</file>
+
+<file path=ppt/slides/slide33.xml><?xml version="1.0" encoding="utf-8"?>
+<p:sld xmlns:a="http://schemas.openxmlformats.org/drawingml/2006/main" xmlns:r="http://schemas.openxmlformats.org/officeDocument/2006/relationships" xmlns:p="http://schemas.openxmlformats.org/presentationml/2006/main">
+  <p:cSld>
+    <p:spTree>
+      <p:nvGrpSpPr>
+        <p:cNvPr id="1" name="">
+          <a:extLst>
+            <a:ext uri="{FF2B5EF4-FFF2-40B4-BE49-F238E27FC236}">
+              <a16:creationId xmlns:a16="http://schemas.microsoft.com/office/drawing/2014/main" id="{90176D13-9606-9ADE-343E-CFDB78AF1BEE}"/>
+            </a:ext>
+          </a:extLst>
+        </p:cNvPr>
+        <p:cNvGrpSpPr/>
+        <p:nvPr/>
+      </p:nvGrpSpPr>
+      <p:grpSpPr>
+        <a:xfrm>
+          <a:off x="0" y="0"/>
+          <a:ext cx="0" cy="0"/>
+          <a:chOff x="0" y="0"/>
+          <a:chExt cx="0" cy="0"/>
+        </a:xfrm>
+      </p:grpSpPr>
+      <p:sp>
+        <p:nvSpPr>
+          <p:cNvPr id="4" name="슬라이드 번호 개체 틀 3">
+            <a:extLst>
+              <a:ext uri="{FF2B5EF4-FFF2-40B4-BE49-F238E27FC236}">
+                <a16:creationId xmlns:a16="http://schemas.microsoft.com/office/drawing/2014/main" id="{429F7A40-60DF-A678-B51B-7620F8F13361}"/>
+              </a:ext>
+            </a:extLst>
+          </p:cNvPr>
+          <p:cNvSpPr>
+            <a:spLocks noGrp="1"/>
+          </p:cNvSpPr>
+          <p:nvPr>
+            <p:ph type="sldNum" sz="quarter" idx="12"/>
+          </p:nvPr>
+        </p:nvSpPr>
+        <p:spPr>
+          <a:xfrm>
+            <a:off x="10514011" y="6036261"/>
+            <a:ext cx="753545" cy="365125"/>
+          </a:xfrm>
+        </p:spPr>
+        <p:txBody>
+          <a:bodyPr/>
+          <a:lstStyle/>
+          <a:p>
+            <a:fld id="{D57F1E4F-1CFF-5643-939E-217C01CDF565}" type="slidenum">
+              <a:rPr lang="en-US" smtClean="0"/>
+              <a:pPr/>
+              <a:t>33</a:t>
+            </a:fld>
+            <a:endParaRPr lang="en-US" dirty="0"/>
+          </a:p>
+        </p:txBody>
+      </p:sp>
+      <p:sp>
+        <p:nvSpPr>
+          <p:cNvPr id="3" name="제목 1">
+            <a:extLst>
+              <a:ext uri="{FF2B5EF4-FFF2-40B4-BE49-F238E27FC236}">
+                <a16:creationId xmlns:a16="http://schemas.microsoft.com/office/drawing/2014/main" id="{C17A03AA-D0E5-0971-6D54-56AEE885548D}"/>
+              </a:ext>
+            </a:extLst>
+          </p:cNvPr>
+          <p:cNvSpPr txBox="1">
+            <a:spLocks/>
+          </p:cNvSpPr>
+          <p:nvPr/>
+        </p:nvSpPr>
+        <p:spPr>
+          <a:xfrm>
+            <a:off x="475645" y="481983"/>
+            <a:ext cx="10353762" cy="766439"/>
+          </a:xfrm>
+          <a:prstGeom prst="rect">
+            <a:avLst/>
+          </a:prstGeom>
+        </p:spPr>
+        <p:txBody>
+          <a:bodyPr vert="horz" lIns="91440" tIns="45720" rIns="91440" bIns="45720" rtlCol="0" anchor="ctr">
+            <a:normAutofit/>
+          </a:bodyPr>
+          <a:lstStyle>
+            <a:lvl1pPr algn="ctr" defTabSz="914400" rtl="0" eaLnBrk="1" latinLnBrk="1" hangingPunct="1">
+              <a:lnSpc>
+                <a:spcPct val="90000"/>
+              </a:lnSpc>
+              <a:spcBef>
+                <a:spcPct val="0"/>
+              </a:spcBef>
+              <a:buNone/>
+              <a:defRPr sz="3200" kern="1200" cap="all" baseline="0">
+                <a:solidFill>
+                  <a:schemeClr val="tx1"/>
+                </a:solidFill>
+                <a:effectLst/>
+                <a:latin typeface="Batang" panose="02030600000101010101" pitchFamily="18" charset="-127"/>
+                <a:ea typeface="Batang" panose="02030600000101010101" pitchFamily="18" charset="-127"/>
+                <a:cs typeface="+mj-cs"/>
+              </a:defRPr>
+            </a:lvl1pPr>
+          </a:lstStyle>
+          <a:p>
+            <a:pPr algn="l"/>
+            <a:r>
+              <a:rPr lang="en-US" altLang="ko-KR" sz="2800" b="1" cap="none" dirty="0">
+                <a:latin typeface="Lora" pitchFamily="2" charset="0"/>
+              </a:rPr>
+              <a:t>The Transformer architecture</a:t>
+            </a:r>
+          </a:p>
+        </p:txBody>
+      </p:sp>
+      <p:sp>
+        <p:nvSpPr>
+          <p:cNvPr id="2" name="TextBox 1">
+            <a:extLst>
+              <a:ext uri="{FF2B5EF4-FFF2-40B4-BE49-F238E27FC236}">
+                <a16:creationId xmlns:a16="http://schemas.microsoft.com/office/drawing/2014/main" id="{61024059-ABE5-E1BC-4E4E-BC75C76D3D57}"/>
+              </a:ext>
+            </a:extLst>
+          </p:cNvPr>
+          <p:cNvSpPr txBox="1"/>
+          <p:nvPr/>
+        </p:nvSpPr>
+        <p:spPr>
+          <a:xfrm>
+            <a:off x="6966408" y="826899"/>
+            <a:ext cx="4600281" cy="369332"/>
+          </a:xfrm>
+          <a:prstGeom prst="rect">
+            <a:avLst/>
+          </a:prstGeom>
+          <a:noFill/>
+        </p:spPr>
+        <p:txBody>
+          <a:bodyPr wrap="square">
+            <a:spAutoFit/>
+          </a:bodyPr>
+          <a:lstStyle/>
+          <a:p>
+            <a:pPr algn="r"/>
+            <a:r>
+              <a:rPr lang="en-US" altLang="ko-KR" b="1" dirty="0">
+                <a:latin typeface="Lora" pitchFamily="2" charset="0"/>
+              </a:rPr>
+              <a:t>Transformer decoder block</a:t>
+            </a:r>
+          </a:p>
+        </p:txBody>
+      </p:sp>
+    </p:spTree>
+    <p:extLst>
+      <p:ext uri="{BB962C8B-B14F-4D97-AF65-F5344CB8AC3E}">
+        <p14:creationId xmlns:p14="http://schemas.microsoft.com/office/powerpoint/2010/main" val="1718748299"/>
+      </p:ext>
+    </p:extLst>
+  </p:cSld>
+  <p:clrMapOvr>
+    <a:masterClrMapping/>
+  </p:clrMapOvr>
+</p:sld>
+</file>
+
+<file path=ppt/slides/slide34.xml><?xml version="1.0" encoding="utf-8"?>
+<p:sld xmlns:a="http://schemas.openxmlformats.org/drawingml/2006/main" xmlns:r="http://schemas.openxmlformats.org/officeDocument/2006/relationships" xmlns:p="http://schemas.openxmlformats.org/presentationml/2006/main">
+  <p:cSld>
+    <p:spTree>
+      <p:nvGrpSpPr>
+        <p:cNvPr id="1" name="">
+          <a:extLst>
+            <a:ext uri="{FF2B5EF4-FFF2-40B4-BE49-F238E27FC236}">
+              <a16:creationId xmlns:a16="http://schemas.microsoft.com/office/drawing/2014/main" id="{8E0E6B01-AA32-CA13-32DA-6B07115A2E12}"/>
+            </a:ext>
+          </a:extLst>
+        </p:cNvPr>
+        <p:cNvGrpSpPr/>
+        <p:nvPr/>
+      </p:nvGrpSpPr>
+      <p:grpSpPr>
+        <a:xfrm>
+          <a:off x="0" y="0"/>
+          <a:ext cx="0" cy="0"/>
+          <a:chOff x="0" y="0"/>
+          <a:chExt cx="0" cy="0"/>
+        </a:xfrm>
+      </p:grpSpPr>
+      <p:sp>
+        <p:nvSpPr>
+          <p:cNvPr id="4" name="슬라이드 번호 개체 틀 3">
+            <a:extLst>
+              <a:ext uri="{FF2B5EF4-FFF2-40B4-BE49-F238E27FC236}">
+                <a16:creationId xmlns:a16="http://schemas.microsoft.com/office/drawing/2014/main" id="{9C1D9962-B0CE-2EE0-1E46-140807A2E99B}"/>
+              </a:ext>
+            </a:extLst>
+          </p:cNvPr>
+          <p:cNvSpPr>
+            <a:spLocks noGrp="1"/>
+          </p:cNvSpPr>
+          <p:nvPr>
+            <p:ph type="sldNum" sz="quarter" idx="12"/>
+          </p:nvPr>
+        </p:nvSpPr>
+        <p:spPr>
+          <a:xfrm>
+            <a:off x="10514011" y="6036261"/>
+            <a:ext cx="753545" cy="365125"/>
+          </a:xfrm>
+        </p:spPr>
+        <p:txBody>
+          <a:bodyPr/>
+          <a:lstStyle/>
+          <a:p>
+            <a:fld id="{D57F1E4F-1CFF-5643-939E-217C01CDF565}" type="slidenum">
+              <a:rPr lang="en-US" smtClean="0"/>
+              <a:pPr/>
+              <a:t>34</a:t>
+            </a:fld>
+            <a:endParaRPr lang="en-US" dirty="0"/>
+          </a:p>
+        </p:txBody>
+      </p:sp>
+      <p:sp>
+        <p:nvSpPr>
+          <p:cNvPr id="3" name="제목 1">
+            <a:extLst>
+              <a:ext uri="{FF2B5EF4-FFF2-40B4-BE49-F238E27FC236}">
+                <a16:creationId xmlns:a16="http://schemas.microsoft.com/office/drawing/2014/main" id="{230A9BD2-0B84-11FF-A28B-35626F1B6944}"/>
+              </a:ext>
+            </a:extLst>
+          </p:cNvPr>
+          <p:cNvSpPr txBox="1">
+            <a:spLocks/>
+          </p:cNvSpPr>
+          <p:nvPr/>
+        </p:nvSpPr>
+        <p:spPr>
+          <a:xfrm>
+            <a:off x="475645" y="481983"/>
+            <a:ext cx="10353762" cy="766439"/>
+          </a:xfrm>
+          <a:prstGeom prst="rect">
+            <a:avLst/>
+          </a:prstGeom>
+        </p:spPr>
+        <p:txBody>
+          <a:bodyPr vert="horz" lIns="91440" tIns="45720" rIns="91440" bIns="45720" rtlCol="0" anchor="ctr">
+            <a:normAutofit/>
+          </a:bodyPr>
+          <a:lstStyle>
+            <a:lvl1pPr algn="ctr" defTabSz="914400" rtl="0" eaLnBrk="1" latinLnBrk="1" hangingPunct="1">
+              <a:lnSpc>
+                <a:spcPct val="90000"/>
+              </a:lnSpc>
+              <a:spcBef>
+                <a:spcPct val="0"/>
+              </a:spcBef>
+              <a:buNone/>
+              <a:defRPr sz="3200" kern="1200" cap="all" baseline="0">
+                <a:solidFill>
+                  <a:schemeClr val="tx1"/>
+                </a:solidFill>
+                <a:effectLst/>
+                <a:latin typeface="Batang" panose="02030600000101010101" pitchFamily="18" charset="-127"/>
+                <a:ea typeface="Batang" panose="02030600000101010101" pitchFamily="18" charset="-127"/>
+                <a:cs typeface="+mj-cs"/>
+              </a:defRPr>
+            </a:lvl1pPr>
+          </a:lstStyle>
+          <a:p>
+            <a:pPr algn="l"/>
+            <a:r>
+              <a:rPr lang="en-US" altLang="ko-KR" sz="2800" b="1" cap="none" dirty="0">
+                <a:latin typeface="Lora" pitchFamily="2" charset="0"/>
+              </a:rPr>
+              <a:t>The Transformer architecture</a:t>
+            </a:r>
+          </a:p>
+        </p:txBody>
+      </p:sp>
+      <p:sp>
+        <p:nvSpPr>
+          <p:cNvPr id="2" name="TextBox 1">
+            <a:extLst>
+              <a:ext uri="{FF2B5EF4-FFF2-40B4-BE49-F238E27FC236}">
+                <a16:creationId xmlns:a16="http://schemas.microsoft.com/office/drawing/2014/main" id="{02DF28C9-1C25-B37C-D11F-BD3D6C9F8864}"/>
+              </a:ext>
+            </a:extLst>
+          </p:cNvPr>
+          <p:cNvSpPr txBox="1"/>
+          <p:nvPr/>
+        </p:nvSpPr>
+        <p:spPr>
+          <a:xfrm>
+            <a:off x="6966408" y="826899"/>
+            <a:ext cx="4600281" cy="369332"/>
+          </a:xfrm>
+          <a:prstGeom prst="rect">
+            <a:avLst/>
+          </a:prstGeom>
+          <a:noFill/>
+        </p:spPr>
+        <p:txBody>
+          <a:bodyPr wrap="square">
+            <a:spAutoFit/>
+          </a:bodyPr>
+          <a:lstStyle/>
+          <a:p>
+            <a:pPr algn="r"/>
+            <a:r>
+              <a:rPr lang="en-US" altLang="ko-KR" b="1" dirty="0">
+                <a:latin typeface="Lora" pitchFamily="2" charset="0"/>
+              </a:rPr>
+              <a:t>Transformer decoder block</a:t>
+            </a:r>
+          </a:p>
+        </p:txBody>
+      </p:sp>
+    </p:spTree>
+    <p:extLst>
+      <p:ext uri="{BB962C8B-B14F-4D97-AF65-F5344CB8AC3E}">
+        <p14:creationId xmlns:p14="http://schemas.microsoft.com/office/powerpoint/2010/main" val="3439332370"/>
+      </p:ext>
+    </p:extLst>
+  </p:cSld>
+  <p:clrMapOvr>
+    <a:masterClrMapping/>
+  </p:clrMapOvr>
+</p:sld>
+</file>
+
+<file path=ppt/slides/slide35.xml><?xml version="1.0" encoding="utf-8"?>
+<p:sld xmlns:a="http://schemas.openxmlformats.org/drawingml/2006/main" xmlns:r="http://schemas.openxmlformats.org/officeDocument/2006/relationships" xmlns:p="http://schemas.openxmlformats.org/presentationml/2006/main">
+  <p:cSld>
+    <p:spTree>
+      <p:nvGrpSpPr>
+        <p:cNvPr id="1" name="">
+          <a:extLst>
+            <a:ext uri="{FF2B5EF4-FFF2-40B4-BE49-F238E27FC236}">
+              <a16:creationId xmlns:a16="http://schemas.microsoft.com/office/drawing/2014/main" id="{D8A8D3A4-C8F8-3A62-1DFF-8BA165EF1A84}"/>
+            </a:ext>
+          </a:extLst>
+        </p:cNvPr>
+        <p:cNvGrpSpPr/>
+        <p:nvPr/>
+      </p:nvGrpSpPr>
+      <p:grpSpPr>
+        <a:xfrm>
+          <a:off x="0" y="0"/>
+          <a:ext cx="0" cy="0"/>
+          <a:chOff x="0" y="0"/>
+          <a:chExt cx="0" cy="0"/>
+        </a:xfrm>
+      </p:grpSpPr>
+      <p:sp>
+        <p:nvSpPr>
+          <p:cNvPr id="4" name="슬라이드 번호 개체 틀 3">
+            <a:extLst>
+              <a:ext uri="{FF2B5EF4-FFF2-40B4-BE49-F238E27FC236}">
+                <a16:creationId xmlns:a16="http://schemas.microsoft.com/office/drawing/2014/main" id="{2824DB55-B4D5-F1AA-CFF1-CCC984361CDF}"/>
+              </a:ext>
+            </a:extLst>
+          </p:cNvPr>
+          <p:cNvSpPr>
+            <a:spLocks noGrp="1"/>
+          </p:cNvSpPr>
+          <p:nvPr>
+            <p:ph type="sldNum" sz="quarter" idx="12"/>
+          </p:nvPr>
+        </p:nvSpPr>
+        <p:spPr>
+          <a:xfrm>
+            <a:off x="10514011" y="6036261"/>
+            <a:ext cx="753545" cy="365125"/>
+          </a:xfrm>
+        </p:spPr>
+        <p:txBody>
+          <a:bodyPr/>
+          <a:lstStyle/>
+          <a:p>
+            <a:fld id="{D57F1E4F-1CFF-5643-939E-217C01CDF565}" type="slidenum">
+              <a:rPr lang="en-US" smtClean="0"/>
+              <a:pPr/>
+              <a:t>35</a:t>
+            </a:fld>
+            <a:endParaRPr lang="en-US" dirty="0"/>
+          </a:p>
+        </p:txBody>
+      </p:sp>
+      <p:sp>
+        <p:nvSpPr>
+          <p:cNvPr id="3" name="제목 1">
+            <a:extLst>
+              <a:ext uri="{FF2B5EF4-FFF2-40B4-BE49-F238E27FC236}">
+                <a16:creationId xmlns:a16="http://schemas.microsoft.com/office/drawing/2014/main" id="{6C23DE18-54F8-881C-5BB2-2CF2DC0929DE}"/>
+              </a:ext>
+            </a:extLst>
+          </p:cNvPr>
+          <p:cNvSpPr txBox="1">
+            <a:spLocks/>
+          </p:cNvSpPr>
+          <p:nvPr/>
+        </p:nvSpPr>
+        <p:spPr>
+          <a:xfrm>
+            <a:off x="475645" y="481983"/>
+            <a:ext cx="10353762" cy="766439"/>
+          </a:xfrm>
+          <a:prstGeom prst="rect">
+            <a:avLst/>
+          </a:prstGeom>
+        </p:spPr>
+        <p:txBody>
+          <a:bodyPr vert="horz" lIns="91440" tIns="45720" rIns="91440" bIns="45720" rtlCol="0" anchor="ctr">
+            <a:normAutofit/>
+          </a:bodyPr>
+          <a:lstStyle>
+            <a:lvl1pPr algn="ctr" defTabSz="914400" rtl="0" eaLnBrk="1" latinLnBrk="1" hangingPunct="1">
+              <a:lnSpc>
+                <a:spcPct val="90000"/>
+              </a:lnSpc>
+              <a:spcBef>
+                <a:spcPct val="0"/>
+              </a:spcBef>
+              <a:buNone/>
+              <a:defRPr sz="3200" kern="1200" cap="all" baseline="0">
+                <a:solidFill>
+                  <a:schemeClr val="tx1"/>
+                </a:solidFill>
+                <a:effectLst/>
+                <a:latin typeface="Batang" panose="02030600000101010101" pitchFamily="18" charset="-127"/>
+                <a:ea typeface="Batang" panose="02030600000101010101" pitchFamily="18" charset="-127"/>
+                <a:cs typeface="+mj-cs"/>
+              </a:defRPr>
+            </a:lvl1pPr>
+          </a:lstStyle>
+          <a:p>
+            <a:pPr algn="l"/>
+            <a:r>
+              <a:rPr lang="en-US" altLang="ko-KR" sz="2800" b="1" cap="none" dirty="0">
+                <a:latin typeface="Lora" pitchFamily="2" charset="0"/>
+              </a:rPr>
+              <a:t>The Transformer architecture</a:t>
+            </a:r>
+          </a:p>
+        </p:txBody>
+      </p:sp>
+      <p:sp>
+        <p:nvSpPr>
+          <p:cNvPr id="2" name="TextBox 1">
+            <a:extLst>
+              <a:ext uri="{FF2B5EF4-FFF2-40B4-BE49-F238E27FC236}">
+                <a16:creationId xmlns:a16="http://schemas.microsoft.com/office/drawing/2014/main" id="{4F248F4F-9556-4A8B-E173-9CAB3530080A}"/>
+              </a:ext>
+            </a:extLst>
+          </p:cNvPr>
+          <p:cNvSpPr txBox="1"/>
+          <p:nvPr/>
+        </p:nvSpPr>
+        <p:spPr>
+          <a:xfrm>
+            <a:off x="6966408" y="826899"/>
+            <a:ext cx="4600281" cy="369332"/>
+          </a:xfrm>
+          <a:prstGeom prst="rect">
+            <a:avLst/>
+          </a:prstGeom>
+          <a:noFill/>
+        </p:spPr>
+        <p:txBody>
+          <a:bodyPr wrap="square">
+            <a:spAutoFit/>
+          </a:bodyPr>
+          <a:lstStyle/>
+          <a:p>
+            <a:pPr algn="r"/>
+            <a:r>
+              <a:rPr lang="en-US" altLang="ko-KR" b="1" dirty="0">
+                <a:latin typeface="Lora" pitchFamily="2" charset="0"/>
+              </a:rPr>
+              <a:t>Transformer decoder block</a:t>
+            </a:r>
+          </a:p>
+        </p:txBody>
+      </p:sp>
+    </p:spTree>
+    <p:extLst>
+      <p:ext uri="{BB962C8B-B14F-4D97-AF65-F5344CB8AC3E}">
+        <p14:creationId xmlns:p14="http://schemas.microsoft.com/office/powerpoint/2010/main" val="467350192"/>
+      </p:ext>
+    </p:extLst>
+  </p:cSld>
+  <p:clrMapOvr>
+    <a:masterClrMapping/>
+  </p:clrMapOvr>
+</p:sld>
+</file>
+
+<file path=ppt/slides/slide36.xml><?xml version="1.0" encoding="utf-8"?>
+<p:sld xmlns:a="http://schemas.openxmlformats.org/drawingml/2006/main" xmlns:r="http://schemas.openxmlformats.org/officeDocument/2006/relationships" xmlns:p="http://schemas.openxmlformats.org/presentationml/2006/main">
+  <p:cSld>
+    <p:spTree>
+      <p:nvGrpSpPr>
+        <p:cNvPr id="1" name="">
+          <a:extLst>
+            <a:ext uri="{FF2B5EF4-FFF2-40B4-BE49-F238E27FC236}">
+              <a16:creationId xmlns:a16="http://schemas.microsoft.com/office/drawing/2014/main" id="{B994EC19-707E-DF6D-24F7-907F0081383E}"/>
+            </a:ext>
+          </a:extLst>
+        </p:cNvPr>
+        <p:cNvGrpSpPr/>
+        <p:nvPr/>
+      </p:nvGrpSpPr>
+      <p:grpSpPr>
+        <a:xfrm>
+          <a:off x="0" y="0"/>
+          <a:ext cx="0" cy="0"/>
+          <a:chOff x="0" y="0"/>
+          <a:chExt cx="0" cy="0"/>
+        </a:xfrm>
+      </p:grpSpPr>
+      <p:sp>
+        <p:nvSpPr>
+          <p:cNvPr id="4" name="슬라이드 번호 개체 틀 3">
+            <a:extLst>
+              <a:ext uri="{FF2B5EF4-FFF2-40B4-BE49-F238E27FC236}">
+                <a16:creationId xmlns:a16="http://schemas.microsoft.com/office/drawing/2014/main" id="{36A9CFDF-5058-9D80-19A7-DD3B0BE0C177}"/>
+              </a:ext>
+            </a:extLst>
+          </p:cNvPr>
+          <p:cNvSpPr>
+            <a:spLocks noGrp="1"/>
+          </p:cNvSpPr>
+          <p:nvPr>
+            <p:ph type="sldNum" sz="quarter" idx="12"/>
+          </p:nvPr>
+        </p:nvSpPr>
+        <p:spPr>
+          <a:xfrm>
+            <a:off x="10514011" y="6036261"/>
+            <a:ext cx="753545" cy="365125"/>
+          </a:xfrm>
+        </p:spPr>
+        <p:txBody>
+          <a:bodyPr/>
+          <a:lstStyle/>
+          <a:p>
+            <a:fld id="{D57F1E4F-1CFF-5643-939E-217C01CDF565}" type="slidenum">
+              <a:rPr lang="en-US" smtClean="0"/>
+              <a:pPr/>
+              <a:t>36</a:t>
+            </a:fld>
+            <a:endParaRPr lang="en-US" dirty="0"/>
+          </a:p>
+        </p:txBody>
+      </p:sp>
+      <p:sp>
+        <p:nvSpPr>
+          <p:cNvPr id="3" name="제목 1">
+            <a:extLst>
+              <a:ext uri="{FF2B5EF4-FFF2-40B4-BE49-F238E27FC236}">
+                <a16:creationId xmlns:a16="http://schemas.microsoft.com/office/drawing/2014/main" id="{AACE83C2-4DF4-71FE-C303-CD5B23076831}"/>
+              </a:ext>
+            </a:extLst>
+          </p:cNvPr>
+          <p:cNvSpPr txBox="1">
+            <a:spLocks/>
+          </p:cNvSpPr>
+          <p:nvPr/>
+        </p:nvSpPr>
+        <p:spPr>
+          <a:xfrm>
+            <a:off x="475645" y="481983"/>
+            <a:ext cx="10353762" cy="766439"/>
+          </a:xfrm>
+          <a:prstGeom prst="rect">
+            <a:avLst/>
+          </a:prstGeom>
+        </p:spPr>
+        <p:txBody>
+          <a:bodyPr vert="horz" lIns="91440" tIns="45720" rIns="91440" bIns="45720" rtlCol="0" anchor="ctr">
+            <a:normAutofit/>
+          </a:bodyPr>
+          <a:lstStyle>
+            <a:lvl1pPr algn="ctr" defTabSz="914400" rtl="0" eaLnBrk="1" latinLnBrk="1" hangingPunct="1">
+              <a:lnSpc>
+                <a:spcPct val="90000"/>
+              </a:lnSpc>
+              <a:spcBef>
+                <a:spcPct val="0"/>
+              </a:spcBef>
+              <a:buNone/>
+              <a:defRPr sz="3200" kern="1200" cap="all" baseline="0">
+                <a:solidFill>
+                  <a:schemeClr val="tx1"/>
+                </a:solidFill>
+                <a:effectLst/>
+                <a:latin typeface="Batang" panose="02030600000101010101" pitchFamily="18" charset="-127"/>
+                <a:ea typeface="Batang" panose="02030600000101010101" pitchFamily="18" charset="-127"/>
+                <a:cs typeface="+mj-cs"/>
+              </a:defRPr>
+            </a:lvl1pPr>
+          </a:lstStyle>
+          <a:p>
+            <a:pPr algn="l"/>
+            <a:r>
+              <a:rPr lang="en-US" altLang="ko-KR" sz="2800" b="1" cap="none" dirty="0">
+                <a:latin typeface="Lora" pitchFamily="2" charset="0"/>
+              </a:rPr>
+              <a:t>The Transformer architecture</a:t>
+            </a:r>
+          </a:p>
+        </p:txBody>
+      </p:sp>
+      <p:sp>
+        <p:nvSpPr>
+          <p:cNvPr id="2" name="TextBox 1">
+            <a:extLst>
+              <a:ext uri="{FF2B5EF4-FFF2-40B4-BE49-F238E27FC236}">
+                <a16:creationId xmlns:a16="http://schemas.microsoft.com/office/drawing/2014/main" id="{1E906E0D-F540-20E8-7C4D-AF65FC880136}"/>
+              </a:ext>
+            </a:extLst>
+          </p:cNvPr>
+          <p:cNvSpPr txBox="1"/>
+          <p:nvPr/>
+        </p:nvSpPr>
+        <p:spPr>
+          <a:xfrm>
+            <a:off x="6966408" y="826899"/>
+            <a:ext cx="4600281" cy="369332"/>
+          </a:xfrm>
+          <a:prstGeom prst="rect">
+            <a:avLst/>
+          </a:prstGeom>
+          <a:noFill/>
+        </p:spPr>
+        <p:txBody>
+          <a:bodyPr wrap="square">
+            <a:spAutoFit/>
+          </a:bodyPr>
+          <a:lstStyle/>
+          <a:p>
+            <a:pPr algn="r"/>
+            <a:r>
+              <a:rPr lang="en-US" altLang="ko-KR" b="1" dirty="0">
+                <a:latin typeface="Lora" pitchFamily="2" charset="0"/>
+              </a:rPr>
+              <a:t>Transformer decoder block</a:t>
+            </a:r>
+          </a:p>
+        </p:txBody>
+      </p:sp>
+    </p:spTree>
+    <p:extLst>
+      <p:ext uri="{BB962C8B-B14F-4D97-AF65-F5344CB8AC3E}">
+        <p14:creationId xmlns:p14="http://schemas.microsoft.com/office/powerpoint/2010/main" val="2562270120"/>
       </p:ext>
     </p:extLst>
   </p:cSld>

--- a/Chapter 15 Language models and the Transformer.pptx
+++ b/Chapter 15 Language models and the Transformer.pptx
@@ -5,10 +5,10 @@
     <p:sldMasterId id="2147483660" r:id="rId1"/>
   </p:sldMasterIdLst>
   <p:notesMasterIdLst>
-    <p:notesMasterId r:id="rId38"/>
+    <p:notesMasterId r:id="rId34"/>
   </p:notesMasterIdLst>
   <p:handoutMasterIdLst>
-    <p:handoutMasterId r:id="rId39"/>
+    <p:handoutMasterId r:id="rId35"/>
   </p:handoutMasterIdLst>
   <p:sldIdLst>
     <p:sldId id="256" r:id="rId2"/>
@@ -41,12 +41,8 @@
     <p:sldId id="1161" r:id="rId29"/>
     <p:sldId id="1163" r:id="rId30"/>
     <p:sldId id="1165" r:id="rId31"/>
-    <p:sldId id="1166" r:id="rId32"/>
-    <p:sldId id="1167" r:id="rId33"/>
-    <p:sldId id="1168" r:id="rId34"/>
-    <p:sldId id="1169" r:id="rId35"/>
-    <p:sldId id="1170" r:id="rId36"/>
-    <p:sldId id="1171" r:id="rId37"/>
+    <p:sldId id="1170" r:id="rId32"/>
+    <p:sldId id="1171" r:id="rId33"/>
   </p:sldIdLst>
   <p:sldSz cx="12192000" cy="6858000"/>
   <p:notesSz cx="6858000" cy="9144000"/>
@@ -184,10 +180,6 @@
             <p14:sldId id="1161"/>
             <p14:sldId id="1163"/>
             <p14:sldId id="1165"/>
-            <p14:sldId id="1166"/>
-            <p14:sldId id="1167"/>
-            <p14:sldId id="1168"/>
-            <p14:sldId id="1169"/>
             <p14:sldId id="1170"/>
             <p14:sldId id="1171"/>
           </p14:sldIdLst>
@@ -19685,7 +19677,7 @@
         </p:blipFill>
         <p:spPr>
           <a:xfrm>
-            <a:off x="1767466" y="1742979"/>
+            <a:off x="1056266" y="2927906"/>
             <a:ext cx="3804659" cy="3468955"/>
           </a:xfrm>
           <a:prstGeom prst="rect">
@@ -19707,7 +19699,7 @@
         </p:nvSpPr>
         <p:spPr>
           <a:xfrm>
-            <a:off x="3159126" y="1893150"/>
+            <a:off x="2447926" y="3078077"/>
             <a:ext cx="655782" cy="2497875"/>
           </a:xfrm>
           <a:prstGeom prst="rect">
@@ -19763,7 +19755,7 @@
         </p:nvCxnSpPr>
         <p:spPr>
           <a:xfrm flipV="1">
-            <a:off x="3814908" y="2456639"/>
+            <a:off x="3103708" y="3641566"/>
             <a:ext cx="4621551" cy="685449"/>
           </a:xfrm>
           <a:prstGeom prst="bentConnector2">
@@ -19803,7 +19795,7 @@
         </p:nvSpPr>
         <p:spPr>
           <a:xfrm>
-            <a:off x="6731391" y="1766018"/>
+            <a:off x="6020191" y="2950945"/>
             <a:ext cx="3127802" cy="338554"/>
           </a:xfrm>
           <a:prstGeom prst="rect">
@@ -19859,7 +19851,7 @@
         </p:nvSpPr>
         <p:spPr>
           <a:xfrm>
-            <a:off x="6731391" y="2118085"/>
+            <a:off x="6020191" y="3303012"/>
             <a:ext cx="3410136" cy="338554"/>
           </a:xfrm>
           <a:prstGeom prst="rect">
@@ -19942,6 +19934,349 @@
               <a:effectLst/>
               <a:latin typeface="Lora" pitchFamily="2" charset="0"/>
             </a:endParaRPr>
+          </a:p>
+        </p:txBody>
+      </p:sp>
+      <p:sp>
+        <p:nvSpPr>
+          <p:cNvPr id="11" name="TextBox 10">
+            <a:extLst>
+              <a:ext uri="{FF2B5EF4-FFF2-40B4-BE49-F238E27FC236}">
+                <a16:creationId xmlns:a16="http://schemas.microsoft.com/office/drawing/2014/main" id="{C25B9962-25D9-08B9-5AFA-8203049ECF24}"/>
+              </a:ext>
+            </a:extLst>
+          </p:cNvPr>
+          <p:cNvSpPr txBox="1"/>
+          <p:nvPr/>
+        </p:nvSpPr>
+        <p:spPr>
+          <a:xfrm>
+            <a:off x="558799" y="1251977"/>
+            <a:ext cx="11007889" cy="1162498"/>
+          </a:xfrm>
+          <a:prstGeom prst="rect">
+            <a:avLst/>
+          </a:prstGeom>
+          <a:noFill/>
+        </p:spPr>
+        <p:txBody>
+          <a:bodyPr wrap="square">
+            <a:spAutoFit/>
+          </a:bodyPr>
+          <a:lstStyle/>
+          <a:p>
+            <a:pPr>
+              <a:lnSpc>
+                <a:spcPct val="150000"/>
+              </a:lnSpc>
+            </a:pPr>
+            <a:r>
+              <a:rPr lang="ko-KR" altLang="en-US" sz="1600" dirty="0">
+                <a:latin typeface="D2Coding" panose="020B0609020101020101" pitchFamily="49" charset="-127"/>
+                <a:ea typeface="D2Coding" panose="020B0609020101020101" pitchFamily="49" charset="-127"/>
+              </a:rPr>
+              <a:t>트랜스포머 인코더는 </a:t>
+            </a:r>
+            <a:r>
+              <a:rPr lang="en-US" altLang="ko-KR" sz="1600" dirty="0">
+                <a:latin typeface="D2Coding" panose="020B0609020101020101" pitchFamily="49" charset="-127"/>
+                <a:ea typeface="D2Coding" panose="020B0609020101020101" pitchFamily="49" charset="-127"/>
+              </a:rPr>
+              <a:t>RNN</a:t>
+            </a:r>
+            <a:r>
+              <a:rPr lang="ko-KR" altLang="en-US" sz="1600" dirty="0">
+                <a:latin typeface="D2Coding" panose="020B0609020101020101" pitchFamily="49" charset="-127"/>
+                <a:ea typeface="D2Coding" panose="020B0609020101020101" pitchFamily="49" charset="-127"/>
+              </a:rPr>
+              <a:t> 처럼 입력된 문장의 모든 단어 벡터들을 중간에 하나로 뭉치지 않고</a:t>
+            </a:r>
+            <a:r>
+              <a:rPr lang="en-US" altLang="ko-KR" sz="1600" dirty="0">
+                <a:latin typeface="D2Coding" panose="020B0609020101020101" pitchFamily="49" charset="-127"/>
+                <a:ea typeface="D2Coding" panose="020B0609020101020101" pitchFamily="49" charset="-127"/>
+              </a:rPr>
+              <a:t>, </a:t>
+            </a:r>
+            <a:r>
+              <a:rPr lang="ko-KR" altLang="en-US" sz="1600" dirty="0">
+                <a:latin typeface="D2Coding" panose="020B0609020101020101" pitchFamily="49" charset="-127"/>
+                <a:ea typeface="D2Coding" panose="020B0609020101020101" pitchFamily="49" charset="-127"/>
+              </a:rPr>
+              <a:t>입력 문장이 </a:t>
+            </a:r>
+            <a:r>
+              <a:rPr lang="en-US" altLang="ko-KR" sz="1600" dirty="0">
+                <a:latin typeface="D2Coding" panose="020B0609020101020101" pitchFamily="49" charset="-127"/>
+                <a:ea typeface="D2Coding" panose="020B0609020101020101" pitchFamily="49" charset="-127"/>
+              </a:rPr>
+              <a:t>30</a:t>
+            </a:r>
+            <a:r>
+              <a:rPr lang="ko-KR" altLang="en-US" sz="1600" dirty="0">
+                <a:latin typeface="D2Coding" panose="020B0609020101020101" pitchFamily="49" charset="-127"/>
+                <a:ea typeface="D2Coding" panose="020B0609020101020101" pitchFamily="49" charset="-127"/>
+              </a:rPr>
+              <a:t>개</a:t>
+            </a:r>
+            <a:r>
+              <a:rPr lang="en-US" altLang="ko-KR" sz="1600" dirty="0">
+                <a:latin typeface="D2Coding" panose="020B0609020101020101" pitchFamily="49" charset="-127"/>
+                <a:ea typeface="D2Coding" panose="020B0609020101020101" pitchFamily="49" charset="-127"/>
+              </a:rPr>
+              <a:t>,</a:t>
+            </a:r>
+            <a:r>
+              <a:rPr lang="ko-KR" altLang="en-US" sz="1600" dirty="0">
+                <a:latin typeface="D2Coding" panose="020B0609020101020101" pitchFamily="49" charset="-127"/>
+                <a:ea typeface="D2Coding" panose="020B0609020101020101" pitchFamily="49" charset="-127"/>
+              </a:rPr>
+              <a:t> </a:t>
+            </a:r>
+            <a:r>
+              <a:rPr lang="en-US" altLang="ko-KR" sz="1600" dirty="0">
+                <a:latin typeface="D2Coding" panose="020B0609020101020101" pitchFamily="49" charset="-127"/>
+                <a:ea typeface="D2Coding" panose="020B0609020101020101" pitchFamily="49" charset="-127"/>
+              </a:rPr>
+              <a:t>100</a:t>
+            </a:r>
+            <a:r>
+              <a:rPr lang="ko-KR" altLang="en-US" sz="1600" dirty="0">
+                <a:latin typeface="D2Coding" panose="020B0609020101020101" pitchFamily="49" charset="-127"/>
+                <a:ea typeface="D2Coding" panose="020B0609020101020101" pitchFamily="49" charset="-127"/>
+              </a:rPr>
+              <a:t>개 단어로 구성되어도 각각 독립된 형태로 메모리에 전부 유지</a:t>
+            </a:r>
+            <a:r>
+              <a:rPr lang="en-US" altLang="ko-KR" sz="1600" dirty="0">
+                <a:latin typeface="D2Coding" panose="020B0609020101020101" pitchFamily="49" charset="-127"/>
+                <a:ea typeface="D2Coding" panose="020B0609020101020101" pitchFamily="49" charset="-127"/>
+              </a:rPr>
+              <a:t>(ChatGPT</a:t>
+            </a:r>
+            <a:r>
+              <a:rPr lang="ko-KR" altLang="en-US" sz="1600" dirty="0">
+                <a:latin typeface="D2Coding" panose="020B0609020101020101" pitchFamily="49" charset="-127"/>
+                <a:ea typeface="D2Coding" panose="020B0609020101020101" pitchFamily="49" charset="-127"/>
+              </a:rPr>
+              <a:t>나 다른 </a:t>
+            </a:r>
+            <a:r>
+              <a:rPr lang="en-US" altLang="ko-KR" sz="1600" dirty="0">
+                <a:latin typeface="D2Coding" panose="020B0609020101020101" pitchFamily="49" charset="-127"/>
+                <a:ea typeface="D2Coding" panose="020B0609020101020101" pitchFamily="49" charset="-127"/>
+              </a:rPr>
+              <a:t>AI </a:t>
+            </a:r>
+            <a:r>
+              <a:rPr lang="ko-KR" altLang="en-US" sz="1600" dirty="0">
+                <a:latin typeface="D2Coding" panose="020B0609020101020101" pitchFamily="49" charset="-127"/>
+                <a:ea typeface="D2Coding" panose="020B0609020101020101" pitchFamily="49" charset="-127"/>
+              </a:rPr>
+              <a:t>모델을 쓸 때 </a:t>
+            </a:r>
+            <a:r>
+              <a:rPr lang="en-US" altLang="ko-KR" sz="1600" dirty="0">
+                <a:latin typeface="D2Coding" panose="020B0609020101020101" pitchFamily="49" charset="-127"/>
+                <a:ea typeface="D2Coding" panose="020B0609020101020101" pitchFamily="49" charset="-127"/>
+              </a:rPr>
+              <a:t>＂</a:t>
+            </a:r>
+            <a:r>
+              <a:rPr lang="ko-KR" altLang="en-US" sz="1600" dirty="0">
+                <a:latin typeface="D2Coding" panose="020B0609020101020101" pitchFamily="49" charset="-127"/>
+                <a:ea typeface="D2Coding" panose="020B0609020101020101" pitchFamily="49" charset="-127"/>
+              </a:rPr>
+              <a:t>한 번에 입력할 수 있는 글자 수 제한</a:t>
+            </a:r>
+            <a:r>
+              <a:rPr lang="en-US" altLang="ko-KR" sz="1600" dirty="0">
+                <a:latin typeface="D2Coding" panose="020B0609020101020101" pitchFamily="49" charset="-127"/>
+                <a:ea typeface="D2Coding" panose="020B0609020101020101" pitchFamily="49" charset="-127"/>
+              </a:rPr>
+              <a:t>_Context Window)</a:t>
+            </a:r>
+            <a:endParaRPr lang="ko-KR" altLang="en-US" sz="1600" dirty="0">
+              <a:latin typeface="D2Coding" panose="020B0609020101020101" pitchFamily="49" charset="-127"/>
+              <a:ea typeface="D2Coding" panose="020B0609020101020101" pitchFamily="49" charset="-127"/>
+            </a:endParaRPr>
+          </a:p>
+        </p:txBody>
+      </p:sp>
+      <p:sp>
+        <p:nvSpPr>
+          <p:cNvPr id="16" name="TextBox 15">
+            <a:extLst>
+              <a:ext uri="{FF2B5EF4-FFF2-40B4-BE49-F238E27FC236}">
+                <a16:creationId xmlns:a16="http://schemas.microsoft.com/office/drawing/2014/main" id="{7A779E95-7CCB-95C4-4EB2-22418D933952}"/>
+              </a:ext>
+            </a:extLst>
+          </p:cNvPr>
+          <p:cNvSpPr txBox="1"/>
+          <p:nvPr/>
+        </p:nvSpPr>
+        <p:spPr>
+          <a:xfrm>
+            <a:off x="6911211" y="4679082"/>
+            <a:ext cx="4710674" cy="1569660"/>
+          </a:xfrm>
+          <a:prstGeom prst="rect">
+            <a:avLst/>
+          </a:prstGeom>
+          <a:noFill/>
+        </p:spPr>
+        <p:txBody>
+          <a:bodyPr wrap="square">
+            <a:spAutoFit/>
+          </a:bodyPr>
+          <a:lstStyle/>
+          <a:p>
+            <a:pPr marL="285750" indent="-285750">
+              <a:buFont typeface="Wingdings" panose="05000000000000000000" pitchFamily="2" charset="2"/>
+              <a:buChar char="v"/>
+            </a:pPr>
+            <a:r>
+              <a:rPr lang="ko-KR" altLang="en-US" sz="1200" dirty="0" err="1">
+                <a:latin typeface="D2Coding" panose="020B0609020101020101" pitchFamily="49" charset="-127"/>
+                <a:ea typeface="D2Coding" panose="020B0609020101020101" pitchFamily="49" charset="-127"/>
+              </a:rPr>
+              <a:t>RNN은</a:t>
+            </a:r>
+            <a:r>
+              <a:rPr lang="ko-KR" altLang="en-US" sz="1200" dirty="0">
+                <a:latin typeface="D2Coding" panose="020B0609020101020101" pitchFamily="49" charset="-127"/>
+                <a:ea typeface="D2Coding" panose="020B0609020101020101" pitchFamily="49" charset="-127"/>
+              </a:rPr>
+              <a:t> 아무리 긴 문장이 와도 단 하나의 고정된 가방(</a:t>
+            </a:r>
+            <a:r>
+              <a:rPr lang="ko-KR" altLang="en-US" sz="1200" dirty="0" err="1">
+                <a:latin typeface="D2Coding" panose="020B0609020101020101" pitchFamily="49" charset="-127"/>
+                <a:ea typeface="D2Coding" panose="020B0609020101020101" pitchFamily="49" charset="-127"/>
+              </a:rPr>
+              <a:t>Context</a:t>
+            </a:r>
+            <a:r>
+              <a:rPr lang="ko-KR" altLang="en-US" sz="1200" dirty="0">
+                <a:latin typeface="D2Coding" panose="020B0609020101020101" pitchFamily="49" charset="-127"/>
+                <a:ea typeface="D2Coding" panose="020B0609020101020101" pitchFamily="49" charset="-127"/>
+              </a:rPr>
+              <a:t> </a:t>
+            </a:r>
+            <a:r>
+              <a:rPr lang="ko-KR" altLang="en-US" sz="1200" dirty="0" err="1">
+                <a:latin typeface="D2Coding" panose="020B0609020101020101" pitchFamily="49" charset="-127"/>
+                <a:ea typeface="D2Coding" panose="020B0609020101020101" pitchFamily="49" charset="-127"/>
+              </a:rPr>
+              <a:t>Vector</a:t>
+            </a:r>
+            <a:r>
+              <a:rPr lang="ko-KR" altLang="en-US" sz="1200" dirty="0">
+                <a:latin typeface="D2Coding" panose="020B0609020101020101" pitchFamily="49" charset="-127"/>
+                <a:ea typeface="D2Coding" panose="020B0609020101020101" pitchFamily="49" charset="-127"/>
+              </a:rPr>
+              <a:t>)</a:t>
+            </a:r>
+            <a:r>
+              <a:rPr lang="ko-KR" altLang="en-US" sz="1200" dirty="0" err="1">
+                <a:latin typeface="D2Coding" panose="020B0609020101020101" pitchFamily="49" charset="-127"/>
+                <a:ea typeface="D2Coding" panose="020B0609020101020101" pitchFamily="49" charset="-127"/>
+              </a:rPr>
+              <a:t>에</a:t>
+            </a:r>
+            <a:r>
+              <a:rPr lang="ko-KR" altLang="en-US" sz="1200" dirty="0">
+                <a:latin typeface="D2Coding" panose="020B0609020101020101" pitchFamily="49" charset="-127"/>
+                <a:ea typeface="D2Coding" panose="020B0609020101020101" pitchFamily="49" charset="-127"/>
+              </a:rPr>
+              <a:t> 모든 걸 억지로 밀어 넣어야 해서 긴 문장을 읽을 때 앞부분을 까먹는 한계</a:t>
+            </a:r>
+          </a:p>
+          <a:p>
+            <a:pPr marL="285750" indent="-285750">
+              <a:buFont typeface="Wingdings" panose="05000000000000000000" pitchFamily="2" charset="2"/>
+              <a:buChar char="v"/>
+            </a:pPr>
+            <a:endParaRPr lang="ko-KR" altLang="en-US" sz="1200" dirty="0">
+              <a:latin typeface="D2Coding" panose="020B0609020101020101" pitchFamily="49" charset="-127"/>
+              <a:ea typeface="D2Coding" panose="020B0609020101020101" pitchFamily="49" charset="-127"/>
+            </a:endParaRPr>
+          </a:p>
+          <a:p>
+            <a:pPr marL="285750" indent="-285750">
+              <a:buFont typeface="Wingdings" panose="05000000000000000000" pitchFamily="2" charset="2"/>
+              <a:buChar char="v"/>
+            </a:pPr>
+            <a:r>
+              <a:rPr lang="en-US" altLang="ko-KR" sz="1200" dirty="0">
+                <a:latin typeface="D2Coding" panose="020B0609020101020101" pitchFamily="49" charset="-127"/>
+                <a:ea typeface="D2Coding" panose="020B0609020101020101" pitchFamily="49" charset="-127"/>
+              </a:rPr>
+              <a:t>Transformer</a:t>
+            </a:r>
+            <a:r>
+              <a:rPr lang="ko-KR" altLang="en-US" sz="1200" dirty="0">
+                <a:latin typeface="D2Coding" panose="020B0609020101020101" pitchFamily="49" charset="-127"/>
+                <a:ea typeface="D2Coding" panose="020B0609020101020101" pitchFamily="49" charset="-127"/>
+              </a:rPr>
+              <a:t>는 문장의 모든 단어 벡터를 메모리에 그대로 펼쳐 놓은 뒤, </a:t>
+            </a:r>
+            <a:r>
+              <a:rPr lang="ko-KR" altLang="en-US" sz="1200" dirty="0" err="1">
+                <a:latin typeface="D2Coding" panose="020B0609020101020101" pitchFamily="49" charset="-127"/>
+                <a:ea typeface="D2Coding" panose="020B0609020101020101" pitchFamily="49" charset="-127"/>
+              </a:rPr>
+              <a:t>Query</a:t>
+            </a:r>
+            <a:r>
+              <a:rPr lang="ko-KR" altLang="en-US" sz="1200" dirty="0">
+                <a:latin typeface="D2Coding" panose="020B0609020101020101" pitchFamily="49" charset="-127"/>
+                <a:ea typeface="D2Coding" panose="020B0609020101020101" pitchFamily="49" charset="-127"/>
+              </a:rPr>
+              <a:t>, </a:t>
+            </a:r>
+            <a:r>
+              <a:rPr lang="ko-KR" altLang="en-US" sz="1200" dirty="0" err="1">
+                <a:latin typeface="D2Coding" panose="020B0609020101020101" pitchFamily="49" charset="-127"/>
+                <a:ea typeface="D2Coding" panose="020B0609020101020101" pitchFamily="49" charset="-127"/>
+              </a:rPr>
+              <a:t>Key</a:t>
+            </a:r>
+            <a:r>
+              <a:rPr lang="ko-KR" altLang="en-US" sz="1200" dirty="0">
+                <a:latin typeface="D2Coding" panose="020B0609020101020101" pitchFamily="49" charset="-127"/>
+                <a:ea typeface="D2Coding" panose="020B0609020101020101" pitchFamily="49" charset="-127"/>
+              </a:rPr>
+              <a:t>, </a:t>
+            </a:r>
+            <a:r>
+              <a:rPr lang="ko-KR" altLang="en-US" sz="1200" dirty="0" err="1">
+                <a:latin typeface="D2Coding" panose="020B0609020101020101" pitchFamily="49" charset="-127"/>
+                <a:ea typeface="D2Coding" panose="020B0609020101020101" pitchFamily="49" charset="-127"/>
+              </a:rPr>
+              <a:t>Value</a:t>
+            </a:r>
+            <a:r>
+              <a:rPr lang="ko-KR" altLang="en-US" sz="1200" dirty="0">
+                <a:latin typeface="D2Coding" panose="020B0609020101020101" pitchFamily="49" charset="-127"/>
+                <a:ea typeface="D2Coding" panose="020B0609020101020101" pitchFamily="49" charset="-127"/>
+              </a:rPr>
+              <a:t> 검색 시스템(</a:t>
+            </a:r>
+            <a:r>
+              <a:rPr lang="ko-KR" altLang="en-US" sz="1200" dirty="0" err="1">
+                <a:latin typeface="D2Coding" panose="020B0609020101020101" pitchFamily="49" charset="-127"/>
+                <a:ea typeface="D2Coding" panose="020B0609020101020101" pitchFamily="49" charset="-127"/>
+              </a:rPr>
+              <a:t>어텐션</a:t>
+            </a:r>
+            <a:r>
+              <a:rPr lang="ko-KR" altLang="en-US" sz="1200" dirty="0">
+                <a:latin typeface="D2Coding" panose="020B0609020101020101" pitchFamily="49" charset="-127"/>
+                <a:ea typeface="D2Coding" panose="020B0609020101020101" pitchFamily="49" charset="-127"/>
+              </a:rPr>
+              <a:t>)을 통해 매 순간 필요한 단어의 정보로 직접 링크를 연결하여 이 한계를 완벽하게 극복</a:t>
+            </a:r>
           </a:p>
         </p:txBody>
       </p:sp>
@@ -23847,6 +24182,476 @@
                 <a:latin typeface="Lora" pitchFamily="2" charset="0"/>
               </a:rPr>
               <a:t>Transformer encoder block</a:t>
+            </a:r>
+          </a:p>
+        </p:txBody>
+      </p:sp>
+      <p:sp>
+        <p:nvSpPr>
+          <p:cNvPr id="7" name="TextBox 6">
+            <a:extLst>
+              <a:ext uri="{FF2B5EF4-FFF2-40B4-BE49-F238E27FC236}">
+                <a16:creationId xmlns:a16="http://schemas.microsoft.com/office/drawing/2014/main" id="{A1358746-50B3-AD72-1BE9-1601D4720F4B}"/>
+              </a:ext>
+            </a:extLst>
+          </p:cNvPr>
+          <p:cNvSpPr txBox="1"/>
+          <p:nvPr/>
+        </p:nvSpPr>
+        <p:spPr>
+          <a:xfrm>
+            <a:off x="618171" y="1247854"/>
+            <a:ext cx="10948518" cy="1711815"/>
+          </a:xfrm>
+          <a:prstGeom prst="rect">
+            <a:avLst/>
+          </a:prstGeom>
+          <a:noFill/>
+        </p:spPr>
+        <p:txBody>
+          <a:bodyPr wrap="square">
+            <a:spAutoFit/>
+          </a:bodyPr>
+          <a:lstStyle/>
+          <a:p>
+            <a:pPr marL="285750" indent="-285750">
+              <a:lnSpc>
+                <a:spcPct val="150000"/>
+              </a:lnSpc>
+              <a:buFont typeface="Wingdings" panose="05000000000000000000" pitchFamily="2" charset="2"/>
+              <a:buChar char="v"/>
+            </a:pPr>
+            <a:r>
+              <a:rPr lang="ko-KR" altLang="en-US" dirty="0">
+                <a:latin typeface="D2Coding" panose="020B0609020101020101" pitchFamily="49" charset="-127"/>
+                <a:ea typeface="D2Coding" panose="020B0609020101020101" pitchFamily="49" charset="-127"/>
+              </a:rPr>
+              <a:t>과거 (</a:t>
+            </a:r>
+            <a:r>
+              <a:rPr lang="ko-KR" altLang="en-US" dirty="0" err="1">
+                <a:latin typeface="D2Coding" panose="020B0609020101020101" pitchFamily="49" charset="-127"/>
+                <a:ea typeface="D2Coding" panose="020B0609020101020101" pitchFamily="49" charset="-127"/>
+              </a:rPr>
+              <a:t>Cross-Attention</a:t>
+            </a:r>
+            <a:r>
+              <a:rPr lang="ko-KR" altLang="en-US" dirty="0">
+                <a:latin typeface="D2Coding" panose="020B0609020101020101" pitchFamily="49" charset="-127"/>
+                <a:ea typeface="D2Coding" panose="020B0609020101020101" pitchFamily="49" charset="-127"/>
+              </a:rPr>
+              <a:t>): 스페인어 원문(</a:t>
+            </a:r>
+            <a:r>
+              <a:rPr lang="ko-KR" altLang="en-US" dirty="0" err="1">
+                <a:latin typeface="D2Coding" panose="020B0609020101020101" pitchFamily="49" charset="-127"/>
+                <a:ea typeface="D2Coding" panose="020B0609020101020101" pitchFamily="49" charset="-127"/>
+              </a:rPr>
+              <a:t>Source</a:t>
+            </a:r>
+            <a:r>
+              <a:rPr lang="ko-KR" altLang="en-US" dirty="0">
+                <a:latin typeface="D2Coding" panose="020B0609020101020101" pitchFamily="49" charset="-127"/>
+                <a:ea typeface="D2Coding" panose="020B0609020101020101" pitchFamily="49" charset="-127"/>
+              </a:rPr>
+              <a:t>)과 영어 번역문(Target)</a:t>
+            </a:r>
+            <a:r>
+              <a:rPr lang="ko-KR" altLang="en-US" dirty="0" err="1">
+                <a:latin typeface="D2Coding" panose="020B0609020101020101" pitchFamily="49" charset="-127"/>
+                <a:ea typeface="D2Coding" panose="020B0609020101020101" pitchFamily="49" charset="-127"/>
+              </a:rPr>
+              <a:t>처럼</a:t>
+            </a:r>
+            <a:r>
+              <a:rPr lang="ko-KR" altLang="en-US" dirty="0">
+                <a:latin typeface="D2Coding" panose="020B0609020101020101" pitchFamily="49" charset="-127"/>
+                <a:ea typeface="D2Coding" panose="020B0609020101020101" pitchFamily="49" charset="-127"/>
+              </a:rPr>
+              <a:t> 서로 다른 두 문장 사이에서 짝을 맞추는 용도로 사용</a:t>
+            </a:r>
+          </a:p>
+          <a:p>
+            <a:pPr marL="285750" indent="-285750">
+              <a:lnSpc>
+                <a:spcPct val="150000"/>
+              </a:lnSpc>
+              <a:buFont typeface="Wingdings" panose="05000000000000000000" pitchFamily="2" charset="2"/>
+              <a:buChar char="v"/>
+            </a:pPr>
+            <a:r>
+              <a:rPr lang="ko-KR" altLang="en-US" dirty="0">
+                <a:latin typeface="D2Coding" panose="020B0609020101020101" pitchFamily="49" charset="-127"/>
+                <a:ea typeface="D2Coding" panose="020B0609020101020101" pitchFamily="49" charset="-127"/>
+              </a:rPr>
+              <a:t>트랜스포머 (</a:t>
+            </a:r>
+            <a:r>
+              <a:rPr lang="ko-KR" altLang="en-US" dirty="0" err="1">
+                <a:latin typeface="D2Coding" panose="020B0609020101020101" pitchFamily="49" charset="-127"/>
+                <a:ea typeface="D2Coding" panose="020B0609020101020101" pitchFamily="49" charset="-127"/>
+              </a:rPr>
+              <a:t>Self-Attention</a:t>
+            </a:r>
+            <a:r>
+              <a:rPr lang="ko-KR" altLang="en-US" dirty="0">
+                <a:latin typeface="D2Coding" panose="020B0609020101020101" pitchFamily="49" charset="-127"/>
+                <a:ea typeface="D2Coding" panose="020B0609020101020101" pitchFamily="49" charset="-127"/>
+              </a:rPr>
+              <a:t>): </a:t>
+            </a:r>
+            <a:r>
+              <a:rPr lang="ko-KR" altLang="en-US" dirty="0" err="1">
+                <a:latin typeface="D2Coding" panose="020B0609020101020101" pitchFamily="49" charset="-127"/>
+                <a:ea typeface="D2Coding" panose="020B0609020101020101" pitchFamily="49" charset="-127"/>
+              </a:rPr>
+              <a:t>query</a:t>
+            </a:r>
+            <a:r>
+              <a:rPr lang="ko-KR" altLang="en-US" dirty="0">
+                <a:latin typeface="D2Coding" panose="020B0609020101020101" pitchFamily="49" charset="-127"/>
+                <a:ea typeface="D2Coding" panose="020B0609020101020101" pitchFamily="49" charset="-127"/>
+              </a:rPr>
+              <a:t>, </a:t>
+            </a:r>
+            <a:r>
+              <a:rPr lang="ko-KR" altLang="en-US" dirty="0" err="1">
+                <a:latin typeface="D2Coding" panose="020B0609020101020101" pitchFamily="49" charset="-127"/>
+                <a:ea typeface="D2Coding" panose="020B0609020101020101" pitchFamily="49" charset="-127"/>
+              </a:rPr>
+              <a:t>key</a:t>
+            </a:r>
+            <a:r>
+              <a:rPr lang="ko-KR" altLang="en-US" dirty="0">
+                <a:latin typeface="D2Coding" panose="020B0609020101020101" pitchFamily="49" charset="-127"/>
+                <a:ea typeface="D2Coding" panose="020B0609020101020101" pitchFamily="49" charset="-127"/>
+              </a:rPr>
+              <a:t>, </a:t>
+            </a:r>
+            <a:r>
+              <a:rPr lang="ko-KR" altLang="en-US" dirty="0" err="1">
+                <a:latin typeface="D2Coding" panose="020B0609020101020101" pitchFamily="49" charset="-127"/>
+                <a:ea typeface="D2Coding" panose="020B0609020101020101" pitchFamily="49" charset="-127"/>
+              </a:rPr>
+              <a:t>value</a:t>
+            </a:r>
+            <a:r>
+              <a:rPr lang="ko-KR" altLang="en-US" dirty="0">
+                <a:latin typeface="D2Coding" panose="020B0609020101020101" pitchFamily="49" charset="-127"/>
+                <a:ea typeface="D2Coding" panose="020B0609020101020101" pitchFamily="49" charset="-127"/>
+              </a:rPr>
+              <a:t> 자리에 전부 동일한 하나의 문장을 입력하여 문장 스스로가 문장 내부의 다른 단어들과 연관성을 계산하는 방식</a:t>
+            </a:r>
+          </a:p>
+        </p:txBody>
+      </p:sp>
+      <p:sp>
+        <p:nvSpPr>
+          <p:cNvPr id="9" name="TextBox 8">
+            <a:extLst>
+              <a:ext uri="{FF2B5EF4-FFF2-40B4-BE49-F238E27FC236}">
+                <a16:creationId xmlns:a16="http://schemas.microsoft.com/office/drawing/2014/main" id="{B16C6FF8-C357-278E-5E1B-BE80BEA89434}"/>
+              </a:ext>
+            </a:extLst>
+          </p:cNvPr>
+          <p:cNvSpPr txBox="1"/>
+          <p:nvPr/>
+        </p:nvSpPr>
+        <p:spPr>
+          <a:xfrm>
+            <a:off x="1243085" y="3343803"/>
+            <a:ext cx="10323603" cy="2554545"/>
+          </a:xfrm>
+          <a:prstGeom prst="rect">
+            <a:avLst/>
+          </a:prstGeom>
+          <a:noFill/>
+          <a:ln>
+            <a:solidFill>
+              <a:schemeClr val="tx1"/>
+            </a:solidFill>
+          </a:ln>
+        </p:spPr>
+        <p:txBody>
+          <a:bodyPr wrap="square">
+            <a:spAutoFit/>
+          </a:bodyPr>
+          <a:lstStyle/>
+          <a:p>
+            <a:r>
+              <a:rPr lang="en-US" altLang="ko-KR" sz="1600" dirty="0">
+                <a:latin typeface="D2Coding" panose="020B0609020101020101" pitchFamily="49" charset="-127"/>
+                <a:ea typeface="D2Coding" panose="020B0609020101020101" pitchFamily="49" charset="-127"/>
+              </a:rPr>
+              <a:t>"The train left the </a:t>
+            </a:r>
+            <a:r>
+              <a:rPr lang="en-US" altLang="ko-KR" sz="1600" b="1" dirty="0">
+                <a:latin typeface="D2Coding" panose="020B0609020101020101" pitchFamily="49" charset="-127"/>
+                <a:ea typeface="D2Coding" panose="020B0609020101020101" pitchFamily="49" charset="-127"/>
+              </a:rPr>
+              <a:t>station</a:t>
+            </a:r>
+            <a:r>
+              <a:rPr lang="en-US" altLang="ko-KR" sz="1600" dirty="0">
+                <a:latin typeface="D2Coding" panose="020B0609020101020101" pitchFamily="49" charset="-127"/>
+                <a:ea typeface="D2Coding" panose="020B0609020101020101" pitchFamily="49" charset="-127"/>
+              </a:rPr>
+              <a:t> on time."</a:t>
+            </a:r>
+            <a:r>
+              <a:rPr lang="ko-KR" altLang="en-US" sz="1600" dirty="0">
+                <a:latin typeface="D2Coding" panose="020B0609020101020101" pitchFamily="49" charset="-127"/>
+                <a:ea typeface="D2Coding" panose="020B0609020101020101" pitchFamily="49" charset="-127"/>
+              </a:rPr>
+              <a:t> </a:t>
+            </a:r>
+            <a:endParaRPr lang="en-US" altLang="ko-KR" sz="1600" dirty="0">
+              <a:latin typeface="D2Coding" panose="020B0609020101020101" pitchFamily="49" charset="-127"/>
+              <a:ea typeface="D2Coding" panose="020B0609020101020101" pitchFamily="49" charset="-127"/>
+            </a:endParaRPr>
+          </a:p>
+          <a:p>
+            <a:endParaRPr lang="en-US" altLang="ko-KR" sz="1600" dirty="0">
+              <a:latin typeface="D2Coding" panose="020B0609020101020101" pitchFamily="49" charset="-127"/>
+              <a:ea typeface="D2Coding" panose="020B0609020101020101" pitchFamily="49" charset="-127"/>
+            </a:endParaRPr>
+          </a:p>
+          <a:p>
+            <a:r>
+              <a:rPr lang="ko-KR" altLang="en-US" sz="1600" dirty="0">
+                <a:latin typeface="D2Coding" panose="020B0609020101020101" pitchFamily="49" charset="-127"/>
+                <a:ea typeface="D2Coding" panose="020B0609020101020101" pitchFamily="49" charset="-127"/>
+              </a:rPr>
+              <a:t>이제 이 문장 속의 </a:t>
+            </a:r>
+            <a:r>
+              <a:rPr lang="en-US" altLang="ko-KR" sz="1600" dirty="0">
+                <a:latin typeface="D2Coding" panose="020B0609020101020101" pitchFamily="49" charset="-127"/>
+                <a:ea typeface="D2Coding" panose="020B0609020101020101" pitchFamily="49" charset="-127"/>
+              </a:rPr>
+              <a:t>"station＂</a:t>
+            </a:r>
+            <a:r>
+              <a:rPr lang="ko-KR" altLang="en-US" sz="1600" dirty="0">
+                <a:latin typeface="D2Coding" panose="020B0609020101020101" pitchFamily="49" charset="-127"/>
+                <a:ea typeface="D2Coding" panose="020B0609020101020101" pitchFamily="49" charset="-127"/>
+              </a:rPr>
+              <a:t>은 어떤 종류의 </a:t>
+            </a:r>
+            <a:r>
+              <a:rPr lang="en-US" altLang="ko-KR" sz="1600" dirty="0">
+                <a:latin typeface="D2Coding" panose="020B0609020101020101" pitchFamily="49" charset="-127"/>
+                <a:ea typeface="D2Coding" panose="020B0609020101020101" pitchFamily="49" charset="-127"/>
+              </a:rPr>
+              <a:t>station</a:t>
+            </a:r>
+            <a:r>
+              <a:rPr lang="ko-KR" altLang="en-US" sz="1600" dirty="0">
+                <a:latin typeface="D2Coding" panose="020B0609020101020101" pitchFamily="49" charset="-127"/>
+                <a:ea typeface="D2Coding" panose="020B0609020101020101" pitchFamily="49" charset="-127"/>
+              </a:rPr>
+              <a:t>에 대해 말하고 있는 걸까요</a:t>
+            </a:r>
+            <a:r>
+              <a:rPr lang="en-US" altLang="ko-KR" sz="1600" dirty="0">
+                <a:latin typeface="D2Coding" panose="020B0609020101020101" pitchFamily="49" charset="-127"/>
+                <a:ea typeface="D2Coding" panose="020B0609020101020101" pitchFamily="49" charset="-127"/>
+              </a:rPr>
+              <a:t>? </a:t>
+            </a:r>
+          </a:p>
+          <a:p>
+            <a:endParaRPr lang="en-US" altLang="ko-KR" sz="1600" dirty="0">
+              <a:latin typeface="D2Coding" panose="020B0609020101020101" pitchFamily="49" charset="-127"/>
+              <a:ea typeface="D2Coding" panose="020B0609020101020101" pitchFamily="49" charset="-127"/>
+            </a:endParaRPr>
+          </a:p>
+          <a:p>
+            <a:r>
+              <a:rPr lang="en-US" altLang="ko-KR" sz="1600" dirty="0">
+                <a:latin typeface="D2Coding" panose="020B0609020101020101" pitchFamily="49" charset="-127"/>
+                <a:ea typeface="D2Coding" panose="020B0609020101020101" pitchFamily="49" charset="-127"/>
+              </a:rPr>
+              <a:t>- </a:t>
+            </a:r>
+            <a:r>
+              <a:rPr lang="ko-KR" altLang="en-US" sz="1600" dirty="0">
+                <a:latin typeface="D2Coding" panose="020B0609020101020101" pitchFamily="49" charset="-127"/>
+                <a:ea typeface="D2Coding" panose="020B0609020101020101" pitchFamily="49" charset="-127"/>
+              </a:rPr>
+              <a:t>라디오 방송국</a:t>
+            </a:r>
+            <a:r>
+              <a:rPr lang="en-US" altLang="ko-KR" sz="1600" dirty="0">
+                <a:latin typeface="D2Coding" panose="020B0609020101020101" pitchFamily="49" charset="-127"/>
+                <a:ea typeface="D2Coding" panose="020B0609020101020101" pitchFamily="49" charset="-127"/>
+              </a:rPr>
+              <a:t>(radio station)</a:t>
+            </a:r>
+            <a:r>
+              <a:rPr lang="ko-KR" altLang="en-US" sz="1600" dirty="0">
+                <a:latin typeface="D2Coding" panose="020B0609020101020101" pitchFamily="49" charset="-127"/>
+                <a:ea typeface="D2Coding" panose="020B0609020101020101" pitchFamily="49" charset="-127"/>
+              </a:rPr>
+              <a:t>일까요</a:t>
+            </a:r>
+            <a:r>
+              <a:rPr lang="en-US" altLang="ko-KR" sz="1600" dirty="0">
+                <a:latin typeface="D2Coding" panose="020B0609020101020101" pitchFamily="49" charset="-127"/>
+                <a:ea typeface="D2Coding" panose="020B0609020101020101" pitchFamily="49" charset="-127"/>
+              </a:rPr>
+              <a:t>? </a:t>
+            </a:r>
+          </a:p>
+          <a:p>
+            <a:r>
+              <a:rPr lang="en-US" altLang="ko-KR" sz="1600" dirty="0">
+                <a:latin typeface="D2Coding" panose="020B0609020101020101" pitchFamily="49" charset="-127"/>
+                <a:ea typeface="D2Coding" panose="020B0609020101020101" pitchFamily="49" charset="-127"/>
+              </a:rPr>
+              <a:t>- </a:t>
+            </a:r>
+            <a:r>
+              <a:rPr lang="ko-KR" altLang="en-US" sz="1600" dirty="0">
+                <a:latin typeface="D2Coding" panose="020B0609020101020101" pitchFamily="49" charset="-127"/>
+                <a:ea typeface="D2Coding" panose="020B0609020101020101" pitchFamily="49" charset="-127"/>
+              </a:rPr>
+              <a:t>국제우주정거장</a:t>
+            </a:r>
+            <a:r>
+              <a:rPr lang="en-US" altLang="ko-KR" sz="1600" dirty="0">
+                <a:latin typeface="D2Coding" panose="020B0609020101020101" pitchFamily="49" charset="-127"/>
+                <a:ea typeface="D2Coding" panose="020B0609020101020101" pitchFamily="49" charset="-127"/>
+              </a:rPr>
+              <a:t>(International Space Station)</a:t>
+            </a:r>
+            <a:r>
+              <a:rPr lang="ko-KR" altLang="en-US" sz="1600" dirty="0">
+                <a:latin typeface="D2Coding" panose="020B0609020101020101" pitchFamily="49" charset="-127"/>
+                <a:ea typeface="D2Coding" panose="020B0609020101020101" pitchFamily="49" charset="-127"/>
+              </a:rPr>
+              <a:t>일까요</a:t>
+            </a:r>
+            <a:r>
+              <a:rPr lang="en-US" altLang="ko-KR" sz="1600" dirty="0">
+                <a:latin typeface="D2Coding" panose="020B0609020101020101" pitchFamily="49" charset="-127"/>
+                <a:ea typeface="D2Coding" panose="020B0609020101020101" pitchFamily="49" charset="-127"/>
+              </a:rPr>
+              <a:t>? </a:t>
+            </a:r>
+          </a:p>
+          <a:p>
+            <a:endParaRPr lang="en-US" altLang="ko-KR" sz="1600" dirty="0">
+              <a:latin typeface="D2Coding" panose="020B0609020101020101" pitchFamily="49" charset="-127"/>
+              <a:ea typeface="D2Coding" panose="020B0609020101020101" pitchFamily="49" charset="-127"/>
+            </a:endParaRPr>
+          </a:p>
+          <a:p>
+            <a:r>
+              <a:rPr lang="ko-KR" altLang="en-US" sz="1600" dirty="0">
+                <a:latin typeface="D2Coding" panose="020B0609020101020101" pitchFamily="49" charset="-127"/>
+                <a:ea typeface="D2Coding" panose="020B0609020101020101" pitchFamily="49" charset="-127"/>
+              </a:rPr>
+              <a:t>셀프 </a:t>
+            </a:r>
+            <a:r>
+              <a:rPr lang="ko-KR" altLang="en-US" sz="1600" dirty="0" err="1">
+                <a:latin typeface="D2Coding" panose="020B0609020101020101" pitchFamily="49" charset="-127"/>
+                <a:ea typeface="D2Coding" panose="020B0609020101020101" pitchFamily="49" charset="-127"/>
+              </a:rPr>
+              <a:t>어텐션을</a:t>
+            </a:r>
+            <a:r>
+              <a:rPr lang="ko-KR" altLang="en-US" sz="1600" dirty="0">
+                <a:latin typeface="D2Coding" panose="020B0609020101020101" pitchFamily="49" charset="-127"/>
+                <a:ea typeface="D2Coding" panose="020B0609020101020101" pitchFamily="49" charset="-127"/>
+              </a:rPr>
+              <a:t> 이용하면 모델은 </a:t>
+            </a:r>
+            <a:r>
+              <a:rPr lang="en-US" altLang="ko-KR" sz="1600" dirty="0">
+                <a:latin typeface="D2Coding" panose="020B0609020101020101" pitchFamily="49" charset="-127"/>
+                <a:ea typeface="D2Coding" panose="020B0609020101020101" pitchFamily="49" charset="-127"/>
+              </a:rPr>
+              <a:t>"station"</a:t>
+            </a:r>
+            <a:r>
+              <a:rPr lang="ko-KR" altLang="en-US" sz="1600" dirty="0">
+                <a:latin typeface="D2Coding" panose="020B0609020101020101" pitchFamily="49" charset="-127"/>
+                <a:ea typeface="D2Coding" panose="020B0609020101020101" pitchFamily="49" charset="-127"/>
+              </a:rPr>
+              <a:t>과 </a:t>
+            </a:r>
+            <a:r>
+              <a:rPr lang="en-US" altLang="ko-KR" sz="1600" dirty="0">
+                <a:latin typeface="D2Coding" panose="020B0609020101020101" pitchFamily="49" charset="-127"/>
+                <a:ea typeface="D2Coding" panose="020B0609020101020101" pitchFamily="49" charset="-127"/>
+              </a:rPr>
+              <a:t>"train"</a:t>
+            </a:r>
+            <a:r>
+              <a:rPr lang="ko-KR" altLang="en-US" sz="1600" dirty="0">
+                <a:latin typeface="D2Coding" panose="020B0609020101020101" pitchFamily="49" charset="-127"/>
+                <a:ea typeface="D2Coding" panose="020B0609020101020101" pitchFamily="49" charset="-127"/>
+              </a:rPr>
+              <a:t>의 쌍에 높은 </a:t>
+            </a:r>
+            <a:r>
+              <a:rPr lang="ko-KR" altLang="en-US" sz="1600" dirty="0" err="1">
+                <a:latin typeface="D2Coding" panose="020B0609020101020101" pitchFamily="49" charset="-127"/>
+                <a:ea typeface="D2Coding" panose="020B0609020101020101" pitchFamily="49" charset="-127"/>
+              </a:rPr>
+              <a:t>어텐션</a:t>
+            </a:r>
+            <a:r>
+              <a:rPr lang="ko-KR" altLang="en-US" sz="1600" dirty="0">
+                <a:latin typeface="D2Coding" panose="020B0609020101020101" pitchFamily="49" charset="-127"/>
+                <a:ea typeface="D2Coding" panose="020B0609020101020101" pitchFamily="49" charset="-127"/>
+              </a:rPr>
+              <a:t> 점수를 부여하는 법을 배울 수 있으며</a:t>
+            </a:r>
+            <a:r>
+              <a:rPr lang="en-US" altLang="ko-KR" sz="1600" dirty="0">
+                <a:latin typeface="D2Coding" panose="020B0609020101020101" pitchFamily="49" charset="-127"/>
+                <a:ea typeface="D2Coding" panose="020B0609020101020101" pitchFamily="49" charset="-127"/>
+              </a:rPr>
+              <a:t>, "train"</a:t>
+            </a:r>
+            <a:r>
+              <a:rPr lang="ko-KR" altLang="en-US" sz="1600" dirty="0">
+                <a:latin typeface="D2Coding" panose="020B0609020101020101" pitchFamily="49" charset="-127"/>
+                <a:ea typeface="D2Coding" panose="020B0609020101020101" pitchFamily="49" charset="-127"/>
+              </a:rPr>
+              <a:t>을 표현하는 데 사용된 벡터를 </a:t>
+            </a:r>
+            <a:r>
+              <a:rPr lang="en-US" altLang="ko-KR" sz="1600" dirty="0">
+                <a:latin typeface="D2Coding" panose="020B0609020101020101" pitchFamily="49" charset="-127"/>
+                <a:ea typeface="D2Coding" panose="020B0609020101020101" pitchFamily="49" charset="-127"/>
+              </a:rPr>
+              <a:t>"station"</a:t>
+            </a:r>
+            <a:r>
+              <a:rPr lang="ko-KR" altLang="en-US" sz="1600" dirty="0">
+                <a:latin typeface="D2Coding" panose="020B0609020101020101" pitchFamily="49" charset="-127"/>
+                <a:ea typeface="D2Coding" panose="020B0609020101020101" pitchFamily="49" charset="-127"/>
+              </a:rPr>
+              <a:t>이라는 단어의 표현 속에 합산</a:t>
+            </a:r>
+            <a:r>
+              <a:rPr lang="en-US" altLang="ko-KR" sz="1600" dirty="0">
+                <a:latin typeface="D2Coding" panose="020B0609020101020101" pitchFamily="49" charset="-127"/>
+                <a:ea typeface="D2Coding" panose="020B0609020101020101" pitchFamily="49" charset="-127"/>
+              </a:rPr>
+              <a:t>(summing)</a:t>
+            </a:r>
+            <a:r>
+              <a:rPr lang="ko-KR" altLang="en-US" sz="1600" dirty="0">
+                <a:latin typeface="D2Coding" panose="020B0609020101020101" pitchFamily="49" charset="-127"/>
+                <a:ea typeface="D2Coding" panose="020B0609020101020101" pitchFamily="49" charset="-127"/>
+              </a:rPr>
+              <a:t>해 넣을 수 있음</a:t>
             </a:r>
           </a:p>
         </p:txBody>
@@ -24562,6 +25367,119 @@
           </a:p>
         </p:txBody>
       </p:sp>
+      <p:sp>
+        <p:nvSpPr>
+          <p:cNvPr id="6" name="TextBox 5">
+            <a:extLst>
+              <a:ext uri="{FF2B5EF4-FFF2-40B4-BE49-F238E27FC236}">
+                <a16:creationId xmlns:a16="http://schemas.microsoft.com/office/drawing/2014/main" id="{71008B3C-9FF7-39F4-E30D-0B6243C708EE}"/>
+              </a:ext>
+            </a:extLst>
+          </p:cNvPr>
+          <p:cNvSpPr txBox="1"/>
+          <p:nvPr/>
+        </p:nvSpPr>
+        <p:spPr>
+          <a:xfrm>
+            <a:off x="609599" y="1447076"/>
+            <a:ext cx="8518689" cy="1162498"/>
+          </a:xfrm>
+          <a:prstGeom prst="rect">
+            <a:avLst/>
+          </a:prstGeom>
+          <a:noFill/>
+        </p:spPr>
+        <p:txBody>
+          <a:bodyPr wrap="square">
+            <a:spAutoFit/>
+          </a:bodyPr>
+          <a:lstStyle/>
+          <a:p>
+            <a:pPr>
+              <a:lnSpc>
+                <a:spcPct val="150000"/>
+              </a:lnSpc>
+            </a:pPr>
+            <a:r>
+              <a:rPr lang="ko-KR" altLang="en-US" sz="1600" dirty="0">
+                <a:latin typeface="D2Coding" panose="020B0609020101020101" pitchFamily="49" charset="-127"/>
+                <a:ea typeface="D2Coding" panose="020B0609020101020101" pitchFamily="49" charset="-127"/>
+              </a:rPr>
+              <a:t>입력문장을 주변 단어들과 눈빛 교환을 하고</a:t>
+            </a:r>
+            <a:r>
+              <a:rPr lang="en-US" altLang="ko-KR" sz="1600" dirty="0">
+                <a:latin typeface="D2Coding" panose="020B0609020101020101" pitchFamily="49" charset="-127"/>
+                <a:ea typeface="D2Coding" panose="020B0609020101020101" pitchFamily="49" charset="-127"/>
+              </a:rPr>
+              <a:t>(Self-Attention), </a:t>
+            </a:r>
+            <a:r>
+              <a:rPr lang="ko-KR" altLang="en-US" sz="1600" dirty="0">
+                <a:latin typeface="D2Coding" panose="020B0609020101020101" pitchFamily="49" charset="-127"/>
+                <a:ea typeface="D2Coding" panose="020B0609020101020101" pitchFamily="49" charset="-127"/>
+              </a:rPr>
+              <a:t>스스로 고뇌하여 의미를 깊게 발전시킨 뒤</a:t>
+            </a:r>
+            <a:r>
+              <a:rPr lang="en-US" altLang="ko-KR" sz="1600" dirty="0">
+                <a:latin typeface="D2Coding" panose="020B0609020101020101" pitchFamily="49" charset="-127"/>
+                <a:ea typeface="D2Coding" panose="020B0609020101020101" pitchFamily="49" charset="-127"/>
+              </a:rPr>
+              <a:t>(</a:t>
+            </a:r>
+            <a:r>
+              <a:rPr lang="en-US" altLang="ko-KR" sz="1600" dirty="0" err="1">
+                <a:latin typeface="D2Coding" panose="020B0609020101020101" pitchFamily="49" charset="-127"/>
+                <a:ea typeface="D2Coding" panose="020B0609020101020101" pitchFamily="49" charset="-127"/>
+              </a:rPr>
+              <a:t>FeedForward</a:t>
+            </a:r>
+            <a:r>
+              <a:rPr lang="en-US" altLang="ko-KR" sz="1600" dirty="0">
+                <a:latin typeface="D2Coding" panose="020B0609020101020101" pitchFamily="49" charset="-127"/>
+                <a:ea typeface="D2Coding" panose="020B0609020101020101" pitchFamily="49" charset="-127"/>
+              </a:rPr>
+              <a:t>), </a:t>
+            </a:r>
+            <a:r>
+              <a:rPr lang="ko-KR" altLang="en-US" sz="1600" dirty="0">
+                <a:latin typeface="D2Coding" panose="020B0609020101020101" pitchFamily="49" charset="-127"/>
+                <a:ea typeface="D2Coding" panose="020B0609020101020101" pitchFamily="49" charset="-127"/>
+              </a:rPr>
+              <a:t>이 모든 과정이 지치지 않도록 안전장치</a:t>
+            </a:r>
+            <a:r>
+              <a:rPr lang="en-US" altLang="ko-KR" sz="1600" dirty="0">
+                <a:latin typeface="D2Coding" panose="020B0609020101020101" pitchFamily="49" charset="-127"/>
+                <a:ea typeface="D2Coding" panose="020B0609020101020101" pitchFamily="49" charset="-127"/>
+              </a:rPr>
+              <a:t>(Residual, </a:t>
+            </a:r>
+            <a:r>
+              <a:rPr lang="en-US" altLang="ko-KR" sz="1600" dirty="0" err="1">
+                <a:latin typeface="D2Coding" panose="020B0609020101020101" pitchFamily="49" charset="-127"/>
+                <a:ea typeface="D2Coding" panose="020B0609020101020101" pitchFamily="49" charset="-127"/>
+              </a:rPr>
+              <a:t>LayerNorm</a:t>
+            </a:r>
+            <a:r>
+              <a:rPr lang="en-US" altLang="ko-KR" sz="1600" dirty="0">
+                <a:latin typeface="D2Coding" panose="020B0609020101020101" pitchFamily="49" charset="-127"/>
+                <a:ea typeface="D2Coding" panose="020B0609020101020101" pitchFamily="49" charset="-127"/>
+              </a:rPr>
+              <a:t>)</a:t>
+            </a:r>
+            <a:r>
+              <a:rPr lang="ko-KR" altLang="en-US" sz="1600" dirty="0">
+                <a:latin typeface="D2Coding" panose="020B0609020101020101" pitchFamily="49" charset="-127"/>
+                <a:ea typeface="D2Coding" panose="020B0609020101020101" pitchFamily="49" charset="-127"/>
+              </a:rPr>
+              <a:t>를 채워 다음 층으로 넘겨주는 레고 블록</a:t>
+            </a:r>
+          </a:p>
+        </p:txBody>
+      </p:sp>
     </p:spTree>
     <p:extLst>
       <p:ext uri="{BB962C8B-B14F-4D97-AF65-F5344CB8AC3E}">
@@ -24576,674 +25494,6 @@
 </file>
 
 <file path=ppt/slides/slide31.xml><?xml version="1.0" encoding="utf-8"?>
-<p:sld xmlns:a="http://schemas.openxmlformats.org/drawingml/2006/main" xmlns:r="http://schemas.openxmlformats.org/officeDocument/2006/relationships" xmlns:p="http://schemas.openxmlformats.org/presentationml/2006/main">
-  <p:cSld>
-    <p:spTree>
-      <p:nvGrpSpPr>
-        <p:cNvPr id="1" name="">
-          <a:extLst>
-            <a:ext uri="{FF2B5EF4-FFF2-40B4-BE49-F238E27FC236}">
-              <a16:creationId xmlns:a16="http://schemas.microsoft.com/office/drawing/2014/main" id="{FF818BB9-FF88-AC42-C02A-5169F3B74A16}"/>
-            </a:ext>
-          </a:extLst>
-        </p:cNvPr>
-        <p:cNvGrpSpPr/>
-        <p:nvPr/>
-      </p:nvGrpSpPr>
-      <p:grpSpPr>
-        <a:xfrm>
-          <a:off x="0" y="0"/>
-          <a:ext cx="0" cy="0"/>
-          <a:chOff x="0" y="0"/>
-          <a:chExt cx="0" cy="0"/>
-        </a:xfrm>
-      </p:grpSpPr>
-      <p:sp>
-        <p:nvSpPr>
-          <p:cNvPr id="4" name="슬라이드 번호 개체 틀 3">
-            <a:extLst>
-              <a:ext uri="{FF2B5EF4-FFF2-40B4-BE49-F238E27FC236}">
-                <a16:creationId xmlns:a16="http://schemas.microsoft.com/office/drawing/2014/main" id="{95E75F44-3F26-3C0C-75D6-9E483188966C}"/>
-              </a:ext>
-            </a:extLst>
-          </p:cNvPr>
-          <p:cNvSpPr>
-            <a:spLocks noGrp="1"/>
-          </p:cNvSpPr>
-          <p:nvPr>
-            <p:ph type="sldNum" sz="quarter" idx="12"/>
-          </p:nvPr>
-        </p:nvSpPr>
-        <p:spPr>
-          <a:xfrm>
-            <a:off x="10514011" y="6036261"/>
-            <a:ext cx="753545" cy="365125"/>
-          </a:xfrm>
-        </p:spPr>
-        <p:txBody>
-          <a:bodyPr/>
-          <a:lstStyle/>
-          <a:p>
-            <a:fld id="{D57F1E4F-1CFF-5643-939E-217C01CDF565}" type="slidenum">
-              <a:rPr lang="en-US" smtClean="0"/>
-              <a:pPr/>
-              <a:t>31</a:t>
-            </a:fld>
-            <a:endParaRPr lang="en-US" dirty="0"/>
-          </a:p>
-        </p:txBody>
-      </p:sp>
-      <p:sp>
-        <p:nvSpPr>
-          <p:cNvPr id="3" name="제목 1">
-            <a:extLst>
-              <a:ext uri="{FF2B5EF4-FFF2-40B4-BE49-F238E27FC236}">
-                <a16:creationId xmlns:a16="http://schemas.microsoft.com/office/drawing/2014/main" id="{50C3227B-BEC3-BF17-6247-ECD2C17D9B1D}"/>
-              </a:ext>
-            </a:extLst>
-          </p:cNvPr>
-          <p:cNvSpPr txBox="1">
-            <a:spLocks/>
-          </p:cNvSpPr>
-          <p:nvPr/>
-        </p:nvSpPr>
-        <p:spPr>
-          <a:xfrm>
-            <a:off x="475645" y="481983"/>
-            <a:ext cx="10353762" cy="766439"/>
-          </a:xfrm>
-          <a:prstGeom prst="rect">
-            <a:avLst/>
-          </a:prstGeom>
-        </p:spPr>
-        <p:txBody>
-          <a:bodyPr vert="horz" lIns="91440" tIns="45720" rIns="91440" bIns="45720" rtlCol="0" anchor="ctr">
-            <a:normAutofit/>
-          </a:bodyPr>
-          <a:lstStyle>
-            <a:lvl1pPr algn="ctr" defTabSz="914400" rtl="0" eaLnBrk="1" latinLnBrk="1" hangingPunct="1">
-              <a:lnSpc>
-                <a:spcPct val="90000"/>
-              </a:lnSpc>
-              <a:spcBef>
-                <a:spcPct val="0"/>
-              </a:spcBef>
-              <a:buNone/>
-              <a:defRPr sz="3200" kern="1200" cap="all" baseline="0">
-                <a:solidFill>
-                  <a:schemeClr val="tx1"/>
-                </a:solidFill>
-                <a:effectLst/>
-                <a:latin typeface="Batang" panose="02030600000101010101" pitchFamily="18" charset="-127"/>
-                <a:ea typeface="Batang" panose="02030600000101010101" pitchFamily="18" charset="-127"/>
-                <a:cs typeface="+mj-cs"/>
-              </a:defRPr>
-            </a:lvl1pPr>
-          </a:lstStyle>
-          <a:p>
-            <a:pPr algn="l"/>
-            <a:r>
-              <a:rPr lang="en-US" altLang="ko-KR" sz="2800" b="1" cap="none" dirty="0">
-                <a:latin typeface="Lora" pitchFamily="2" charset="0"/>
-              </a:rPr>
-              <a:t>The Transformer architecture</a:t>
-            </a:r>
-          </a:p>
-        </p:txBody>
-      </p:sp>
-      <p:sp>
-        <p:nvSpPr>
-          <p:cNvPr id="2" name="TextBox 1">
-            <a:extLst>
-              <a:ext uri="{FF2B5EF4-FFF2-40B4-BE49-F238E27FC236}">
-                <a16:creationId xmlns:a16="http://schemas.microsoft.com/office/drawing/2014/main" id="{21C43261-8309-ABA6-C334-C8ED1EB623F1}"/>
-              </a:ext>
-            </a:extLst>
-          </p:cNvPr>
-          <p:cNvSpPr txBox="1"/>
-          <p:nvPr/>
-        </p:nvSpPr>
-        <p:spPr>
-          <a:xfrm>
-            <a:off x="6966408" y="826899"/>
-            <a:ext cx="4600281" cy="369332"/>
-          </a:xfrm>
-          <a:prstGeom prst="rect">
-            <a:avLst/>
-          </a:prstGeom>
-          <a:noFill/>
-        </p:spPr>
-        <p:txBody>
-          <a:bodyPr wrap="square">
-            <a:spAutoFit/>
-          </a:bodyPr>
-          <a:lstStyle/>
-          <a:p>
-            <a:pPr algn="r"/>
-            <a:r>
-              <a:rPr lang="en-US" altLang="ko-KR" b="1" dirty="0">
-                <a:latin typeface="Lora" pitchFamily="2" charset="0"/>
-              </a:rPr>
-              <a:t>Transformer encoder block</a:t>
-            </a:r>
-          </a:p>
-        </p:txBody>
-      </p:sp>
-    </p:spTree>
-    <p:extLst>
-      <p:ext uri="{BB962C8B-B14F-4D97-AF65-F5344CB8AC3E}">
-        <p14:creationId xmlns:p14="http://schemas.microsoft.com/office/powerpoint/2010/main" val="2241170252"/>
-      </p:ext>
-    </p:extLst>
-  </p:cSld>
-  <p:clrMapOvr>
-    <a:masterClrMapping/>
-  </p:clrMapOvr>
-</p:sld>
-</file>
-
-<file path=ppt/slides/slide32.xml><?xml version="1.0" encoding="utf-8"?>
-<p:sld xmlns:a="http://schemas.openxmlformats.org/drawingml/2006/main" xmlns:r="http://schemas.openxmlformats.org/officeDocument/2006/relationships" xmlns:p="http://schemas.openxmlformats.org/presentationml/2006/main">
-  <p:cSld>
-    <p:spTree>
-      <p:nvGrpSpPr>
-        <p:cNvPr id="1" name="">
-          <a:extLst>
-            <a:ext uri="{FF2B5EF4-FFF2-40B4-BE49-F238E27FC236}">
-              <a16:creationId xmlns:a16="http://schemas.microsoft.com/office/drawing/2014/main" id="{F4D372C5-41FC-9754-4830-C0B67ADEB27D}"/>
-            </a:ext>
-          </a:extLst>
-        </p:cNvPr>
-        <p:cNvGrpSpPr/>
-        <p:nvPr/>
-      </p:nvGrpSpPr>
-      <p:grpSpPr>
-        <a:xfrm>
-          <a:off x="0" y="0"/>
-          <a:ext cx="0" cy="0"/>
-          <a:chOff x="0" y="0"/>
-          <a:chExt cx="0" cy="0"/>
-        </a:xfrm>
-      </p:grpSpPr>
-      <p:sp>
-        <p:nvSpPr>
-          <p:cNvPr id="4" name="슬라이드 번호 개체 틀 3">
-            <a:extLst>
-              <a:ext uri="{FF2B5EF4-FFF2-40B4-BE49-F238E27FC236}">
-                <a16:creationId xmlns:a16="http://schemas.microsoft.com/office/drawing/2014/main" id="{52C883BE-47E8-D5DA-A28E-954BBA54AB86}"/>
-              </a:ext>
-            </a:extLst>
-          </p:cNvPr>
-          <p:cNvSpPr>
-            <a:spLocks noGrp="1"/>
-          </p:cNvSpPr>
-          <p:nvPr>
-            <p:ph type="sldNum" sz="quarter" idx="12"/>
-          </p:nvPr>
-        </p:nvSpPr>
-        <p:spPr>
-          <a:xfrm>
-            <a:off x="10514011" y="6036261"/>
-            <a:ext cx="753545" cy="365125"/>
-          </a:xfrm>
-        </p:spPr>
-        <p:txBody>
-          <a:bodyPr/>
-          <a:lstStyle/>
-          <a:p>
-            <a:fld id="{D57F1E4F-1CFF-5643-939E-217C01CDF565}" type="slidenum">
-              <a:rPr lang="en-US" smtClean="0"/>
-              <a:pPr/>
-              <a:t>32</a:t>
-            </a:fld>
-            <a:endParaRPr lang="en-US" dirty="0"/>
-          </a:p>
-        </p:txBody>
-      </p:sp>
-      <p:sp>
-        <p:nvSpPr>
-          <p:cNvPr id="3" name="제목 1">
-            <a:extLst>
-              <a:ext uri="{FF2B5EF4-FFF2-40B4-BE49-F238E27FC236}">
-                <a16:creationId xmlns:a16="http://schemas.microsoft.com/office/drawing/2014/main" id="{4FF1BE88-7706-6316-E74F-CA94894F0E37}"/>
-              </a:ext>
-            </a:extLst>
-          </p:cNvPr>
-          <p:cNvSpPr txBox="1">
-            <a:spLocks/>
-          </p:cNvSpPr>
-          <p:nvPr/>
-        </p:nvSpPr>
-        <p:spPr>
-          <a:xfrm>
-            <a:off x="475645" y="481983"/>
-            <a:ext cx="10353762" cy="766439"/>
-          </a:xfrm>
-          <a:prstGeom prst="rect">
-            <a:avLst/>
-          </a:prstGeom>
-        </p:spPr>
-        <p:txBody>
-          <a:bodyPr vert="horz" lIns="91440" tIns="45720" rIns="91440" bIns="45720" rtlCol="0" anchor="ctr">
-            <a:normAutofit/>
-          </a:bodyPr>
-          <a:lstStyle>
-            <a:lvl1pPr algn="ctr" defTabSz="914400" rtl="0" eaLnBrk="1" latinLnBrk="1" hangingPunct="1">
-              <a:lnSpc>
-                <a:spcPct val="90000"/>
-              </a:lnSpc>
-              <a:spcBef>
-                <a:spcPct val="0"/>
-              </a:spcBef>
-              <a:buNone/>
-              <a:defRPr sz="3200" kern="1200" cap="all" baseline="0">
-                <a:solidFill>
-                  <a:schemeClr val="tx1"/>
-                </a:solidFill>
-                <a:effectLst/>
-                <a:latin typeface="Batang" panose="02030600000101010101" pitchFamily="18" charset="-127"/>
-                <a:ea typeface="Batang" panose="02030600000101010101" pitchFamily="18" charset="-127"/>
-                <a:cs typeface="+mj-cs"/>
-              </a:defRPr>
-            </a:lvl1pPr>
-          </a:lstStyle>
-          <a:p>
-            <a:pPr algn="l"/>
-            <a:r>
-              <a:rPr lang="en-US" altLang="ko-KR" sz="2800" b="1" cap="none" dirty="0">
-                <a:latin typeface="Lora" pitchFamily="2" charset="0"/>
-              </a:rPr>
-              <a:t>The Transformer architecture</a:t>
-            </a:r>
-          </a:p>
-        </p:txBody>
-      </p:sp>
-      <p:sp>
-        <p:nvSpPr>
-          <p:cNvPr id="2" name="TextBox 1">
-            <a:extLst>
-              <a:ext uri="{FF2B5EF4-FFF2-40B4-BE49-F238E27FC236}">
-                <a16:creationId xmlns:a16="http://schemas.microsoft.com/office/drawing/2014/main" id="{0F64AE2D-BB99-563F-8847-E8512FC74CB1}"/>
-              </a:ext>
-            </a:extLst>
-          </p:cNvPr>
-          <p:cNvSpPr txBox="1"/>
-          <p:nvPr/>
-        </p:nvSpPr>
-        <p:spPr>
-          <a:xfrm>
-            <a:off x="6966408" y="826899"/>
-            <a:ext cx="4600281" cy="369332"/>
-          </a:xfrm>
-          <a:prstGeom prst="rect">
-            <a:avLst/>
-          </a:prstGeom>
-          <a:noFill/>
-        </p:spPr>
-        <p:txBody>
-          <a:bodyPr wrap="square">
-            <a:spAutoFit/>
-          </a:bodyPr>
-          <a:lstStyle/>
-          <a:p>
-            <a:pPr algn="r"/>
-            <a:r>
-              <a:rPr lang="en-US" altLang="ko-KR" b="1" dirty="0">
-                <a:latin typeface="Lora" pitchFamily="2" charset="0"/>
-              </a:rPr>
-              <a:t>Transformer encoder block</a:t>
-            </a:r>
-          </a:p>
-        </p:txBody>
-      </p:sp>
-    </p:spTree>
-    <p:extLst>
-      <p:ext uri="{BB962C8B-B14F-4D97-AF65-F5344CB8AC3E}">
-        <p14:creationId xmlns:p14="http://schemas.microsoft.com/office/powerpoint/2010/main" val="1870135119"/>
-      </p:ext>
-    </p:extLst>
-  </p:cSld>
-  <p:clrMapOvr>
-    <a:masterClrMapping/>
-  </p:clrMapOvr>
-</p:sld>
-</file>
-
-<file path=ppt/slides/slide33.xml><?xml version="1.0" encoding="utf-8"?>
-<p:sld xmlns:a="http://schemas.openxmlformats.org/drawingml/2006/main" xmlns:r="http://schemas.openxmlformats.org/officeDocument/2006/relationships" xmlns:p="http://schemas.openxmlformats.org/presentationml/2006/main">
-  <p:cSld>
-    <p:spTree>
-      <p:nvGrpSpPr>
-        <p:cNvPr id="1" name="">
-          <a:extLst>
-            <a:ext uri="{FF2B5EF4-FFF2-40B4-BE49-F238E27FC236}">
-              <a16:creationId xmlns:a16="http://schemas.microsoft.com/office/drawing/2014/main" id="{90176D13-9606-9ADE-343E-CFDB78AF1BEE}"/>
-            </a:ext>
-          </a:extLst>
-        </p:cNvPr>
-        <p:cNvGrpSpPr/>
-        <p:nvPr/>
-      </p:nvGrpSpPr>
-      <p:grpSpPr>
-        <a:xfrm>
-          <a:off x="0" y="0"/>
-          <a:ext cx="0" cy="0"/>
-          <a:chOff x="0" y="0"/>
-          <a:chExt cx="0" cy="0"/>
-        </a:xfrm>
-      </p:grpSpPr>
-      <p:sp>
-        <p:nvSpPr>
-          <p:cNvPr id="4" name="슬라이드 번호 개체 틀 3">
-            <a:extLst>
-              <a:ext uri="{FF2B5EF4-FFF2-40B4-BE49-F238E27FC236}">
-                <a16:creationId xmlns:a16="http://schemas.microsoft.com/office/drawing/2014/main" id="{429F7A40-60DF-A678-B51B-7620F8F13361}"/>
-              </a:ext>
-            </a:extLst>
-          </p:cNvPr>
-          <p:cNvSpPr>
-            <a:spLocks noGrp="1"/>
-          </p:cNvSpPr>
-          <p:nvPr>
-            <p:ph type="sldNum" sz="quarter" idx="12"/>
-          </p:nvPr>
-        </p:nvSpPr>
-        <p:spPr>
-          <a:xfrm>
-            <a:off x="10514011" y="6036261"/>
-            <a:ext cx="753545" cy="365125"/>
-          </a:xfrm>
-        </p:spPr>
-        <p:txBody>
-          <a:bodyPr/>
-          <a:lstStyle/>
-          <a:p>
-            <a:fld id="{D57F1E4F-1CFF-5643-939E-217C01CDF565}" type="slidenum">
-              <a:rPr lang="en-US" smtClean="0"/>
-              <a:pPr/>
-              <a:t>33</a:t>
-            </a:fld>
-            <a:endParaRPr lang="en-US" dirty="0"/>
-          </a:p>
-        </p:txBody>
-      </p:sp>
-      <p:sp>
-        <p:nvSpPr>
-          <p:cNvPr id="3" name="제목 1">
-            <a:extLst>
-              <a:ext uri="{FF2B5EF4-FFF2-40B4-BE49-F238E27FC236}">
-                <a16:creationId xmlns:a16="http://schemas.microsoft.com/office/drawing/2014/main" id="{C17A03AA-D0E5-0971-6D54-56AEE885548D}"/>
-              </a:ext>
-            </a:extLst>
-          </p:cNvPr>
-          <p:cNvSpPr txBox="1">
-            <a:spLocks/>
-          </p:cNvSpPr>
-          <p:nvPr/>
-        </p:nvSpPr>
-        <p:spPr>
-          <a:xfrm>
-            <a:off x="475645" y="481983"/>
-            <a:ext cx="10353762" cy="766439"/>
-          </a:xfrm>
-          <a:prstGeom prst="rect">
-            <a:avLst/>
-          </a:prstGeom>
-        </p:spPr>
-        <p:txBody>
-          <a:bodyPr vert="horz" lIns="91440" tIns="45720" rIns="91440" bIns="45720" rtlCol="0" anchor="ctr">
-            <a:normAutofit/>
-          </a:bodyPr>
-          <a:lstStyle>
-            <a:lvl1pPr algn="ctr" defTabSz="914400" rtl="0" eaLnBrk="1" latinLnBrk="1" hangingPunct="1">
-              <a:lnSpc>
-                <a:spcPct val="90000"/>
-              </a:lnSpc>
-              <a:spcBef>
-                <a:spcPct val="0"/>
-              </a:spcBef>
-              <a:buNone/>
-              <a:defRPr sz="3200" kern="1200" cap="all" baseline="0">
-                <a:solidFill>
-                  <a:schemeClr val="tx1"/>
-                </a:solidFill>
-                <a:effectLst/>
-                <a:latin typeface="Batang" panose="02030600000101010101" pitchFamily="18" charset="-127"/>
-                <a:ea typeface="Batang" panose="02030600000101010101" pitchFamily="18" charset="-127"/>
-                <a:cs typeface="+mj-cs"/>
-              </a:defRPr>
-            </a:lvl1pPr>
-          </a:lstStyle>
-          <a:p>
-            <a:pPr algn="l"/>
-            <a:r>
-              <a:rPr lang="en-US" altLang="ko-KR" sz="2800" b="1" cap="none" dirty="0">
-                <a:latin typeface="Lora" pitchFamily="2" charset="0"/>
-              </a:rPr>
-              <a:t>The Transformer architecture</a:t>
-            </a:r>
-          </a:p>
-        </p:txBody>
-      </p:sp>
-      <p:sp>
-        <p:nvSpPr>
-          <p:cNvPr id="2" name="TextBox 1">
-            <a:extLst>
-              <a:ext uri="{FF2B5EF4-FFF2-40B4-BE49-F238E27FC236}">
-                <a16:creationId xmlns:a16="http://schemas.microsoft.com/office/drawing/2014/main" id="{61024059-ABE5-E1BC-4E4E-BC75C76D3D57}"/>
-              </a:ext>
-            </a:extLst>
-          </p:cNvPr>
-          <p:cNvSpPr txBox="1"/>
-          <p:nvPr/>
-        </p:nvSpPr>
-        <p:spPr>
-          <a:xfrm>
-            <a:off x="6966408" y="826899"/>
-            <a:ext cx="4600281" cy="369332"/>
-          </a:xfrm>
-          <a:prstGeom prst="rect">
-            <a:avLst/>
-          </a:prstGeom>
-          <a:noFill/>
-        </p:spPr>
-        <p:txBody>
-          <a:bodyPr wrap="square">
-            <a:spAutoFit/>
-          </a:bodyPr>
-          <a:lstStyle/>
-          <a:p>
-            <a:pPr algn="r"/>
-            <a:r>
-              <a:rPr lang="en-US" altLang="ko-KR" b="1" dirty="0">
-                <a:latin typeface="Lora" pitchFamily="2" charset="0"/>
-              </a:rPr>
-              <a:t>Transformer decoder block</a:t>
-            </a:r>
-          </a:p>
-        </p:txBody>
-      </p:sp>
-    </p:spTree>
-    <p:extLst>
-      <p:ext uri="{BB962C8B-B14F-4D97-AF65-F5344CB8AC3E}">
-        <p14:creationId xmlns:p14="http://schemas.microsoft.com/office/powerpoint/2010/main" val="1718748299"/>
-      </p:ext>
-    </p:extLst>
-  </p:cSld>
-  <p:clrMapOvr>
-    <a:masterClrMapping/>
-  </p:clrMapOvr>
-</p:sld>
-</file>
-
-<file path=ppt/slides/slide34.xml><?xml version="1.0" encoding="utf-8"?>
-<p:sld xmlns:a="http://schemas.openxmlformats.org/drawingml/2006/main" xmlns:r="http://schemas.openxmlformats.org/officeDocument/2006/relationships" xmlns:p="http://schemas.openxmlformats.org/presentationml/2006/main">
-  <p:cSld>
-    <p:spTree>
-      <p:nvGrpSpPr>
-        <p:cNvPr id="1" name="">
-          <a:extLst>
-            <a:ext uri="{FF2B5EF4-FFF2-40B4-BE49-F238E27FC236}">
-              <a16:creationId xmlns:a16="http://schemas.microsoft.com/office/drawing/2014/main" id="{8E0E6B01-AA32-CA13-32DA-6B07115A2E12}"/>
-            </a:ext>
-          </a:extLst>
-        </p:cNvPr>
-        <p:cNvGrpSpPr/>
-        <p:nvPr/>
-      </p:nvGrpSpPr>
-      <p:grpSpPr>
-        <a:xfrm>
-          <a:off x="0" y="0"/>
-          <a:ext cx="0" cy="0"/>
-          <a:chOff x="0" y="0"/>
-          <a:chExt cx="0" cy="0"/>
-        </a:xfrm>
-      </p:grpSpPr>
-      <p:sp>
-        <p:nvSpPr>
-          <p:cNvPr id="4" name="슬라이드 번호 개체 틀 3">
-            <a:extLst>
-              <a:ext uri="{FF2B5EF4-FFF2-40B4-BE49-F238E27FC236}">
-                <a16:creationId xmlns:a16="http://schemas.microsoft.com/office/drawing/2014/main" id="{9C1D9962-B0CE-2EE0-1E46-140807A2E99B}"/>
-              </a:ext>
-            </a:extLst>
-          </p:cNvPr>
-          <p:cNvSpPr>
-            <a:spLocks noGrp="1"/>
-          </p:cNvSpPr>
-          <p:nvPr>
-            <p:ph type="sldNum" sz="quarter" idx="12"/>
-          </p:nvPr>
-        </p:nvSpPr>
-        <p:spPr>
-          <a:xfrm>
-            <a:off x="10514011" y="6036261"/>
-            <a:ext cx="753545" cy="365125"/>
-          </a:xfrm>
-        </p:spPr>
-        <p:txBody>
-          <a:bodyPr/>
-          <a:lstStyle/>
-          <a:p>
-            <a:fld id="{D57F1E4F-1CFF-5643-939E-217C01CDF565}" type="slidenum">
-              <a:rPr lang="en-US" smtClean="0"/>
-              <a:pPr/>
-              <a:t>34</a:t>
-            </a:fld>
-            <a:endParaRPr lang="en-US" dirty="0"/>
-          </a:p>
-        </p:txBody>
-      </p:sp>
-      <p:sp>
-        <p:nvSpPr>
-          <p:cNvPr id="3" name="제목 1">
-            <a:extLst>
-              <a:ext uri="{FF2B5EF4-FFF2-40B4-BE49-F238E27FC236}">
-                <a16:creationId xmlns:a16="http://schemas.microsoft.com/office/drawing/2014/main" id="{230A9BD2-0B84-11FF-A28B-35626F1B6944}"/>
-              </a:ext>
-            </a:extLst>
-          </p:cNvPr>
-          <p:cNvSpPr txBox="1">
-            <a:spLocks/>
-          </p:cNvSpPr>
-          <p:nvPr/>
-        </p:nvSpPr>
-        <p:spPr>
-          <a:xfrm>
-            <a:off x="475645" y="481983"/>
-            <a:ext cx="10353762" cy="766439"/>
-          </a:xfrm>
-          <a:prstGeom prst="rect">
-            <a:avLst/>
-          </a:prstGeom>
-        </p:spPr>
-        <p:txBody>
-          <a:bodyPr vert="horz" lIns="91440" tIns="45720" rIns="91440" bIns="45720" rtlCol="0" anchor="ctr">
-            <a:normAutofit/>
-          </a:bodyPr>
-          <a:lstStyle>
-            <a:lvl1pPr algn="ctr" defTabSz="914400" rtl="0" eaLnBrk="1" latinLnBrk="1" hangingPunct="1">
-              <a:lnSpc>
-                <a:spcPct val="90000"/>
-              </a:lnSpc>
-              <a:spcBef>
-                <a:spcPct val="0"/>
-              </a:spcBef>
-              <a:buNone/>
-              <a:defRPr sz="3200" kern="1200" cap="all" baseline="0">
-                <a:solidFill>
-                  <a:schemeClr val="tx1"/>
-                </a:solidFill>
-                <a:effectLst/>
-                <a:latin typeface="Batang" panose="02030600000101010101" pitchFamily="18" charset="-127"/>
-                <a:ea typeface="Batang" panose="02030600000101010101" pitchFamily="18" charset="-127"/>
-                <a:cs typeface="+mj-cs"/>
-              </a:defRPr>
-            </a:lvl1pPr>
-          </a:lstStyle>
-          <a:p>
-            <a:pPr algn="l"/>
-            <a:r>
-              <a:rPr lang="en-US" altLang="ko-KR" sz="2800" b="1" cap="none" dirty="0">
-                <a:latin typeface="Lora" pitchFamily="2" charset="0"/>
-              </a:rPr>
-              <a:t>The Transformer architecture</a:t>
-            </a:r>
-          </a:p>
-        </p:txBody>
-      </p:sp>
-      <p:sp>
-        <p:nvSpPr>
-          <p:cNvPr id="2" name="TextBox 1">
-            <a:extLst>
-              <a:ext uri="{FF2B5EF4-FFF2-40B4-BE49-F238E27FC236}">
-                <a16:creationId xmlns:a16="http://schemas.microsoft.com/office/drawing/2014/main" id="{02DF28C9-1C25-B37C-D11F-BD3D6C9F8864}"/>
-              </a:ext>
-            </a:extLst>
-          </p:cNvPr>
-          <p:cNvSpPr txBox="1"/>
-          <p:nvPr/>
-        </p:nvSpPr>
-        <p:spPr>
-          <a:xfrm>
-            <a:off x="6966408" y="826899"/>
-            <a:ext cx="4600281" cy="369332"/>
-          </a:xfrm>
-          <a:prstGeom prst="rect">
-            <a:avLst/>
-          </a:prstGeom>
-          <a:noFill/>
-        </p:spPr>
-        <p:txBody>
-          <a:bodyPr wrap="square">
-            <a:spAutoFit/>
-          </a:bodyPr>
-          <a:lstStyle/>
-          <a:p>
-            <a:pPr algn="r"/>
-            <a:r>
-              <a:rPr lang="en-US" altLang="ko-KR" b="1" dirty="0">
-                <a:latin typeface="Lora" pitchFamily="2" charset="0"/>
-              </a:rPr>
-              <a:t>Transformer decoder block</a:t>
-            </a:r>
-          </a:p>
-        </p:txBody>
-      </p:sp>
-    </p:spTree>
-    <p:extLst>
-      <p:ext uri="{BB962C8B-B14F-4D97-AF65-F5344CB8AC3E}">
-        <p14:creationId xmlns:p14="http://schemas.microsoft.com/office/powerpoint/2010/main" val="3439332370"/>
-      </p:ext>
-    </p:extLst>
-  </p:cSld>
-  <p:clrMapOvr>
-    <a:masterClrMapping/>
-  </p:clrMapOvr>
-</p:sld>
-</file>
-
-<file path=ppt/slides/slide35.xml><?xml version="1.0" encoding="utf-8"?>
 <p:sld xmlns:a="http://schemas.openxmlformats.org/drawingml/2006/main" xmlns:r="http://schemas.openxmlformats.org/officeDocument/2006/relationships" xmlns:p="http://schemas.openxmlformats.org/presentationml/2006/main">
   <p:cSld>
     <p:spTree>
@@ -25295,7 +25545,7 @@
             <a:fld id="{D57F1E4F-1CFF-5643-939E-217C01CDF565}" type="slidenum">
               <a:rPr lang="en-US" smtClean="0"/>
               <a:pPr/>
-              <a:t>35</a:t>
+              <a:t>31</a:t>
             </a:fld>
             <a:endParaRPr lang="en-US" dirty="0"/>
           </a:p>
@@ -25397,6 +25647,53 @@
           </a:p>
         </p:txBody>
       </p:sp>
+      <p:pic>
+        <p:nvPicPr>
+          <p:cNvPr id="5122" name="Picture 2">
+            <a:extLst>
+              <a:ext uri="{FF2B5EF4-FFF2-40B4-BE49-F238E27FC236}">
+                <a16:creationId xmlns:a16="http://schemas.microsoft.com/office/drawing/2014/main" id="{61C9BD35-605F-DB65-0DD7-169DBA5901C5}"/>
+              </a:ext>
+            </a:extLst>
+          </p:cNvPr>
+          <p:cNvPicPr>
+            <a:picLocks noChangeAspect="1" noChangeArrowheads="1"/>
+          </p:cNvPicPr>
+          <p:nvPr/>
+        </p:nvPicPr>
+        <p:blipFill>
+          <a:blip r:embed="rId2">
+            <a:extLst>
+              <a:ext uri="{28A0092B-C50C-407E-A947-70E740481C1C}">
+                <a14:useLocalDpi xmlns:a14="http://schemas.microsoft.com/office/drawing/2010/main" val="0"/>
+              </a:ext>
+            </a:extLst>
+          </a:blip>
+          <a:srcRect/>
+          <a:stretch>
+            <a:fillRect/>
+          </a:stretch>
+        </p:blipFill>
+        <p:spPr bwMode="auto">
+          <a:xfrm>
+            <a:off x="1127443" y="1555383"/>
+            <a:ext cx="5486019" cy="4663440"/>
+          </a:xfrm>
+          <a:prstGeom prst="rect">
+            <a:avLst/>
+          </a:prstGeom>
+          <a:noFill/>
+          <a:extLst>
+            <a:ext uri="{909E8E84-426E-40DD-AFC4-6F175D3DCCD1}">
+              <a14:hiddenFill xmlns:a14="http://schemas.microsoft.com/office/drawing/2010/main">
+                <a:solidFill>
+                  <a:srgbClr val="FFFFFF"/>
+                </a:solidFill>
+              </a14:hiddenFill>
+            </a:ext>
+          </a:extLst>
+        </p:spPr>
+      </p:pic>
     </p:spTree>
     <p:extLst>
       <p:ext uri="{BB962C8B-B14F-4D97-AF65-F5344CB8AC3E}">
@@ -25410,7 +25707,7 @@
 </p:sld>
 </file>
 
-<file path=ppt/slides/slide36.xml><?xml version="1.0" encoding="utf-8"?>
+<file path=ppt/slides/slide32.xml><?xml version="1.0" encoding="utf-8"?>
 <p:sld xmlns:a="http://schemas.openxmlformats.org/drawingml/2006/main" xmlns:r="http://schemas.openxmlformats.org/officeDocument/2006/relationships" xmlns:p="http://schemas.openxmlformats.org/presentationml/2006/main">
   <p:cSld>
     <p:spTree>
@@ -25462,7 +25759,7 @@
             <a:fld id="{D57F1E4F-1CFF-5643-939E-217C01CDF565}" type="slidenum">
               <a:rPr lang="en-US" smtClean="0"/>
               <a:pPr/>
-              <a:t>36</a:t>
+              <a:t>32</a:t>
             </a:fld>
             <a:endParaRPr lang="en-US" dirty="0"/>
           </a:p>
